--- a/AI/ObjectDetection.pptx
+++ b/AI/ObjectDetection.pptx
@@ -1,123 +1,224 @@
 
 <file path=ppt/presentation.xml><?xml version="1.0" encoding="utf-8"?>
-<p:presentation xmlns:a="http://schemas.openxmlformats.org/drawingml/2006/main" xmlns:r="http://schemas.openxmlformats.org/officeDocument/2006/relationships" xmlns:p="http://schemas.openxmlformats.org/presentationml/2006/main" saveSubsetFonts="1">
+<p:presentation xmlns:p="http://schemas.openxmlformats.org/presentationml/2006/main" xmlns:mc="http://schemas.openxmlformats.org/markup-compatibility/2006" xmlns:p14="http://schemas.microsoft.com/office/powerpoint/2010/main" xmlns:p15="http://schemas.microsoft.com/office/powerpoint/2012/main" xmlns:r="http://schemas.openxmlformats.org/officeDocument/2006/relationships" xmlns:a="http://schemas.openxmlformats.org/drawingml/2006/main">
   <p:sldMasterIdLst>
-    <p:sldMasterId id="2147483648" r:id="rId1"/>
+    <p:sldMasterId id="2147483648" r:id="rId5"/>
   </p:sldMasterIdLst>
   <p:sldIdLst>
-    <p:sldId id="256" r:id="rId2"/>
-    <p:sldId id="257" r:id="rId3"/>
-    <p:sldId id="258" r:id="rId4"/>
-    <p:sldId id="260" r:id="rId5"/>
-    <p:sldId id="259" r:id="rId6"/>
+    <p:sldId id="256" r:id="rId6"/>
+    <p:sldId id="257" r:id="rId7"/>
+    <p:sldId id="258" r:id="rId8"/>
+    <p:sldId id="261" r:id="rId9"/>
+    <p:sldId id="260" r:id="rId10"/>
+    <p:sldId id="259" r:id="rId11"/>
   </p:sldIdLst>
   <p:sldSz cx="12192000" cy="6858000"/>
   <p:notesSz cx="6858000" cy="9144000"/>
   <p:defaultTextStyle>
-    <a:defPPr>
-      <a:defRPr lang="en-US"/>
-    </a:defPPr>
-    <a:lvl1pPr marL="0" algn="l" defTabSz="914400" rtl="0" eaLnBrk="1" latinLnBrk="0" hangingPunct="1">
-      <a:defRPr sz="1800" kern="1200">
+    <a:lvl1pPr marL="0" marR="0" indent="0" algn="l" defTabSz="914400">
+      <a:lnSpc>
+        <a:spcPct val="100000"/>
+      </a:lnSpc>
+      <a:spcBef>
+        <a:spcPts val="0"/>
+      </a:spcBef>
+      <a:spcAft>
+        <a:spcPts val="0"/>
+      </a:spcAft>
+      <a:buNone/>
+      <a:tabLst/>
+      <a:defRPr lang="en-us" sz="1800" b="0" i="0" u="none" strike="noStrike" kern="1" cap="none" spc="0" baseline="0">
         <a:solidFill>
           <a:schemeClr val="tx1"/>
         </a:solidFill>
-        <a:latin typeface="+mn-lt"/>
-        <a:ea typeface="+mn-ea"/>
-        <a:cs typeface="+mn-cs"/>
+        <a:effectLst/>
+        <a:latin typeface="Calibri" pitchFamily="2" charset="0"/>
+        <a:ea typeface="Calibri" pitchFamily="2" charset="0"/>
+        <a:cs typeface="Calibri" pitchFamily="2" charset="0"/>
       </a:defRPr>
     </a:lvl1pPr>
-    <a:lvl2pPr marL="457200" algn="l" defTabSz="914400" rtl="0" eaLnBrk="1" latinLnBrk="0" hangingPunct="1">
-      <a:defRPr sz="1800" kern="1200">
+    <a:lvl2pPr marL="457200" marR="0" indent="0" algn="l" defTabSz="914400">
+      <a:lnSpc>
+        <a:spcPct val="100000"/>
+      </a:lnSpc>
+      <a:spcBef>
+        <a:spcPts val="0"/>
+      </a:spcBef>
+      <a:spcAft>
+        <a:spcPts val="0"/>
+      </a:spcAft>
+      <a:buNone/>
+      <a:tabLst/>
+      <a:defRPr lang="en-us" sz="1800" b="0" i="0" u="none" strike="noStrike" kern="1" cap="none" spc="0" baseline="0">
         <a:solidFill>
           <a:schemeClr val="tx1"/>
         </a:solidFill>
-        <a:latin typeface="+mn-lt"/>
-        <a:ea typeface="+mn-ea"/>
-        <a:cs typeface="+mn-cs"/>
+        <a:effectLst/>
+        <a:latin typeface="Calibri" pitchFamily="2" charset="0"/>
+        <a:ea typeface="Calibri" pitchFamily="2" charset="0"/>
+        <a:cs typeface="Calibri" pitchFamily="2" charset="0"/>
       </a:defRPr>
     </a:lvl2pPr>
-    <a:lvl3pPr marL="914400" algn="l" defTabSz="914400" rtl="0" eaLnBrk="1" latinLnBrk="0" hangingPunct="1">
-      <a:defRPr sz="1800" kern="1200">
+    <a:lvl3pPr marL="914400" marR="0" indent="0" algn="l" defTabSz="914400">
+      <a:lnSpc>
+        <a:spcPct val="100000"/>
+      </a:lnSpc>
+      <a:spcBef>
+        <a:spcPts val="0"/>
+      </a:spcBef>
+      <a:spcAft>
+        <a:spcPts val="0"/>
+      </a:spcAft>
+      <a:buNone/>
+      <a:tabLst/>
+      <a:defRPr lang="en-us" sz="1800" b="0" i="0" u="none" strike="noStrike" kern="1" cap="none" spc="0" baseline="0">
         <a:solidFill>
           <a:schemeClr val="tx1"/>
         </a:solidFill>
-        <a:latin typeface="+mn-lt"/>
-        <a:ea typeface="+mn-ea"/>
-        <a:cs typeface="+mn-cs"/>
+        <a:effectLst/>
+        <a:latin typeface="Calibri" pitchFamily="2" charset="0"/>
+        <a:ea typeface="Calibri" pitchFamily="2" charset="0"/>
+        <a:cs typeface="Calibri" pitchFamily="2" charset="0"/>
       </a:defRPr>
     </a:lvl3pPr>
-    <a:lvl4pPr marL="1371600" algn="l" defTabSz="914400" rtl="0" eaLnBrk="1" latinLnBrk="0" hangingPunct="1">
-      <a:defRPr sz="1800" kern="1200">
+    <a:lvl4pPr marL="1371600" marR="0" indent="0" algn="l" defTabSz="914400">
+      <a:lnSpc>
+        <a:spcPct val="100000"/>
+      </a:lnSpc>
+      <a:spcBef>
+        <a:spcPts val="0"/>
+      </a:spcBef>
+      <a:spcAft>
+        <a:spcPts val="0"/>
+      </a:spcAft>
+      <a:buNone/>
+      <a:tabLst/>
+      <a:defRPr lang="en-us" sz="1800" b="0" i="0" u="none" strike="noStrike" kern="1" cap="none" spc="0" baseline="0">
         <a:solidFill>
           <a:schemeClr val="tx1"/>
         </a:solidFill>
-        <a:latin typeface="+mn-lt"/>
-        <a:ea typeface="+mn-ea"/>
-        <a:cs typeface="+mn-cs"/>
+        <a:effectLst/>
+        <a:latin typeface="Calibri" pitchFamily="2" charset="0"/>
+        <a:ea typeface="Calibri" pitchFamily="2" charset="0"/>
+        <a:cs typeface="Calibri" pitchFamily="2" charset="0"/>
       </a:defRPr>
     </a:lvl4pPr>
-    <a:lvl5pPr marL="1828800" algn="l" defTabSz="914400" rtl="0" eaLnBrk="1" latinLnBrk="0" hangingPunct="1">
-      <a:defRPr sz="1800" kern="1200">
+    <a:lvl5pPr marL="1828800" marR="0" indent="0" algn="l" defTabSz="914400">
+      <a:lnSpc>
+        <a:spcPct val="100000"/>
+      </a:lnSpc>
+      <a:spcBef>
+        <a:spcPts val="0"/>
+      </a:spcBef>
+      <a:spcAft>
+        <a:spcPts val="0"/>
+      </a:spcAft>
+      <a:buNone/>
+      <a:tabLst/>
+      <a:defRPr lang="en-us" sz="1800" b="0" i="0" u="none" strike="noStrike" kern="1" cap="none" spc="0" baseline="0">
         <a:solidFill>
           <a:schemeClr val="tx1"/>
         </a:solidFill>
-        <a:latin typeface="+mn-lt"/>
-        <a:ea typeface="+mn-ea"/>
-        <a:cs typeface="+mn-cs"/>
+        <a:effectLst/>
+        <a:latin typeface="Calibri" pitchFamily="2" charset="0"/>
+        <a:ea typeface="Calibri" pitchFamily="2" charset="0"/>
+        <a:cs typeface="Calibri" pitchFamily="2" charset="0"/>
       </a:defRPr>
     </a:lvl5pPr>
-    <a:lvl6pPr marL="2286000" algn="l" defTabSz="914400" rtl="0" eaLnBrk="1" latinLnBrk="0" hangingPunct="1">
-      <a:defRPr sz="1800" kern="1200">
+    <a:lvl6pPr marL="2286000" marR="0" indent="0" algn="l" defTabSz="914400">
+      <a:lnSpc>
+        <a:spcPct val="100000"/>
+      </a:lnSpc>
+      <a:spcBef>
+        <a:spcPts val="0"/>
+      </a:spcBef>
+      <a:spcAft>
+        <a:spcPts val="0"/>
+      </a:spcAft>
+      <a:buNone/>
+      <a:tabLst/>
+      <a:defRPr lang="en-us" sz="1800" b="0" i="0" u="none" strike="noStrike" kern="1" cap="none" spc="0" baseline="0">
         <a:solidFill>
           <a:schemeClr val="tx1"/>
         </a:solidFill>
-        <a:latin typeface="+mn-lt"/>
-        <a:ea typeface="+mn-ea"/>
-        <a:cs typeface="+mn-cs"/>
+        <a:effectLst/>
+        <a:latin typeface="Calibri" pitchFamily="2" charset="0"/>
+        <a:ea typeface="Calibri" pitchFamily="2" charset="0"/>
+        <a:cs typeface="Calibri" pitchFamily="2" charset="0"/>
       </a:defRPr>
     </a:lvl6pPr>
-    <a:lvl7pPr marL="2743200" algn="l" defTabSz="914400" rtl="0" eaLnBrk="1" latinLnBrk="0" hangingPunct="1">
-      <a:defRPr sz="1800" kern="1200">
+    <a:lvl7pPr marL="2743200" marR="0" indent="0" algn="l" defTabSz="914400">
+      <a:lnSpc>
+        <a:spcPct val="100000"/>
+      </a:lnSpc>
+      <a:spcBef>
+        <a:spcPts val="0"/>
+      </a:spcBef>
+      <a:spcAft>
+        <a:spcPts val="0"/>
+      </a:spcAft>
+      <a:buNone/>
+      <a:tabLst/>
+      <a:defRPr lang="en-us" sz="1800" b="0" i="0" u="none" strike="noStrike" kern="1" cap="none" spc="0" baseline="0">
         <a:solidFill>
           <a:schemeClr val="tx1"/>
         </a:solidFill>
-        <a:latin typeface="+mn-lt"/>
-        <a:ea typeface="+mn-ea"/>
-        <a:cs typeface="+mn-cs"/>
+        <a:effectLst/>
+        <a:latin typeface="Calibri" pitchFamily="2" charset="0"/>
+        <a:ea typeface="Calibri" pitchFamily="2" charset="0"/>
+        <a:cs typeface="Calibri" pitchFamily="2" charset="0"/>
       </a:defRPr>
     </a:lvl7pPr>
-    <a:lvl8pPr marL="3200400" algn="l" defTabSz="914400" rtl="0" eaLnBrk="1" latinLnBrk="0" hangingPunct="1">
-      <a:defRPr sz="1800" kern="1200">
+    <a:lvl8pPr marL="3200400" marR="0" indent="0" algn="l" defTabSz="914400">
+      <a:lnSpc>
+        <a:spcPct val="100000"/>
+      </a:lnSpc>
+      <a:spcBef>
+        <a:spcPts val="0"/>
+      </a:spcBef>
+      <a:spcAft>
+        <a:spcPts val="0"/>
+      </a:spcAft>
+      <a:buNone/>
+      <a:tabLst/>
+      <a:defRPr lang="en-us" sz="1800" b="0" i="0" u="none" strike="noStrike" kern="1" cap="none" spc="0" baseline="0">
         <a:solidFill>
           <a:schemeClr val="tx1"/>
         </a:solidFill>
-        <a:latin typeface="+mn-lt"/>
-        <a:ea typeface="+mn-ea"/>
-        <a:cs typeface="+mn-cs"/>
+        <a:effectLst/>
+        <a:latin typeface="Calibri" pitchFamily="2" charset="0"/>
+        <a:ea typeface="Calibri" pitchFamily="2" charset="0"/>
+        <a:cs typeface="Calibri" pitchFamily="2" charset="0"/>
       </a:defRPr>
     </a:lvl8pPr>
-    <a:lvl9pPr marL="3657600" algn="l" defTabSz="914400" rtl="0" eaLnBrk="1" latinLnBrk="0" hangingPunct="1">
-      <a:defRPr sz="1800" kern="1200">
+    <a:lvl9pPr marL="3657600" marR="0" indent="0" algn="l" defTabSz="914400">
+      <a:lnSpc>
+        <a:spcPct val="100000"/>
+      </a:lnSpc>
+      <a:spcBef>
+        <a:spcPts val="0"/>
+      </a:spcBef>
+      <a:spcAft>
+        <a:spcPts val="0"/>
+      </a:spcAft>
+      <a:buNone/>
+      <a:tabLst/>
+      <a:defRPr lang="en-us" sz="1800" b="0" i="0" u="none" strike="noStrike" kern="1" cap="none" spc="0" baseline="0">
         <a:solidFill>
           <a:schemeClr val="tx1"/>
         </a:solidFill>
-        <a:latin typeface="+mn-lt"/>
-        <a:ea typeface="+mn-ea"/>
-        <a:cs typeface="+mn-cs"/>
+        <a:effectLst/>
+        <a:latin typeface="Calibri" pitchFamily="2" charset="0"/>
+        <a:ea typeface="Calibri" pitchFamily="2" charset="0"/>
+        <a:cs typeface="Calibri" pitchFamily="2" charset="0"/>
       </a:defRPr>
     </a:lvl9pPr>
   </p:defaultTextStyle>
-  <p:extLst>
-    <p:ext uri="{EFAFB233-063F-42B5-8137-9DF3F51BA10A}">
-      <p15:sldGuideLst xmlns:p15="http://schemas.microsoft.com/office/powerpoint/2012/main"/>
-    </p:ext>
-  </p:extLst>
 </p:presentation>
 </file>
 
 <file path=ppt/slideLayouts/slideLayout1.xml><?xml version="1.0" encoding="utf-8"?>
-<p:sldLayout xmlns:a="http://schemas.openxmlformats.org/drawingml/2006/main" xmlns:r="http://schemas.openxmlformats.org/officeDocument/2006/relationships" xmlns:p="http://schemas.openxmlformats.org/presentationml/2006/main" type="title" preserve="1">
+<p:sldLayout xmlns:p="http://schemas.openxmlformats.org/presentationml/2006/main" xmlns:mc="http://schemas.openxmlformats.org/markup-compatibility/2006" xmlns:p14="http://schemas.microsoft.com/office/powerpoint/2010/main" xmlns:p15="http://schemas.microsoft.com/office/powerpoint/2012/main" xmlns:r="http://schemas.openxmlformats.org/officeDocument/2006/relationships" xmlns:a="http://schemas.openxmlformats.org/drawingml/2006/main" type="title" preserve="1">
   <p:cSld name="Title Slide">
     <p:spTree>
       <p:nvGrpSpPr>
@@ -137,7 +238,12 @@
         <p:nvSpPr>
           <p:cNvPr id="2" name="Title 1"/>
           <p:cNvSpPr>
-            <a:spLocks noGrp="1"/>
+            <a:spLocks noGrp="1" noChangeArrowheads="1"/>
+            <a:extLst>
+              <a:ext uri="smNativeData">
+                <pr:smNativeData xmlns:pr="smNativeData" xmlns="smNativeData" val="SMDATA_15_+nJ9aRMAAAAlAAAAZAAAAA0AAAAAkAAAAEgAAACQAAAASAAAAAAAAAACAAAAAAAAAAEAAABQAAAAAAAAAAAA4D8AAAAAAADgPwAAAAAAAOA/AAAAAAAA4D8AAAAAAADgPwAAAAAAAOA/AAAAAAAA4D8AAAAAAADgPwAAAAAAAOA/AAAAAAAA4D8CAAAAjAAAAAAAAAAAAAAAW5vVDP///wgAAAAAAAAAAAAAAAAAAAAAAAAAAAAAAAAAAAAAZAAAAAEAAABAAAAAAAAAAAAAAAAAAAAAAAAAAAAAAAAAAAAAAAAAAAAAAAAAAAAAAAAAAAAAAAAAAAAAAAAAAAAAAAAAAAAAAAAAAAAAAAAAAAAAAAAAAAAAAAAAAAAAFAAAADwAAAAAAAAAAAAAAAAAAAkUAAAAAQAAABQAAAAUAAAAFAAAAAEAAAAAAAAAZAAAAGQAAAAAAAAAZAAAAGQAAAAVAAAAYAAAAAAAAAAAAAAADwAAACADAAAAAAAAAAAAAAEAAACgMgAAVgcAAKr4//8BAAAAf39/AAEAAABkAAAAAAAAABQAAABAHwAAAAAAACYAAAAAAAAAwOD//wAAAAAmAAAAZAAAABYAAABMAAAAAAAAAAAAAAAEAAAAAAAAAAEAAADn5uYKAAAAACgAAAAoAAAAZAAAAGQAAAAAAAAAzMzMAAAAAABQAAAAUAAAAGQAAABkAAAAAAAAABcAAAAUAAAAAAAAAAAAAAD/fwAA/38AAAAAAAAJAAAABAAAAF8AYAAeAAAAaAAAAAAAAAAAAAAAAAAAAAAAAAAAAAAAECcAABAnAAAAAAAAAAAAAAAAAAAAAAAAAAAAAAAAAAAAAAAAAAAAABQAAAAAAAAAwMD/AAAAAABkAAAAMgAAAAAAAABkAAAAAAAAAH9/fwAKAAAAIgAAABgAAAAAAAAAAAAAAAAAAAAAAAAAAAAAAAAAAAAkAAAAJAAAAAAAAAAHAAAAAAAAAAAAAAAAAAAAAAAAAAAAAAAAAAAAf39/ACUAAABYAAAAAAAAAAAAAAAAAAAAAAAAAAAAAAAAAAAAAAAAAAAAAAAAAAAAAAAAAAAAAAA/AAAAAAAAAKCGAQAAAAAAAAAAAAAAAAAMAAAAAQAAAAAAAAAAAAAAAAAAAB8AAABUAAAAAAAABQAAAAEAAAAAAAAAAAAAAAAAAAAAAAAAAAAAAAAAAAAAAAAAAAAAAAJ/f38AAAAAA8zMzADAwP8Af39/AAAAAAAAAAAAAAAAAAAAAAAAAAAAIQAAABgAAAAUAAAAYAkAAOgGAACgQQAAmBUAABAAAAAmAAAACAAAAIGAAAAAAAAA"/>
+              </a:ext>
+            </a:extLst>
           </p:cNvSpPr>
           <p:nvPr>
             <p:ph type="ctrTitle"/>
@@ -145,23 +251,52 @@
         </p:nvSpPr>
         <p:spPr>
           <a:xfrm>
-            <a:off x="1524000" y="1122363"/>
+            <a:off x="1524000" y="1122680"/>
             <a:ext cx="9144000" cy="2387600"/>
           </a:xfrm>
         </p:spPr>
         <p:txBody>
-          <a:bodyPr anchor="b"/>
+          <a:bodyPr vert="horz" wrap="square" lIns="91440" tIns="45720" rIns="91440" bIns="45720" numCol="1" spcCol="215900" anchor="b">
+            <a:prstTxWarp prst="textNoShape">
+              <a:avLst/>
+            </a:prstTxWarp>
+          </a:bodyPr>
           <a:lstStyle>
             <a:lvl1pPr algn="ctr">
-              <a:defRPr sz="6000"/>
+              <a:defRPr lang="en-us" sz="6000" cap="none"/>
             </a:lvl1pPr>
+            <a:lvl2pPr>
+              <a:defRPr lang="en-us"/>
+            </a:lvl2pPr>
+            <a:lvl3pPr>
+              <a:defRPr lang="en-us"/>
+            </a:lvl3pPr>
+            <a:lvl4pPr>
+              <a:defRPr lang="en-us"/>
+            </a:lvl4pPr>
+            <a:lvl5pPr>
+              <a:defRPr lang="en-us"/>
+            </a:lvl5pPr>
+            <a:lvl6pPr>
+              <a:defRPr lang="en-us"/>
+            </a:lvl6pPr>
+            <a:lvl7pPr>
+              <a:defRPr lang="en-us"/>
+            </a:lvl7pPr>
+            <a:lvl8pPr>
+              <a:defRPr lang="en-us"/>
+            </a:lvl8pPr>
+            <a:lvl9pPr>
+              <a:defRPr lang="en-us"/>
+            </a:lvl9pPr>
           </a:lstStyle>
           <a:p>
-            <a:r>
-              <a:rPr lang="en-US" smtClean="0"/>
+            <a:pPr>
+              <a:defRPr lang="en-us"/>
+            </a:pPr>
+            <a:r>
               <a:t>Click to edit Master title style</a:t>
             </a:r>
-            <a:endParaRPr lang="en-US"/>
           </a:p>
         </p:txBody>
       </p:sp>
@@ -169,7 +304,12 @@
         <p:nvSpPr>
           <p:cNvPr id="3" name="Subtitle 2"/>
           <p:cNvSpPr>
-            <a:spLocks noGrp="1"/>
+            <a:spLocks noGrp="1" noChangeArrowheads="1"/>
+            <a:extLst>
+              <a:ext uri="smNativeData">
+                <pr:smNativeData xmlns:pr="smNativeData" xmlns="smNativeData" val="SMDATA_15_+nJ9aRMAAAAlAAAAZAAAAA0AAAAAkAAAAEgAAACQAAAASAAAAAAAAAAAAAAAAAAAAAEAAABQAAAAAAAAAAAA4D8AAAAAAADgPwAAAAAAAOA/AAAAAAAA4D8AAAAAAADgPwAAAAAAAOA/AAAAAAAA4D8AAAAAAADgPwAAAAAAAOA/AAAAAAAA4D8CAAAAjAAAAAAAAAAAAAAAW5vVDP///wgAAAAAAAAAAAAAAAAAAAAAAAAAAAAAAAAAAAAAZAAAAAEAAABAAAAAAAAAAAAAAAAAAAAAAAAAAAAAAAAAAAAAAAAAAAAAAAAAAAAAAAAAAAAAAAAAAAAAAAAAAAAAAAAAAAAAAAAAAAAAAAAAAAAAAAAAAAAAAAAAAAAAFAAAADwAAAAAAAAAAAAAAAAAAAkUAAAAAQAAABQAAAAUAAAAFAAAAAEAAAAAAAAAZAAAAGQAAAAAAAAAZAAAAGQAAAAVAAAAYAAAAAAAAAAAAAAADwAAACADAAAAAAAAAAAAAAEAAACgMgAAVgcAAKr4//8BAAAAf39/AAEAAABkAAAAAAAAABQAAABAHwAAAAAAACYAAAAAAAAAwOD//wAAAAAmAAAAZAAAABYAAABMAAAAAAAAAAAAAAAEAAAAAAAAAAEAAADn5uYKAAAAACgAAAAoAAAAZAAAAGQAAAAAAAAAzMzMAAAAAABQAAAAUAAAAGQAAABkAAAAAAAAABcAAAAUAAAAAAAAAAAAAAD/fwAA/38AAAAAAAAJAAAABAAAAPz///8eAAAAaAAAAAAAAAAAAAAAAAAAAAAAAAAAAAAAECcAABAnAAAAAAAAAAAAAAAAAAAAAAAAAAAAAAAAAAAAAAAAAAAAABQAAAAAAAAAwMD/AAAAAABkAAAAMgAAAAAAAABkAAAAAAAAAH9/fwAKAAAAIgAAABgAAAAAAAAAAAAAAAAAAAAAAAAAAAAAAAAAAAAkAAAAJAAAAAAAAAAHAAAAAAAAAAAAAAAAAAAAAAAAAAAAAAAAAAAAf39/ACUAAABYAAAAAAAAAAAAAAAAAAAAAAAAAAAAAAAAAAAAAAAAAAAAAAAAAAAAAAAAAAAAAAA/AAAAAAAAAKCGAQAAAAAAAAAAAAAAAAAMAAAAAQAAAAAAAAAAAAAAAAAAAB8AAABUAAAAAAAABQAAAAEAAAAAAAAAAAAAAAAAAAAAAAAAAAAAAAAAAAAAAAAAAAAAAAJ/f38AAAAAA8zMzADAwP8Af39/AAAAAAAAAAAAAAAAAAAAAAAAAAAAIQAAABgAAAAUAAAAYAkAACkWAACgQQAAWCAAABAAAAAmAAAACAAAAAGAAAAAAAAA"/>
+              </a:ext>
+            </a:extLst>
           </p:cNvSpPr>
           <p:nvPr>
             <p:ph type="subTitle" idx="1"/>
@@ -177,8 +317,8 @@
         </p:nvSpPr>
         <p:spPr>
           <a:xfrm>
-            <a:off x="1524000" y="3602038"/>
-            <a:ext cx="9144000" cy="1655762"/>
+            <a:off x="1524000" y="3602355"/>
+            <a:ext cx="9144000" cy="1655445"/>
           </a:xfrm>
         </p:spPr>
         <p:txBody>
@@ -186,47 +326,48 @@
           <a:lstStyle>
             <a:lvl1pPr marL="0" indent="0" algn="ctr">
               <a:buNone/>
-              <a:defRPr sz="2400"/>
+              <a:defRPr lang="en-us" sz="2400" cap="none"/>
             </a:lvl1pPr>
             <a:lvl2pPr marL="457200" indent="0" algn="ctr">
               <a:buNone/>
-              <a:defRPr sz="2000"/>
+              <a:defRPr lang="en-us" sz="2000" cap="none"/>
             </a:lvl2pPr>
             <a:lvl3pPr marL="914400" indent="0" algn="ctr">
               <a:buNone/>
-              <a:defRPr sz="1800"/>
+              <a:defRPr lang="en-us" sz="1800" cap="none"/>
             </a:lvl3pPr>
             <a:lvl4pPr marL="1371600" indent="0" algn="ctr">
               <a:buNone/>
-              <a:defRPr sz="1600"/>
+              <a:defRPr lang="en-us" sz="1600" cap="none"/>
             </a:lvl4pPr>
             <a:lvl5pPr marL="1828800" indent="0" algn="ctr">
               <a:buNone/>
-              <a:defRPr sz="1600"/>
+              <a:defRPr lang="en-us" sz="1600" cap="none"/>
             </a:lvl5pPr>
             <a:lvl6pPr marL="2286000" indent="0" algn="ctr">
               <a:buNone/>
-              <a:defRPr sz="1600"/>
+              <a:defRPr lang="en-us" sz="1600" cap="none"/>
             </a:lvl6pPr>
             <a:lvl7pPr marL="2743200" indent="0" algn="ctr">
               <a:buNone/>
-              <a:defRPr sz="1600"/>
+              <a:defRPr lang="en-us" sz="1600" cap="none"/>
             </a:lvl7pPr>
             <a:lvl8pPr marL="3200400" indent="0" algn="ctr">
               <a:buNone/>
-              <a:defRPr sz="1600"/>
+              <a:defRPr lang="en-us" sz="1600" cap="none"/>
             </a:lvl8pPr>
             <a:lvl9pPr marL="3657600" indent="0" algn="ctr">
               <a:buNone/>
-              <a:defRPr sz="1600"/>
+              <a:defRPr lang="en-us" sz="1600" cap="none"/>
             </a:lvl9pPr>
           </a:lstStyle>
           <a:p>
-            <a:r>
-              <a:rPr lang="en-US" smtClean="0"/>
+            <a:pPr>
+              <a:defRPr lang="en-us"/>
+            </a:pPr>
+            <a:r>
               <a:t>Click to edit Master subtitle style</a:t>
             </a:r>
-            <a:endParaRPr lang="en-US"/>
           </a:p>
         </p:txBody>
       </p:sp>
@@ -234,7 +375,12 @@
         <p:nvSpPr>
           <p:cNvPr id="4" name="Date Placeholder 3"/>
           <p:cNvSpPr>
-            <a:spLocks noGrp="1"/>
+            <a:spLocks noGrp="1" noChangeArrowheads="1"/>
+            <a:extLst>
+              <a:ext uri="smNativeData">
+                <pr:smNativeData xmlns:pr="smNativeData" xmlns="smNativeData" val="SMDATA_15_+nJ9aRMAAAAlAAAAZAAAAA0AAAAAkAAAAEgAAACQAAAASAAAAAAAAAABAAAAAAAAAAEAAABQAAAAAAAAAAAA4D8AAAAAAADgPwAAAAAAAOA/AAAAAAAA4D8AAAAAAADgPwAAAAAAAOA/AAAAAAAA4D8AAAAAAADgPwAAAAAAAOA/AAAAAAAA4D8CAAAAjAAAAAAAAAAAAAAAW5vVDP///wgAAAAAAAAAAAAAAAAAAAAAAAAAAAAAAAAAAAAAZAAAAAEAAABAAAAAAAAAAAAAAAAAAAAAAAAAAAAAAAAAAAAAAAAAAAAAAAAAAAAAAAAAAAAAAAAAAAAAAAAAAAAAAAAAAAAAAAAAAAAAAAAAAAAAAAAAAAAAAAAAAAAAFAAAADwAAAAAAAAAAAAAAAAAAAkUAAAAAQAAABQAAAAUAAAAFAAAAAEAAAAAAAAAZAAAAGQAAAAAAAAAZAAAAGQAAAAVAAAAYAAAAAAAAAAAAAAADwAAACADAAAAAAAAAAAAAAEAAACgMgAAVgcAAKr4//8BAAAAf39/AAEAAABkAAAAAAAAABQAAABAHwAAAAAAACYAAAAAAAAAwOD//wAAAAAmAAAAZAAAABYAAABMAAAAAAAAAAAAAAAEAAAAAAAAAAEAAADn5uYKAAAAACgAAAAoAAAAZAAAAGQAAAAAAAAAzMzMAAAAAABQAAAAUAAAAGQAAABkAAAAAAAAABcAAAAUAAAAAAAAAAAAAAD/fwAA/38AAAAAAAAJAAAABAAAAPTvuwQeAAAAaAAAAAAAAAAAAAAAAAAAAAAAAAAAAAAAECcAABAnAAAAAAAAAAAAAAAAAAAAAAAAAAAAAAAAAAAAAAAAAAAAABQAAAAAAAAAwMD/AAAAAABkAAAAMgAAAAAAAABkAAAAAAAAAH9/fwAKAAAAIgAAABgAAAAAAAAAAAAAAAAAAAAAAAAAAAAAAAAAAAAkAAAAJAAAAAAAAAAHAAAAAAAAAAAAAAAAAAAAAAAAAAAAAAAAAAAAf39/ACUAAABYAAAAAAAAAAAAAAAAAAAAAAAAAAAAAAAAAAAAAAAAAAAAAAAAAAAAAAAAAAAAAAA/AAAAAAAAAKCGAQAAAAAAAAAAAAAAAAAMAAAAAQAAAAAAAAAAAAAAAAAAAB8AAABUAAAAAAAABQAAAAEAAAAAAAAAAAAAAAAAAAAAAAAAAAAAAAAAAAAAAAAAAAAAAAJ/f38AAAAAA8zMzADAwP8Af39/AAAAAAAAAAAAAAAAAAAAAAAAAAAAIQAAABgAAAAUAAAAKAUAABonAAAIFgAAWSkAABAAAAAmAAAACAAAAAAAAAAAAAAA"/>
+              </a:ext>
+            </a:extLst>
           </p:cNvSpPr>
           <p:nvPr>
             <p:ph type="dt" sz="half" idx="10"/>
@@ -245,11 +391,12 @@
           <a:bodyPr/>
           <a:lstStyle/>
           <a:p>
-            <a:fld id="{7DE6D954-9D5F-4B54-AC5F-2CADB10B85DE}" type="datetimeFigureOut">
-              <a:rPr lang="en-US" smtClean="0"/>
-              <a:t>1/12/2026</a:t>
+            <a:pPr>
+              <a:defRPr lang="en-us"/>
+            </a:pPr>
+            <a:fld id="{3AF9D986-C8D7-AC2F-9941-3E7A970F6F6B}" type="datetime1">
+              <a:t/>
             </a:fld>
-            <a:endParaRPr lang="en-US"/>
           </a:p>
         </p:txBody>
       </p:sp>
@@ -257,7 +404,12 @@
         <p:nvSpPr>
           <p:cNvPr id="5" name="Footer Placeholder 4"/>
           <p:cNvSpPr>
-            <a:spLocks noGrp="1"/>
+            <a:spLocks noGrp="1" noChangeArrowheads="1"/>
+            <a:extLst>
+              <a:ext uri="smNativeData">
+                <pr:smNativeData xmlns:pr="smNativeData" xmlns="smNativeData" val="SMDATA_15_+nJ9aRMAAAAlAAAAZAAAAA0AAAAAkAAAAEgAAACQAAAASAAAAAAAAAABAAAAAAAAAAEAAABQAAAAAAAAAAAA4D8AAAAAAADgPwAAAAAAAOA/AAAAAAAA4D8AAAAAAADgPwAAAAAAAOA/AAAAAAAA4D8AAAAAAADgPwAAAAAAAOA/AAAAAAAA4D8CAAAAjAAAAAAAAAAAAAAAW5vVDP///wgAAAAAAAAAAAAAAAAAAAAAAAAAAAAAAAAAAAAAZAAAAAEAAABAAAAAAAAAAAAAAAAAAAAAAAAAAAAAAAAAAAAAAAAAAAAAAAAAAAAAAAAAAAAAAAAAAAAAAAAAAAAAAAAAAAAAAAAAAAAAAAAAAAAAAAAAAAAAAAAAAAAAFAAAADwAAAAAAAAAAAAAAAAAAAkUAAAAAQAAABQAAAAUAAAAFAAAAAEAAAAAAAAAZAAAAGQAAAAAAAAAZAAAAGQAAAAVAAAAYAAAAAAAAAAAAAAADwAAACADAAAAAAAAAAAAAAEAAACgMgAAVgcAAKr4//8BAAAAf39/AAEAAABkAAAAAAAAABQAAABAHwAAAAAAACYAAAAAAAAAwOD//wAAAAAmAAAAZAAAABYAAABMAAAAAAAAAAAAAAAEAAAAAAAAAAEAAADn5uYKAAAAACgAAAAoAAAAZAAAAGQAAAAAAAAAzMzMAAAAAABQAAAAUAAAAGQAAABkAAAAAAAAABcAAAAUAAAAAAAAAAAAAAD/fwAA/38AAAAAAAAJAAAABAAAAGxpY2keAAAAaAAAAAAAAAAAAAAAAAAAAAAAAAAAAAAAECcAABAnAAAAAAAAAAAAAAAAAAAAAAAAAAAAAAAAAAAAAAAAAAAAABQAAAAAAAAAwMD/AAAAAABkAAAAMgAAAAAAAABkAAAAAAAAAH9/fwAKAAAAIgAAABgAAAAAAAAAAAAAAAAAAAAAAAAAAAAAAAAAAAAkAAAAJAAAAAAAAAAHAAAAAAAAAAAAAAAAAAAAAAAAAAAAAAAAAAAAf39/ACUAAABYAAAAAAAAAAAAAAAAAAAAAAAAAAAAAAAAAAAAAAAAAAAAAAAAAAAAAAAAAAAAAAA/AAAAAAAAAKCGAQAAAAAAAAAAAAAAAAAMAAAAAQAAAAAAAAAAAAAAAAAAAB8AAABUAAAAAAAABQAAAAEAAAAAAAAAAAAAAAAAAAAAAAAAAAAAAAAAAAAAAAAAAAAAAAJ/f38AAAAAA8zMzADAwP8Af39/AAAAAAAAAAAAAAAAAAAAAAAAAAAAIQAAABgAAAAUAAAA2BgAABonAAAoMgAAWSkAABAAAAAmAAAACAAAAAAAAAAAAAAA"/>
+              </a:ext>
+            </a:extLst>
           </p:cNvSpPr>
           <p:nvPr>
             <p:ph type="ftr" sz="quarter" idx="11"/>
@@ -268,7 +420,9 @@
           <a:bodyPr/>
           <a:lstStyle/>
           <a:p>
-            <a:endParaRPr lang="en-US"/>
+            <a:pPr>
+              <a:defRPr lang="en-us"/>
+            </a:pPr>
           </a:p>
         </p:txBody>
       </p:sp>
@@ -276,7 +430,12 @@
         <p:nvSpPr>
           <p:cNvPr id="6" name="Slide Number Placeholder 5"/>
           <p:cNvSpPr>
-            <a:spLocks noGrp="1"/>
+            <a:spLocks noGrp="1" noChangeArrowheads="1"/>
+            <a:extLst>
+              <a:ext uri="smNativeData">
+                <pr:smNativeData xmlns:pr="smNativeData" xmlns="smNativeData" val="SMDATA_15_+nJ9aRMAAAAlAAAAZAAAAA0AAAAAkAAAAEgAAACQAAAASAAAAAAAAAABAAAAAAAAAAEAAABQAAAAAAAAAAAA4D8AAAAAAADgPwAAAAAAAOA/AAAAAAAA4D8AAAAAAADgPwAAAAAAAOA/AAAAAAAA4D8AAAAAAADgPwAAAAAAAOA/AAAAAAAA4D8CAAAAjAAAAAAAAAAAAAAAW5vVDP///wgAAAAAAAAAAAAAAAAAAAAAAAAAAAAAAAAAAAAAZAAAAAEAAABAAAAAAAAAAAAAAAAAAAAAAAAAAAAAAAAAAAAAAAAAAAAAAAAAAAAAAAAAAAAAAAAAAAAAAAAAAAAAAAAAAAAAAAAAAAAAAAAAAAAAAAAAAAAAAAAAAAAAFAAAADwAAAAAAAAAAAAAAAAAAAkUAAAAAQAAABQAAAAUAAAAFAAAAAEAAAAAAAAAZAAAAGQAAAAAAAAAZAAAAGQAAAAVAAAAYAAAAAAAAAAAAAAADwAAACADAAAAAAAAAAAAAAEAAACgMgAAVgcAAKr4//8BAAAAf39/AAEAAABkAAAAAAAAABQAAABAHwAAAAAAACYAAAAAAAAAwOD//wAAAAAmAAAAZAAAABYAAABMAAAAAAAAAAAAAAAEAAAAAAAAAAEAAADn5uYKAAAAACgAAAAoAAAAZAAAAGQAAAAAAAAAzMzMAAAAAABQAAAAUAAAAGQAAABkAAAAAAAAABcAAAAUAAAAAAAAAAAAAAD/fwAA/38AAAAAAAAJAAAABAAAAAAAAAAeAAAAaAAAAAAAAAAAAAAAAAAAAAAAAAAAAAAAECcAABAnAAAAAAAAAAAAAAAAAAAAAAAAAAAAAAAAAAAAAAAAAAAAABQAAAAAAAAAwMD/AAAAAABkAAAAMgAAAAAAAABkAAAAAAAAAH9/fwAKAAAAIgAAABgAAAAAAAAAAAAAAAAAAAAAAAAAAAAAAAAAAAAkAAAAJAAAAAAAAAAHAAAAAAAAAAAAAAAAAAAAAAAAAAAAAAAAAAAAf39/ACUAAABYAAAAAAAAAAAAAAAAAAAAAAAAAAAAAAAAAAAAAAAAAAAAAAAAAAAAAAAAAAAAAAA/AAAAAAAAAKCGAQAAAAAAAAAAAAAAAAAMAAAAAQAAAAAAAAAAAAAAAAAAAB8AAABUAAAAAAAABQAAAAEAAAAAAAAAAAAAAAAAAAAAAAAAAAAAAAAAAAAAAAAAAAAAAAJ/f38AAAAAA8zMzADAwP8Af39/AAAAAAAAAAAAAAAAAAAAAAAAAAAAIQAAABgAAAAUAAAA+DQAABonAADYRQAAWSkAABAAAAAmAAAACAAAAAAAAAAAAAAA"/>
+              </a:ext>
+            </a:extLst>
           </p:cNvSpPr>
           <p:nvPr>
             <p:ph type="sldNum" sz="quarter" idx="12"/>
@@ -287,29 +446,26 @@
           <a:bodyPr/>
           <a:lstStyle/>
           <a:p>
-            <a:fld id="{58AA844A-00A1-4A5D-A246-C5B817417ED4}" type="slidenum">
-              <a:rPr lang="en-US" smtClean="0"/>
-              <a:t>‹#›</a:t>
+            <a:pPr>
+              <a:defRPr lang="en-us"/>
+            </a:pPr>
+            <a:fld id="{3AF9F725-6BD7-AC01-9941-9D54B90F6FC8}" type="slidenum">
+              <a:t/>
             </a:fld>
-            <a:endParaRPr lang="en-US"/>
           </a:p>
         </p:txBody>
       </p:sp>
     </p:spTree>
-    <p:extLst>
-      <p:ext uri="{BB962C8B-B14F-4D97-AF65-F5344CB8AC3E}">
-        <p14:creationId xmlns:p14="http://schemas.microsoft.com/office/powerpoint/2010/main" val="3176791062"/>
-      </p:ext>
-    </p:extLst>
   </p:cSld>
   <p:clrMapOvr>
     <a:masterClrMapping/>
   </p:clrMapOvr>
+  <p:hf hdr="0" ftr="0"/>
 </p:sldLayout>
 </file>
 
 <file path=ppt/slideLayouts/slideLayout10.xml><?xml version="1.0" encoding="utf-8"?>
-<p:sldLayout xmlns:a="http://schemas.openxmlformats.org/drawingml/2006/main" xmlns:r="http://schemas.openxmlformats.org/officeDocument/2006/relationships" xmlns:p="http://schemas.openxmlformats.org/presentationml/2006/main" type="vertTx" preserve="1">
+<p:sldLayout xmlns:p="http://schemas.openxmlformats.org/presentationml/2006/main" xmlns:mc="http://schemas.openxmlformats.org/markup-compatibility/2006" xmlns:p14="http://schemas.microsoft.com/office/powerpoint/2010/main" xmlns:p15="http://schemas.microsoft.com/office/powerpoint/2012/main" xmlns:r="http://schemas.openxmlformats.org/officeDocument/2006/relationships" xmlns:a="http://schemas.openxmlformats.org/drawingml/2006/main" type="vertTx" preserve="1">
   <p:cSld name="Title and Vertical Text">
     <p:spTree>
       <p:nvGrpSpPr>
@@ -329,7 +485,12 @@
         <p:nvSpPr>
           <p:cNvPr id="2" name="Title 1"/>
           <p:cNvSpPr>
-            <a:spLocks noGrp="1"/>
+            <a:spLocks noGrp="1" noChangeArrowheads="1"/>
+            <a:extLst>
+              <a:ext uri="smNativeData">
+                <pr:smNativeData xmlns:pr="smNativeData" xmlns="smNativeData" val="SMDATA_15_+nJ9aRMAAAAlAAAAZAAAAA0AAAAAkAAAAEgAAACQAAAASAAAAAAAAAABAAAAAAAAAAEAAABQAAAAAAAAAAAA4D8AAAAAAADgPwAAAAAAAOA/AAAAAAAA4D8AAAAAAADgPwAAAAAAAOA/AAAAAAAA4D8AAAAAAADgPwAAAAAAAOA/AAAAAAAA4D8CAAAAjAAAAAAAAAAAAAAAW5vVDP///wgAAAAAAAAAAAAAAAAAAAAAAAAAAAAAAAAAAAAAZAAAAAEAAABAAAAAAAAAAAAAAAAAAAAAAAAAAAAAAAAAAAAAAAAAAAAAAAAAAAAAAAAAAAAAAAAAAAAAAAAAAAAAAAAAAAAAAAAAAAAAAAAAAAAAAAAAAAAAAAAAAAAAFAAAADwAAAAAAAAAAAAAAAAAAAkUAAAAAQAAABQAAAAUAAAAFAAAAAEAAAAAAAAAZAAAAGQAAAAAAAAAZAAAAGQAAAAVAAAAYAAAAAAAAAAAAAAADwAAACADAAAAAAAAAAAAAAEAAACgMgAAVgcAAKr4//8BAAAAf39/AAEAAABkAAAAAAAAABQAAABAHwAAAAAAACYAAAAAAAAAwOD//wAAAAAmAAAAZAAAABYAAABMAAAAAAAAAAAAAAAEAAAAAAAAAAEAAADn5uYKAAAAACgAAAAoAAAAZAAAAGQAAAAAAAAAzMzMAAAAAABQAAAAUAAAAGQAAABkAAAAAAAAABcAAAAUAAAAAAAAAAAAAAD/fwAA/38AAAAAAAAJAAAABAAAAAAAAAAeAAAAaAAAAAAAAAAAAAAAAAAAAAAAAAAAAAAAECcAABAnAAAAAAAAAAAAAAAAAAAAAAAAAAAAAAAAAAAAAAAAAAAAABQAAAAAAAAAwMD/AAAAAABkAAAAMgAAAAAAAABkAAAAAAAAAH9/fwAKAAAAIgAAABgAAAAAAAAAAAAAAAAAAAAAAAAAAAAAAAAAAAAkAAAAJAAAAAAAAAAHAAAAAAAAAAAAAAAAAAAAAAAAAAAAAAAAAAAAf39/ACUAAABYAAAAAAAAAAAAAAAAAAAAAAAAAAAAAAAAAAAAAAAAAAAAAAAAAAAAAAAAAAAAAAA/AAAAAAAAAKCGAQAAAAAAAAAAAAAAAAAMAAAAAQAAAAAAAAAAAAAAAAAAAB8AAABUAAAAAAAABQAAAAEAAAAAAAAAAAAAAAAAAAAAAAAAAAAAAAAAAAAAAAAAAAAAAAJ/f38AAAAAA8zMzADAwP8Af39/AAAAAAAAAAAAAAAAAAAAAAAAAAAAIQAAABgAAAAUAAAAKAUAAD8CAADYRQAAZwoAABAAAAAmAAAACAAAAAAAAAAAAAAA"/>
+              </a:ext>
+            </a:extLst>
           </p:cNvSpPr>
           <p:nvPr>
             <p:ph type="title"/>
@@ -340,11 +501,12 @@
           <a:bodyPr/>
           <a:lstStyle/>
           <a:p>
-            <a:r>
-              <a:rPr lang="en-US" smtClean="0"/>
+            <a:pPr>
+              <a:defRPr lang="en-us"/>
+            </a:pPr>
+            <a:r>
               <a:t>Click to edit Master title style</a:t>
             </a:r>
-            <a:endParaRPr lang="en-US"/>
           </a:p>
         </p:txBody>
       </p:sp>
@@ -352,51 +514,64 @@
         <p:nvSpPr>
           <p:cNvPr id="3" name="Vertical Text Placeholder 2"/>
           <p:cNvSpPr>
-            <a:spLocks noGrp="1"/>
-          </p:cNvSpPr>
-          <p:nvPr>
-            <p:ph type="body" orient="vert" idx="1"/>
+            <a:spLocks noGrp="1" noChangeArrowheads="1"/>
+            <a:extLst>
+              <a:ext uri="smNativeData">
+                <pr:smNativeData xmlns:pr="smNativeData" xmlns="smNativeData" val="SMDATA_15_+nJ9aRMAAAAlAAAAZAAAAA0AAAAAkAAAAEgAAACQAAAASAAAAAAAAAAAAAAAAQAAAAEAAABQAAAAAAAAAAAA4D8AAAAAAADgPwAAAAAAAOA/AAAAAAAA4D8AAAAAAADgPwAAAAAAAOA/AAAAAAAA4D8AAAAAAADgPwAAAAAAAOA/AAAAAAAA4D8CAAAAjAAAAAAAAAAAAAAAW5vVDP///wgAAAAAAAAAAAAAAAAAAAAAAAAAAAAAAAAAAAAAZAAAAAEAAABAAAAAAAAAAAAAAAAAAAAAAAAAAAAAAAAAAAAAAAAAAAAAAAAAAAAAAAAAAAAAAAAAAAAAAAAAAAAAAAAAAAAAAAAAAAAAAAAAAAAAAAAAAAAAAAAAAAAAFAAAADwAAAAAAAAAAAAAAAAAAAkUAAAAAQAAABQAAAAUAAAAFAAAAAEAAAAAAAAAZAAAAGQAAAAAAAAAZAAAAGQAAAAVAAAAYAAAAAAAAAAAAAAADwAAACADAAAAAAAAAAAAAAEAAACgMgAAVgcAAKr4//8BAAAAf39/AAEAAABkAAAAAAAAABQAAABAHwAAAAAAACYAAAAAAAAAwOD//wAAAAAmAAAAZAAAABYAAABMAAAAAAAAAAAAAAAEAAAAAAAAAAEAAADn5uYKAAAAACgAAAAoAAAAZAAAAGQAAAAAAAAAzMzMAAAAAABQAAAAUAAAAGQAAABkAAAAAAAAABcAAAAUAAAAAAAAAAAAAAD/fwAA/38AAAAAAAAJAAAABAAAAAAAAAAeAAAAaAAAAAAAAAAAAAAAAAAAAAAAAAAAAAAAECcAABAnAAAAAAAAAAAAAAAAAAAAAAAAAAAAAAAAAAAAAAAAAAAAABQAAAAAAAAAwMD/AAAAAABkAAAAMgAAAAAAAABkAAAAAAAAAH9/fwAKAAAAIgAAABgAAAAAAAAAAAAAAAAAAAAAAAAAAAAAAAAAAAAkAAAAJAAAAAAAAAAHAAAAAAAAAAAAAAAAAAAAAAAAAAAAAAAAAAAAf39/ACUAAABYAAAAAAAAAAAAAAAAAAAAAAAAAAAAAAAAAAAAAAAAAAAAAAAAAAAAAAAAAAAAAAA/AAAAAAAAAKCGAQAAAAAAAAAAAAAAAAAMAAAAAQAAAAAAAAAAAAAAAAAAAB8AAABUAAAAAAAABQAAAAEAAAAAAAAAAAAAAAAAAAAAAAAAAAAAAAAAAAAAAAAAAAAAAAJ/f38AAAAAA8zMzADAwP8Af39/AAAAAAAAAAAAAAAAAAAAAAAAAAAAIQAAABgAAAAUAAAAKAUAADsLAADYRQAAACYAABAAAAAmAAAACAAAAAIAAAAAAAAA"/>
+              </a:ext>
+            </a:extLst>
+          </p:cNvSpPr>
+          <p:nvPr>
+            <p:ph idx="1"/>
           </p:nvPr>
         </p:nvSpPr>
         <p:spPr/>
         <p:txBody>
-          <a:bodyPr vert="eaVert"/>
-          <a:lstStyle/>
-          <a:p>
-            <a:pPr lvl="0"/>
-            <a:r>
-              <a:rPr lang="en-US" smtClean="0"/>
+          <a:bodyPr vert="vert" wrap="square" lIns="91440" tIns="45720" rIns="91440" bIns="45720" numCol="1" spcCol="215900" anchor="t">
+            <a:prstTxWarp prst="textNoShape">
+              <a:avLst/>
+            </a:prstTxWarp>
+          </a:bodyPr>
+          <a:lstStyle/>
+          <a:p>
+            <a:pPr>
+              <a:defRPr lang="en-us"/>
+            </a:pPr>
+            <a:r>
               <a:t>Click to edit Master text styles</a:t>
             </a:r>
           </a:p>
           <a:p>
-            <a:pPr lvl="1"/>
-            <a:r>
-              <a:rPr lang="en-US" smtClean="0"/>
+            <a:pPr lvl="1">
+              <a:defRPr lang="en-us"/>
+            </a:pPr>
+            <a:r>
               <a:t>Second level</a:t>
             </a:r>
           </a:p>
           <a:p>
-            <a:pPr lvl="2"/>
-            <a:r>
-              <a:rPr lang="en-US" smtClean="0"/>
+            <a:pPr lvl="2">
+              <a:defRPr lang="en-us"/>
+            </a:pPr>
+            <a:r>
               <a:t>Third level</a:t>
             </a:r>
           </a:p>
           <a:p>
-            <a:pPr lvl="3"/>
-            <a:r>
-              <a:rPr lang="en-US" smtClean="0"/>
+            <a:pPr lvl="3">
+              <a:defRPr lang="en-us"/>
+            </a:pPr>
+            <a:r>
               <a:t>Fourth level</a:t>
             </a:r>
           </a:p>
           <a:p>
-            <a:pPr lvl="4"/>
-            <a:r>
-              <a:rPr lang="en-US" smtClean="0"/>
+            <a:pPr lvl="4">
+              <a:defRPr lang="en-us"/>
+            </a:pPr>
+            <a:r>
               <a:t>Fifth level</a:t>
             </a:r>
-            <a:endParaRPr lang="en-US"/>
           </a:p>
         </p:txBody>
       </p:sp>
@@ -404,7 +579,12 @@
         <p:nvSpPr>
           <p:cNvPr id="4" name="Date Placeholder 3"/>
           <p:cNvSpPr>
-            <a:spLocks noGrp="1"/>
+            <a:spLocks noGrp="1" noChangeArrowheads="1"/>
+            <a:extLst>
+              <a:ext uri="smNativeData">
+                <pr:smNativeData xmlns:pr="smNativeData" xmlns="smNativeData" val="SMDATA_15_+nJ9aRMAAAAlAAAAZAAAAA0AAAAAkAAAAEgAAACQAAAASAAAAAAAAAABAAAAAAAAAAEAAABQAAAAAAAAAAAA4D8AAAAAAADgPwAAAAAAAOA/AAAAAAAA4D8AAAAAAADgPwAAAAAAAOA/AAAAAAAA4D8AAAAAAADgPwAAAAAAAOA/AAAAAAAA4D8CAAAAjAAAAAAAAAAAAAAAW5vVDP///wgAAAAAAAAAAAAAAAAAAAAAAAAAAAAAAAAAAAAAZAAAAAEAAABAAAAAAAAAAAAAAAAAAAAAAAAAAAAAAAAAAAAAAAAAAAAAAAAAAAAAAAAAAAAAAAAAAAAAAAAAAAAAAAAAAAAAAAAAAAAAAAAAAAAAAAAAAAAAAAAAAAAAFAAAADwAAAAAAAAAAAAAAAAAAAkUAAAAAQAAABQAAAAUAAAAFAAAAAEAAAAAAAAAZAAAAGQAAAAAAAAAZAAAAGQAAAAVAAAAYAAAAAAAAAAAAAAADwAAACADAAAAAAAAAAAAAAEAAACgMgAAVgcAAKr4//8BAAAAf39/AAEAAABkAAAAAAAAABQAAABAHwAAAAAAACYAAAAAAAAAwOD//wAAAAAmAAAAZAAAABYAAABMAAAAAAAAAAAAAAAEAAAAAAAAAAEAAADn5uYKAAAAACgAAAAoAAAAZAAAAGQAAAAAAAAAzMzMAAAAAABQAAAAUAAAAGQAAABkAAAAAAAAABcAAAAUAAAAAAAAAAAAAAD/fwAA/38AAAAAAAAJAAAABAAAAAAAAAAeAAAAaAAAAAAAAAAAAAAAAAAAAAAAAAAAAAAAECcAABAnAAAAAAAAAAAAAAAAAAAAAAAAAAAAAAAAAAAAAAAAAAAAABQAAAAAAAAAwMD/AAAAAABkAAAAMgAAAAAAAABkAAAAAAAAAH9/fwAKAAAAIgAAABgAAAAAAAAAAAAAAAAAAAAAAAAAAAAAAAAAAAAkAAAAJAAAAAAAAAAHAAAAAAAAAAAAAAAAAAAAAAAAAAAAAAAAAAAAf39/ACUAAABYAAAAAAAAAAAAAAAAAAAAAAAAAAAAAAAAAAAAAAAAAAAAAAAAAAAAAAAAAAAAAAA/AAAAAAAAAKCGAQAAAAAAAAAAAAAAAAAMAAAAAQAAAAAAAAAAAAAAAAAAAB8AAABUAAAAAAAABQAAAAEAAAAAAAAAAAAAAAAAAAAAAAAAAAAAAAAAAAAAAAAAAAAAAAJ/f38AAAAAA8zMzADAwP8Af39/AAAAAAAAAAAAAAAAAAAAAAAAAAAAIQAAABgAAAAUAAAAKAUAABonAAAIFgAAWSkAABAAAAAmAAAACAAAAAAAAAAAAAAA"/>
+              </a:ext>
+            </a:extLst>
           </p:cNvSpPr>
           <p:nvPr>
             <p:ph type="dt" sz="half" idx="10"/>
@@ -415,11 +595,12 @@
           <a:bodyPr/>
           <a:lstStyle/>
           <a:p>
-            <a:fld id="{7DE6D954-9D5F-4B54-AC5F-2CADB10B85DE}" type="datetimeFigureOut">
-              <a:rPr lang="en-US" smtClean="0"/>
+            <a:pPr>
+              <a:defRPr lang="en-us"/>
+            </a:pPr>
+            <a:fld id="{3AF993E9-A7D7-AC65-9941-5130DD0F6F04}" type="datetime1">
               <a:t>1/12/2026</a:t>
             </a:fld>
-            <a:endParaRPr lang="en-US"/>
           </a:p>
         </p:txBody>
       </p:sp>
@@ -427,7 +608,12 @@
         <p:nvSpPr>
           <p:cNvPr id="5" name="Footer Placeholder 4"/>
           <p:cNvSpPr>
-            <a:spLocks noGrp="1"/>
+            <a:spLocks noGrp="1" noChangeArrowheads="1"/>
+            <a:extLst>
+              <a:ext uri="smNativeData">
+                <pr:smNativeData xmlns:pr="smNativeData" xmlns="smNativeData" val="SMDATA_15_+nJ9aRMAAAAlAAAAZAAAAA0AAAAAkAAAAEgAAACQAAAASAAAAAAAAAABAAAAAAAAAAEAAABQAAAAAAAAAAAA4D8AAAAAAADgPwAAAAAAAOA/AAAAAAAA4D8AAAAAAADgPwAAAAAAAOA/AAAAAAAA4D8AAAAAAADgPwAAAAAAAOA/AAAAAAAA4D8CAAAAjAAAAAAAAAAAAAAAW5vVDP///wgAAAAAAAAAAAAAAAAAAAAAAAAAAAAAAAAAAAAAZAAAAAEAAABAAAAAAAAAAAAAAAAAAAAAAAAAAAAAAAAAAAAAAAAAAAAAAAAAAAAAAAAAAAAAAAAAAAAAAAAAAAAAAAAAAAAAAAAAAAAAAAAAAAAAAAAAAAAAAAAAAAAAFAAAADwAAAAAAAAAAAAAAAAAAAkUAAAAAQAAABQAAAAUAAAAFAAAAAEAAAAAAAAAZAAAAGQAAAAAAAAAZAAAAGQAAAAVAAAAYAAAAAAAAAAAAAAADwAAACADAAAAAAAAAAAAAAEAAACgMgAAVgcAAKr4//8BAAAAf39/AAEAAABkAAAAAAAAABQAAABAHwAAAAAAACYAAAAAAAAAwOD//wAAAAAmAAAAZAAAABYAAABMAAAAAAAAAAAAAAAEAAAAAAAAAAEAAADn5uYKAAAAACgAAAAoAAAAZAAAAGQAAAAAAAAAzMzMAAAAAABQAAAAUAAAAGQAAABkAAAAAAAAABcAAAAUAAAAAAAAAAAAAAD/fwAA/38AAAAAAAAJAAAABAAAAAAAAAAeAAAAaAAAAAAAAAAAAAAAAAAAAAAAAAAAAAAAECcAABAnAAAAAAAAAAAAAAAAAAAAAAAAAAAAAAAAAAAAAAAAAAAAABQAAAAAAAAAwMD/AAAAAABkAAAAMgAAAAAAAABkAAAAAAAAAH9/fwAKAAAAIgAAABgAAAAAAAAAAAAAAAAAAAAAAAAAAAAAAAAAAAAkAAAAJAAAAAAAAAAHAAAAAAAAAAAAAAAAAAAAAAAAAAAAAAAAAAAAf39/ACUAAABYAAAAAAAAAAAAAAAAAAAAAAAAAAAAAAAAAAAAAAAAAAAAAAAAAAAAAAAAAAAAAAA/AAAAAAAAAKCGAQAAAAAAAAAAAAAAAAAMAAAAAQAAAAAAAAAAAAAAAAAAAB8AAABUAAAAAAAABQAAAAEAAAAAAAAAAAAAAAAAAAAAAAAAAAAAAAAAAAAAAAAAAAAAAAJ/f38AAAAAA8zMzADAwP8Af39/AAAAAAAAAAAAAAAAAAAAAAAAAAAAIQAAABgAAAAUAAAA2BgAABonAAAoMgAAWSkAABAAAAAmAAAACAAAAAAAAAAAAAAA"/>
+              </a:ext>
+            </a:extLst>
           </p:cNvSpPr>
           <p:nvPr>
             <p:ph type="ftr" sz="quarter" idx="11"/>
@@ -438,7 +624,9 @@
           <a:bodyPr/>
           <a:lstStyle/>
           <a:p>
-            <a:endParaRPr lang="en-US"/>
+            <a:pPr>
+              <a:defRPr lang="en-us"/>
+            </a:pPr>
           </a:p>
         </p:txBody>
       </p:sp>
@@ -446,7 +634,12 @@
         <p:nvSpPr>
           <p:cNvPr id="6" name="Slide Number Placeholder 5"/>
           <p:cNvSpPr>
-            <a:spLocks noGrp="1"/>
+            <a:spLocks noGrp="1" noChangeArrowheads="1"/>
+            <a:extLst>
+              <a:ext uri="smNativeData">
+                <pr:smNativeData xmlns:pr="smNativeData" xmlns="smNativeData" val="SMDATA_15_+nJ9aRMAAAAlAAAAZAAAAA0AAAAAkAAAAEgAAACQAAAASAAAAAAAAAABAAAAAAAAAAEAAABQAAAAAAAAAAAA4D8AAAAAAADgPwAAAAAAAOA/AAAAAAAA4D8AAAAAAADgPwAAAAAAAOA/AAAAAAAA4D8AAAAAAADgPwAAAAAAAOA/AAAAAAAA4D8CAAAAjAAAAAAAAAAAAAAAW5vVDP///wgAAAAAAAAAAAAAAAAAAAAAAAAAAAAAAAAAAAAAZAAAAAEAAABAAAAAAAAAAAAAAAAAAAAAAAAAAAAAAAAAAAAAAAAAAAAAAAAAAAAAAAAAAAAAAAAAAAAAAAAAAAAAAAAAAAAAAAAAAAAAAAAAAAAAAAAAAAAAAAAAAAAAFAAAADwAAAAAAAAAAAAAAAAAAAkUAAAAAQAAABQAAAAUAAAAFAAAAAEAAAAAAAAAZAAAAGQAAAAAAAAAZAAAAGQAAAAVAAAAYAAAAAAAAAAAAAAADwAAACADAAAAAAAAAAAAAAEAAACgMgAAVgcAAKr4//8BAAAAf39/AAEAAABkAAAAAAAAABQAAABAHwAAAAAAACYAAAAAAAAAwOD//wAAAAAmAAAAZAAAABYAAABMAAAAAAAAAAAAAAAEAAAAAAAAAAEAAADn5uYKAAAAACgAAAAoAAAAZAAAAGQAAAAAAAAAzMzMAAAAAABQAAAAUAAAAGQAAABkAAAAAAAAABcAAAAUAAAAAAAAAAAAAAD/fwAA/38AAAAAAAAJAAAABAAAAAAAAAAeAAAAaAAAAAAAAAAAAAAAAAAAAAAAAAAAAAAAECcAABAnAAAAAAAAAAAAAAAAAAAAAAAAAAAAAAAAAAAAAAAAAAAAABQAAAAAAAAAwMD/AAAAAABkAAAAMgAAAAAAAABkAAAAAAAAAH9/fwAKAAAAIgAAABgAAAAAAAAAAAAAAAAAAAAAAAAAAAAAAAAAAAAkAAAAJAAAAAAAAAAHAAAAAAAAAAAAAAAAAAAAAAAAAAAAAAAAAAAAf39/ACUAAABYAAAAAAAAAAAAAAAAAAAAAAAAAAAAAAAAAAAAAAAAAAAAAAAAAAAAAAAAAAAAAAA/AAAAAAAAAKCGAQAAAAAAAAAAAAAAAAAMAAAAAQAAAAAAAAAAAAAAAAAAAB8AAABUAAAAAAAABQAAAAEAAAAAAAAAAAAAAAAAAAAAAAAAAAAAAAAAAAAAAAAAAAAAAAJ/f38AAAAAA8zMzADAwP8Af39/AAAAAAAAAAAAAAAAAAAAAAAAAAAAIQAAABgAAAAUAAAA+DQAABonAADYRQAAWSkAABAAAAAmAAAACAAAAAAAAAAAAAAA"/>
+              </a:ext>
+            </a:extLst>
           </p:cNvSpPr>
           <p:nvPr>
             <p:ph type="sldNum" sz="quarter" idx="12"/>
@@ -457,29 +650,26 @@
           <a:bodyPr/>
           <a:lstStyle/>
           <a:p>
-            <a:fld id="{58AA844A-00A1-4A5D-A246-C5B817417ED4}" type="slidenum">
-              <a:rPr lang="en-US" smtClean="0"/>
+            <a:pPr>
+              <a:defRPr lang="en-us"/>
+            </a:pPr>
+            <a:fld id="{3AF9B07F-31D7-AC46-9941-C713FE0F6F92}" type="slidenum">
               <a:t>‹#›</a:t>
             </a:fld>
-            <a:endParaRPr lang="en-US"/>
           </a:p>
         </p:txBody>
       </p:sp>
     </p:spTree>
-    <p:extLst>
-      <p:ext uri="{BB962C8B-B14F-4D97-AF65-F5344CB8AC3E}">
-        <p14:creationId xmlns:p14="http://schemas.microsoft.com/office/powerpoint/2010/main" val="378177918"/>
-      </p:ext>
-    </p:extLst>
   </p:cSld>
   <p:clrMapOvr>
     <a:masterClrMapping/>
   </p:clrMapOvr>
+  <p:hf hdr="0" ftr="0"/>
 </p:sldLayout>
 </file>
 
 <file path=ppt/slideLayouts/slideLayout11.xml><?xml version="1.0" encoding="utf-8"?>
-<p:sldLayout xmlns:a="http://schemas.openxmlformats.org/drawingml/2006/main" xmlns:r="http://schemas.openxmlformats.org/officeDocument/2006/relationships" xmlns:p="http://schemas.openxmlformats.org/presentationml/2006/main" type="vertTitleAndTx" preserve="1">
+<p:sldLayout xmlns:p="http://schemas.openxmlformats.org/presentationml/2006/main" xmlns:mc="http://schemas.openxmlformats.org/markup-compatibility/2006" xmlns:p14="http://schemas.microsoft.com/office/powerpoint/2010/main" xmlns:p15="http://schemas.microsoft.com/office/powerpoint/2012/main" xmlns:r="http://schemas.openxmlformats.org/officeDocument/2006/relationships" xmlns:a="http://schemas.openxmlformats.org/drawingml/2006/main" type="vertTitleAndTx" preserve="1">
   <p:cSld name="Vertical Title and Text">
     <p:spTree>
       <p:nvGrpSpPr>
@@ -499,27 +689,37 @@
         <p:nvSpPr>
           <p:cNvPr id="2" name="Vertical Title 1"/>
           <p:cNvSpPr>
-            <a:spLocks noGrp="1"/>
-          </p:cNvSpPr>
-          <p:nvPr>
-            <p:ph type="title" orient="vert"/>
+            <a:spLocks noGrp="1" noChangeArrowheads="1"/>
+            <a:extLst>
+              <a:ext uri="smNativeData">
+                <pr:smNativeData xmlns:pr="smNativeData" xmlns="smNativeData" val="SMDATA_15_+nJ9aRMAAAAlAAAAZAAAAA0AAAAAkAAAAEgAAACQAAAASAAAAAAAAAABAAAAAQAAAAEAAABQAAAAAAAAAAAA4D8AAAAAAADgPwAAAAAAAOA/AAAAAAAA4D8AAAAAAADgPwAAAAAAAOA/AAAAAAAA4D8AAAAAAADgPwAAAAAAAOA/AAAAAAAA4D8CAAAAjAAAAAAAAAAAAAAAW5vVDP///wgAAAAAAAAAAAAAAAAAAAAAAAAAAAAAAAAAAAAAZAAAAAEAAABAAAAAAAAAAAAAAAAAAAAAAAAAAAAAAAAAAAAAAAAAAAAAAAAAAAAAAAAAAAAAAAAAAAAAAAAAAAAAAAAAAAAAAAAAAAAAAAAAAAAAAAAAAAAAAAAAAAAAFAAAADwAAAAAAAAAAAAAAAAAAAkUAAAAAQAAABQAAAAUAAAAFAAAAAEAAAAAAAAAZAAAAGQAAAAAAAAAZAAAAGQAAAAVAAAAYAAAAAAAAAAAAAAADwAAACADAAAAAAAAAAAAAAEAAACgMgAAVgcAAKr4//8BAAAAf39/AAEAAABkAAAAAAAAABQAAABAHwAAAAAAACYAAAAAAAAAwOD//wAAAAAmAAAAZAAAABYAAABMAAAAAAAAAAAAAAAEAAAAAAAAAAEAAADn5uYKAAAAACgAAAAoAAAAZAAAAGQAAAAAAAAAzMzMAAAAAABQAAAAUAAAAGQAAABkAAAAAAAAABcAAAAUAAAAAAAAAAAAAAD/fwAA/38AAAAAAAAJAAAABAAAAAAAAAAeAAAAaAAAAAAAAAAAAAAAAAAAAAAAAAAAAAAAECcAABAnAAAAAAAAAAAAAAAAAAAAAAAAAAAAAAAAAAAAAAAAAAAAABQAAAAAAAAAwMD/AAAAAABkAAAAMgAAAAAAAABkAAAAAAAAAH9/fwAKAAAAIgAAABgAAAAAAAAAAAAAAAAAAAAAAAAAAAAAAAAAAAAkAAAAJAAAAAAAAAAHAAAAAAAAAAAAAAAAAAAAAAAAAAAAAAAAAAAAf39/ACUAAABYAAAAAAAAAAAAAAAAAAAAAAAAAAAAAAAAAAAAAAAAAAAAAAAAAAAAAAAAAAAAAAA/AAAAAAAAAKCGAQAAAAAAAAAAAAAAAAAMAAAAAQAAAAAAAAAAAAAAAAAAAB8AAABUAAAAAAAABQAAAAEAAAAAAAAAAAAAAAAAAAAAAAAAAAAAAAAAAAAAAAAAAAAAAAJ/f38AAAAAA8zMzADAwP8Af39/AAAAAAAAAAAAAAAAAAAAAAAAAAAAIQAAABgAAAAUAAAArDUAAD8CAADYRQAAACYAABAAAAAmAAAACAAAAAMAAAAAAAAA"/>
+              </a:ext>
+            </a:extLst>
+          </p:cNvSpPr>
+          <p:nvPr>
+            <p:ph type="title"/>
           </p:nvPr>
         </p:nvSpPr>
         <p:spPr>
           <a:xfrm>
             <a:off x="8724900" y="365125"/>
-            <a:ext cx="2628900" cy="5811838"/>
+            <a:ext cx="2628900" cy="5812155"/>
           </a:xfrm>
         </p:spPr>
         <p:txBody>
-          <a:bodyPr vert="eaVert"/>
-          <a:lstStyle/>
-          <a:p>
-            <a:r>
-              <a:rPr lang="en-US" smtClean="0"/>
+          <a:bodyPr vert="vert" wrap="square" lIns="91440" tIns="45720" rIns="91440" bIns="45720" numCol="1" spcCol="215900" anchor="ctr">
+            <a:prstTxWarp prst="textNoShape">
+              <a:avLst/>
+            </a:prstTxWarp>
+          </a:bodyPr>
+          <a:lstStyle/>
+          <a:p>
+            <a:pPr>
+              <a:defRPr lang="en-us"/>
+            </a:pPr>
+            <a:r>
               <a:t>Click to edit Master title style</a:t>
             </a:r>
-            <a:endParaRPr lang="en-US"/>
           </a:p>
         </p:txBody>
       </p:sp>
@@ -527,56 +727,69 @@
         <p:nvSpPr>
           <p:cNvPr id="3" name="Vertical Text Placeholder 2"/>
           <p:cNvSpPr>
-            <a:spLocks noGrp="1"/>
-          </p:cNvSpPr>
-          <p:nvPr>
-            <p:ph type="body" orient="vert" idx="1"/>
+            <a:spLocks noGrp="1" noChangeArrowheads="1"/>
+            <a:extLst>
+              <a:ext uri="smNativeData">
+                <pr:smNativeData xmlns:pr="smNativeData" xmlns="smNativeData" val="SMDATA_15_+nJ9aRMAAAAlAAAAZAAAAA0AAAAAkAAAAEgAAACQAAAASAAAAAAAAAAAAAAAAQAAAAEAAABQAAAAAAAAAAAA4D8AAAAAAADgPwAAAAAAAOA/AAAAAAAA4D8AAAAAAADgPwAAAAAAAOA/AAAAAAAA4D8AAAAAAADgPwAAAAAAAOA/AAAAAAAA4D8CAAAAjAAAAAAAAAAAAAAAW5vVDP///wgAAAAAAAAAAAAAAAAAAAAAAAAAAAAAAAAAAAAAZAAAAAEAAABAAAAAAAAAAAAAAAAAAAAAAAAAAAAAAAAAAAAAAAAAAAAAAAAAAAAAAAAAAAAAAAAAAAAAAAAAAAAAAAAAAAAAAAAAAAAAAAAAAAAAAAAAAAAAAAAAAAAAFAAAADwAAAAAAAAAAAAAAAAAAAkUAAAAAQAAABQAAAAUAAAAFAAAAAEAAAAAAAAAZAAAAGQAAAAAAAAAZAAAAGQAAAAVAAAAYAAAAAAAAAAAAAAADwAAACADAAAAAAAAAAAAAAEAAACgMgAAVgcAAKr4//8BAAAAf39/AAEAAABkAAAAAAAAABQAAABAHwAAAAAAACYAAAAAAAAAwOD//wAAAAAmAAAAZAAAABYAAABMAAAAAAAAAAAAAAAEAAAAAAAAAAEAAADn5uYKAAAAACgAAAAoAAAAZAAAAGQAAAAAAAAAzMzMAAAAAABQAAAAUAAAAGQAAABkAAAAAAAAABcAAAAUAAAAAAAAAAAAAAD/fwAA/38AAAAAAAAJAAAABAAAAAAAAAAeAAAAaAAAAAAAAAAAAAAAAAAAAAAAAAAAAAAAECcAABAnAAAAAAAAAAAAAAAAAAAAAAAAAAAAAAAAAAAAAAAAAAAAABQAAAAAAAAAwMD/AAAAAABkAAAAMgAAAAAAAABkAAAAAAAAAH9/fwAKAAAAIgAAABgAAAAAAAAAAAAAAAAAAAAAAAAAAAAAAAAAAAAkAAAAJAAAAAAAAAAHAAAAAAAAAAAAAAAAAAAAAAAAAAAAAAAAAAAAf39/ACUAAABYAAAAAAAAAAAAAAAAAAAAAAAAAAAAAAAAAAAAAAAAAAAAAAAAAAAAAAAAAAAAAAA/AAAAAAAAAKCGAQAAAAAAAAAAAAAAAAAMAAAAAQAAAAAAAAAAAAAAAAAAAB8AAABUAAAAAAAABQAAAAEAAAAAAAAAAAAAAAAAAAAAAAAAAAAAAAAAAAAAAAAAAAAAAAJ/f38AAAAAA8zMzADAwP8Af39/AAAAAAAAAAAAAAAAAAAAAAAAAAAAIQAAABgAAAAUAAAAKAUAAD8CAAC8NAAAACYAABAAAAAmAAAACAAAAAMAAAAAAAAA"/>
+              </a:ext>
+            </a:extLst>
+          </p:cNvSpPr>
+          <p:nvPr>
+            <p:ph idx="1"/>
           </p:nvPr>
         </p:nvSpPr>
         <p:spPr>
           <a:xfrm>
             <a:off x="838200" y="365125"/>
-            <a:ext cx="7734300" cy="5811838"/>
+            <a:ext cx="7734300" cy="5812155"/>
           </a:xfrm>
         </p:spPr>
         <p:txBody>
-          <a:bodyPr vert="eaVert"/>
-          <a:lstStyle/>
-          <a:p>
-            <a:pPr lvl="0"/>
-            <a:r>
-              <a:rPr lang="en-US" smtClean="0"/>
+          <a:bodyPr vert="vert" wrap="square" lIns="91440" tIns="45720" rIns="91440" bIns="45720" numCol="1" spcCol="215900" anchor="t">
+            <a:prstTxWarp prst="textNoShape">
+              <a:avLst/>
+            </a:prstTxWarp>
+          </a:bodyPr>
+          <a:lstStyle/>
+          <a:p>
+            <a:pPr>
+              <a:defRPr lang="en-us"/>
+            </a:pPr>
+            <a:r>
               <a:t>Click to edit Master text styles</a:t>
             </a:r>
           </a:p>
           <a:p>
-            <a:pPr lvl="1"/>
-            <a:r>
-              <a:rPr lang="en-US" smtClean="0"/>
+            <a:pPr lvl="1">
+              <a:defRPr lang="en-us"/>
+            </a:pPr>
+            <a:r>
               <a:t>Second level</a:t>
             </a:r>
           </a:p>
           <a:p>
-            <a:pPr lvl="2"/>
-            <a:r>
-              <a:rPr lang="en-US" smtClean="0"/>
+            <a:pPr lvl="2">
+              <a:defRPr lang="en-us"/>
+            </a:pPr>
+            <a:r>
               <a:t>Third level</a:t>
             </a:r>
           </a:p>
           <a:p>
-            <a:pPr lvl="3"/>
-            <a:r>
-              <a:rPr lang="en-US" smtClean="0"/>
+            <a:pPr lvl="3">
+              <a:defRPr lang="en-us"/>
+            </a:pPr>
+            <a:r>
               <a:t>Fourth level</a:t>
             </a:r>
           </a:p>
           <a:p>
-            <a:pPr lvl="4"/>
-            <a:r>
-              <a:rPr lang="en-US" smtClean="0"/>
+            <a:pPr lvl="4">
+              <a:defRPr lang="en-us"/>
+            </a:pPr>
+            <a:r>
               <a:t>Fifth level</a:t>
             </a:r>
-            <a:endParaRPr lang="en-US"/>
           </a:p>
         </p:txBody>
       </p:sp>
@@ -584,7 +797,12 @@
         <p:nvSpPr>
           <p:cNvPr id="4" name="Date Placeholder 3"/>
           <p:cNvSpPr>
-            <a:spLocks noGrp="1"/>
+            <a:spLocks noGrp="1" noChangeArrowheads="1"/>
+            <a:extLst>
+              <a:ext uri="smNativeData">
+                <pr:smNativeData xmlns:pr="smNativeData" xmlns="smNativeData" val="SMDATA_15_+nJ9aRMAAAAlAAAAZAAAAA0AAAAAkAAAAEgAAACQAAAASAAAAAAAAAABAAAAAAAAAAEAAABQAAAAAAAAAAAA4D8AAAAAAADgPwAAAAAAAOA/AAAAAAAA4D8AAAAAAADgPwAAAAAAAOA/AAAAAAAA4D8AAAAAAADgPwAAAAAAAOA/AAAAAAAA4D8CAAAAjAAAAAAAAAAAAAAAW5vVDP///wgAAAAAAAAAAAAAAAAAAAAAAAAAAAAAAAAAAAAAZAAAAAEAAABAAAAAAAAAAAAAAAAAAAAAAAAAAAAAAAAAAAAAAAAAAAAAAAAAAAAAAAAAAAAAAAAAAAAAAAAAAAAAAAAAAAAAAAAAAAAAAAAAAAAAAAAAAAAAAAAAAAAAFAAAADwAAAAAAAAAAAAAAAAAAAkUAAAAAQAAABQAAAAUAAAAFAAAAAEAAAAAAAAAZAAAAGQAAAAAAAAAZAAAAGQAAAAVAAAAYAAAAAAAAAAAAAAADwAAACADAAAAAAAAAAAAAAEAAACgMgAAVgcAAKr4//8BAAAAf39/AAEAAABkAAAAAAAAABQAAABAHwAAAAAAACYAAAAAAAAAwOD//wAAAAAmAAAAZAAAABYAAABMAAAAAAAAAAAAAAAEAAAAAAAAAAEAAADn5uYKAAAAACgAAAAoAAAAZAAAAGQAAAAAAAAAzMzMAAAAAABQAAAAUAAAAGQAAABkAAAAAAAAABcAAAAUAAAAAAAAAAAAAAD/fwAA/38AAAAAAAAJAAAABAAAAAAAAAAeAAAAaAAAAAAAAAAAAAAAAAAAAAAAAAAAAAAAECcAABAnAAAAAAAAAAAAAAAAAAAAAAAAAAAAAAAAAAAAAAAAAAAAABQAAAAAAAAAwMD/AAAAAABkAAAAMgAAAAAAAABkAAAAAAAAAH9/fwAKAAAAIgAAABgAAAAAAAAAAAAAAAAAAAAAAAAAAAAAAAAAAAAkAAAAJAAAAAAAAAAHAAAAAAAAAAAAAAAAAAAAAAAAAAAAAAAAAAAAf39/ACUAAABYAAAAAAAAAAAAAAAAAAAAAAAAAAAAAAAAAAAAAAAAAAAAAAAAAAAAAAAAAAAAAAA/AAAAAAAAAKCGAQAAAAAAAAAAAAAAAAAMAAAAAQAAAAAAAAAAAAAAAAAAAB8AAABUAAAAAAAABQAAAAEAAAAAAAAAAAAAAAAAAAAAAAAAAAAAAAAAAAAAAAAAAAAAAAJ/f38AAAAAA8zMzADAwP8Af39/AAAAAAAAAAAAAAAAAAAAAAAAAAAAIQAAABgAAAAUAAAAKAUAABonAAAIFgAAWSkAABAAAAAmAAAACAAAAAAAAAAAAAAA"/>
+              </a:ext>
+            </a:extLst>
           </p:cNvSpPr>
           <p:nvPr>
             <p:ph type="dt" sz="half" idx="10"/>
@@ -595,11 +813,12 @@
           <a:bodyPr/>
           <a:lstStyle/>
           <a:p>
-            <a:fld id="{7DE6D954-9D5F-4B54-AC5F-2CADB10B85DE}" type="datetimeFigureOut">
-              <a:rPr lang="en-US" smtClean="0"/>
+            <a:pPr>
+              <a:defRPr lang="en-us"/>
+            </a:pPr>
+            <a:fld id="{3AF9ED14-5AD7-AC1B-9941-AC4EA30F6FF9}" type="datetime1">
               <a:t>1/12/2026</a:t>
             </a:fld>
-            <a:endParaRPr lang="en-US"/>
           </a:p>
         </p:txBody>
       </p:sp>
@@ -607,7 +826,12 @@
         <p:nvSpPr>
           <p:cNvPr id="5" name="Footer Placeholder 4"/>
           <p:cNvSpPr>
-            <a:spLocks noGrp="1"/>
+            <a:spLocks noGrp="1" noChangeArrowheads="1"/>
+            <a:extLst>
+              <a:ext uri="smNativeData">
+                <pr:smNativeData xmlns:pr="smNativeData" xmlns="smNativeData" val="SMDATA_15_+nJ9aRMAAAAlAAAAZAAAAA0AAAAAkAAAAEgAAACQAAAASAAAAAAAAAABAAAAAAAAAAEAAABQAAAAAAAAAAAA4D8AAAAAAADgPwAAAAAAAOA/AAAAAAAA4D8AAAAAAADgPwAAAAAAAOA/AAAAAAAA4D8AAAAAAADgPwAAAAAAAOA/AAAAAAAA4D8CAAAAjAAAAAAAAAAAAAAAW5vVDP///wgAAAAAAAAAAAAAAAAAAAAAAAAAAAAAAAAAAAAAZAAAAAEAAABAAAAAAAAAAAAAAAAAAAAAAAAAAAAAAAAAAAAAAAAAAAAAAAAAAAAAAAAAAAAAAAAAAAAAAAAAAAAAAAAAAAAAAAAAAAAAAAAAAAAAAAAAAAAAAAAAAAAAFAAAADwAAAAAAAAAAAAAAAAAAAkUAAAAAQAAABQAAAAUAAAAFAAAAAEAAAAAAAAAZAAAAGQAAAAAAAAAZAAAAGQAAAAVAAAAYAAAAAAAAAAAAAAADwAAACADAAAAAAAAAAAAAAEAAACgMgAAVgcAAKr4//8BAAAAf39/AAEAAABkAAAAAAAAABQAAABAHwAAAAAAACYAAAAAAAAAwOD//wAAAAAmAAAAZAAAABYAAABMAAAAAAAAAAAAAAAEAAAAAAAAAAEAAADn5uYKAAAAACgAAAAoAAAAZAAAAGQAAAAAAAAAzMzMAAAAAABQAAAAUAAAAGQAAABkAAAAAAAAABcAAAAUAAAAAAAAAAAAAAD/fwAA/38AAAAAAAAJAAAABAAAAAAAAAAeAAAAaAAAAAAAAAAAAAAAAAAAAAAAAAAAAAAAECcAABAnAAAAAAAAAAAAAAAAAAAAAAAAAAAAAAAAAAAAAAAAAAAAABQAAAAAAAAAwMD/AAAAAABkAAAAMgAAAAAAAABkAAAAAAAAAH9/fwAKAAAAIgAAABgAAAAAAAAAAAAAAAAAAAAAAAAAAAAAAAAAAAAkAAAAJAAAAAAAAAAHAAAAAAAAAAAAAAAAAAAAAAAAAAAAAAAAAAAAf39/ACUAAABYAAAAAAAAAAAAAAAAAAAAAAAAAAAAAAAAAAAAAAAAAAAAAAAAAAAAAAAAAAAAAAA/AAAAAAAAAKCGAQAAAAAAAAAAAAAAAAAMAAAAAQAAAAAAAAAAAAAAAAAAAB8AAABUAAAAAAAABQAAAAEAAAAAAAAAAAAAAAAAAAAAAAAAAAAAAAAAAAAAAAAAAAAAAAJ/f38AAAAAA8zMzADAwP8Af39/AAAAAAAAAAAAAAAAAAAAAAAAAAAAIQAAABgAAAAUAAAA2BgAABonAAAoMgAAWSkAABAAAAAmAAAACAAAAAAAAAAAAAAA"/>
+              </a:ext>
+            </a:extLst>
           </p:cNvSpPr>
           <p:nvPr>
             <p:ph type="ftr" sz="quarter" idx="11"/>
@@ -618,7 +842,9 @@
           <a:bodyPr/>
           <a:lstStyle/>
           <a:p>
-            <a:endParaRPr lang="en-US"/>
+            <a:pPr>
+              <a:defRPr lang="en-us"/>
+            </a:pPr>
           </a:p>
         </p:txBody>
       </p:sp>
@@ -626,7 +852,12 @@
         <p:nvSpPr>
           <p:cNvPr id="6" name="Slide Number Placeholder 5"/>
           <p:cNvSpPr>
-            <a:spLocks noGrp="1"/>
+            <a:spLocks noGrp="1" noChangeArrowheads="1"/>
+            <a:extLst>
+              <a:ext uri="smNativeData">
+                <pr:smNativeData xmlns:pr="smNativeData" xmlns="smNativeData" val="SMDATA_15_+nJ9aRMAAAAlAAAAZAAAAA0AAAAAkAAAAEgAAACQAAAASAAAAAAAAAABAAAAAAAAAAEAAABQAAAAAAAAAAAA4D8AAAAAAADgPwAAAAAAAOA/AAAAAAAA4D8AAAAAAADgPwAAAAAAAOA/AAAAAAAA4D8AAAAAAADgPwAAAAAAAOA/AAAAAAAA4D8CAAAAjAAAAAAAAAAAAAAAW5vVDP///wgAAAAAAAAAAAAAAAAAAAAAAAAAAAAAAAAAAAAAZAAAAAEAAABAAAAAAAAAAAAAAAAAAAAAAAAAAAAAAAAAAAAAAAAAAAAAAAAAAAAAAAAAAAAAAAAAAAAAAAAAAAAAAAAAAAAAAAAAAAAAAAAAAAAAAAAAAAAAAAAAAAAAFAAAADwAAAAAAAAAAAAAAAAAAAkUAAAAAQAAABQAAAAUAAAAFAAAAAEAAAAAAAAAZAAAAGQAAAAAAAAAZAAAAGQAAAAVAAAAYAAAAAAAAAAAAAAADwAAACADAAAAAAAAAAAAAAEAAACgMgAAVgcAAKr4//8BAAAAf39/AAEAAABkAAAAAAAAABQAAABAHwAAAAAAACYAAAAAAAAAwOD//wAAAAAmAAAAZAAAABYAAABMAAAAAAAAAAAAAAAEAAAAAAAAAAEAAADn5uYKAAAAACgAAAAoAAAAZAAAAGQAAAAAAAAAzMzMAAAAAABQAAAAUAAAAGQAAABkAAAAAAAAABcAAAAUAAAAAAAAAAAAAAD/fwAA/38AAAAAAAAJAAAABAAAAAAAAAAeAAAAaAAAAAAAAAAAAAAAAAAAAAAAAAAAAAAAECcAABAnAAAAAAAAAAAAAAAAAAAAAAAAAAAAAAAAAAAAAAAAAAAAABQAAAAAAAAAwMD/AAAAAABkAAAAMgAAAAAAAABkAAAAAAAAAH9/fwAKAAAAIgAAABgAAAAAAAAAAAAAAAAAAAAAAAAAAAAAAAAAAAAkAAAAJAAAAAAAAAAHAAAAAAAAAAAAAAAAAAAAAAAAAAAAAAAAAAAAf39/ACUAAABYAAAAAAAAAAAAAAAAAAAAAAAAAAAAAAAAAAAAAAAAAAAAAAAAAAAAAAAAAAAAAAA/AAAAAAAAAKCGAQAAAAAAAAAAAAAAAAAMAAAAAQAAAAAAAAAAAAAAAAAAAB8AAABUAAAAAAAABQAAAAEAAAAAAAAAAAAAAAAAAAAAAAAAAAAAAAAAAAAAAAAAAAAAAAJ/f38AAAAAA8zMzADAwP8Af39/AAAAAAAAAAAAAAAAAAAAAAAAAAAAIQAAABgAAAAUAAAA+DQAABonAADYRQAAWSkAABAAAAAmAAAACAAAAAAAAAAAAAAA"/>
+              </a:ext>
+            </a:extLst>
           </p:cNvSpPr>
           <p:nvPr>
             <p:ph type="sldNum" sz="quarter" idx="12"/>
@@ -637,29 +868,26 @@
           <a:bodyPr/>
           <a:lstStyle/>
           <a:p>
-            <a:fld id="{58AA844A-00A1-4A5D-A246-C5B817417ED4}" type="slidenum">
-              <a:rPr lang="en-US" smtClean="0"/>
+            <a:pPr>
+              <a:defRPr lang="en-us"/>
+            </a:pPr>
+            <a:fld id="{3AF98CFF-B1D7-AC7A-9941-472FC20F6F12}" type="slidenum">
               <a:t>‹#›</a:t>
             </a:fld>
-            <a:endParaRPr lang="en-US"/>
           </a:p>
         </p:txBody>
       </p:sp>
     </p:spTree>
-    <p:extLst>
-      <p:ext uri="{BB962C8B-B14F-4D97-AF65-F5344CB8AC3E}">
-        <p14:creationId xmlns:p14="http://schemas.microsoft.com/office/powerpoint/2010/main" val="199735324"/>
-      </p:ext>
-    </p:extLst>
   </p:cSld>
   <p:clrMapOvr>
     <a:masterClrMapping/>
   </p:clrMapOvr>
+  <p:hf hdr="0" ftr="0"/>
 </p:sldLayout>
 </file>
 
 <file path=ppt/slideLayouts/slideLayout2.xml><?xml version="1.0" encoding="utf-8"?>
-<p:sldLayout xmlns:a="http://schemas.openxmlformats.org/drawingml/2006/main" xmlns:r="http://schemas.openxmlformats.org/officeDocument/2006/relationships" xmlns:p="http://schemas.openxmlformats.org/presentationml/2006/main" type="obj" preserve="1">
+<p:sldLayout xmlns:p="http://schemas.openxmlformats.org/presentationml/2006/main" xmlns:mc="http://schemas.openxmlformats.org/markup-compatibility/2006" xmlns:p14="http://schemas.microsoft.com/office/powerpoint/2010/main" xmlns:p15="http://schemas.microsoft.com/office/powerpoint/2012/main" xmlns:r="http://schemas.openxmlformats.org/officeDocument/2006/relationships" xmlns:a="http://schemas.openxmlformats.org/drawingml/2006/main" type="obj" preserve="1">
   <p:cSld name="Title and Content">
     <p:spTree>
       <p:nvGrpSpPr>
@@ -679,7 +907,12 @@
         <p:nvSpPr>
           <p:cNvPr id="2" name="Title 1"/>
           <p:cNvSpPr>
-            <a:spLocks noGrp="1"/>
+            <a:spLocks noGrp="1" noChangeArrowheads="1"/>
+            <a:extLst>
+              <a:ext uri="smNativeData">
+                <pr:smNativeData xmlns:pr="smNativeData" xmlns="smNativeData" val="SMDATA_15_+nJ9aRMAAAAlAAAAZAAAAA0AAAAAkAAAAEgAAACQAAAASAAAAAAAAAABAAAAAAAAAAEAAABQAAAAAAAAAAAA4D8AAAAAAADgPwAAAAAAAOA/AAAAAAAA4D8AAAAAAADgPwAAAAAAAOA/AAAAAAAA4D8AAAAAAADgPwAAAAAAAOA/AAAAAAAA4D8CAAAAjAAAAAAAAAAAAAAAW5vVDP///wgAAAAAAAAAAAAAAAAAAAAAAAAAAAAAAAAAAAAAZAAAAAEAAABAAAAAAAAAAAAAAAAAAAAAAAAAAAAAAAAAAAAAAAAAAAAAAAAAAAAAAAAAAAAAAAAAAAAAAAAAAAAAAAAAAAAAAAAAAAAAAAAAAAAAAAAAAAAAAAAAAAAAFAAAADwAAAAAAAAAAAAAAAAAAAkUAAAAAQAAABQAAAAUAAAAFAAAAAEAAAAAAAAAZAAAAGQAAAAAAAAAZAAAAGQAAAAVAAAAYAAAAAAAAAAAAAAADwAAACADAAAAAAAAAAAAAAEAAACgMgAAVgcAAKr4//8BAAAAf39/AAEAAABkAAAAAAAAABQAAABAHwAAAAAAACYAAAAAAAAAwOD//wAAAAAmAAAAZAAAABYAAABMAAAAAAAAAAAAAAAEAAAAAAAAAAEAAADn5uYKAAAAACgAAAAoAAAAZAAAAGQAAAAAAAAAzMzMAAAAAABQAAAAUAAAAGQAAABkAAAAAAAAABcAAAAUAAAAAAAAAAAAAAD/fwAA/38AAAAAAAAJAAAABAAAAGxpY2keAAAAaAAAAAAAAAAAAAAAAAAAAAAAAAAAAAAAECcAABAnAAAAAAAAAAAAAAAAAAAAAAAAAAAAAAAAAAAAAAAAAAAAABQAAAAAAAAAwMD/AAAAAABkAAAAMgAAAAAAAABkAAAAAAAAAH9/fwAKAAAAIgAAABgAAAAAAAAAAAAAAAAAAAAAAAAAAAAAAAAAAAAkAAAAJAAAAAAAAAAHAAAAAAAAAAAAAAAAAAAAAAAAAAAAAAAAAAAAf39/ACUAAABYAAAAAAAAAAAAAAAAAAAAAAAAAAAAAAAAAAAAAAAAAAAAAAAAAAAAAAAAAAAAAAA/AAAAAAAAAKCGAQAAAAAAAAAAAAAAAAAMAAAAAQAAAAAAAAAAAAAAAAAAAB8AAABUAAAAAAAABQAAAAEAAAAAAAAAAAAAAAAAAAAAAAAAAAAAAAAAAAAAAAAAAAAAAAJ/f38AAAAAA8zMzADAwP8Af39/AAAAAAAAAAAAAAAAAAAAAAAAAAAAIQAAABgAAAAUAAAAKAUAAD8CAADYRQAAZwoAABAAAAAmAAAACAAAAAAAAAAAAAAA"/>
+              </a:ext>
+            </a:extLst>
           </p:cNvSpPr>
           <p:nvPr>
             <p:ph type="title"/>
@@ -690,11 +923,12 @@
           <a:bodyPr/>
           <a:lstStyle/>
           <a:p>
-            <a:r>
-              <a:rPr lang="en-US" smtClean="0"/>
+            <a:pPr>
+              <a:defRPr lang="en-us"/>
+            </a:pPr>
+            <a:r>
               <a:t>Click to edit Master title style</a:t>
             </a:r>
-            <a:endParaRPr lang="en-US"/>
           </a:p>
         </p:txBody>
       </p:sp>
@@ -702,7 +936,12 @@
         <p:nvSpPr>
           <p:cNvPr id="3" name="Content Placeholder 2"/>
           <p:cNvSpPr>
-            <a:spLocks noGrp="1"/>
+            <a:spLocks noGrp="1" noChangeArrowheads="1"/>
+            <a:extLst>
+              <a:ext uri="smNativeData">
+                <pr:smNativeData xmlns:pr="smNativeData" xmlns="smNativeData" val="SMDATA_15_+nJ9aRMAAAAlAAAAZAAAAA0AAAAAkAAAAEgAAACQAAAASAAAAAAAAAAAAAAAAAAAAAEAAABQAAAAAAAAAAAA4D8AAAAAAADgPwAAAAAAAOA/AAAAAAAA4D8AAAAAAADgPwAAAAAAAOA/AAAAAAAA4D8AAAAAAADgPwAAAAAAAOA/AAAAAAAA4D8CAAAAjAAAAAAAAAAAAAAAW5vVDP///wgAAAAAAAAAAAAAAAAAAAAAAAAAAAAAAAAAAAAAZAAAAAEAAABAAAAAAAAAAAAAAAAAAAAAAAAAAAAAAAAAAAAAAAAAAAAAAAAAAAAAAAAAAAAAAAAAAAAAAAAAAAAAAAAAAAAAAAAAAAAAAAAAAAAAAAAAAAAAAAAAAAAAFAAAADwAAAAAAAAAAAAAAAAAAAkUAAAAAQAAABQAAAAUAAAAFAAAAAEAAAAAAAAAZAAAAGQAAAAAAAAAZAAAAGQAAAAVAAAAYAAAAAAAAAAAAAAADwAAACADAAAAAAAAAAAAAAEAAACgMgAAVgcAAKr4//8BAAAAf39/AAEAAABkAAAAAAAAABQAAABAHwAAAAAAACYAAAAAAAAAwOD//wAAAAAmAAAAZAAAABYAAABMAAAAAAAAAAAAAAAEAAAAAAAAAAEAAADn5uYKAAAAACgAAAAoAAAAZAAAAGQAAAAAAAAAzMzMAAAAAABQAAAAUAAAAGQAAABkAAAAAAAAABcAAAAUAAAAAAAAAAAAAAD/fwAA/38AAAAAAAAJAAAABAAAAIPPcg0eAAAAaAAAAAAAAAAAAAAAAAAAAAAAAAAAAAAAECcAABAnAAAAAAAAAAAAAAAAAAAAAAAAAAAAAAAAAAAAAAAAAAAAABQAAAAAAAAAwMD/AAAAAABkAAAAMgAAAAAAAABkAAAAAAAAAH9/fwAKAAAAIgAAABgAAAAAAAAAAAAAAAAAAAAAAAAAAAAAAAAAAAAkAAAAJAAAAAAAAAAHAAAAAAAAAAAAAAAAAAAAAAAAAAAAAAAAAAAAf39/ACUAAABYAAAAAAAAAAAAAAAAAAAAAAAAAAAAAAAAAAAAAAAAAAAAAAAAAAAAAAAAAAAAAAA/AAAAAAAAAKCGAQAAAAAAAAAAAAAAAAAMAAAAAQAAAAAAAAAAAAAAAAAAAB8AAABUAAAAAAAABQAAAAEAAAAAAAAAAAAAAAAAAAAAAAAAAAAAAAAAAAAAAAAAAAAAAAJ/f38AAAAAA8zMzADAwP8Af39/AAAAAAAAAAAAAAAAAAAAAAAAAAAAIQAAABgAAAAUAAAAKAUAADsLAADYRQAAACYAABAAAAAmAAAACAAAAAAAAAAAAAAA"/>
+              </a:ext>
+            </a:extLst>
           </p:cNvSpPr>
           <p:nvPr>
             <p:ph idx="1"/>
@@ -713,40 +952,44 @@
           <a:bodyPr/>
           <a:lstStyle/>
           <a:p>
-            <a:pPr lvl="0"/>
-            <a:r>
-              <a:rPr lang="en-US" smtClean="0"/>
+            <a:pPr>
+              <a:defRPr lang="en-us"/>
+            </a:pPr>
+            <a:r>
               <a:t>Click to edit Master text styles</a:t>
             </a:r>
           </a:p>
           <a:p>
-            <a:pPr lvl="1"/>
-            <a:r>
-              <a:rPr lang="en-US" smtClean="0"/>
+            <a:pPr lvl="1">
+              <a:defRPr lang="en-us"/>
+            </a:pPr>
+            <a:r>
               <a:t>Second level</a:t>
             </a:r>
           </a:p>
           <a:p>
-            <a:pPr lvl="2"/>
-            <a:r>
-              <a:rPr lang="en-US" smtClean="0"/>
+            <a:pPr lvl="2">
+              <a:defRPr lang="en-us"/>
+            </a:pPr>
+            <a:r>
               <a:t>Third level</a:t>
             </a:r>
           </a:p>
           <a:p>
-            <a:pPr lvl="3"/>
-            <a:r>
-              <a:rPr lang="en-US" smtClean="0"/>
+            <a:pPr lvl="3">
+              <a:defRPr lang="en-us"/>
+            </a:pPr>
+            <a:r>
               <a:t>Fourth level</a:t>
             </a:r>
           </a:p>
           <a:p>
-            <a:pPr lvl="4"/>
-            <a:r>
-              <a:rPr lang="en-US" smtClean="0"/>
+            <a:pPr lvl="4">
+              <a:defRPr lang="en-us"/>
+            </a:pPr>
+            <a:r>
               <a:t>Fifth level</a:t>
             </a:r>
-            <a:endParaRPr lang="en-US"/>
           </a:p>
         </p:txBody>
       </p:sp>
@@ -754,7 +997,12 @@
         <p:nvSpPr>
           <p:cNvPr id="4" name="Date Placeholder 3"/>
           <p:cNvSpPr>
-            <a:spLocks noGrp="1"/>
+            <a:spLocks noGrp="1" noChangeArrowheads="1"/>
+            <a:extLst>
+              <a:ext uri="smNativeData">
+                <pr:smNativeData xmlns:pr="smNativeData" xmlns="smNativeData" val="SMDATA_15_+nJ9aRMAAAAlAAAAZAAAAA0AAAAAkAAAAEgAAACQAAAASAAAAAAAAAABAAAAAAAAAAEAAABQAAAAAAAAAAAA4D8AAAAAAADgPwAAAAAAAOA/AAAAAAAA4D8AAAAAAADgPwAAAAAAAOA/AAAAAAAA4D8AAAAAAADgPwAAAAAAAOA/AAAAAAAA4D8CAAAAjAAAAAAAAAAAAAAAW5vVDP///wgAAAAAAAAAAAAAAAAAAAAAAAAAAAAAAAAAAAAAZAAAAAEAAABAAAAAAAAAAAAAAAAAAAAAAAAAAAAAAAAAAAAAAAAAAAAAAAAAAAAAAAAAAAAAAAAAAAAAAAAAAAAAAAAAAAAAAAAAAAAAAAAAAAAAAAAAAAAAAAAAAAAAFAAAADwAAAAAAAAAAAAAAAAAAAkUAAAAAQAAABQAAAAUAAAAFAAAAAEAAAAAAAAAZAAAAGQAAAAAAAAAZAAAAGQAAAAVAAAAYAAAAAAAAAAAAAAADwAAACADAAAAAAAAAAAAAAEAAACgMgAAVgcAAKr4//8BAAAAf39/AAEAAABkAAAAAAAAABQAAABAHwAAAAAAACYAAAAAAAAAwOD//wAAAAAmAAAAZAAAABYAAABMAAAAAAAAAAAAAAAEAAAAAAAAAAEAAADn5uYKAAAAACgAAAAoAAAAZAAAAGQAAAAAAAAAzMzMAAAAAABQAAAAUAAAAGQAAABkAAAAAAAAABcAAAAUAAAAAAAAAAAAAAD/fwAA/38AAAAAAAAJAAAABAAAAJgGAAAeAAAAaAAAAAAAAAAAAAAAAAAAAAAAAAAAAAAAECcAABAnAAAAAAAAAAAAAAAAAAAAAAAAAAAAAAAAAAAAAAAAAAAAABQAAAAAAAAAwMD/AAAAAABkAAAAMgAAAAAAAABkAAAAAAAAAH9/fwAKAAAAIgAAABgAAAAAAAAAAAAAAAAAAAAAAAAAAAAAAAAAAAAkAAAAJAAAAAAAAAAHAAAAAAAAAAAAAAAAAAAAAAAAAAAAAAAAAAAAf39/ACUAAABYAAAAAAAAAAAAAAAAAAAAAAAAAAAAAAAAAAAAAAAAAAAAAAAAAAAAAAAAAAAAAAA/AAAAAAAAAKCGAQAAAAAAAAAAAAAAAAAMAAAAAQAAAAAAAAAAAAAAAAAAAB8AAABUAAAAAAAABQAAAAEAAAAAAAAAAAAAAAAAAAAAAAAAAAAAAAAAAAAAAAAAAAAAAAJ/f38AAAAAA8zMzADAwP8Af39/AAAAAAAAAAAAAAAAAAAAAAAAAAAAIQAAABgAAAAUAAAAKAUAABonAAAIFgAAWSkAABAAAAAmAAAACAAAAAAAAAAAAAAA"/>
+              </a:ext>
+            </a:extLst>
           </p:cNvSpPr>
           <p:nvPr>
             <p:ph type="dt" sz="half" idx="10"/>
@@ -765,11 +1013,12 @@
           <a:bodyPr/>
           <a:lstStyle/>
           <a:p>
-            <a:fld id="{7DE6D954-9D5F-4B54-AC5F-2CADB10B85DE}" type="datetimeFigureOut">
-              <a:rPr lang="en-US" smtClean="0"/>
-              <a:t>1/12/2026</a:t>
+            <a:pPr>
+              <a:defRPr lang="en-us"/>
+            </a:pPr>
+            <a:fld id="{3AF998E7-A9D7-AC6E-9941-5F3BD60F6F0A}" type="datetime1">
+              <a:t/>
             </a:fld>
-            <a:endParaRPr lang="en-US"/>
           </a:p>
         </p:txBody>
       </p:sp>
@@ -777,7 +1026,12 @@
         <p:nvSpPr>
           <p:cNvPr id="5" name="Footer Placeholder 4"/>
           <p:cNvSpPr>
-            <a:spLocks noGrp="1"/>
+            <a:spLocks noGrp="1" noChangeArrowheads="1"/>
+            <a:extLst>
+              <a:ext uri="smNativeData">
+                <pr:smNativeData xmlns:pr="smNativeData" xmlns="smNativeData" val="SMDATA_15_+nJ9aRMAAAAlAAAAZAAAAA0AAAAAkAAAAEgAAACQAAAASAAAAAAAAAABAAAAAAAAAAEAAABQAAAAAAAAAAAA4D8AAAAAAADgPwAAAAAAAOA/AAAAAAAA4D8AAAAAAADgPwAAAAAAAOA/AAAAAAAA4D8AAAAAAADgPwAAAAAAAOA/AAAAAAAA4D8CAAAAjAAAAAAAAAAAAAAAW5vVDP///wgAAAAAAAAAAAAAAAAAAAAAAAAAAAAAAAAAAAAAZAAAAAEAAABAAAAAAAAAAAAAAAAAAAAAAAAAAAAAAAAAAAAAAAAAAAAAAAAAAAAAAAAAAAAAAAAAAAAAAAAAAAAAAAAAAAAAAAAAAAAAAAAAAAAAAAAAAAAAAAAAAAAAFAAAADwAAAAAAAAAAAAAAAAAAAkUAAAAAQAAABQAAAAUAAAAFAAAAAEAAAAAAAAAZAAAAGQAAAAAAAAAZAAAAGQAAAAVAAAAYAAAAAAAAAAAAAAADwAAACADAAAAAAAAAAAAAAEAAACgMgAAVgcAAKr4//8BAAAAf39/AAEAAABkAAAAAAAAABQAAABAHwAAAAAAACYAAAAAAAAAwOD//wAAAAAmAAAAZAAAABYAAABMAAAAAAAAAAAAAAAEAAAAAAAAAAEAAADn5uYKAAAAACgAAAAoAAAAZAAAAGQAAAAAAAAAzMzMAAAAAABQAAAAUAAAAGQAAABkAAAAAAAAABcAAAAUAAAAAAAAAAAAAAD/fwAA/38AAAAAAAAJAAAABAAAAJZgtQ0eAAAAaAAAAAAAAAAAAAAAAAAAAAAAAAAAAAAAECcAABAnAAAAAAAAAAAAAAAAAAAAAAAAAAAAAAAAAAAAAAAAAAAAABQAAAAAAAAAwMD/AAAAAABkAAAAMgAAAAAAAABkAAAAAAAAAH9/fwAKAAAAIgAAABgAAAAAAAAAAAAAAAAAAAAAAAAAAAAAAAAAAAAkAAAAJAAAAAAAAAAHAAAAAAAAAAAAAAAAAAAAAAAAAAAAAAAAAAAAf39/ACUAAABYAAAAAAAAAAAAAAAAAAAAAAAAAAAAAAAAAAAAAAAAAAAAAAAAAAAAAAAAAAAAAAA/AAAAAAAAAKCGAQAAAAAAAAAAAAAAAAAMAAAAAQAAAAAAAAAAAAAAAAAAAB8AAABUAAAAAAAABQAAAAEAAAAAAAAAAAAAAAAAAAAAAAAAAAAAAAAAAAAAAAAAAAAAAAJ/f38AAAAAA8zMzADAwP8Af39/AAAAAAAAAAAAAAAAAAAAAAAAAAAAIQAAABgAAAAUAAAA2BgAABonAAAoMgAAWSkAABAAAAAmAAAACAAAAAAAAAAAAAAA"/>
+              </a:ext>
+            </a:extLst>
           </p:cNvSpPr>
           <p:nvPr>
             <p:ph type="ftr" sz="quarter" idx="11"/>
@@ -788,7 +1042,9 @@
           <a:bodyPr/>
           <a:lstStyle/>
           <a:p>
-            <a:endParaRPr lang="en-US"/>
+            <a:pPr>
+              <a:defRPr lang="en-us"/>
+            </a:pPr>
           </a:p>
         </p:txBody>
       </p:sp>
@@ -796,7 +1052,12 @@
         <p:nvSpPr>
           <p:cNvPr id="6" name="Slide Number Placeholder 5"/>
           <p:cNvSpPr>
-            <a:spLocks noGrp="1"/>
+            <a:spLocks noGrp="1" noChangeArrowheads="1"/>
+            <a:extLst>
+              <a:ext uri="smNativeData">
+                <pr:smNativeData xmlns:pr="smNativeData" xmlns="smNativeData" val="SMDATA_15_+nJ9aRMAAAAlAAAAZAAAAA0AAAAAkAAAAEgAAACQAAAASAAAAAAAAAABAAAAAAAAAAEAAABQAAAAAAAAAAAA4D8AAAAAAADgPwAAAAAAAOA/AAAAAAAA4D8AAAAAAADgPwAAAAAAAOA/AAAAAAAA4D8AAAAAAADgPwAAAAAAAOA/AAAAAAAA4D8CAAAAjAAAAAAAAAAAAAAAW5vVDP///wgAAAAAAAAAAAAAAAAAAAAAAAAAAAAAAAAAAAAAZAAAAAEAAABAAAAAAAAAAAAAAAAAAAAAAAAAAAAAAAAAAAAAAAAAAAAAAAAAAAAAAAAAAAAAAAAAAAAAAAAAAAAAAAAAAAAAAAAAAAAAAAAAAAAAAAAAAAAAAAAAAAAAFAAAADwAAAAAAAAAAAAAAAAAAAkUAAAAAQAAABQAAAAUAAAAFAAAAAEAAAAAAAAAZAAAAGQAAAAAAAAAZAAAAGQAAAAVAAAAYAAAAAAAAAAAAAAADwAAACADAAAAAAAAAAAAAAEAAACgMgAAVgcAAKr4//8BAAAAf39/AAEAAABkAAAAAAAAABQAAABAHwAAAAAAACYAAAAAAAAAwOD//wAAAAAmAAAAZAAAABYAAABMAAAAAAAAAAAAAAAEAAAAAAAAAAEAAADn5uYKAAAAACgAAAAoAAAAZAAAAGQAAAAAAAAAzMzMAAAAAABQAAAAUAAAAGQAAABkAAAAAAAAABcAAAAUAAAAAAAAAAAAAAD/fwAA/38AAAAAAAAJAAAABAAAANjYGQIeAAAAaAAAAAAAAAAAAAAAAAAAAAAAAAAAAAAAECcAABAnAAAAAAAAAAAAAAAAAAAAAAAAAAAAAAAAAAAAAAAAAAAAABQAAAAAAAAAwMD/AAAAAABkAAAAMgAAAAAAAABkAAAAAAAAAH9/fwAKAAAAIgAAABgAAAAAAAAAAAAAAAAAAAAAAAAAAAAAAAAAAAAkAAAAJAAAAAAAAAAHAAAAAAAAAAAAAAAAAAAAAAAAAAAAAAAAAAAAf39/ACUAAABYAAAAAAAAAAAAAAAAAAAAAAAAAAAAAAAAAAAAAAAAAAAAAAAAAAAAAAAAAAAAAAA/AAAAAAAAAKCGAQAAAAAAAAAAAAAAAAAMAAAAAQAAAAAAAAAAAAAAAAAAAB8AAABUAAAAAAAABQAAAAEAAAAAAAAAAAAAAAAAAAAAAAAAAAAAAAAAAAAAAAAAAAAAAAJ/f38AAAAAA8zMzADAwP8Af39/AAAAAAAAAAAAAAAAAAAAAAAAAAAAIQAAABgAAAAUAAAA+DQAABonAADYRQAAWSkAABAAAAAmAAAACAAAAAAAAAAAAAAA"/>
+              </a:ext>
+            </a:extLst>
           </p:cNvSpPr>
           <p:nvPr>
             <p:ph type="sldNum" sz="quarter" idx="12"/>
@@ -807,29 +1068,26 @@
           <a:bodyPr/>
           <a:lstStyle/>
           <a:p>
-            <a:fld id="{58AA844A-00A1-4A5D-A246-C5B817417ED4}" type="slidenum">
-              <a:rPr lang="en-US" smtClean="0"/>
-              <a:t>‹#›</a:t>
+            <a:pPr>
+              <a:defRPr lang="en-us"/>
+            </a:pPr>
+            <a:fld id="{3AF9E04E-00D7-AC16-9941-F643AE0F6FA3}" type="slidenum">
+              <a:t/>
             </a:fld>
-            <a:endParaRPr lang="en-US"/>
           </a:p>
         </p:txBody>
       </p:sp>
     </p:spTree>
-    <p:extLst>
-      <p:ext uri="{BB962C8B-B14F-4D97-AF65-F5344CB8AC3E}">
-        <p14:creationId xmlns:p14="http://schemas.microsoft.com/office/powerpoint/2010/main" val="2939342277"/>
-      </p:ext>
-    </p:extLst>
   </p:cSld>
   <p:clrMapOvr>
     <a:masterClrMapping/>
   </p:clrMapOvr>
+  <p:hf hdr="0" ftr="0"/>
 </p:sldLayout>
 </file>
 
 <file path=ppt/slideLayouts/slideLayout3.xml><?xml version="1.0" encoding="utf-8"?>
-<p:sldLayout xmlns:a="http://schemas.openxmlformats.org/drawingml/2006/main" xmlns:r="http://schemas.openxmlformats.org/officeDocument/2006/relationships" xmlns:p="http://schemas.openxmlformats.org/presentationml/2006/main" type="secHead" preserve="1">
+<p:sldLayout xmlns:p="http://schemas.openxmlformats.org/presentationml/2006/main" xmlns:mc="http://schemas.openxmlformats.org/markup-compatibility/2006" xmlns:p14="http://schemas.microsoft.com/office/powerpoint/2010/main" xmlns:p15="http://schemas.microsoft.com/office/powerpoint/2012/main" xmlns:r="http://schemas.openxmlformats.org/officeDocument/2006/relationships" xmlns:a="http://schemas.openxmlformats.org/drawingml/2006/main" type="secHead" preserve="1">
   <p:cSld name="Section Header">
     <p:spTree>
       <p:nvGrpSpPr>
@@ -849,7 +1107,12 @@
         <p:nvSpPr>
           <p:cNvPr id="2" name="Title 1"/>
           <p:cNvSpPr>
-            <a:spLocks noGrp="1"/>
+            <a:spLocks noGrp="1" noChangeArrowheads="1"/>
+            <a:extLst>
+              <a:ext uri="smNativeData">
+                <pr:smNativeData xmlns:pr="smNativeData" xmlns="smNativeData" val="SMDATA_15_+nJ9aRMAAAAlAAAAZAAAAA0AAAAAkAAAAEgAAACQAAAASAAAAAAAAAACAAAAAAAAAAEAAABQAAAAAAAAAAAA4D8AAAAAAADgPwAAAAAAAOA/AAAAAAAA4D8AAAAAAADgPwAAAAAAAOA/AAAAAAAA4D8AAAAAAADgPwAAAAAAAOA/AAAAAAAA4D8CAAAAjAAAAAAAAAAAAAAAW5vVDP///wgAAAAAAAAAAAAAAAAAAAAAAAAAAAAAAAAAAAAAZAAAAAEAAABAAAAAAAAAAAAAAAAAAAAAAAAAAAAAAAAAAAAAAAAAAAAAAAAAAAAAAAAAAAAAAAAAAAAAAAAAAAAAAAAAAAAAAAAAAAAAAAAAAAAAAAAAAAAAAAAAAAAAFAAAADwAAAAAAAAAAAAAAAAAAAkUAAAAAQAAABQAAAAUAAAAFAAAAAEAAAAAAAAAZAAAAGQAAAAAAAAAZAAAAGQAAAAVAAAAYAAAAAAAAAAAAAAADwAAACADAAAAAAAAAAAAAAEAAACgMgAAVgcAAKr4//8BAAAAf39/AAEAAABkAAAAAAAAABQAAABAHwAAAAAAACYAAAAAAAAAwOD//wAAAAAmAAAAZAAAABYAAABMAAAAAAAAAAAAAAAEAAAAAAAAAAEAAADn5uYKAAAAACgAAAAoAAAAZAAAAGQAAAAAAAAAzMzMAAAAAABQAAAAUAAAAGQAAABkAAAAAAAAABcAAAAUAAAAAAAAAAAAAAD/fwAA/38AAAAAAAAJAAAABAAAAAAAAAAeAAAAaAAAAAAAAAAAAAAAAAAAAAAAAAAAAAAAECcAABAnAAAAAAAAAAAAAAAAAAAAAAAAAAAAAAAAAAAAAAAAAAAAABQAAAAAAAAAwMD/AAAAAABkAAAAMgAAAAAAAABkAAAAAAAAAH9/fwAKAAAAIgAAABgAAAAAAAAAAAAAAAAAAAAAAAAAAAAAAAAAAAAkAAAAJAAAAAAAAAAHAAAAAAAAAAAAAAAAAAAAAAAAAAAAAAAAAAAAf39/ACUAAABYAAAAAAAAAAAAAAAAAAAAAAAAAAAAAAAAAAAAAAAAAAAAAAAAAAAAAAAAAAAAAAA/AAAAAAAAAKCGAQAAAAAAAAAAAAAAAAAMAAAAAQAAAAAAAAAAAAAAAAAAAB8AAABUAAAAAAAABQAAAAEAAAAAAAAAAAAAAAAAAAAAAAAAAAAAAAAAAAAAAAAAAAAAAAJ/f38AAAAAA8zMzADAwP8Af39/AAAAAAAAAAAAAAAAAAAAAAAAAAAAIQAAABgAAAAUAAAAHgUAAIUKAADORQAAERwAABAAAAAmAAAACAAAAIGAAAAAAAAA"/>
+              </a:ext>
+            </a:extLst>
           </p:cNvSpPr>
           <p:nvPr>
             <p:ph type="title"/>
@@ -857,23 +1120,52 @@
         </p:nvSpPr>
         <p:spPr>
           <a:xfrm>
-            <a:off x="831850" y="1709738"/>
-            <a:ext cx="10515600" cy="2852737"/>
+            <a:off x="831850" y="1710055"/>
+            <a:ext cx="10515600" cy="2852420"/>
           </a:xfrm>
         </p:spPr>
         <p:txBody>
-          <a:bodyPr anchor="b"/>
+          <a:bodyPr vert="horz" wrap="square" lIns="91440" tIns="45720" rIns="91440" bIns="45720" numCol="1" spcCol="215900" anchor="b">
+            <a:prstTxWarp prst="textNoShape">
+              <a:avLst/>
+            </a:prstTxWarp>
+          </a:bodyPr>
           <a:lstStyle>
             <a:lvl1pPr>
-              <a:defRPr sz="6000"/>
+              <a:defRPr lang="en-us" sz="6000" cap="none"/>
             </a:lvl1pPr>
+            <a:lvl2pPr>
+              <a:defRPr lang="en-us"/>
+            </a:lvl2pPr>
+            <a:lvl3pPr>
+              <a:defRPr lang="en-us"/>
+            </a:lvl3pPr>
+            <a:lvl4pPr>
+              <a:defRPr lang="en-us"/>
+            </a:lvl4pPr>
+            <a:lvl5pPr>
+              <a:defRPr lang="en-us"/>
+            </a:lvl5pPr>
+            <a:lvl6pPr>
+              <a:defRPr lang="en-us"/>
+            </a:lvl6pPr>
+            <a:lvl7pPr>
+              <a:defRPr lang="en-us"/>
+            </a:lvl7pPr>
+            <a:lvl8pPr>
+              <a:defRPr lang="en-us"/>
+            </a:lvl8pPr>
+            <a:lvl9pPr>
+              <a:defRPr lang="en-us"/>
+            </a:lvl9pPr>
           </a:lstStyle>
           <a:p>
-            <a:r>
-              <a:rPr lang="en-US" smtClean="0"/>
+            <a:pPr>
+              <a:defRPr lang="en-us"/>
+            </a:pPr>
+            <a:r>
               <a:t>Click to edit Master title style</a:t>
             </a:r>
-            <a:endParaRPr lang="en-US"/>
           </a:p>
         </p:txBody>
       </p:sp>
@@ -881,16 +1173,21 @@
         <p:nvSpPr>
           <p:cNvPr id="3" name="Text Placeholder 2"/>
           <p:cNvSpPr>
-            <a:spLocks noGrp="1"/>
-          </p:cNvSpPr>
-          <p:nvPr>
-            <p:ph type="body" idx="1"/>
+            <a:spLocks noGrp="1" noChangeArrowheads="1"/>
+            <a:extLst>
+              <a:ext uri="smNativeData">
+                <pr:smNativeData xmlns:pr="smNativeData" xmlns="smNativeData" val="SMDATA_15_+nJ9aRMAAAAlAAAAZAAAAA0AAAAAkAAAAEgAAACQAAAASAAAAAAAAAAAAAAAAAAAAAEAAABQAAAAAAAAAAAA4D8AAAAAAADgPwAAAAAAAOA/AAAAAAAA4D8AAAAAAADgPwAAAAAAAOA/AAAAAAAA4D8AAAAAAADgPwAAAAAAAOA/AAAAAAAA4D8CAAAAjAAAAAAAAAAAAAAAW5vVDP///wgAAAAAAAAAAAAAAAAAAAAAAAAAAAAAAAAAAAAAZAAAAAEAAABAAAAAAAAAAAAAAAAAAAAAAAAAAAAAAAAAAAAAAAAAAAAAAAAAAAAAAAAAAAAAAAAAAAAAAAAAAAAAAAAAAAAAAAAAAAAAAAAAAAAAAAAAAAAAAAAAAAAAFAAAADwAAAAAAAAAAAAAAAAAAAkUAAAAAQAAABQAAAAUAAAAFAAAAAEAAAAAAAAAZAAAAGQAAAAAAAAAZAAAAGQAAAAVAAAAYAAAAAAAAAAAAAAADwAAACADAAAAAAAAAAAAAAEAAACgMgAAVgcAAKr4//8BAAAAf39/AAEAAABkAAAAAAAAABQAAABAHwAAAAAAACYAAAAAAAAAwOD//wAAAAAmAAAAZAAAABYAAABMAAAAAAAAAAAAAAAEAAAAAAAAAAEAAADn5uYKAAAAACgAAAAoAAAAZAAAAGQAAAAAAAAAzMzMAAAAAABQAAAAUAAAAGQAAABkAAAAAAAAABcAAAAUAAAAAAAAAAAAAAD/fwAA/38AAAAAAAAJAAAABAAAAGButQ0eAAAAaAAAAAAAAAAAAAAAAAAAAAAAAAAAAAAAECcAABAnAAAAAAAAAAAAAAAAAAAAAAAAAAAAAAAAAAAAAAAAAAAAABQAAAAAAAAAwMD/AAAAAABkAAAAMgAAAAAAAABkAAAAAAAAAH9/fwAKAAAAIgAAABgAAAAAAAAAAAAAAAAAAAAAAAAAAAAAAAAAAAAkAAAAJAAAAAAAAAAHAAAAAAAAAAAAAAAAAAAAAAAAAAAAAAAAAAAAf39/ACUAAABYAAAAAAAAAAAAAAAAAAAAAAAAAAAAAAAAAAAAAAAAAAAAAAAAAAAAAAAAAAAAAAA/AAAAAAAAAKCGAQAAAAAAAAAAAAAAAAAMAAAAAQAAAAAAAAAAAAAAAAAAAB8AAABUAAAAAAAABQAAAAEAAAAAAAAAAAAAAAAAAAAAAAAAAAAAAAAAAAAAAAAAAAAAAAJ/f38AAAAAA8zMzADAwP8Af39/AAAAAAAAAAAAAAAAAAAAAAAAAAAAIQAAABgAAAAUAAAAHgUAADwcAADORQAAdiUAABAAAAAmAAAACAAAAAGAAAAAAAAA"/>
+              </a:ext>
+            </a:extLst>
+          </p:cNvSpPr>
+          <p:nvPr>
+            <p:ph idx="1"/>
           </p:nvPr>
         </p:nvSpPr>
         <p:spPr>
           <a:xfrm>
-            <a:off x="831850" y="4589463"/>
-            <a:ext cx="10515600" cy="1500187"/>
+            <a:off x="831850" y="4589780"/>
+            <a:ext cx="10515600" cy="1499870"/>
           </a:xfrm>
         </p:spPr>
         <p:txBody>
@@ -898,99 +1195,82 @@
           <a:lstStyle>
             <a:lvl1pPr marL="0" indent="0">
               <a:buNone/>
-              <a:defRPr sz="2400">
+              <a:defRPr lang="en-us" sz="2400" cap="none">
                 <a:solidFill>
-                  <a:schemeClr val="tx1">
-                    <a:tint val="75000"/>
-                  </a:schemeClr>
+                  <a:srgbClr val="8C8C8C"/>
                 </a:solidFill>
               </a:defRPr>
             </a:lvl1pPr>
             <a:lvl2pPr marL="457200" indent="0">
               <a:buNone/>
-              <a:defRPr sz="2000">
+              <a:defRPr lang="en-us" sz="2000" cap="none">
                 <a:solidFill>
-                  <a:schemeClr val="tx1">
-                    <a:tint val="75000"/>
-                  </a:schemeClr>
+                  <a:srgbClr val="8C8C8C"/>
                 </a:solidFill>
               </a:defRPr>
             </a:lvl2pPr>
             <a:lvl3pPr marL="914400" indent="0">
               <a:buNone/>
-              <a:defRPr sz="1800">
+              <a:defRPr lang="en-us" sz="1800" cap="none">
                 <a:solidFill>
-                  <a:schemeClr val="tx1">
-                    <a:tint val="75000"/>
-                  </a:schemeClr>
+                  <a:srgbClr val="8C8C8C"/>
                 </a:solidFill>
               </a:defRPr>
             </a:lvl3pPr>
             <a:lvl4pPr marL="1371600" indent="0">
               <a:buNone/>
-              <a:defRPr sz="1600">
+              <a:defRPr lang="en-us" sz="1600" cap="none">
                 <a:solidFill>
-                  <a:schemeClr val="tx1">
-                    <a:tint val="75000"/>
-                  </a:schemeClr>
+                  <a:srgbClr val="8C8C8C"/>
                 </a:solidFill>
               </a:defRPr>
             </a:lvl4pPr>
             <a:lvl5pPr marL="1828800" indent="0">
               <a:buNone/>
-              <a:defRPr sz="1600">
+              <a:defRPr lang="en-us" sz="1600" cap="none">
                 <a:solidFill>
-                  <a:schemeClr val="tx1">
-                    <a:tint val="75000"/>
-                  </a:schemeClr>
+                  <a:srgbClr val="8C8C8C"/>
                 </a:solidFill>
               </a:defRPr>
             </a:lvl5pPr>
             <a:lvl6pPr marL="2286000" indent="0">
               <a:buNone/>
-              <a:defRPr sz="1600">
+              <a:defRPr lang="en-us" sz="1600" cap="none">
                 <a:solidFill>
-                  <a:schemeClr val="tx1">
-                    <a:tint val="75000"/>
-                  </a:schemeClr>
+                  <a:srgbClr val="8C8C8C"/>
                 </a:solidFill>
               </a:defRPr>
             </a:lvl6pPr>
             <a:lvl7pPr marL="2743200" indent="0">
               <a:buNone/>
-              <a:defRPr sz="1600">
+              <a:defRPr lang="en-us" sz="1600" cap="none">
                 <a:solidFill>
-                  <a:schemeClr val="tx1">
-                    <a:tint val="75000"/>
-                  </a:schemeClr>
+                  <a:srgbClr val="8C8C8C"/>
                 </a:solidFill>
               </a:defRPr>
             </a:lvl7pPr>
             <a:lvl8pPr marL="3200400" indent="0">
               <a:buNone/>
-              <a:defRPr sz="1600">
+              <a:defRPr lang="en-us" sz="1600" cap="none">
                 <a:solidFill>
-                  <a:schemeClr val="tx1">
-                    <a:tint val="75000"/>
-                  </a:schemeClr>
+                  <a:srgbClr val="8C8C8C"/>
                 </a:solidFill>
               </a:defRPr>
             </a:lvl8pPr>
             <a:lvl9pPr marL="3657600" indent="0">
               <a:buNone/>
-              <a:defRPr sz="1600">
+              <a:defRPr lang="en-us" sz="1600" cap="none">
                 <a:solidFill>
-                  <a:schemeClr val="tx1">
-                    <a:tint val="75000"/>
-                  </a:schemeClr>
+                  <a:srgbClr val="8C8C8C"/>
                 </a:solidFill>
               </a:defRPr>
             </a:lvl9pPr>
           </a:lstStyle>
           <a:p>
-            <a:pPr lvl="0"/>
-            <a:r>
-              <a:rPr lang="en-US" smtClean="0"/>
+            <a:pPr>
+              <a:defRPr lang="en-us"/>
+            </a:pPr>
+            <a:r>
               <a:t>Click to edit Master text styles</a:t>
             </a:r>
           </a:p>
@@ -1000,7 +1280,12 @@
         <p:nvSpPr>
           <p:cNvPr id="4" name="Date Placeholder 3"/>
           <p:cNvSpPr>
-            <a:spLocks noGrp="1"/>
+            <a:spLocks noGrp="1" noChangeArrowheads="1"/>
+            <a:extLst>
+              <a:ext uri="smNativeData">
+                <pr:smNativeData xmlns:pr="smNativeData" xmlns="smNativeData" val="SMDATA_15_+nJ9aRMAAAAlAAAAZAAAAA0AAAAAkAAAAEgAAACQAAAASAAAAAAAAAABAAAAAAAAAAEAAABQAAAAAAAAAAAA4D8AAAAAAADgPwAAAAAAAOA/AAAAAAAA4D8AAAAAAADgPwAAAAAAAOA/AAAAAAAA4D8AAAAAAADgPwAAAAAAAOA/AAAAAAAA4D8CAAAAjAAAAAAAAAAAAAAAW5vVDP///wgAAAAAAAAAAAAAAAAAAAAAAAAAAAAAAAAAAAAAZAAAAAEAAABAAAAAAAAAAAAAAAAAAAAAAAAAAAAAAAAAAAAAAAAAAAAAAAAAAAAAAAAAAAAAAAAAAAAAAAAAAAAAAAAAAAAAAAAAAAAAAAAAAAAAAAAAAAAAAAAAAAAAFAAAADwAAAAAAAAAAAAAAAAAAAkUAAAAAQAAABQAAAAUAAAAFAAAAAEAAAAAAAAAZAAAAGQAAAAAAAAAZAAAAGQAAAAVAAAAYAAAAAAAAAAAAAAADwAAACADAAAAAAAAAAAAAAEAAACgMgAAVgcAAKr4//8BAAAAf39/AAEAAABkAAAAAAAAABQAAABAHwAAAAAAACYAAAAAAAAAwOD//wAAAAAmAAAAZAAAABYAAABMAAAAAAAAAAAAAAAEAAAAAAAAAAEAAADn5uYKAAAAACgAAAAoAAAAZAAAAGQAAAAAAAAAzMzMAAAAAABQAAAAUAAAAGQAAABkAAAAAAAAABcAAAAUAAAAAAAAAAAAAAD/fwAA/38AAAAAAAAJAAAABAAAAAAAAAAeAAAAaAAAAAAAAAAAAAAAAAAAAAAAAAAAAAAAECcAABAnAAAAAAAAAAAAAAAAAAAAAAAAAAAAAAAAAAAAAAAAAAAAABQAAAAAAAAAwMD/AAAAAABkAAAAMgAAAAAAAABkAAAAAAAAAH9/fwAKAAAAIgAAABgAAAAAAAAAAAAAAAAAAAAAAAAAAAAAAAAAAAAkAAAAJAAAAAAAAAAHAAAAAAAAAAAAAAAAAAAAAAAAAAAAAAAAAAAAf39/ACUAAABYAAAAAAAAAAAAAAAAAAAAAAAAAAAAAAAAAAAAAAAAAAAAAAAAAAAAAAAAAAAAAAA/AAAAAAAAAKCGAQAAAAAAAAAAAAAAAAAMAAAAAQAAAAAAAAAAAAAAAAAAAB8AAABUAAAAAAAABQAAAAEAAAAAAAAAAAAAAAAAAAAAAAAAAAAAAAAAAAAAAAAAAAAAAAJ/f38AAAAAA8zMzADAwP8Af39/AAAAAAAAAAAAAAAAAAAAAAAAAAAAIQAAABgAAAAUAAAAKAUAABonAAAIFgAAWSkAABAAAAAmAAAACAAAAAAAAAAAAAAA"/>
+              </a:ext>
+            </a:extLst>
           </p:cNvSpPr>
           <p:nvPr>
             <p:ph type="dt" sz="half" idx="10"/>
@@ -1011,11 +1296,12 @@
           <a:bodyPr/>
           <a:lstStyle/>
           <a:p>
-            <a:fld id="{7DE6D954-9D5F-4B54-AC5F-2CADB10B85DE}" type="datetimeFigureOut">
-              <a:rPr lang="en-US" smtClean="0"/>
+            <a:pPr>
+              <a:defRPr lang="en-us"/>
+            </a:pPr>
+            <a:fld id="{3AF9EBE5-ABD7-AC1D-9941-5D48A50F6F08}" type="datetime1">
               <a:t>1/12/2026</a:t>
             </a:fld>
-            <a:endParaRPr lang="en-US"/>
           </a:p>
         </p:txBody>
       </p:sp>
@@ -1023,7 +1309,12 @@
         <p:nvSpPr>
           <p:cNvPr id="5" name="Footer Placeholder 4"/>
           <p:cNvSpPr>
-            <a:spLocks noGrp="1"/>
+            <a:spLocks noGrp="1" noChangeArrowheads="1"/>
+            <a:extLst>
+              <a:ext uri="smNativeData">
+                <pr:smNativeData xmlns:pr="smNativeData" xmlns="smNativeData" val="SMDATA_15_+nJ9aRMAAAAlAAAAZAAAAA0AAAAAkAAAAEgAAACQAAAASAAAAAAAAAABAAAAAAAAAAEAAABQAAAAAAAAAAAA4D8AAAAAAADgPwAAAAAAAOA/AAAAAAAA4D8AAAAAAADgPwAAAAAAAOA/AAAAAAAA4D8AAAAAAADgPwAAAAAAAOA/AAAAAAAA4D8CAAAAjAAAAAAAAAAAAAAAW5vVDP///wgAAAAAAAAAAAAAAAAAAAAAAAAAAAAAAAAAAAAAZAAAAAEAAABAAAAAAAAAAAAAAAAAAAAAAAAAAAAAAAAAAAAAAAAAAAAAAAAAAAAAAAAAAAAAAAAAAAAAAAAAAAAAAAAAAAAAAAAAAAAAAAAAAAAAAAAAAAAAAAAAAAAAFAAAADwAAAAAAAAAAAAAAAAAAAkUAAAAAQAAABQAAAAUAAAAFAAAAAEAAAAAAAAAZAAAAGQAAAAAAAAAZAAAAGQAAAAVAAAAYAAAAAAAAAAAAAAADwAAACADAAAAAAAAAAAAAAEAAACgMgAAVgcAAKr4//8BAAAAf39/AAEAAABkAAAAAAAAABQAAABAHwAAAAAAACYAAAAAAAAAwOD//wAAAAAmAAAAZAAAABYAAABMAAAAAAAAAAAAAAAEAAAAAAAAAAEAAADn5uYKAAAAACgAAAAoAAAAZAAAAGQAAAAAAAAAzMzMAAAAAABQAAAAUAAAAGQAAABkAAAAAAAAABcAAAAUAAAAAAAAAAAAAAD/fwAA/38AAAAAAAAJAAAABAAAAAEAAAAeAAAAaAAAAAAAAAAAAAAAAAAAAAAAAAAAAAAAECcAABAnAAAAAAAAAAAAAAAAAAAAAAAAAAAAAAAAAAAAAAAAAAAAABQAAAAAAAAAwMD/AAAAAABkAAAAMgAAAAAAAABkAAAAAAAAAH9/fwAKAAAAIgAAABgAAAAAAAAAAAAAAAAAAAAAAAAAAAAAAAAAAAAkAAAAJAAAAAAAAAAHAAAAAAAAAAAAAAAAAAAAAAAAAAAAAAAAAAAAf39/ACUAAABYAAAAAAAAAAAAAAAAAAAAAAAAAAAAAAAAAAAAAAAAAAAAAAAAAAAAAAAAAAAAAAA/AAAAAAAAAKCGAQAAAAAAAAAAAAAAAAAMAAAAAQAAAAAAAAAAAAAAAAAAAB8AAABUAAAAAAAABQAAAAEAAAAAAAAAAAAAAAAAAAAAAAAAAAAAAAAAAAAAAAAAAAAAAAJ/f38AAAAAA8zMzADAwP8Af39/AAAAAAAAAAAAAAAAAAAAAAAAAAAAIQAAABgAAAAUAAAA2BgAABonAAAoMgAAWSkAABAAAAAmAAAACAAAAAAAAAAAAAAA"/>
+              </a:ext>
+            </a:extLst>
           </p:cNvSpPr>
           <p:nvPr>
             <p:ph type="ftr" sz="quarter" idx="11"/>
@@ -1034,7 +1325,9 @@
           <a:bodyPr/>
           <a:lstStyle/>
           <a:p>
-            <a:endParaRPr lang="en-US"/>
+            <a:pPr>
+              <a:defRPr lang="en-us"/>
+            </a:pPr>
           </a:p>
         </p:txBody>
       </p:sp>
@@ -1042,7 +1335,12 @@
         <p:nvSpPr>
           <p:cNvPr id="6" name="Slide Number Placeholder 5"/>
           <p:cNvSpPr>
-            <a:spLocks noGrp="1"/>
+            <a:spLocks noGrp="1" noChangeArrowheads="1"/>
+            <a:extLst>
+              <a:ext uri="smNativeData">
+                <pr:smNativeData xmlns:pr="smNativeData" xmlns="smNativeData" val="SMDATA_15_+nJ9aRMAAAAlAAAAZAAAAA0AAAAAkAAAAEgAAACQAAAASAAAAAAAAAABAAAAAAAAAAEAAABQAAAAAAAAAAAA4D8AAAAAAADgPwAAAAAAAOA/AAAAAAAA4D8AAAAAAADgPwAAAAAAAOA/AAAAAAAA4D8AAAAAAADgPwAAAAAAAOA/AAAAAAAA4D8CAAAAjAAAAAAAAAAAAAAAW5vVDP///wgAAAAAAAAAAAAAAAAAAAAAAAAAAAAAAAAAAAAAZAAAAAEAAABAAAAAAAAAAAAAAAAAAAAAAAAAAAAAAAAAAAAAAAAAAAAAAAAAAAAAAAAAAAAAAAAAAAAAAAAAAAAAAAAAAAAAAAAAAAAAAAAAAAAAAAAAAAAAAAAAAAAAFAAAADwAAAAAAAAAAAAAAAAAAAkUAAAAAQAAABQAAAAUAAAAFAAAAAEAAAAAAAAAZAAAAGQAAAAAAAAAZAAAAGQAAAAVAAAAYAAAAAAAAAAAAAAADwAAACADAAAAAAAAAAAAAAEAAACgMgAAVgcAAKr4//8BAAAAf39/AAEAAABkAAAAAAAAABQAAABAHwAAAAAAACYAAAAAAAAAwOD//wAAAAAmAAAAZAAAABYAAABMAAAAAAAAAAAAAAAEAAAAAAAAAAEAAADn5uYKAAAAACgAAAAoAAAAZAAAAGQAAAAAAAAAzMzMAAAAAABQAAAAUAAAAGQAAABkAAAAAAAAABcAAAAUAAAAAAAAAAAAAAD/fwAA/38AAAAAAAAJAAAABAAAAAAAAAAeAAAAaAAAAAAAAAAAAAAAAAAAAAAAAAAAAAAAECcAABAnAAAAAAAAAAAAAAAAAAAAAAAAAAAAAAAAAAAAAAAAAAAAABQAAAAAAAAAwMD/AAAAAABkAAAAMgAAAAAAAABkAAAAAAAAAH9/fwAKAAAAIgAAABgAAAAAAAAAAAAAAAAAAAAAAAAAAAAAAAAAAAAkAAAAJAAAAAAAAAAHAAAAAAAAAAAAAAAAAAAAAAAAAAAAAAAAAAAAf39/ACUAAABYAAAAAAAAAAAAAAAAAAAAAAAAAAAAAAAAAAAAAAAAAAAAAAAAAAAAAAAAAAAAAAA/AAAAAAAAAKCGAQAAAAAAAAAAAAAAAAAMAAAAAQAAAAAAAAAAAAAAAAAAAB8AAABUAAAAAAAABQAAAAEAAAAAAAAAAAAAAAAAAAAAAAAAAAAAAAAAAAAAAAAAAAAAAAJ/f38AAAAAA8zMzADAwP8Af39/AAAAAAAAAAAAAAAAAAAAAAAAAAAAIQAAABgAAAAUAAAA+DQAABonAADYRQAAWSkAABAAAAAmAAAACAAAAAAAAAAAAAAA"/>
+              </a:ext>
+            </a:extLst>
           </p:cNvSpPr>
           <p:nvPr>
             <p:ph type="sldNum" sz="quarter" idx="12"/>
@@ -1053,29 +1351,26 @@
           <a:bodyPr/>
           <a:lstStyle/>
           <a:p>
-            <a:fld id="{58AA844A-00A1-4A5D-A246-C5B817417ED4}" type="slidenum">
-              <a:rPr lang="en-US" smtClean="0"/>
+            <a:pPr>
+              <a:defRPr lang="en-us"/>
+            </a:pPr>
+            <a:fld id="{3AF9E9F0-BED7-AC1F-9941-484AA70F6F1D}" type="slidenum">
               <a:t>‹#›</a:t>
             </a:fld>
-            <a:endParaRPr lang="en-US"/>
           </a:p>
         </p:txBody>
       </p:sp>
     </p:spTree>
-    <p:extLst>
-      <p:ext uri="{BB962C8B-B14F-4D97-AF65-F5344CB8AC3E}">
-        <p14:creationId xmlns:p14="http://schemas.microsoft.com/office/powerpoint/2010/main" val="25566260"/>
-      </p:ext>
-    </p:extLst>
   </p:cSld>
   <p:clrMapOvr>
     <a:masterClrMapping/>
   </p:clrMapOvr>
+  <p:hf hdr="0" ftr="0"/>
 </p:sldLayout>
 </file>
 
 <file path=ppt/slideLayouts/slideLayout4.xml><?xml version="1.0" encoding="utf-8"?>
-<p:sldLayout xmlns:a="http://schemas.openxmlformats.org/drawingml/2006/main" xmlns:r="http://schemas.openxmlformats.org/officeDocument/2006/relationships" xmlns:p="http://schemas.openxmlformats.org/presentationml/2006/main" type="twoObj" preserve="1">
+<p:sldLayout xmlns:p="http://schemas.openxmlformats.org/presentationml/2006/main" xmlns:mc="http://schemas.openxmlformats.org/markup-compatibility/2006" xmlns:p14="http://schemas.microsoft.com/office/powerpoint/2010/main" xmlns:p15="http://schemas.microsoft.com/office/powerpoint/2012/main" xmlns:r="http://schemas.openxmlformats.org/officeDocument/2006/relationships" xmlns:a="http://schemas.openxmlformats.org/drawingml/2006/main" type="twoObj" preserve="1">
   <p:cSld name="Two Content">
     <p:spTree>
       <p:nvGrpSpPr>
@@ -1095,7 +1390,12 @@
         <p:nvSpPr>
           <p:cNvPr id="2" name="Title 1"/>
           <p:cNvSpPr>
-            <a:spLocks noGrp="1"/>
+            <a:spLocks noGrp="1" noChangeArrowheads="1"/>
+            <a:extLst>
+              <a:ext uri="smNativeData">
+                <pr:smNativeData xmlns:pr="smNativeData" xmlns="smNativeData" val="SMDATA_15_+nJ9aRMAAAAlAAAAZAAAAA0AAAAAkAAAAEgAAACQAAAASAAAAAAAAAABAAAAAAAAAAEAAABQAAAAAAAAAAAA4D8AAAAAAADgPwAAAAAAAOA/AAAAAAAA4D8AAAAAAADgPwAAAAAAAOA/AAAAAAAA4D8AAAAAAADgPwAAAAAAAOA/AAAAAAAA4D8CAAAAjAAAAAAAAAAAAAAAW5vVDP///wgAAAAAAAAAAAAAAAAAAAAAAAAAAAAAAAAAAAAAZAAAAAEAAABAAAAAAAAAAAAAAAAAAAAAAAAAAAAAAAAAAAAAAAAAAAAAAAAAAAAAAAAAAAAAAAAAAAAAAAAAAAAAAAAAAAAAAAAAAAAAAAAAAAAAAAAAAAAAAAAAAAAAFAAAADwAAAAAAAAAAAAAAAAAAAkUAAAAAQAAABQAAAAUAAAAFAAAAAEAAAAAAAAAZAAAAGQAAAAAAAAAZAAAAGQAAAAVAAAAYAAAAAAAAAAAAAAADwAAACADAAAAAAAAAAAAAAEAAACgMgAAVgcAAKr4//8BAAAAf39/AAEAAABkAAAAAAAAABQAAABAHwAAAAAAACYAAAAAAAAAwOD//wAAAAAmAAAAZAAAABYAAABMAAAAAAAAAAAAAAAEAAAAAAAAAAEAAADn5uYKAAAAACgAAAAoAAAAZAAAAGQAAAAAAAAAzMzMAAAAAABQAAAAUAAAAGQAAABkAAAAAAAAABcAAAAUAAAAAAAAAAAAAAD/fwAA/38AAAAAAAAJAAAABAAAAKiVwQEeAAAAaAAAAAAAAAAAAAAAAAAAAAAAAAAAAAAAECcAABAnAAAAAAAAAAAAAAAAAAAAAAAAAAAAAAAAAAAAAAAAAAAAABQAAAAAAAAAwMD/AAAAAABkAAAAMgAAAAAAAABkAAAAAAAAAH9/fwAKAAAAIgAAABgAAAAAAAAAAAAAAAAAAAAAAAAAAAAAAAAAAAAkAAAAJAAAAAAAAAAHAAAAAAAAAAAAAAAAAAAAAAAAAAAAAAAAAAAAf39/ACUAAABYAAAAAAAAAAAAAAAAAAAAAAAAAAAAAAAAAAAAAAAAAAAAAAAAAAAAAAAAAAAAAAA/AAAAAAAAAKCGAQAAAAAAAAAAAAAAAAAMAAAAAQAAAAAAAAAAAAAAAAAAAB8AAABUAAAAAAAABQAAAAEAAAAAAAAAAAAAAAAAAAAAAAAAAAAAAAAAAAAAAAAAAAAAAAJ/f38AAAAAA8zMzADAwP8Af39/AAAAAAAAAAAAAAAAAAAAAAAAAAAAIQAAABgAAAAUAAAAKAUAAD8CAADYRQAAZwoAABAAAAAmAAAACAAAAAAAAAAAAAAA"/>
+              </a:ext>
+            </a:extLst>
           </p:cNvSpPr>
           <p:nvPr>
             <p:ph type="title"/>
@@ -1106,11 +1406,12 @@
           <a:bodyPr/>
           <a:lstStyle/>
           <a:p>
-            <a:r>
-              <a:rPr lang="en-US" smtClean="0"/>
+            <a:pPr>
+              <a:defRPr lang="en-us"/>
+            </a:pPr>
+            <a:r>
               <a:t>Click to edit Master title style</a:t>
             </a:r>
-            <a:endParaRPr lang="en-US"/>
           </a:p>
         </p:txBody>
       </p:sp>
@@ -1118,56 +1419,65 @@
         <p:nvSpPr>
           <p:cNvPr id="3" name="Content Placeholder 2"/>
           <p:cNvSpPr>
-            <a:spLocks noGrp="1"/>
-          </p:cNvSpPr>
-          <p:nvPr>
-            <p:ph sz="half" idx="1"/>
+            <a:spLocks noGrp="1" noChangeArrowheads="1"/>
+            <a:extLst>
+              <a:ext uri="smNativeData">
+                <pr:smNativeData xmlns:pr="smNativeData" xmlns="smNativeData" val="SMDATA_15_+nJ9aRMAAAAlAAAAZAAAAA0AAAAAkAAAAEgAAACQAAAASAAAAAAAAAAAAAAAAAAAAAEAAABQAAAAAAAAAAAA4D8AAAAAAADgPwAAAAAAAOA/AAAAAAAA4D8AAAAAAADgPwAAAAAAAOA/AAAAAAAA4D8AAAAAAADgPwAAAAAAAOA/AAAAAAAA4D8CAAAAjAAAAAAAAAAAAAAAW5vVDP///wgAAAAAAAAAAAAAAAAAAAAAAAAAAAAAAAAAAAAAZAAAAAEAAABAAAAAAAAAAAAAAAAAAAAAAAAAAAAAAAAAAAAAAAAAAAAAAAAAAAAAAAAAAAAAAAAAAAAAAAAAAAAAAAAAAAAAAAAAAAAAAAAAAAAAAAAAAAAAAAAAAAAAFAAAADwAAAAAAAAAAAAAAAAAAAkUAAAAAQAAABQAAAAUAAAAFAAAAAEAAAAAAAAAZAAAAGQAAAAAAAAAZAAAAGQAAAAVAAAAYAAAAAAAAAAAAAAADwAAACADAAAAAAAAAAAAAAEAAACgMgAAVgcAAKr4//8BAAAAf39/AAEAAABkAAAAAAAAABQAAABAHwAAAAAAACYAAAAAAAAAwOD//wAAAAAmAAAAZAAAABYAAABMAAAAAAAAAAAAAAAEAAAAAAAAAAEAAADn5uYKAAAAACgAAAAoAAAAZAAAAGQAAAAAAAAAzMzMAAAAAABQAAAAUAAAAGQAAABkAAAAAAAAABcAAAAUAAAAAAAAAAAAAAD/fwAA/38AAAAAAAAJAAAABAAAAOciJ3ceAAAAaAAAAAAAAAAAAAAAAAAAAAAAAAAAAAAAECcAABAnAAAAAAAAAAAAAAAAAAAAAAAAAAAAAAAAAAAAAAAAAAAAABQAAAAAAAAAwMD/AAAAAABkAAAAMgAAAAAAAABkAAAAAAAAAH9/fwAKAAAAIgAAABgAAAAAAAAAAAAAAAAAAAAAAAAAAAAAAAAAAAAkAAAAJAAAAAAAAAAHAAAAAAAAAAAAAAAAAAAAAAAAAAAAAAAAAAAAf39/ACUAAABYAAAAAAAAAAAAAAAAAAAAAAAAAAAAAAAAAAAAAAAAAAAAAAAAAAAAAAAAAAAAAAA/AAAAAAAAAKCGAQAAAAAAAAAAAAAAAAAMAAAAAQAAAAAAAAAAAAAAAAAAAB8AAABUAAAAAAAABQAAAAEAAAAAAAAAAAAAAAAAAAAAAAAAAAAAAAAAAAAAAAAAAAAAAAJ/f38AAAAAA8zMzADAwP8Af39/AAAAAAAAAAAAAAAAAAAAAAAAAAAAIQAAABgAAAAUAAAAKAUAADsLAAAIJQAAACYAABAAAAAmAAAACAAAAAEAAAAAAAAA"/>
+              </a:ext>
+            </a:extLst>
+          </p:cNvSpPr>
+          <p:nvPr>
+            <p:ph idx="1"/>
           </p:nvPr>
         </p:nvSpPr>
         <p:spPr>
           <a:xfrm>
             <a:off x="838200" y="1825625"/>
-            <a:ext cx="5181600" cy="4351338"/>
+            <a:ext cx="5181600" cy="4351655"/>
           </a:xfrm>
         </p:spPr>
         <p:txBody>
           <a:bodyPr/>
           <a:lstStyle/>
           <a:p>
-            <a:pPr lvl="0"/>
-            <a:r>
-              <a:rPr lang="en-US" smtClean="0"/>
+            <a:pPr>
+              <a:defRPr lang="en-us"/>
+            </a:pPr>
+            <a:r>
               <a:t>Click to edit Master text styles</a:t>
             </a:r>
           </a:p>
           <a:p>
-            <a:pPr lvl="1"/>
-            <a:r>
-              <a:rPr lang="en-US" smtClean="0"/>
+            <a:pPr lvl="1">
+              <a:defRPr lang="en-us"/>
+            </a:pPr>
+            <a:r>
               <a:t>Second level</a:t>
             </a:r>
           </a:p>
           <a:p>
-            <a:pPr lvl="2"/>
-            <a:r>
-              <a:rPr lang="en-US" smtClean="0"/>
+            <a:pPr lvl="2">
+              <a:defRPr lang="en-us"/>
+            </a:pPr>
+            <a:r>
               <a:t>Third level</a:t>
             </a:r>
           </a:p>
           <a:p>
-            <a:pPr lvl="3"/>
-            <a:r>
-              <a:rPr lang="en-US" smtClean="0"/>
+            <a:pPr lvl="3">
+              <a:defRPr lang="en-us"/>
+            </a:pPr>
+            <a:r>
               <a:t>Fourth level</a:t>
             </a:r>
           </a:p>
           <a:p>
-            <a:pPr lvl="4"/>
-            <a:r>
-              <a:rPr lang="en-US" smtClean="0"/>
+            <a:pPr lvl="4">
+              <a:defRPr lang="en-us"/>
+            </a:pPr>
+            <a:r>
               <a:t>Fifth level</a:t>
             </a:r>
-            <a:endParaRPr lang="en-US"/>
           </a:p>
         </p:txBody>
       </p:sp>
@@ -1175,56 +1485,65 @@
         <p:nvSpPr>
           <p:cNvPr id="4" name="Content Placeholder 3"/>
           <p:cNvSpPr>
-            <a:spLocks noGrp="1"/>
-          </p:cNvSpPr>
-          <p:nvPr>
-            <p:ph sz="half" idx="2"/>
+            <a:spLocks noGrp="1" noChangeArrowheads="1"/>
+            <a:extLst>
+              <a:ext uri="smNativeData">
+                <pr:smNativeData xmlns:pr="smNativeData" xmlns="smNativeData" val="SMDATA_15_+nJ9aRMAAAAlAAAAZAAAAA0AAAAAkAAAAEgAAACQAAAASAAAAAAAAAAAAAAAAAAAAAEAAABQAAAAAAAAAAAA4D8AAAAAAADgPwAAAAAAAOA/AAAAAAAA4D8AAAAAAADgPwAAAAAAAOA/AAAAAAAA4D8AAAAAAADgPwAAAAAAAOA/AAAAAAAA4D8CAAAAjAAAAAAAAAAAAAAAW5vVDP///wgAAAAAAAAAAAAAAAAAAAAAAAAAAAAAAAAAAAAAZAAAAAEAAABAAAAAAAAAAAAAAAAAAAAAAAAAAAAAAAAAAAAAAAAAAAAAAAAAAAAAAAAAAAAAAAAAAAAAAAAAAAAAAAAAAAAAAAAAAAAAAAAAAAAAAAAAAAAAAAAAAAAAFAAAADwAAAAAAAAAAAAAAAAAAAkUAAAAAQAAABQAAAAUAAAAFAAAAAEAAAAAAAAAZAAAAGQAAAAAAAAAZAAAAGQAAAAVAAAAYAAAAAAAAAAAAAAADwAAACADAAAAAAAAAAAAAAEAAACgMgAAVgcAAKr4//8BAAAAf39/AAEAAABkAAAAAAAAABQAAABAHwAAAAAAACYAAAAAAAAAwOD//wAAAAAmAAAAZAAAABYAAABMAAAAAAAAAAAAAAAEAAAAAAAAAAEAAADn5uYKAAAAACgAAAAoAAAAZAAAAGQAAAAAAAAAzMzMAAAAAABQAAAAUAAAAGQAAABkAAAAAAAAABcAAAAUAAAAAAAAAAAAAAD/fwAA/38AAAAAAAAJAAAABAAAAOCyww0eAAAAaAAAAAAAAAAAAAAAAAAAAAAAAAAAAAAAECcAABAnAAAAAAAAAAAAAAAAAAAAAAAAAAAAAAAAAAAAAAAAAAAAABQAAAAAAAAAwMD/AAAAAABkAAAAMgAAAAAAAABkAAAAAAAAAH9/fwAKAAAAIgAAABgAAAAAAAAAAAAAAAAAAAAAAAAAAAAAAAAAAAAkAAAAJAAAAAAAAAAHAAAAAAAAAAAAAAAAAAAAAAAAAAAAAAAAAAAAf39/ACUAAABYAAAAAAAAAAAAAAAAAAAAAAAAAAAAAAAAAAAAAAAAAAAAAAAAAAAAAAAAAAAAAAA/AAAAAAAAAKCGAQAAAAAAAAAAAAAAAAAMAAAAAQAAAAAAAAAAAAAAAAAAAB8AAABUAAAAAAAABQAAAAEAAAAAAAAAAAAAAAAAAAAAAAAAAAAAAAAAAAAAAAAAAAAAAAJ/f38AAAAAA8zMzADAwP8Af39/AAAAAAAAAAAAAAAAAAAAAAAAAAAAIQAAABgAAAAUAAAA+CUAADsLAADYRQAAACYAABAAAAAmAAAACAAAAAEAAAAAAAAA"/>
+              </a:ext>
+            </a:extLst>
+          </p:cNvSpPr>
+          <p:nvPr>
+            <p:ph idx="2"/>
           </p:nvPr>
         </p:nvSpPr>
         <p:spPr>
           <a:xfrm>
             <a:off x="6172200" y="1825625"/>
-            <a:ext cx="5181600" cy="4351338"/>
+            <a:ext cx="5181600" cy="4351655"/>
           </a:xfrm>
         </p:spPr>
         <p:txBody>
           <a:bodyPr/>
           <a:lstStyle/>
           <a:p>
-            <a:pPr lvl="0"/>
-            <a:r>
-              <a:rPr lang="en-US" smtClean="0"/>
+            <a:pPr>
+              <a:defRPr lang="en-us"/>
+            </a:pPr>
+            <a:r>
               <a:t>Click to edit Master text styles</a:t>
             </a:r>
           </a:p>
           <a:p>
-            <a:pPr lvl="1"/>
-            <a:r>
-              <a:rPr lang="en-US" smtClean="0"/>
+            <a:pPr lvl="1">
+              <a:defRPr lang="en-us"/>
+            </a:pPr>
+            <a:r>
               <a:t>Second level</a:t>
             </a:r>
           </a:p>
           <a:p>
-            <a:pPr lvl="2"/>
-            <a:r>
-              <a:rPr lang="en-US" smtClean="0"/>
+            <a:pPr lvl="2">
+              <a:defRPr lang="en-us"/>
+            </a:pPr>
+            <a:r>
               <a:t>Third level</a:t>
             </a:r>
           </a:p>
           <a:p>
-            <a:pPr lvl="3"/>
-            <a:r>
-              <a:rPr lang="en-US" smtClean="0"/>
+            <a:pPr lvl="3">
+              <a:defRPr lang="en-us"/>
+            </a:pPr>
+            <a:r>
               <a:t>Fourth level</a:t>
             </a:r>
           </a:p>
           <a:p>
-            <a:pPr lvl="4"/>
-            <a:r>
-              <a:rPr lang="en-US" smtClean="0"/>
+            <a:pPr lvl="4">
+              <a:defRPr lang="en-us"/>
+            </a:pPr>
+            <a:r>
               <a:t>Fifth level</a:t>
             </a:r>
-            <a:endParaRPr lang="en-US"/>
           </a:p>
         </p:txBody>
       </p:sp>
@@ -1232,7 +1551,12 @@
         <p:nvSpPr>
           <p:cNvPr id="5" name="Date Placeholder 4"/>
           <p:cNvSpPr>
-            <a:spLocks noGrp="1"/>
+            <a:spLocks noGrp="1" noChangeArrowheads="1"/>
+            <a:extLst>
+              <a:ext uri="smNativeData">
+                <pr:smNativeData xmlns:pr="smNativeData" xmlns="smNativeData" val="SMDATA_15_+nJ9aRMAAAAlAAAAZAAAAA0AAAAAkAAAAEgAAACQAAAASAAAAAAAAAABAAAAAAAAAAEAAABQAAAAAAAAAAAA4D8AAAAAAADgPwAAAAAAAOA/AAAAAAAA4D8AAAAAAADgPwAAAAAAAOA/AAAAAAAA4D8AAAAAAADgPwAAAAAAAOA/AAAAAAAA4D8CAAAAjAAAAAAAAAAAAAAAW5vVDP///wgAAAAAAAAAAAAAAAAAAAAAAAAAAAAAAAAAAAAAZAAAAAEAAABAAAAAAAAAAAAAAAAAAAAAAAAAAAAAAAAAAAAAAAAAAAAAAAAAAAAAAAAAAAAAAAAAAAAAAAAAAAAAAAAAAAAAAAAAAAAAAAAAAAAAAAAAAAAAAAAAAAAAFAAAADwAAAAAAAAAAAAAAAAAAAkUAAAAAQAAABQAAAAUAAAAFAAAAAEAAAAAAAAAZAAAAGQAAAAAAAAAZAAAAGQAAAAVAAAAYAAAAAAAAAAAAAAADwAAACADAAAAAAAAAAAAAAEAAACgMgAAVgcAAKr4//8BAAAAf39/AAEAAABkAAAAAAAAABQAAABAHwAAAAAAACYAAAAAAAAAwOD//wAAAAAmAAAAZAAAABYAAABMAAAAAAAAAAAAAAAEAAAAAAAAAAEAAADn5uYKAAAAACgAAAAoAAAAZAAAAGQAAAAAAAAAzMzMAAAAAABQAAAAUAAAAGQAAABkAAAAAAAAABcAAAAUAAAAAAAAAAAAAAD/fwAA/38AAAAAAAAJAAAABAAAAAAAAAAeAAAAaAAAAAAAAAAAAAAAAAAAAAAAAAAAAAAAECcAABAnAAAAAAAAAAAAAAAAAAAAAAAAAAAAAAAAAAAAAAAAAAAAABQAAAAAAAAAwMD/AAAAAABkAAAAMgAAAAAAAABkAAAAAAAAAH9/fwAKAAAAIgAAABgAAAAAAAAAAAAAAAAAAAAAAAAAAAAAAAAAAAAkAAAAJAAAAAAAAAAHAAAAAAAAAAAAAAAAAAAAAAAAAAAAAAAAAAAAf39/ACUAAABYAAAAAAAAAAAAAAAAAAAAAAAAAAAAAAAAAAAAAAAAAAAAAAAAAAAAAAAAAAAAAAA/AAAAAAAAAKCGAQAAAAAAAAAAAAAAAAAMAAAAAQAAAAAAAAAAAAAAAAAAAB8AAABUAAAAAAAABQAAAAEAAAAAAAAAAAAAAAAAAAAAAAAAAAAAAAAAAAAAAAAAAAAAAAJ/f38AAAAAA8zMzADAwP8Af39/AAAAAAAAAAAAAAAAAAAAAAAAAAAAIQAAABgAAAAUAAAAKAUAABonAAAIFgAAWSkAABAAAAAmAAAACAAAAAAAAAAAAAAA"/>
+              </a:ext>
+            </a:extLst>
           </p:cNvSpPr>
           <p:nvPr>
             <p:ph type="dt" sz="half" idx="10"/>
@@ -1243,11 +1567,12 @@
           <a:bodyPr/>
           <a:lstStyle/>
           <a:p>
-            <a:fld id="{7DE6D954-9D5F-4B54-AC5F-2CADB10B85DE}" type="datetimeFigureOut">
-              <a:rPr lang="en-US" smtClean="0"/>
+            <a:pPr>
+              <a:defRPr lang="en-us"/>
+            </a:pPr>
+            <a:fld id="{3AF9F9CC-82D7-AC0F-9941-745AB70F6F21}" type="datetime1">
               <a:t>1/12/2026</a:t>
             </a:fld>
-            <a:endParaRPr lang="en-US"/>
           </a:p>
         </p:txBody>
       </p:sp>
@@ -1255,7 +1580,12 @@
         <p:nvSpPr>
           <p:cNvPr id="6" name="Footer Placeholder 5"/>
           <p:cNvSpPr>
-            <a:spLocks noGrp="1"/>
+            <a:spLocks noGrp="1" noChangeArrowheads="1"/>
+            <a:extLst>
+              <a:ext uri="smNativeData">
+                <pr:smNativeData xmlns:pr="smNativeData" xmlns="smNativeData" val="SMDATA_15_+nJ9aRMAAAAlAAAAZAAAAA0AAAAAkAAAAEgAAACQAAAASAAAAAAAAAABAAAAAAAAAAEAAABQAAAAAAAAAAAA4D8AAAAAAADgPwAAAAAAAOA/AAAAAAAA4D8AAAAAAADgPwAAAAAAAOA/AAAAAAAA4D8AAAAAAADgPwAAAAAAAOA/AAAAAAAA4D8CAAAAjAAAAAAAAAAAAAAAW5vVDP///wgAAAAAAAAAAAAAAAAAAAAAAAAAAAAAAAAAAAAAZAAAAAEAAABAAAAAAAAAAAAAAAAAAAAAAAAAAAAAAAAAAAAAAAAAAAAAAAAAAAAAAAAAAAAAAAAAAAAAAAAAAAAAAAAAAAAAAAAAAAAAAAAAAAAAAAAAAAAAAAAAAAAAFAAAADwAAAAAAAAAAAAAAAAAAAkUAAAAAQAAABQAAAAUAAAAFAAAAAEAAAAAAAAAZAAAAGQAAAAAAAAAZAAAAGQAAAAVAAAAYAAAAAAAAAAAAAAADwAAACADAAAAAAAAAAAAAAEAAACgMgAAVgcAAKr4//8BAAAAf39/AAEAAABkAAAAAAAAABQAAABAHwAAAAAAACYAAAAAAAAAwOD//wAAAAAmAAAAZAAAABYAAABMAAAAAAAAAAAAAAAEAAAAAAAAAAEAAADn5uYKAAAAACgAAAAoAAAAZAAAAGQAAAAAAAAAzMzMAAAAAABQAAAAUAAAAGQAAABkAAAAAAAAABcAAAAUAAAAAAAAAAAAAAD/fwAA/38AAAAAAAAJAAAABAAAAAUAAAAeAAAAaAAAAAAAAAAAAAAAAAAAAAAAAAAAAAAAECcAABAnAAAAAAAAAAAAAAAAAAAAAAAAAAAAAAAAAAAAAAAAAAAAABQAAAAAAAAAwMD/AAAAAABkAAAAMgAAAAAAAABkAAAAAAAAAH9/fwAKAAAAIgAAABgAAAAAAAAAAAAAAAAAAAAAAAAAAAAAAAAAAAAkAAAAJAAAAAAAAAAHAAAAAAAAAAAAAAAAAAAAAAAAAAAAAAAAAAAAf39/ACUAAABYAAAAAAAAAAAAAAAAAAAAAAAAAAAAAAAAAAAAAAAAAAAAAAAAAAAAAAAAAAAAAAA/AAAAAAAAAKCGAQAAAAAAAAAAAAAAAAAMAAAAAQAAAAAAAAAAAAAAAAAAAB8AAABUAAAAAAAABQAAAAEAAAAAAAAAAAAAAAAAAAAAAAAAAAAAAAAAAAAAAAAAAAAAAAJ/f38AAAAAA8zMzADAwP8Af39/AAAAAAAAAAAAAAAAAAAAAAAAAAAAIQAAABgAAAAUAAAA2BgAABonAAAoMgAAWSkAABAAAAAmAAAACAAAAAAAAAAAAAAA"/>
+              </a:ext>
+            </a:extLst>
           </p:cNvSpPr>
           <p:nvPr>
             <p:ph type="ftr" sz="quarter" idx="11"/>
@@ -1266,7 +1596,9 @@
           <a:bodyPr/>
           <a:lstStyle/>
           <a:p>
-            <a:endParaRPr lang="en-US"/>
+            <a:pPr>
+              <a:defRPr lang="en-us"/>
+            </a:pPr>
           </a:p>
         </p:txBody>
       </p:sp>
@@ -1274,7 +1606,12 @@
         <p:nvSpPr>
           <p:cNvPr id="7" name="Slide Number Placeholder 6"/>
           <p:cNvSpPr>
-            <a:spLocks noGrp="1"/>
+            <a:spLocks noGrp="1" noChangeArrowheads="1"/>
+            <a:extLst>
+              <a:ext uri="smNativeData">
+                <pr:smNativeData xmlns:pr="smNativeData" xmlns="smNativeData" val="SMDATA_15_+nJ9aRMAAAAlAAAAZAAAAA0AAAAAkAAAAEgAAACQAAAASAAAAAAAAAABAAAAAAAAAAEAAABQAAAAAAAAAAAA4D8AAAAAAADgPwAAAAAAAOA/AAAAAAAA4D8AAAAAAADgPwAAAAAAAOA/AAAAAAAA4D8AAAAAAADgPwAAAAAAAOA/AAAAAAAA4D8CAAAAjAAAAAAAAAAAAAAAW5vVDP///wgAAAAAAAAAAAAAAAAAAAAAAAAAAAAAAAAAAAAAZAAAAAEAAABAAAAAAAAAAAAAAAAAAAAAAAAAAAAAAAAAAAAAAAAAAAAAAAAAAAAAAAAAAAAAAAAAAAAAAAAAAAAAAAAAAAAAAAAAAAAAAAAAAAAAAAAAAAAAAAAAAAAAFAAAADwAAAAAAAAAAAAAAAAAAAkUAAAAAQAAABQAAAAUAAAAFAAAAAEAAAAAAAAAZAAAAGQAAAAAAAAAZAAAAGQAAAAVAAAAYAAAAAAAAAAAAAAADwAAACADAAAAAAAAAAAAAAEAAACgMgAAVgcAAKr4//8BAAAAf39/AAEAAABkAAAAAAAAABQAAABAHwAAAAAAACYAAAAAAAAAwOD//wAAAAAmAAAAZAAAABYAAABMAAAAAAAAAAAAAAAEAAAAAAAAAAEAAADn5uYKAAAAACgAAAAoAAAAZAAAAGQAAAAAAAAAzMzMAAAAAABQAAAAUAAAAGQAAABkAAAAAAAAABcAAAAUAAAAAAAAAAAAAAD/fwAA/38AAAAAAAAJAAAABAAAAAAAAAAeAAAAaAAAAAAAAAAAAAAAAAAAAAAAAAAAAAAAECcAABAnAAAAAAAAAAAAAAAAAAAAAAAAAAAAAAAAAAAAAAAAAAAAABQAAAAAAAAAwMD/AAAAAABkAAAAMgAAAAAAAABkAAAAAAAAAH9/fwAKAAAAIgAAABgAAAAAAAAAAAAAAAAAAAAAAAAAAAAAAAAAAAAkAAAAJAAAAAAAAAAHAAAAAAAAAAAAAAAAAAAAAAAAAAAAAAAAAAAAf39/ACUAAABYAAAAAAAAAAAAAAAAAAAAAAAAAAAAAAAAAAAAAAAAAAAAAAAAAAAAAAAAAAAAAAA/AAAAAAAAAKCGAQAAAAAAAAAAAAAAAAAMAAAAAQAAAAAAAAAAAAAAAAAAAB8AAABUAAAAAAAABQAAAAEAAAAAAAAAAAAAAAAAAAAAAAAAAAAAAAAAAAAAAAAAAAAAAAJ/f38AAAAAA8zMzADAwP8Af39/AAAAAAAAAAAAAAAAAAAAAAAAAAAAIQAAABgAAAAUAAAA+DQAABonAADYRQAAWSkAABAAAAAmAAAACAAAAAAAAAAAAAAA"/>
+              </a:ext>
+            </a:extLst>
           </p:cNvSpPr>
           <p:nvPr>
             <p:ph type="sldNum" sz="quarter" idx="12"/>
@@ -1285,29 +1622,26 @@
           <a:bodyPr/>
           <a:lstStyle/>
           <a:p>
-            <a:fld id="{58AA844A-00A1-4A5D-A246-C5B817417ED4}" type="slidenum">
-              <a:rPr lang="en-US" smtClean="0"/>
+            <a:pPr>
+              <a:defRPr lang="en-us"/>
+            </a:pPr>
+            <a:fld id="{3AF9E353-1DD7-AC15-9941-EB40AD0F6FBE}" type="slidenum">
               <a:t>‹#›</a:t>
             </a:fld>
-            <a:endParaRPr lang="en-US"/>
           </a:p>
         </p:txBody>
       </p:sp>
     </p:spTree>
-    <p:extLst>
-      <p:ext uri="{BB962C8B-B14F-4D97-AF65-F5344CB8AC3E}">
-        <p14:creationId xmlns:p14="http://schemas.microsoft.com/office/powerpoint/2010/main" val="3990535807"/>
-      </p:ext>
-    </p:extLst>
   </p:cSld>
   <p:clrMapOvr>
     <a:masterClrMapping/>
   </p:clrMapOvr>
+  <p:hf hdr="0" ftr="0"/>
 </p:sldLayout>
 </file>
 
 <file path=ppt/slideLayouts/slideLayout5.xml><?xml version="1.0" encoding="utf-8"?>
-<p:sldLayout xmlns:a="http://schemas.openxmlformats.org/drawingml/2006/main" xmlns:r="http://schemas.openxmlformats.org/officeDocument/2006/relationships" xmlns:p="http://schemas.openxmlformats.org/presentationml/2006/main" type="twoTxTwoObj" preserve="1">
+<p:sldLayout xmlns:p="http://schemas.openxmlformats.org/presentationml/2006/main" xmlns:mc="http://schemas.openxmlformats.org/markup-compatibility/2006" xmlns:p14="http://schemas.microsoft.com/office/powerpoint/2010/main" xmlns:p15="http://schemas.microsoft.com/office/powerpoint/2012/main" xmlns:r="http://schemas.openxmlformats.org/officeDocument/2006/relationships" xmlns:a="http://schemas.openxmlformats.org/drawingml/2006/main" type="twoTxTwoObj" preserve="1">
   <p:cSld name="Comparison">
     <p:spTree>
       <p:nvGrpSpPr>
@@ -1327,7 +1661,12 @@
         <p:nvSpPr>
           <p:cNvPr id="2" name="Title 1"/>
           <p:cNvSpPr>
-            <a:spLocks noGrp="1"/>
+            <a:spLocks noGrp="1" noChangeArrowheads="1"/>
+            <a:extLst>
+              <a:ext uri="smNativeData">
+                <pr:smNativeData xmlns:pr="smNativeData" xmlns="smNativeData" val="SMDATA_15_+nJ9aRMAAAAlAAAAZAAAAA0AAAAAkAAAAEgAAACQAAAASAAAAAAAAAABAAAAAAAAAAEAAABQAAAAAAAAAAAA4D8AAAAAAADgPwAAAAAAAOA/AAAAAAAA4D8AAAAAAADgPwAAAAAAAOA/AAAAAAAA4D8AAAAAAADgPwAAAAAAAOA/AAAAAAAA4D8CAAAAjAAAAAAAAAAAAAAAW5vVDP///wgAAAAAAAAAAAAAAAAAAAAAAAAAAAAAAAAAAAAAZAAAAAEAAABAAAAAAAAAAAAAAAAAAAAAAAAAAAAAAAAAAAAAAAAAAAAAAAAAAAAAAAAAAAAAAAAAAAAAAAAAAAAAAAAAAAAAAAAAAAAAAAAAAAAAAAAAAAAAAAAAAAAAFAAAADwAAAAAAAAAAAAAAAAAAAkUAAAAAQAAABQAAAAUAAAAFAAAAAEAAAAAAAAAZAAAAGQAAAAAAAAAZAAAAGQAAAAVAAAAYAAAAAAAAAAAAAAADwAAACADAAAAAAAAAAAAAAEAAACgMgAAVgcAAKr4//8BAAAAf39/AAEAAABkAAAAAAAAABQAAABAHwAAAAAAACYAAAAAAAAAwOD//wAAAAAmAAAAZAAAABYAAABMAAAAAAAAAAAAAAAEAAAAAAAAAAEAAADn5uYKAAAAACgAAAAoAAAAZAAAAGQAAAAAAAAAzMzMAAAAAABQAAAAUAAAAGQAAABkAAAAAAAAABcAAAAUAAAAAAAAAAAAAAD/fwAA/38AAAAAAAAJAAAABAAAAAAAAAAeAAAAaAAAAAAAAAAAAAAAAAAAAAAAAAAAAAAAECcAABAnAAAAAAAAAAAAAAAAAAAAAAAAAAAAAAAAAAAAAAAAAAAAABQAAAAAAAAAwMD/AAAAAABkAAAAMgAAAAAAAABkAAAAAAAAAH9/fwAKAAAAIgAAABgAAAAAAAAAAAAAAAAAAAAAAAAAAAAAAAAAAAAkAAAAJAAAAAAAAAAHAAAAAAAAAAAAAAAAAAAAAAAAAAAAAAAAAAAAf39/ACUAAABYAAAAAAAAAAAAAAAAAAAAAAAAAAAAAAAAAAAAAAAAAAAAAAAAAAAAAAAAAAAAAAA/AAAAAAAAAKCGAQAAAAAAAAAAAAAAAAAMAAAAAQAAAAAAAAAAAAAAAAAAAB8AAABUAAAAAAAABQAAAAEAAAAAAAAAAAAAAAAAAAAAAAAAAAAAAAAAAAAAAAAAAAAAAAJ/f38AAAAAA8zMzADAwP8Af39/AAAAAAAAAAAAAAAAAAAAAAAAAAAAIQAAABgAAAAUAAAAKwUAAD8CAADbRQAAZwoAABAAAAAmAAAACAAAAAEAAAAAAAAA"/>
+              </a:ext>
+            </a:extLst>
           </p:cNvSpPr>
           <p:nvPr>
             <p:ph type="title"/>
@@ -1335,19 +1674,20 @@
         </p:nvSpPr>
         <p:spPr>
           <a:xfrm>
-            <a:off x="839788" y="365125"/>
-            <a:ext cx="10515600" cy="1325563"/>
+            <a:off x="840105" y="365125"/>
+            <a:ext cx="10515600" cy="1325880"/>
           </a:xfrm>
         </p:spPr>
         <p:txBody>
           <a:bodyPr/>
           <a:lstStyle/>
           <a:p>
-            <a:r>
-              <a:rPr lang="en-US" smtClean="0"/>
+            <a:pPr>
+              <a:defRPr lang="en-us"/>
+            </a:pPr>
+            <a:r>
               <a:t>Click to edit Master title style</a:t>
             </a:r>
-            <a:endParaRPr lang="en-US"/>
           </a:p>
         </p:txBody>
       </p:sp>
@@ -1355,62 +1695,72 @@
         <p:nvSpPr>
           <p:cNvPr id="3" name="Text Placeholder 2"/>
           <p:cNvSpPr>
-            <a:spLocks noGrp="1"/>
-          </p:cNvSpPr>
-          <p:nvPr>
-            <p:ph type="body" idx="1"/>
+            <a:spLocks noGrp="1" noChangeArrowheads="1"/>
+            <a:extLst>
+              <a:ext uri="smNativeData">
+                <pr:smNativeData xmlns:pr="smNativeData" xmlns="smNativeData" val="SMDATA_15_+nJ9aRMAAAAlAAAAZAAAAA0AAAAAkAAAAEgAAACQAAAASAAAAAAAAAACAAAAAAAAAAEAAABQAAAAAAAAAAAA4D8AAAAAAADgPwAAAAAAAOA/AAAAAAAA4D8AAAAAAADgPwAAAAAAAOA/AAAAAAAA4D8AAAAAAADgPwAAAAAAAOA/AAAAAAAA4D8CAAAAjAAAAAAAAAAAAAAAW5vVDP///wgAAAAAAAAAAAAAAAAAAAAAAAAAAAAAAAAAAAAAZAAAAAEAAABAAAAAAAAAAAAAAAAAAAAAAAAAAAAAAAAAAAAAAAAAAAAAAAAAAAAAAAAAAAAAAAAAAAAAAAAAAAAAAAAAAAAAAAAAAAAAAAAAAAAAAAAAAAAAAAAAAAAAFAAAADwAAAAAAAAAAAAAAAAAAAkUAAAAAQAAABQAAAAUAAAAFAAAAAEAAAAAAAAAZAAAAGQAAAAAAAAAZAAAAGQAAAAVAAAAYAAAAAAAAAAAAAAADwAAACADAAAAAAAAAAAAAAEAAACgMgAAVgcAAKr4//8BAAAAf39/AAEAAABkAAAAAAAAABQAAABAHwAAAAAAACYAAAAAAAAAwOD//wAAAAAmAAAAZAAAABYAAABMAAAAAAAAAAAAAAAEAAAAAAAAAAEAAADn5uYKAAAAACgAAAAoAAAAZAAAAGQAAAAAAAAAzMzMAAAAAABQAAAAUAAAAGQAAABkAAAAAAAAABcAAAAUAAAAAAAAAAAAAAD/fwAA/38AAAAAAAAJAAAABAAAAAAAAAAeAAAAaAAAAAAAAAAAAAAAAAAAAAAAAAAAAAAAECcAABAnAAAAAAAAAAAAAAAAAAAAAAAAAAAAAAAAAAAAAAAAAAAAABQAAAAAAAAAwMD/AAAAAABkAAAAMgAAAAAAAABkAAAAAAAAAH9/fwAKAAAAIgAAABgAAAAAAAAAAAAAAAAAAAAAAAAAAAAAAAAAAAAkAAAAJAAAAAAAAAAHAAAAAAAAAAAAAAAAAAAAAAAAAAAAAAAAAAAAf39/ACUAAABYAAAAAAAAAAAAAAAAAAAAAAAAAAAAAAAAAAAAAAAAAAAAAAAAAAAAAAAAAAAAAAA/AAAAAAAAAKCGAQAAAAAAAAAAAAAAAAAMAAAAAQAAAAAAAAAAAAAAAAAAAB8AAABUAAAAAAAABQAAAAEAAAAAAAAAAAAAAAAAAAAAAAAAAAAAAAAAAAAAAAAAAAAAAAJ/f38AAAAAA8zMzADAwP8Af39/AAAAAAAAAAAAAAAAAAAAAAAAAAAAIQAAABgAAAAUAAAAKwUAAFgKAADlJAAAaQ8AABAAAAAmAAAACAAAAIGAAAAAAAAA"/>
+              </a:ext>
+            </a:extLst>
+          </p:cNvSpPr>
+          <p:nvPr>
+            <p:ph idx="1"/>
           </p:nvPr>
         </p:nvSpPr>
         <p:spPr>
           <a:xfrm>
-            <a:off x="839788" y="1681163"/>
-            <a:ext cx="5157787" cy="823912"/>
+            <a:off x="840105" y="1681480"/>
+            <a:ext cx="5157470" cy="823595"/>
           </a:xfrm>
         </p:spPr>
         <p:txBody>
-          <a:bodyPr anchor="b"/>
+          <a:bodyPr vert="horz" wrap="square" lIns="91440" tIns="45720" rIns="91440" bIns="45720" numCol="1" spcCol="215900" anchor="b">
+            <a:prstTxWarp prst="textNoShape">
+              <a:avLst/>
+            </a:prstTxWarp>
+          </a:bodyPr>
           <a:lstStyle>
             <a:lvl1pPr marL="0" indent="0">
               <a:buNone/>
-              <a:defRPr sz="2400" b="1"/>
+              <a:defRPr lang="en-us" sz="2400" b="1" cap="none"/>
             </a:lvl1pPr>
             <a:lvl2pPr marL="457200" indent="0">
               <a:buNone/>
-              <a:defRPr sz="2000" b="1"/>
+              <a:defRPr lang="en-us" sz="2000" b="1" cap="none"/>
             </a:lvl2pPr>
             <a:lvl3pPr marL="914400" indent="0">
               <a:buNone/>
-              <a:defRPr sz="1800" b="1"/>
+              <a:defRPr lang="en-us" sz="1800" b="1" cap="none"/>
             </a:lvl3pPr>
             <a:lvl4pPr marL="1371600" indent="0">
               <a:buNone/>
-              <a:defRPr sz="1600" b="1"/>
+              <a:defRPr lang="en-us" sz="1600" b="1" cap="none"/>
             </a:lvl4pPr>
             <a:lvl5pPr marL="1828800" indent="0">
               <a:buNone/>
-              <a:defRPr sz="1600" b="1"/>
+              <a:defRPr lang="en-us" sz="1600" b="1" cap="none"/>
             </a:lvl5pPr>
             <a:lvl6pPr marL="2286000" indent="0">
               <a:buNone/>
-              <a:defRPr sz="1600" b="1"/>
+              <a:defRPr lang="en-us" sz="1600" b="1" cap="none"/>
             </a:lvl6pPr>
             <a:lvl7pPr marL="2743200" indent="0">
               <a:buNone/>
-              <a:defRPr sz="1600" b="1"/>
+              <a:defRPr lang="en-us" sz="1600" b="1" cap="none"/>
             </a:lvl7pPr>
             <a:lvl8pPr marL="3200400" indent="0">
               <a:buNone/>
-              <a:defRPr sz="1600" b="1"/>
+              <a:defRPr lang="en-us" sz="1600" b="1" cap="none"/>
             </a:lvl8pPr>
             <a:lvl9pPr marL="3657600" indent="0">
               <a:buNone/>
-              <a:defRPr sz="1600" b="1"/>
+              <a:defRPr lang="en-us" sz="1600" b="1" cap="none"/>
             </a:lvl9pPr>
           </a:lstStyle>
           <a:p>
-            <a:pPr lvl="0"/>
-            <a:r>
-              <a:rPr lang="en-US" smtClean="0"/>
+            <a:pPr>
+              <a:defRPr lang="en-us"/>
+            </a:pPr>
+            <a:r>
               <a:t>Click to edit Master text styles</a:t>
             </a:r>
           </a:p>
@@ -1420,56 +1770,65 @@
         <p:nvSpPr>
           <p:cNvPr id="4" name="Content Placeholder 3"/>
           <p:cNvSpPr>
-            <a:spLocks noGrp="1"/>
-          </p:cNvSpPr>
-          <p:nvPr>
-            <p:ph sz="half" idx="2"/>
+            <a:spLocks noGrp="1" noChangeArrowheads="1"/>
+            <a:extLst>
+              <a:ext uri="smNativeData">
+                <pr:smNativeData xmlns:pr="smNativeData" xmlns="smNativeData" val="SMDATA_15_+nJ9aRMAAAAlAAAAZAAAAA0AAAAAkAAAAEgAAACQAAAASAAAAAAAAAAAAAAAAAAAAAEAAABQAAAAAAAAAAAA4D8AAAAAAADgPwAAAAAAAOA/AAAAAAAA4D8AAAAAAADgPwAAAAAAAOA/AAAAAAAA4D8AAAAAAADgPwAAAAAAAOA/AAAAAAAA4D8CAAAAjAAAAAAAAAAAAAAAW5vVDP///wgAAAAAAAAAAAAAAAAAAAAAAAAAAAAAAAAAAAAAZAAAAAEAAABAAAAAAAAAAAAAAAAAAAAAAAAAAAAAAAAAAAAAAAAAAAAAAAAAAAAAAAAAAAAAAAAAAAAAAAAAAAAAAAAAAAAAAAAAAAAAAAAAAAAAAAAAAAAAAAAAAAAAFAAAADwAAAAAAAAAAAAAAAAAAAkUAAAAAQAAABQAAAAUAAAAFAAAAAEAAAAAAAAAZAAAAGQAAAAAAAAAZAAAAGQAAAAVAAAAYAAAAAAAAAAAAAAADwAAACADAAAAAAAAAAAAAAEAAACgMgAAVgcAAKr4//8BAAAAf39/AAEAAABkAAAAAAAAABQAAABAHwAAAAAAACYAAAAAAAAAwOD//wAAAAAmAAAAZAAAABYAAABMAAAAAAAAAAAAAAAEAAAAAAAAAAEAAADn5uYKAAAAACgAAAAoAAAAZAAAAGQAAAAAAAAAzMzMAAAAAABQAAAAUAAAAGQAAABkAAAAAAAAABcAAAAUAAAAAAAAAAAAAAD/fwAA/38AAAAAAAAJAAAABAAAAAAAAAAeAAAAaAAAAAAAAAAAAAAAAAAAAAAAAAAAAAAAECcAABAnAAAAAAAAAAAAAAAAAAAAAAAAAAAAAAAAAAAAAAAAAAAAABQAAAAAAAAAwMD/AAAAAABkAAAAMgAAAAAAAABkAAAAAAAAAH9/fwAKAAAAIgAAABgAAAAAAAAAAAAAAAAAAAAAAAAAAAAAAAAAAAAkAAAAJAAAAAAAAAAHAAAAAAAAAAAAAAAAAAAAAAAAAAAAAAAAAAAAf39/ACUAAABYAAAAAAAAAAAAAAAAAAAAAAAAAAAAAAAAAAAAAAAAAAAAAAAAAAAAAAAAAAAAAAA/AAAAAAAAAKCGAQAAAAAAAAAAAAAAAAAMAAAAAQAAAAAAAAAAAAAAAAAAAB8AAABUAAAAAAAABQAAAAEAAAAAAAAAAAAAAAAAAAAAAAAAAAAAAAAAAAAAAAAAAAAAAAJ/f38AAAAAA8zMzADAwP8Af39/AAAAAAAAAAAAAAAAAAAAAAAAAAAAIQAAABgAAAAUAAAAKwUAAGkPAADlJAAAFCYAABAAAAAmAAAACAAAAAEAAAAAAAAA"/>
+              </a:ext>
+            </a:extLst>
+          </p:cNvSpPr>
+          <p:nvPr>
+            <p:ph idx="2"/>
           </p:nvPr>
         </p:nvSpPr>
         <p:spPr>
           <a:xfrm>
-            <a:off x="839788" y="2505075"/>
-            <a:ext cx="5157787" cy="3684588"/>
+            <a:off x="840105" y="2505075"/>
+            <a:ext cx="5157470" cy="3684905"/>
           </a:xfrm>
         </p:spPr>
         <p:txBody>
           <a:bodyPr/>
           <a:lstStyle/>
           <a:p>
-            <a:pPr lvl="0"/>
-            <a:r>
-              <a:rPr lang="en-US" smtClean="0"/>
+            <a:pPr>
+              <a:defRPr lang="en-us"/>
+            </a:pPr>
+            <a:r>
               <a:t>Click to edit Master text styles</a:t>
             </a:r>
           </a:p>
           <a:p>
-            <a:pPr lvl="1"/>
-            <a:r>
-              <a:rPr lang="en-US" smtClean="0"/>
+            <a:pPr lvl="1">
+              <a:defRPr lang="en-us"/>
+            </a:pPr>
+            <a:r>
               <a:t>Second level</a:t>
             </a:r>
           </a:p>
           <a:p>
-            <a:pPr lvl="2"/>
-            <a:r>
-              <a:rPr lang="en-US" smtClean="0"/>
+            <a:pPr lvl="2">
+              <a:defRPr lang="en-us"/>
+            </a:pPr>
+            <a:r>
               <a:t>Third level</a:t>
             </a:r>
           </a:p>
           <a:p>
-            <a:pPr lvl="3"/>
-            <a:r>
-              <a:rPr lang="en-US" smtClean="0"/>
+            <a:pPr lvl="3">
+              <a:defRPr lang="en-us"/>
+            </a:pPr>
+            <a:r>
               <a:t>Fourth level</a:t>
             </a:r>
           </a:p>
           <a:p>
-            <a:pPr lvl="4"/>
-            <a:r>
-              <a:rPr lang="en-US" smtClean="0"/>
+            <a:pPr lvl="4">
+              <a:defRPr lang="en-us"/>
+            </a:pPr>
+            <a:r>
               <a:t>Fifth level</a:t>
             </a:r>
-            <a:endParaRPr lang="en-US"/>
           </a:p>
         </p:txBody>
       </p:sp>
@@ -1477,62 +1836,72 @@
         <p:nvSpPr>
           <p:cNvPr id="5" name="Text Placeholder 4"/>
           <p:cNvSpPr>
-            <a:spLocks noGrp="1"/>
-          </p:cNvSpPr>
-          <p:nvPr>
-            <p:ph type="body" sz="quarter" idx="3"/>
+            <a:spLocks noGrp="1" noChangeArrowheads="1"/>
+            <a:extLst>
+              <a:ext uri="smNativeData">
+                <pr:smNativeData xmlns:pr="smNativeData" xmlns="smNativeData" val="SMDATA_15_+nJ9aRMAAAAlAAAAZAAAAA0AAAAAkAAAAEgAAACQAAAASAAAAAAAAAACAAAAAAAAAAEAAABQAAAAAAAAAAAA4D8AAAAAAADgPwAAAAAAAOA/AAAAAAAA4D8AAAAAAADgPwAAAAAAAOA/AAAAAAAA4D8AAAAAAADgPwAAAAAAAOA/AAAAAAAA4D8CAAAAjAAAAAAAAAAAAAAAW5vVDP///wgAAAAAAAAAAAAAAAAAAAAAAAAAAAAAAAAAAAAAZAAAAAEAAABAAAAAAAAAAAAAAAAAAAAAAAAAAAAAAAAAAAAAAAAAAAAAAAAAAAAAAAAAAAAAAAAAAAAAAAAAAAAAAAAAAAAAAAAAAAAAAAAAAAAAAAAAAAAAAAAAAAAAFAAAADwAAAAAAAAAAAAAAAAAAAkUAAAAAQAAABQAAAAUAAAAFAAAAAEAAAAAAAAAZAAAAGQAAAAAAAAAZAAAAGQAAAAVAAAAYAAAAAAAAAAAAAAADwAAACADAAAAAAAAAAAAAAEAAACgMgAAVgcAAKr4//8BAAAAf39/AAEAAABkAAAAAAAAABQAAABAHwAAAAAAACYAAAAAAAAAwOD//wAAAAAmAAAAZAAAABYAAABMAAAAAAAAAAAAAAAEAAAAAAAAAAEAAADn5uYKAAAAACgAAAAoAAAAZAAAAGQAAAAAAAAAzMzMAAAAAABQAAAAUAAAAGQAAABkAAAAAAAAABcAAAAUAAAAAAAAAAAAAAD/fwAA/38AAAAAAAAJAAAABAAAAAAAAAAeAAAAaAAAAAAAAAAAAAAAAAAAAAAAAAAAAAAAECcAABAnAAAAAAAAAAAAAAAAAAAAAAAAAAAAAAAAAAAAAAAAAAAAABQAAAAAAAAAwMD/AAAAAABkAAAAMgAAAAAAAABkAAAAAAAAAH9/fwAKAAAAIgAAABgAAAAAAAAAAAAAAAAAAAAAAAAAAAAAAAAAAAAkAAAAJAAAAAAAAAAHAAAAAAAAAAAAAAAAAAAAAAAAAAAAAAAAAAAAf39/ACUAAABYAAAAAAAAAAAAAAAAAAAAAAAAAAAAAAAAAAAAAAAAAAAAAAAAAAAAAAAAAAAAAAA/AAAAAAAAAKCGAQAAAAAAAAAAAAAAAAAMAAAAAQAAAAAAAAAAAAAAAAAAAB8AAABUAAAAAAAABQAAAAEAAAAAAAAAAAAAAAAAAAAAAAAAAAAAAAAAAAAAAAAAAAAAAAJ/f38AAAAAA8zMzADAwP8Af39/AAAAAAAAAAAAAAAAAAAAAAAAAAAAIQAAABgAAAAUAAAA+CUAAFgKAADbRQAAaQ8AABAAAAAmAAAACAAAAIGAAAAAAAAA"/>
+              </a:ext>
+            </a:extLst>
+          </p:cNvSpPr>
+          <p:nvPr>
+            <p:ph idx="3"/>
           </p:nvPr>
         </p:nvSpPr>
         <p:spPr>
           <a:xfrm>
-            <a:off x="6172200" y="1681163"/>
-            <a:ext cx="5183188" cy="823912"/>
+            <a:off x="6172200" y="1681480"/>
+            <a:ext cx="5183505" cy="823595"/>
           </a:xfrm>
         </p:spPr>
         <p:txBody>
-          <a:bodyPr anchor="b"/>
+          <a:bodyPr vert="horz" wrap="square" lIns="91440" tIns="45720" rIns="91440" bIns="45720" numCol="1" spcCol="215900" anchor="b">
+            <a:prstTxWarp prst="textNoShape">
+              <a:avLst/>
+            </a:prstTxWarp>
+          </a:bodyPr>
           <a:lstStyle>
             <a:lvl1pPr marL="0" indent="0">
               <a:buNone/>
-              <a:defRPr sz="2400" b="1"/>
+              <a:defRPr lang="en-us" sz="2400" b="1" cap="none"/>
             </a:lvl1pPr>
             <a:lvl2pPr marL="457200" indent="0">
               <a:buNone/>
-              <a:defRPr sz="2000" b="1"/>
+              <a:defRPr lang="en-us" sz="2000" b="1" cap="none"/>
             </a:lvl2pPr>
             <a:lvl3pPr marL="914400" indent="0">
               <a:buNone/>
-              <a:defRPr sz="1800" b="1"/>
+              <a:defRPr lang="en-us" sz="1800" b="1" cap="none"/>
             </a:lvl3pPr>
             <a:lvl4pPr marL="1371600" indent="0">
               <a:buNone/>
-              <a:defRPr sz="1600" b="1"/>
+              <a:defRPr lang="en-us" sz="1600" b="1" cap="none"/>
             </a:lvl4pPr>
             <a:lvl5pPr marL="1828800" indent="0">
               <a:buNone/>
-              <a:defRPr sz="1600" b="1"/>
+              <a:defRPr lang="en-us" sz="1600" b="1" cap="none"/>
             </a:lvl5pPr>
             <a:lvl6pPr marL="2286000" indent="0">
               <a:buNone/>
-              <a:defRPr sz="1600" b="1"/>
+              <a:defRPr lang="en-us" sz="1600" b="1" cap="none"/>
             </a:lvl6pPr>
             <a:lvl7pPr marL="2743200" indent="0">
               <a:buNone/>
-              <a:defRPr sz="1600" b="1"/>
+              <a:defRPr lang="en-us" sz="1600" b="1" cap="none"/>
             </a:lvl7pPr>
             <a:lvl8pPr marL="3200400" indent="0">
               <a:buNone/>
-              <a:defRPr sz="1600" b="1"/>
+              <a:defRPr lang="en-us" sz="1600" b="1" cap="none"/>
             </a:lvl8pPr>
             <a:lvl9pPr marL="3657600" indent="0">
               <a:buNone/>
-              <a:defRPr sz="1600" b="1"/>
+              <a:defRPr lang="en-us" sz="1600" b="1" cap="none"/>
             </a:lvl9pPr>
           </a:lstStyle>
           <a:p>
-            <a:pPr lvl="0"/>
-            <a:r>
-              <a:rPr lang="en-US" smtClean="0"/>
+            <a:pPr>
+              <a:defRPr lang="en-us"/>
+            </a:pPr>
+            <a:r>
               <a:t>Click to edit Master text styles</a:t>
             </a:r>
           </a:p>
@@ -1542,56 +1911,65 @@
         <p:nvSpPr>
           <p:cNvPr id="6" name="Content Placeholder 5"/>
           <p:cNvSpPr>
-            <a:spLocks noGrp="1"/>
-          </p:cNvSpPr>
-          <p:nvPr>
-            <p:ph sz="quarter" idx="4"/>
+            <a:spLocks noGrp="1" noChangeArrowheads="1"/>
+            <a:extLst>
+              <a:ext uri="smNativeData">
+                <pr:smNativeData xmlns:pr="smNativeData" xmlns="smNativeData" val="SMDATA_15_+nJ9aRMAAAAlAAAAZAAAAA0AAAAAkAAAAEgAAACQAAAASAAAAAAAAAAAAAAAAAAAAAEAAABQAAAAAAAAAAAA4D8AAAAAAADgPwAAAAAAAOA/AAAAAAAA4D8AAAAAAADgPwAAAAAAAOA/AAAAAAAA4D8AAAAAAADgPwAAAAAAAOA/AAAAAAAA4D8CAAAAjAAAAAAAAAAAAAAAW5vVDP///wgAAAAAAAAAAAAAAAAAAAAAAAAAAAAAAAAAAAAAZAAAAAEAAABAAAAAAAAAAAAAAAAAAAAAAAAAAAAAAAAAAAAAAAAAAAAAAAAAAAAAAAAAAAAAAAAAAAAAAAAAAAAAAAAAAAAAAAAAAAAAAAAAAAAAAAAAAAAAAAAAAAAAFAAAADwAAAAAAAAAAAAAAAAAAAkUAAAAAQAAABQAAAAUAAAAFAAAAAEAAAAAAAAAZAAAAGQAAAAAAAAAZAAAAGQAAAAVAAAAYAAAAAAAAAAAAAAADwAAACADAAAAAAAAAAAAAAEAAACgMgAAVgcAAKr4//8BAAAAf39/AAEAAABkAAAAAAAAABQAAABAHwAAAAAAACYAAAAAAAAAwOD//wAAAAAmAAAAZAAAABYAAABMAAAAAAAAAAAAAAAEAAAAAAAAAAEAAADn5uYKAAAAACgAAAAoAAAAZAAAAGQAAAAAAAAAzMzMAAAAAABQAAAAUAAAAGQAAABkAAAAAAAAABcAAAAUAAAAAAAAAAAAAAD/fwAA/38AAAAAAAAJAAAABAAAAAAAAAAeAAAAaAAAAAAAAAAAAAAAAAAAAAAAAAAAAAAAECcAABAnAAAAAAAAAAAAAAAAAAAAAAAAAAAAAAAAAAAAAAAAAAAAABQAAAAAAAAAwMD/AAAAAABkAAAAMgAAAAAAAABkAAAAAAAAAH9/fwAKAAAAIgAAABgAAAAAAAAAAAAAAAAAAAAAAAAAAAAAAAAAAAAkAAAAJAAAAAAAAAAHAAAAAAAAAAAAAAAAAAAAAAAAAAAAAAAAAAAAf39/ACUAAABYAAAAAAAAAAAAAAAAAAAAAAAAAAAAAAAAAAAAAAAAAAAAAAAAAAAAAAAAAAAAAAA/AAAAAAAAAKCGAQAAAAAAAAAAAAAAAAAMAAAAAQAAAAAAAAAAAAAAAAAAAB8AAABUAAAAAAAABQAAAAEAAAAAAAAAAAAAAAAAAAAAAAAAAAAAAAAAAAAAAAAAAAAAAAJ/f38AAAAAA8zMzADAwP8Af39/AAAAAAAAAAAAAAAAAAAAAAAAAAAAIQAAABgAAAAUAAAA+CUAAGkPAADbRQAAFCYAABAAAAAmAAAACAAAAAEAAAAAAAAA"/>
+              </a:ext>
+            </a:extLst>
+          </p:cNvSpPr>
+          <p:nvPr>
+            <p:ph idx="4"/>
           </p:nvPr>
         </p:nvSpPr>
         <p:spPr>
           <a:xfrm>
             <a:off x="6172200" y="2505075"/>
-            <a:ext cx="5183188" cy="3684588"/>
+            <a:ext cx="5183505" cy="3684905"/>
           </a:xfrm>
         </p:spPr>
         <p:txBody>
           <a:bodyPr/>
           <a:lstStyle/>
           <a:p>
-            <a:pPr lvl="0"/>
-            <a:r>
-              <a:rPr lang="en-US" smtClean="0"/>
+            <a:pPr>
+              <a:defRPr lang="en-us"/>
+            </a:pPr>
+            <a:r>
               <a:t>Click to edit Master text styles</a:t>
             </a:r>
           </a:p>
           <a:p>
-            <a:pPr lvl="1"/>
-            <a:r>
-              <a:rPr lang="en-US" smtClean="0"/>
+            <a:pPr lvl="1">
+              <a:defRPr lang="en-us"/>
+            </a:pPr>
+            <a:r>
               <a:t>Second level</a:t>
             </a:r>
           </a:p>
           <a:p>
-            <a:pPr lvl="2"/>
-            <a:r>
-              <a:rPr lang="en-US" smtClean="0"/>
+            <a:pPr lvl="2">
+              <a:defRPr lang="en-us"/>
+            </a:pPr>
+            <a:r>
               <a:t>Third level</a:t>
             </a:r>
           </a:p>
           <a:p>
-            <a:pPr lvl="3"/>
-            <a:r>
-              <a:rPr lang="en-US" smtClean="0"/>
+            <a:pPr lvl="3">
+              <a:defRPr lang="en-us"/>
+            </a:pPr>
+            <a:r>
               <a:t>Fourth level</a:t>
             </a:r>
           </a:p>
           <a:p>
-            <a:pPr lvl="4"/>
-            <a:r>
-              <a:rPr lang="en-US" smtClean="0"/>
+            <a:pPr lvl="4">
+              <a:defRPr lang="en-us"/>
+            </a:pPr>
+            <a:r>
               <a:t>Fifth level</a:t>
             </a:r>
-            <a:endParaRPr lang="en-US"/>
           </a:p>
         </p:txBody>
       </p:sp>
@@ -1599,7 +1977,12 @@
         <p:nvSpPr>
           <p:cNvPr id="7" name="Date Placeholder 6"/>
           <p:cNvSpPr>
-            <a:spLocks noGrp="1"/>
+            <a:spLocks noGrp="1" noChangeArrowheads="1"/>
+            <a:extLst>
+              <a:ext uri="smNativeData">
+                <pr:smNativeData xmlns:pr="smNativeData" xmlns="smNativeData" val="SMDATA_15_+nJ9aRMAAAAlAAAAZAAAAA0AAAAAkAAAAEgAAACQAAAASAAAAAAAAAABAAAAAAAAAAEAAABQAAAAAAAAAAAA4D8AAAAAAADgPwAAAAAAAOA/AAAAAAAA4D8AAAAAAADgPwAAAAAAAOA/AAAAAAAA4D8AAAAAAADgPwAAAAAAAOA/AAAAAAAA4D8CAAAAjAAAAAAAAAAAAAAAW5vVDP///wgAAAAAAAAAAAAAAAAAAAAAAAAAAAAAAAAAAAAAZAAAAAEAAABAAAAAAAAAAAAAAAAAAAAAAAAAAAAAAAAAAAAAAAAAAAAAAAAAAAAAAAAAAAAAAAAAAAAAAAAAAAAAAAAAAAAAAAAAAAAAAAAAAAAAAAAAAAAAAAAAAAAAFAAAADwAAAAAAAAAAAAAAAAAAAkUAAAAAQAAABQAAAAUAAAAFAAAAAEAAAAAAAAAZAAAAGQAAAAAAAAAZAAAAGQAAAAVAAAAYAAAAAAAAAAAAAAADwAAACADAAAAAAAAAAAAAAEAAACgMgAAVgcAAKr4//8BAAAAf39/AAEAAABkAAAAAAAAABQAAABAHwAAAAAAACYAAAAAAAAAwOD//wAAAAAmAAAAZAAAABYAAABMAAAAAAAAAAAAAAAEAAAAAAAAAAEAAADn5uYKAAAAACgAAAAoAAAAZAAAAGQAAAAAAAAAzMzMAAAAAABQAAAAUAAAAGQAAABkAAAAAAAAABcAAAAUAAAAAAAAAAAAAAD/fwAA/38AAAAAAAAJAAAABAAAAAAAAAAeAAAAaAAAAAAAAAAAAAAAAAAAAAAAAAAAAAAAECcAABAnAAAAAAAAAAAAAAAAAAAAAAAAAAAAAAAAAAAAAAAAAAAAABQAAAAAAAAAwMD/AAAAAABkAAAAMgAAAAAAAABkAAAAAAAAAH9/fwAKAAAAIgAAABgAAAAAAAAAAAAAAAAAAAAAAAAAAAAAAAAAAAAkAAAAJAAAAAAAAAAHAAAAAAAAAAAAAAAAAAAAAAAAAAAAAAAAAAAAf39/ACUAAABYAAAAAAAAAAAAAAAAAAAAAAAAAAAAAAAAAAAAAAAAAAAAAAAAAAAAAAAAAAAAAAA/AAAAAAAAAKCGAQAAAAAAAAAAAAAAAAAMAAAAAQAAAAAAAAAAAAAAAAAAAB8AAABUAAAAAAAABQAAAAEAAAAAAAAAAAAAAAAAAAAAAAAAAAAAAAAAAAAAAAAAAAAAAAJ/f38AAAAAA8zMzADAwP8Af39/AAAAAAAAAAAAAAAAAAAAAAAAAAAAIQAAABgAAAAUAAAAKAUAABonAAAIFgAAWSkAABAAAAAmAAAACAAAAAAAAAAAAAAA"/>
+              </a:ext>
+            </a:extLst>
           </p:cNvSpPr>
           <p:nvPr>
             <p:ph type="dt" sz="half" idx="10"/>
@@ -1610,11 +1993,12 @@
           <a:bodyPr/>
           <a:lstStyle/>
           <a:p>
-            <a:fld id="{7DE6D954-9D5F-4B54-AC5F-2CADB10B85DE}" type="datetimeFigureOut">
-              <a:rPr lang="en-US" smtClean="0"/>
+            <a:pPr>
+              <a:defRPr lang="en-us"/>
+            </a:pPr>
+            <a:fld id="{3AF9EF5C-12D7-AC19-9941-E44CA10F6FB1}" type="datetime1">
               <a:t>1/12/2026</a:t>
             </a:fld>
-            <a:endParaRPr lang="en-US"/>
           </a:p>
         </p:txBody>
       </p:sp>
@@ -1622,7 +2006,12 @@
         <p:nvSpPr>
           <p:cNvPr id="8" name="Footer Placeholder 7"/>
           <p:cNvSpPr>
-            <a:spLocks noGrp="1"/>
+            <a:spLocks noGrp="1" noChangeArrowheads="1"/>
+            <a:extLst>
+              <a:ext uri="smNativeData">
+                <pr:smNativeData xmlns:pr="smNativeData" xmlns="smNativeData" val="SMDATA_15_+nJ9aRMAAAAlAAAAZAAAAA0AAAAAkAAAAEgAAACQAAAASAAAAAAAAAABAAAAAAAAAAEAAABQAAAAAAAAAAAA4D8AAAAAAADgPwAAAAAAAOA/AAAAAAAA4D8AAAAAAADgPwAAAAAAAOA/AAAAAAAA4D8AAAAAAADgPwAAAAAAAOA/AAAAAAAA4D8CAAAAjAAAAAAAAAAAAAAAW5vVDP///wgAAAAAAAAAAAAAAAAAAAAAAAAAAAAAAAAAAAAAZAAAAAEAAABAAAAAAAAAAAAAAAAAAAAAAAAAAAAAAAAAAAAAAAAAAAAAAAAAAAAAAAAAAAAAAAAAAAAAAAAAAAAAAAAAAAAAAAAAAAAAAAAAAAAAAAAAAAAAAAAAAAAAFAAAADwAAAAAAAAAAAAAAAAAAAkUAAAAAQAAABQAAAAUAAAAFAAAAAEAAAAAAAAAZAAAAGQAAAAAAAAAZAAAAGQAAAAVAAAAYAAAAAAAAAAAAAAADwAAACADAAAAAAAAAAAAAAEAAACgMgAAVgcAAKr4//8BAAAAf39/AAEAAABkAAAAAAAAABQAAABAHwAAAAAAACYAAAAAAAAAwOD//wAAAAAmAAAAZAAAABYAAABMAAAAAAAAAAAAAAAEAAAAAAAAAAEAAADn5uYKAAAAACgAAAAoAAAAZAAAAGQAAAAAAAAAzMzMAAAAAABQAAAAUAAAAGQAAABkAAAAAAAAABcAAAAUAAAAAAAAAAAAAAD/fwAA/38AAAAAAAAJAAAABAAAAAAAAAAeAAAAaAAAAAAAAAAAAAAAAAAAAAAAAAAAAAAAECcAABAnAAAAAAAAAAAAAAAAAAAAAAAAAAAAAAAAAAAAAAAAAAAAABQAAAAAAAAAwMD/AAAAAABkAAAAMgAAAAAAAABkAAAAAAAAAH9/fwAKAAAAIgAAABgAAAAAAAAAAAAAAAAAAAAAAAAAAAAAAAAAAAAkAAAAJAAAAAAAAAAHAAAAAAAAAAAAAAAAAAAAAAAAAAAAAAAAAAAAf39/ACUAAABYAAAAAAAAAAAAAAAAAAAAAAAAAAAAAAAAAAAAAAAAAAAAAAAAAAAAAAAAAAAAAAA/AAAAAAAAAKCGAQAAAAAAAAAAAAAAAAAMAAAAAQAAAAAAAAAAAAAAAAAAAB8AAABUAAAAAAAABQAAAAEAAAAAAAAAAAAAAAAAAAAAAAAAAAAAAAAAAAAAAAAAAAAAAAJ/f38AAAAAA8zMzADAwP8Af39/AAAAAAAAAAAAAAAAAAAAAAAAAAAAIQAAABgAAAAUAAAA2BgAABonAAAoMgAAWSkAABAAAAAmAAAACAAAAAAAAAAAAAAA"/>
+              </a:ext>
+            </a:extLst>
           </p:cNvSpPr>
           <p:nvPr>
             <p:ph type="ftr" sz="quarter" idx="11"/>
@@ -1633,7 +2022,9 @@
           <a:bodyPr/>
           <a:lstStyle/>
           <a:p>
-            <a:endParaRPr lang="en-US"/>
+            <a:pPr>
+              <a:defRPr lang="en-us"/>
+            </a:pPr>
           </a:p>
         </p:txBody>
       </p:sp>
@@ -1641,7 +2032,12 @@
         <p:nvSpPr>
           <p:cNvPr id="9" name="Slide Number Placeholder 8"/>
           <p:cNvSpPr>
-            <a:spLocks noGrp="1"/>
+            <a:spLocks noGrp="1" noChangeArrowheads="1"/>
+            <a:extLst>
+              <a:ext uri="smNativeData">
+                <pr:smNativeData xmlns:pr="smNativeData" xmlns="smNativeData" val="SMDATA_15_+nJ9aRMAAAAlAAAAZAAAAA0AAAAAkAAAAEgAAACQAAAASAAAAAAAAAABAAAAAAAAAAEAAABQAAAAAAAAAAAA4D8AAAAAAADgPwAAAAAAAOA/AAAAAAAA4D8AAAAAAADgPwAAAAAAAOA/AAAAAAAA4D8AAAAAAADgPwAAAAAAAOA/AAAAAAAA4D8CAAAAjAAAAAAAAAAAAAAAW5vVDP///wgAAAAAAAAAAAAAAAAAAAAAAAAAAAAAAAAAAAAAZAAAAAEAAABAAAAAAAAAAAAAAAAAAAAAAAAAAAAAAAAAAAAAAAAAAAAAAAAAAAAAAAAAAAAAAAAAAAAAAAAAAAAAAAAAAAAAAAAAAAAAAAAAAAAAAAAAAAAAAAAAAAAAFAAAADwAAAAAAAAAAAAAAAAAAAkUAAAAAQAAABQAAAAUAAAAFAAAAAEAAAAAAAAAZAAAAGQAAAAAAAAAZAAAAGQAAAAVAAAAYAAAAAAAAAAAAAAADwAAACADAAAAAAAAAAAAAAEAAACgMgAAVgcAAKr4//8BAAAAf39/AAEAAABkAAAAAAAAABQAAABAHwAAAAAAACYAAAAAAAAAwOD//wAAAAAmAAAAZAAAABYAAABMAAAAAAAAAAAAAAAEAAAAAAAAAAEAAADn5uYKAAAAACgAAAAoAAAAZAAAAGQAAAAAAAAAzMzMAAAAAABQAAAAUAAAAGQAAABkAAAAAAAAABcAAAAUAAAAAAAAAAAAAAD/fwAA/38AAAAAAAAJAAAABAAAAAAAAAAeAAAAaAAAAAAAAAAAAAAAAAAAAAAAAAAAAAAAECcAABAnAAAAAAAAAAAAAAAAAAAAAAAAAAAAAAAAAAAAAAAAAAAAABQAAAAAAAAAwMD/AAAAAABkAAAAMgAAAAAAAABkAAAAAAAAAH9/fwAKAAAAIgAAABgAAAAAAAAAAAAAAAAAAAAAAAAAAAAAAAAAAAAkAAAAJAAAAAAAAAAHAAAAAAAAAAAAAAAAAAAAAAAAAAAAAAAAAAAAf39/ACUAAABYAAAAAAAAAAAAAAAAAAAAAAAAAAAAAAAAAAAAAAAAAAAAAAAAAAAAAAAAAAAAAAA/AAAAAAAAAKCGAQAAAAAAAAAAAAAAAAAMAAAAAQAAAAAAAAAAAAAAAAAAAB8AAABUAAAAAAAABQAAAAEAAAAAAAAAAAAAAAAAAAAAAAAAAAAAAAAAAAAAAAAAAAAAAAJ/f38AAAAAA8zMzADAwP8Af39/AAAAAAAAAAAAAAAAAAAAAAAAAAAAIQAAABgAAAAUAAAA+DQAABonAADYRQAAWSkAABAAAAAmAAAACAAAAAAAAAAAAAAA"/>
+              </a:ext>
+            </a:extLst>
           </p:cNvSpPr>
           <p:nvPr>
             <p:ph type="sldNum" sz="quarter" idx="12"/>
@@ -1652,29 +2048,26 @@
           <a:bodyPr/>
           <a:lstStyle/>
           <a:p>
-            <a:fld id="{58AA844A-00A1-4A5D-A246-C5B817417ED4}" type="slidenum">
-              <a:rPr lang="en-US" smtClean="0"/>
+            <a:pPr>
+              <a:defRPr lang="en-us"/>
+            </a:pPr>
+            <a:fld id="{3AF9FD12-5CD7-AC0B-9941-AA5EB30F6FFF}" type="slidenum">
               <a:t>‹#›</a:t>
             </a:fld>
-            <a:endParaRPr lang="en-US"/>
           </a:p>
         </p:txBody>
       </p:sp>
     </p:spTree>
-    <p:extLst>
-      <p:ext uri="{BB962C8B-B14F-4D97-AF65-F5344CB8AC3E}">
-        <p14:creationId xmlns:p14="http://schemas.microsoft.com/office/powerpoint/2010/main" val="38044860"/>
-      </p:ext>
-    </p:extLst>
   </p:cSld>
   <p:clrMapOvr>
     <a:masterClrMapping/>
   </p:clrMapOvr>
+  <p:hf hdr="0" ftr="0"/>
 </p:sldLayout>
 </file>
 
 <file path=ppt/slideLayouts/slideLayout6.xml><?xml version="1.0" encoding="utf-8"?>
-<p:sldLayout xmlns:a="http://schemas.openxmlformats.org/drawingml/2006/main" xmlns:r="http://schemas.openxmlformats.org/officeDocument/2006/relationships" xmlns:p="http://schemas.openxmlformats.org/presentationml/2006/main" type="titleOnly" preserve="1">
+<p:sldLayout xmlns:p="http://schemas.openxmlformats.org/presentationml/2006/main" xmlns:mc="http://schemas.openxmlformats.org/markup-compatibility/2006" xmlns:p14="http://schemas.microsoft.com/office/powerpoint/2010/main" xmlns:p15="http://schemas.microsoft.com/office/powerpoint/2012/main" xmlns:r="http://schemas.openxmlformats.org/officeDocument/2006/relationships" xmlns:a="http://schemas.openxmlformats.org/drawingml/2006/main" type="titleOnly" preserve="1">
   <p:cSld name="Title Only">
     <p:spTree>
       <p:nvGrpSpPr>
@@ -1694,7 +2087,12 @@
         <p:nvSpPr>
           <p:cNvPr id="2" name="Title 1"/>
           <p:cNvSpPr>
-            <a:spLocks noGrp="1"/>
+            <a:spLocks noGrp="1" noChangeArrowheads="1"/>
+            <a:extLst>
+              <a:ext uri="smNativeData">
+                <pr:smNativeData xmlns:pr="smNativeData" xmlns="smNativeData" val="SMDATA_15_+nJ9aRMAAAAlAAAAZAAAAA0AAAAAkAAAAEgAAACQAAAASAAAAAAAAAABAAAAAAAAAAEAAABQAAAAAAAAAAAA4D8AAAAAAADgPwAAAAAAAOA/AAAAAAAA4D8AAAAAAADgPwAAAAAAAOA/AAAAAAAA4D8AAAAAAADgPwAAAAAAAOA/AAAAAAAA4D8CAAAAjAAAAAAAAAAAAAAAW5vVDP///wgAAAAAAAAAAAAAAAAAAAAAAAAAAAAAAAAAAAAAZAAAAAEAAABAAAAAAAAAAAAAAAAAAAAAAAAAAAAAAAAAAAAAAAAAAAAAAAAAAAAAAAAAAAAAAAAAAAAAAAAAAAAAAAAAAAAAAAAAAAAAAAAAAAAAAAAAAAAAAAAAAAAAFAAAADwAAAAAAAAAAAAAAAAAAAkUAAAAAQAAABQAAAAUAAAAFAAAAAEAAAAAAAAAZAAAAGQAAAAAAAAAZAAAAGQAAAAVAAAAYAAAAAAAAAAAAAAADwAAACADAAAAAAAAAAAAAAEAAACgMgAAVgcAAKr4//8BAAAAf39/AAEAAABkAAAAAAAAABQAAABAHwAAAAAAACYAAAAAAAAAwOD//wAAAAAmAAAAZAAAABYAAABMAAAAAAAAAAAAAAAEAAAAAAAAAAEAAADn5uYKAAAAACgAAAAoAAAAZAAAAGQAAAAAAAAAzMzMAAAAAABQAAAAUAAAAGQAAABkAAAAAAAAABcAAAAUAAAAAAAAAAAAAAD/fwAA/38AAAAAAAAJAAAABAAAAAAAAAAeAAAAaAAAAAAAAAAAAAAAAAAAAAAAAAAAAAAAECcAABAnAAAAAAAAAAAAAAAAAAAAAAAAAAAAAAAAAAAAAAAAAAAAABQAAAAAAAAAwMD/AAAAAABkAAAAMgAAAAAAAABkAAAAAAAAAH9/fwAKAAAAIgAAABgAAAAAAAAAAAAAAAAAAAAAAAAAAAAAAAAAAAAkAAAAJAAAAAAAAAAHAAAAAAAAAAAAAAAAAAAAAAAAAAAAAAAAAAAAf39/ACUAAABYAAAAAAAAAAAAAAAAAAAAAAAAAAAAAAAAAAAAAAAAAAAAAAAAAAAAAAAAAAAAAAA/AAAAAAAAAKCGAQAAAAAAAAAAAAAAAAAMAAAAAQAAAAAAAAAAAAAAAAAAAB8AAABUAAAAAAAABQAAAAEAAAAAAAAAAAAAAAAAAAAAAAAAAAAAAAAAAAAAAAAAAAAAAAJ/f38AAAAAA8zMzADAwP8Af39/AAAAAAAAAAAAAAAAAAAAAAAAAAAAIQAAABgAAAAUAAAAKAUAAD8CAADYRQAAZwoAABAAAAAmAAAACAAAAAAAAAAAAAAA"/>
+              </a:ext>
+            </a:extLst>
           </p:cNvSpPr>
           <p:nvPr>
             <p:ph type="title"/>
@@ -1705,11 +2103,12 @@
           <a:bodyPr/>
           <a:lstStyle/>
           <a:p>
-            <a:r>
-              <a:rPr lang="en-US" smtClean="0"/>
+            <a:pPr>
+              <a:defRPr lang="en-us"/>
+            </a:pPr>
+            <a:r>
               <a:t>Click to edit Master title style</a:t>
             </a:r>
-            <a:endParaRPr lang="en-US"/>
           </a:p>
         </p:txBody>
       </p:sp>
@@ -1717,7 +2116,12 @@
         <p:nvSpPr>
           <p:cNvPr id="3" name="Date Placeholder 2"/>
           <p:cNvSpPr>
-            <a:spLocks noGrp="1"/>
+            <a:spLocks noGrp="1" noChangeArrowheads="1"/>
+            <a:extLst>
+              <a:ext uri="smNativeData">
+                <pr:smNativeData xmlns:pr="smNativeData" xmlns="smNativeData" val="SMDATA_15_+nJ9aRMAAAAlAAAAZAAAAA0AAAAAkAAAAEgAAACQAAAASAAAAAAAAAABAAAAAAAAAAEAAABQAAAAAAAAAAAA4D8AAAAAAADgPwAAAAAAAOA/AAAAAAAA4D8AAAAAAADgPwAAAAAAAOA/AAAAAAAA4D8AAAAAAADgPwAAAAAAAOA/AAAAAAAA4D8CAAAAjAAAAAAAAAAAAAAAW5vVDP///wgAAAAAAAAAAAAAAAAAAAAAAAAAAAAAAAAAAAAAZAAAAAEAAABAAAAAAAAAAAAAAAAAAAAAAAAAAAAAAAAAAAAAAAAAAAAAAAAAAAAAAAAAAAAAAAAAAAAAAAAAAAAAAAAAAAAAAAAAAAAAAAAAAAAAAAAAAAAAAAAAAAAAFAAAADwAAAAAAAAAAAAAAAAAAAkUAAAAAQAAABQAAAAUAAAAFAAAAAEAAAAAAAAAZAAAAGQAAAAAAAAAZAAAAGQAAAAVAAAAYAAAAAAAAAAAAAAADwAAACADAAAAAAAAAAAAAAEAAACgMgAAVgcAAKr4//8BAAAAf39/AAEAAABkAAAAAAAAABQAAABAHwAAAAAAACYAAAAAAAAAwOD//wAAAAAmAAAAZAAAABYAAABMAAAAAAAAAAAAAAAEAAAAAAAAAAEAAADn5uYKAAAAACgAAAAoAAAAZAAAAGQAAAAAAAAAzMzMAAAAAABQAAAAUAAAAGQAAABkAAAAAAAAABcAAAAUAAAAAAAAAAAAAAD/fwAA/38AAAAAAAAJAAAABAAAAAAAAAAeAAAAaAAAAAAAAAAAAAAAAAAAAAAAAAAAAAAAECcAABAnAAAAAAAAAAAAAAAAAAAAAAAAAAAAAAAAAAAAAAAAAAAAABQAAAAAAAAAwMD/AAAAAABkAAAAMgAAAAAAAABkAAAAAAAAAH9/fwAKAAAAIgAAABgAAAAAAAAAAAAAAAAAAAAAAAAAAAAAAAAAAAAkAAAAJAAAAAAAAAAHAAAAAAAAAAAAAAAAAAAAAAAAAAAAAAAAAAAAf39/ACUAAABYAAAAAAAAAAAAAAAAAAAAAAAAAAAAAAAAAAAAAAAAAAAAAAAAAAAAAAAAAAAAAAA/AAAAAAAAAKCGAQAAAAAAAAAAAAAAAAAMAAAAAQAAAAAAAAAAAAAAAAAAAB8AAABUAAAAAAAABQAAAAEAAAAAAAAAAAAAAAAAAAAAAAAAAAAAAAAAAAAAAAAAAAAAAAJ/f38AAAAAA8zMzADAwP8Af39/AAAAAAAAAAAAAAAAAAAAAAAAAAAAIQAAABgAAAAUAAAAKAUAABonAAAIFgAAWSkAABAAAAAmAAAACAAAAAAAAAAAAAAA"/>
+              </a:ext>
+            </a:extLst>
           </p:cNvSpPr>
           <p:nvPr>
             <p:ph type="dt" sz="half" idx="10"/>
@@ -1728,11 +2132,12 @@
           <a:bodyPr/>
           <a:lstStyle/>
           <a:p>
-            <a:fld id="{7DE6D954-9D5F-4B54-AC5F-2CADB10B85DE}" type="datetimeFigureOut">
-              <a:rPr lang="en-US" smtClean="0"/>
+            <a:pPr>
+              <a:defRPr lang="en-us"/>
+            </a:pPr>
+            <a:fld id="{3AF9802D-63D7-AC76-9941-9523CE0F6FC0}" type="datetime1">
               <a:t>1/12/2026</a:t>
             </a:fld>
-            <a:endParaRPr lang="en-US"/>
           </a:p>
         </p:txBody>
       </p:sp>
@@ -1740,7 +2145,12 @@
         <p:nvSpPr>
           <p:cNvPr id="4" name="Footer Placeholder 3"/>
           <p:cNvSpPr>
-            <a:spLocks noGrp="1"/>
+            <a:spLocks noGrp="1" noChangeArrowheads="1"/>
+            <a:extLst>
+              <a:ext uri="smNativeData">
+                <pr:smNativeData xmlns:pr="smNativeData" xmlns="smNativeData" val="SMDATA_15_+nJ9aRMAAAAlAAAAZAAAAA0AAAAAkAAAAEgAAACQAAAASAAAAAAAAAABAAAAAAAAAAEAAABQAAAAAAAAAAAA4D8AAAAAAADgPwAAAAAAAOA/AAAAAAAA4D8AAAAAAADgPwAAAAAAAOA/AAAAAAAA4D8AAAAAAADgPwAAAAAAAOA/AAAAAAAA4D8CAAAAjAAAAAAAAAAAAAAAW5vVDP///wgAAAAAAAAAAAAAAAAAAAAAAAAAAAAAAAAAAAAAZAAAAAEAAABAAAAAAAAAAAAAAAAAAAAAAAAAAAAAAAAAAAAAAAAAAAAAAAAAAAAAAAAAAAAAAAAAAAAAAAAAAAAAAAAAAAAAAAAAAAAAAAAAAAAAAAAAAAAAAAAAAAAAFAAAADwAAAAAAAAAAAAAAAAAAAkUAAAAAQAAABQAAAAUAAAAFAAAAAEAAAAAAAAAZAAAAGQAAAAAAAAAZAAAAGQAAAAVAAAAYAAAAAAAAAAAAAAADwAAACADAAAAAAAAAAAAAAEAAACgMgAAVgcAAKr4//8BAAAAf39/AAEAAABkAAAAAAAAABQAAABAHwAAAAAAACYAAAAAAAAAwOD//wAAAAAmAAAAZAAAABYAAABMAAAAAAAAAAAAAAAEAAAAAAAAAAEAAADn5uYKAAAAACgAAAAoAAAAZAAAAGQAAAAAAAAAzMzMAAAAAABQAAAAUAAAAGQAAABkAAAAAAAAABcAAAAUAAAAAAAAAAAAAAD/fwAA/38AAAAAAAAJAAAABAAAAAAAAAAeAAAAaAAAAAAAAAAAAAAAAAAAAAAAAAAAAAAAECcAABAnAAAAAAAAAAAAAAAAAAAAAAAAAAAAAAAAAAAAAAAAAAAAABQAAAAAAAAAwMD/AAAAAABkAAAAMgAAAAAAAABkAAAAAAAAAH9/fwAKAAAAIgAAABgAAAAAAAAAAAAAAAAAAAAAAAAAAAAAAAAAAAAkAAAAJAAAAAAAAAAHAAAAAAAAAAAAAAAAAAAAAAAAAAAAAAAAAAAAf39/ACUAAABYAAAAAAAAAAAAAAAAAAAAAAAAAAAAAAAAAAAAAAAAAAAAAAAAAAAAAAAAAAAAAAA/AAAAAAAAAKCGAQAAAAAAAAAAAAAAAAAMAAAAAQAAAAAAAAAAAAAAAAAAAB8AAABUAAAAAAAABQAAAAEAAAAAAAAAAAAAAAAAAAAAAAAAAAAAAAAAAAAAAAAAAAAAAAJ/f38AAAAAA8zMzADAwP8Af39/AAAAAAAAAAAAAAAAAAAAAAAAAAAAIQAAABgAAAAUAAAA2BgAABonAAAoMgAAWSkAABAAAAAmAAAACAAAAAAAAAAAAAAA"/>
+              </a:ext>
+            </a:extLst>
           </p:cNvSpPr>
           <p:nvPr>
             <p:ph type="ftr" sz="quarter" idx="11"/>
@@ -1751,7 +2161,9 @@
           <a:bodyPr/>
           <a:lstStyle/>
           <a:p>
-            <a:endParaRPr lang="en-US"/>
+            <a:pPr>
+              <a:defRPr lang="en-us"/>
+            </a:pPr>
           </a:p>
         </p:txBody>
       </p:sp>
@@ -1759,7 +2171,12 @@
         <p:nvSpPr>
           <p:cNvPr id="5" name="Slide Number Placeholder 4"/>
           <p:cNvSpPr>
-            <a:spLocks noGrp="1"/>
+            <a:spLocks noGrp="1" noChangeArrowheads="1"/>
+            <a:extLst>
+              <a:ext uri="smNativeData">
+                <pr:smNativeData xmlns:pr="smNativeData" xmlns="smNativeData" val="SMDATA_15_+nJ9aRMAAAAlAAAAZAAAAA0AAAAAkAAAAEgAAACQAAAASAAAAAAAAAABAAAAAAAAAAEAAABQAAAAAAAAAAAA4D8AAAAAAADgPwAAAAAAAOA/AAAAAAAA4D8AAAAAAADgPwAAAAAAAOA/AAAAAAAA4D8AAAAAAADgPwAAAAAAAOA/AAAAAAAA4D8CAAAAjAAAAAAAAAAAAAAAW5vVDP///wgAAAAAAAAAAAAAAAAAAAAAAAAAAAAAAAAAAAAAZAAAAAEAAABAAAAAAAAAAAAAAAAAAAAAAAAAAAAAAAAAAAAAAAAAAAAAAAAAAAAAAAAAAAAAAAAAAAAAAAAAAAAAAAAAAAAAAAAAAAAAAAAAAAAAAAAAAAAAAAAAAAAAFAAAADwAAAAAAAAAAAAAAAAAAAkUAAAAAQAAABQAAAAUAAAAFAAAAAEAAAAAAAAAZAAAAGQAAAAAAAAAZAAAAGQAAAAVAAAAYAAAAAAAAAAAAAAADwAAACADAAAAAAAAAAAAAAEAAACgMgAAVgcAAKr4//8BAAAAf39/AAEAAABkAAAAAAAAABQAAABAHwAAAAAAACYAAAAAAAAAwOD//wAAAAAmAAAAZAAAABYAAABMAAAAAAAAAAAAAAAEAAAAAAAAAAEAAADn5uYKAAAAACgAAAAoAAAAZAAAAGQAAAAAAAAAzMzMAAAAAABQAAAAUAAAAGQAAABkAAAAAAAAABcAAAAUAAAAAAAAAAAAAAD/fwAA/38AAAAAAAAJAAAABAAAAAAAAAAeAAAAaAAAAAAAAAAAAAAAAAAAAAAAAAAAAAAAECcAABAnAAAAAAAAAAAAAAAAAAAAAAAAAAAAAAAAAAAAAAAAAAAAABQAAAAAAAAAwMD/AAAAAABkAAAAMgAAAAAAAABkAAAAAAAAAH9/fwAKAAAAIgAAABgAAAAAAAAAAAAAAAAAAAAAAAAAAAAAAAAAAAAkAAAAJAAAAAAAAAAHAAAAAAAAAAAAAAAAAAAAAAAAAAAAAAAAAAAAf39/ACUAAABYAAAAAAAAAAAAAAAAAAAAAAAAAAAAAAAAAAAAAAAAAAAAAAAAAAAAAAAAAAAAAAA/AAAAAAAAAKCGAQAAAAAAAAAAAAAAAAAMAAAAAQAAAAAAAAAAAAAAAAAAAB8AAABUAAAAAAAABQAAAAEAAAAAAAAAAAAAAAAAAAAAAAAAAAAAAAAAAAAAAAAAAAAAAAJ/f38AAAAAA8zMzADAwP8Af39/AAAAAAAAAAAAAAAAAAAAAAAAAAAAIQAAABgAAAAUAAAA+DQAABonAADYRQAAWSkAABAAAAAmAAAACAAAAAAAAAAAAAAA"/>
+              </a:ext>
+            </a:extLst>
           </p:cNvSpPr>
           <p:nvPr>
             <p:ph type="sldNum" sz="quarter" idx="12"/>
@@ -1770,29 +2187,26 @@
           <a:bodyPr/>
           <a:lstStyle/>
           <a:p>
-            <a:fld id="{58AA844A-00A1-4A5D-A246-C5B817417ED4}" type="slidenum">
-              <a:rPr lang="en-US" smtClean="0"/>
+            <a:pPr>
+              <a:defRPr lang="en-us"/>
+            </a:pPr>
+            <a:fld id="{3AF9A098-D6D7-AC56-9941-2003EE0F6F75}" type="slidenum">
               <a:t>‹#›</a:t>
             </a:fld>
-            <a:endParaRPr lang="en-US"/>
           </a:p>
         </p:txBody>
       </p:sp>
     </p:spTree>
-    <p:extLst>
-      <p:ext uri="{BB962C8B-B14F-4D97-AF65-F5344CB8AC3E}">
-        <p14:creationId xmlns:p14="http://schemas.microsoft.com/office/powerpoint/2010/main" val="2949434157"/>
-      </p:ext>
-    </p:extLst>
   </p:cSld>
   <p:clrMapOvr>
     <a:masterClrMapping/>
   </p:clrMapOvr>
+  <p:hf hdr="0" ftr="0"/>
 </p:sldLayout>
 </file>
 
 <file path=ppt/slideLayouts/slideLayout7.xml><?xml version="1.0" encoding="utf-8"?>
-<p:sldLayout xmlns:a="http://schemas.openxmlformats.org/drawingml/2006/main" xmlns:r="http://schemas.openxmlformats.org/officeDocument/2006/relationships" xmlns:p="http://schemas.openxmlformats.org/presentationml/2006/main" type="blank" preserve="1">
+<p:sldLayout xmlns:p="http://schemas.openxmlformats.org/presentationml/2006/main" xmlns:mc="http://schemas.openxmlformats.org/markup-compatibility/2006" xmlns:p14="http://schemas.microsoft.com/office/powerpoint/2010/main" xmlns:p15="http://schemas.microsoft.com/office/powerpoint/2012/main" xmlns:r="http://schemas.openxmlformats.org/officeDocument/2006/relationships" xmlns:a="http://schemas.openxmlformats.org/drawingml/2006/main" type="blank" preserve="1">
   <p:cSld name="Blank">
     <p:spTree>
       <p:nvGrpSpPr>
@@ -1812,7 +2226,12 @@
         <p:nvSpPr>
           <p:cNvPr id="2" name="Date Placeholder 1"/>
           <p:cNvSpPr>
-            <a:spLocks noGrp="1"/>
+            <a:spLocks noGrp="1" noChangeArrowheads="1"/>
+            <a:extLst>
+              <a:ext uri="smNativeData">
+                <pr:smNativeData xmlns:pr="smNativeData" xmlns="smNativeData" val="SMDATA_15_+nJ9aRMAAAAlAAAAZAAAAA0AAAAAkAAAAEgAAACQAAAASAAAAAAAAAABAAAAAAAAAAEAAABQAAAAAAAAAAAA4D8AAAAAAADgPwAAAAAAAOA/AAAAAAAA4D8AAAAAAADgPwAAAAAAAOA/AAAAAAAA4D8AAAAAAADgPwAAAAAAAOA/AAAAAAAA4D8CAAAAjAAAAAAAAAAAAAAAW5vVDP///wgAAAAAAAAAAAAAAAAAAAAAAAAAAAAAAAAAAAAAZAAAAAEAAABAAAAAAAAAAAAAAAAAAAAAAAAAAAAAAAAAAAAAAAAAAAAAAAAAAAAAAAAAAAAAAAAAAAAAAAAAAAAAAAAAAAAAAAAAAAAAAAAAAAAAAAAAAAAAAAAAAAAAFAAAADwAAAAAAAAAAAAAAAAAAAkUAAAAAQAAABQAAAAUAAAAFAAAAAEAAAAAAAAAZAAAAGQAAAAAAAAAZAAAAGQAAAAVAAAAYAAAAAAAAAAAAAAADwAAACADAAAAAAAAAAAAAAEAAACgMgAAVgcAAKr4//8BAAAAf39/AAEAAABkAAAAAAAAABQAAABAHwAAAAAAACYAAAAAAAAAwOD//wAAAAAmAAAAZAAAABYAAABMAAAAAAAAAAAAAAAEAAAAAAAAAAEAAADn5uYKAAAAACgAAAAoAAAAZAAAAGQAAAAAAAAAzMzMAAAAAABQAAAAUAAAAGQAAABkAAAAAAAAABcAAAAUAAAAAAAAAAAAAAD/fwAA/38AAAAAAAAJAAAABAAAAAAAAAAeAAAAaAAAAAAAAAAAAAAAAAAAAAAAAAAAAAAAECcAABAnAAAAAAAAAAAAAAAAAAAAAAAAAAAAAAAAAAAAAAAAAAAAABQAAAAAAAAAwMD/AAAAAABkAAAAMgAAAAAAAABkAAAAAAAAAH9/fwAKAAAAIgAAABgAAAAAAAAAAAAAAAAAAAAAAAAAAAAAAAAAAAAkAAAAJAAAAAAAAAAHAAAAAAAAAAAAAAAAAAAAAAAAAAAAAAAAAAAAf39/ACUAAABYAAAAAAAAAAAAAAAAAAAAAAAAAAAAAAAAAAAAAAAAAAAAAAAAAAAAAAAAAAAAAAA/AAAAAAAAAKCGAQAAAAAAAAAAAAAAAAAMAAAAAQAAAAAAAAAAAAAAAAAAAB8AAABUAAAAAAAABQAAAAEAAAAAAAAAAAAAAAAAAAAAAAAAAAAAAAAAAAAAAAAAAAAAAAJ/f38AAAAAA8zMzADAwP8Af39/AAAAAAAAAAAAAAAAAAAAAAAAAAAAIQAAABgAAAAUAAAAKAUAABonAAAIFgAAWSkAABAAAAAmAAAACAAAAAAAAAAAAAAA"/>
+              </a:ext>
+            </a:extLst>
           </p:cNvSpPr>
           <p:nvPr>
             <p:ph type="dt" sz="half" idx="10"/>
@@ -1823,11 +2242,12 @@
           <a:bodyPr/>
           <a:lstStyle/>
           <a:p>
-            <a:fld id="{7DE6D954-9D5F-4B54-AC5F-2CADB10B85DE}" type="datetimeFigureOut">
-              <a:rPr lang="en-US" smtClean="0"/>
+            <a:pPr>
+              <a:defRPr lang="en-us"/>
+            </a:pPr>
+            <a:fld id="{3AF98B11-5FD7-AC7D-9941-A928C50F6FFC}" type="datetime1">
               <a:t>1/12/2026</a:t>
             </a:fld>
-            <a:endParaRPr lang="en-US"/>
           </a:p>
         </p:txBody>
       </p:sp>
@@ -1835,7 +2255,12 @@
         <p:nvSpPr>
           <p:cNvPr id="3" name="Footer Placeholder 2"/>
           <p:cNvSpPr>
-            <a:spLocks noGrp="1"/>
+            <a:spLocks noGrp="1" noChangeArrowheads="1"/>
+            <a:extLst>
+              <a:ext uri="smNativeData">
+                <pr:smNativeData xmlns:pr="smNativeData" xmlns="smNativeData" val="SMDATA_15_+nJ9aRMAAAAlAAAAZAAAAA0AAAAAkAAAAEgAAACQAAAASAAAAAAAAAABAAAAAAAAAAEAAABQAAAAAAAAAAAA4D8AAAAAAADgPwAAAAAAAOA/AAAAAAAA4D8AAAAAAADgPwAAAAAAAOA/AAAAAAAA4D8AAAAAAADgPwAAAAAAAOA/AAAAAAAA4D8CAAAAjAAAAAAAAAAAAAAAW5vVDP///wgAAAAAAAAAAAAAAAAAAAAAAAAAAAAAAAAAAAAAZAAAAAEAAABAAAAAAAAAAAAAAAAAAAAAAAAAAAAAAAAAAAAAAAAAAAAAAAAAAAAAAAAAAAAAAAAAAAAAAAAAAAAAAAAAAAAAAAAAAAAAAAAAAAAAAAAAAAAAAAAAAAAAFAAAADwAAAAAAAAAAAAAAAAAAAkUAAAAAQAAABQAAAAUAAAAFAAAAAEAAAAAAAAAZAAAAGQAAAAAAAAAZAAAAGQAAAAVAAAAYAAAAAAAAAAAAAAADwAAACADAAAAAAAAAAAAAAEAAACgMgAAVgcAAKr4//8BAAAAf39/AAEAAABkAAAAAAAAABQAAABAHwAAAAAAACYAAAAAAAAAwOD//wAAAAAmAAAAZAAAABYAAABMAAAAAAAAAAAAAAAEAAAAAAAAAAEAAADn5uYKAAAAACgAAAAoAAAAZAAAAGQAAAAAAAAAzMzMAAAAAABQAAAAUAAAAGQAAABkAAAAAAAAABcAAAAUAAAAAAAAAAAAAAD/fwAA/38AAAAAAAAJAAAABAAAAAAAAAAeAAAAaAAAAAAAAAAAAAAAAAAAAAAAAAAAAAAAECcAABAnAAAAAAAAAAAAAAAAAAAAAAAAAAAAAAAAAAAAAAAAAAAAABQAAAAAAAAAwMD/AAAAAABkAAAAMgAAAAAAAABkAAAAAAAAAH9/fwAKAAAAIgAAABgAAAAAAAAAAAAAAAAAAAAAAAAAAAAAAAAAAAAkAAAAJAAAAAAAAAAHAAAAAAAAAAAAAAAAAAAAAAAAAAAAAAAAAAAAf39/ACUAAABYAAAAAAAAAAAAAAAAAAAAAAAAAAAAAAAAAAAAAAAAAAAAAAAAAAAAAAAAAAAAAAA/AAAAAAAAAKCGAQAAAAAAAAAAAAAAAAAMAAAAAQAAAAAAAAAAAAAAAAAAAB8AAABUAAAAAAAABQAAAAEAAAAAAAAAAAAAAAAAAAAAAAAAAAAAAAAAAAAAAAAAAAAAAAJ/f38AAAAAA8zMzADAwP8Af39/AAAAAAAAAAAAAAAAAAAAAAAAAAAAIQAAABgAAAAUAAAA2BgAABonAAAoMgAAWSkAABAAAAAmAAAACAAAAAAAAAAAAAAA"/>
+              </a:ext>
+            </a:extLst>
           </p:cNvSpPr>
           <p:nvPr>
             <p:ph type="ftr" sz="quarter" idx="11"/>
@@ -1846,7 +2271,9 @@
           <a:bodyPr/>
           <a:lstStyle/>
           <a:p>
-            <a:endParaRPr lang="en-US"/>
+            <a:pPr>
+              <a:defRPr lang="en-us"/>
+            </a:pPr>
           </a:p>
         </p:txBody>
       </p:sp>
@@ -1854,7 +2281,12 @@
         <p:nvSpPr>
           <p:cNvPr id="4" name="Slide Number Placeholder 3"/>
           <p:cNvSpPr>
-            <a:spLocks noGrp="1"/>
+            <a:spLocks noGrp="1" noChangeArrowheads="1"/>
+            <a:extLst>
+              <a:ext uri="smNativeData">
+                <pr:smNativeData xmlns:pr="smNativeData" xmlns="smNativeData" val="SMDATA_15_+nJ9aRMAAAAlAAAAZAAAAA0AAAAAkAAAAEgAAACQAAAASAAAAAAAAAABAAAAAAAAAAEAAABQAAAAAAAAAAAA4D8AAAAAAADgPwAAAAAAAOA/AAAAAAAA4D8AAAAAAADgPwAAAAAAAOA/AAAAAAAA4D8AAAAAAADgPwAAAAAAAOA/AAAAAAAA4D8CAAAAjAAAAAAAAAAAAAAAW5vVDP///wgAAAAAAAAAAAAAAAAAAAAAAAAAAAAAAAAAAAAAZAAAAAEAAABAAAAAAAAAAAAAAAAAAAAAAAAAAAAAAAAAAAAAAAAAAAAAAAAAAAAAAAAAAAAAAAAAAAAAAAAAAAAAAAAAAAAAAAAAAAAAAAAAAAAAAAAAAAAAAAAAAAAAFAAAADwAAAAAAAAAAAAAAAAAAAkUAAAAAQAAABQAAAAUAAAAFAAAAAEAAAAAAAAAZAAAAGQAAAAAAAAAZAAAAGQAAAAVAAAAYAAAAAAAAAAAAAAADwAAACADAAAAAAAAAAAAAAEAAACgMgAAVgcAAKr4//8BAAAAf39/AAEAAABkAAAAAAAAABQAAABAHwAAAAAAACYAAAAAAAAAwOD//wAAAAAmAAAAZAAAABYAAABMAAAAAAAAAAAAAAAEAAAAAAAAAAEAAADn5uYKAAAAACgAAAAoAAAAZAAAAGQAAAAAAAAAzMzMAAAAAABQAAAAUAAAAGQAAABkAAAAAAAAABcAAAAUAAAAAAAAAAAAAAD/fwAA/38AAAAAAAAJAAAABAAAAAAAAAAeAAAAaAAAAAAAAAAAAAAAAAAAAAAAAAAAAAAAECcAABAnAAAAAAAAAAAAAAAAAAAAAAAAAAAAAAAAAAAAAAAAAAAAABQAAAAAAAAAwMD/AAAAAABkAAAAMgAAAAAAAABkAAAAAAAAAH9/fwAKAAAAIgAAABgAAAAAAAAAAAAAAAAAAAAAAAAAAAAAAAAAAAAkAAAAJAAAAAAAAAAHAAAAAAAAAAAAAAAAAAAAAAAAAAAAAAAAAAAAf39/ACUAAABYAAAAAAAAAAAAAAAAAAAAAAAAAAAAAAAAAAAAAAAAAAAAAAAAAAAAAAAAAAAAAAA/AAAAAAAAAKCGAQAAAAAAAAAAAAAAAAAMAAAAAQAAAAAAAAAAAAAAAAAAAB8AAABUAAAAAAAABQAAAAEAAAAAAAAAAAAAAAAAAAAAAAAAAAAAAAAAAAAAAAAAAAAAAAJ/f38AAAAAA8zMzADAwP8Af39/AAAAAAAAAAAAAAAAAAAAAAAAAAAAIQAAABgAAAAUAAAA+DQAABonAADYRQAAWSkAABAAAAAmAAAACAAAAAAAAAAAAAAA"/>
+              </a:ext>
+            </a:extLst>
           </p:cNvSpPr>
           <p:nvPr>
             <p:ph type="sldNum" sz="quarter" idx="12"/>
@@ -1865,29 +2297,26 @@
           <a:bodyPr/>
           <a:lstStyle/>
           <a:p>
-            <a:fld id="{58AA844A-00A1-4A5D-A246-C5B817417ED4}" type="slidenum">
-              <a:rPr lang="en-US" smtClean="0"/>
+            <a:pPr>
+              <a:defRPr lang="en-us"/>
+            </a:pPr>
+            <a:fld id="{3AF9E98A-C4D7-AC1F-9941-324AA70F6F67}" type="slidenum">
               <a:t>‹#›</a:t>
             </a:fld>
-            <a:endParaRPr lang="en-US"/>
           </a:p>
         </p:txBody>
       </p:sp>
     </p:spTree>
-    <p:extLst>
-      <p:ext uri="{BB962C8B-B14F-4D97-AF65-F5344CB8AC3E}">
-        <p14:creationId xmlns:p14="http://schemas.microsoft.com/office/powerpoint/2010/main" val="258349505"/>
-      </p:ext>
-    </p:extLst>
   </p:cSld>
   <p:clrMapOvr>
     <a:masterClrMapping/>
   </p:clrMapOvr>
+  <p:hf hdr="0" ftr="0"/>
 </p:sldLayout>
 </file>
 
 <file path=ppt/slideLayouts/slideLayout8.xml><?xml version="1.0" encoding="utf-8"?>
-<p:sldLayout xmlns:a="http://schemas.openxmlformats.org/drawingml/2006/main" xmlns:r="http://schemas.openxmlformats.org/officeDocument/2006/relationships" xmlns:p="http://schemas.openxmlformats.org/presentationml/2006/main" type="objTx" preserve="1">
+<p:sldLayout xmlns:p="http://schemas.openxmlformats.org/presentationml/2006/main" xmlns:mc="http://schemas.openxmlformats.org/markup-compatibility/2006" xmlns:p14="http://schemas.microsoft.com/office/powerpoint/2010/main" xmlns:p15="http://schemas.microsoft.com/office/powerpoint/2012/main" xmlns:r="http://schemas.openxmlformats.org/officeDocument/2006/relationships" xmlns:a="http://schemas.openxmlformats.org/drawingml/2006/main" type="objTx" preserve="1">
   <p:cSld name="Content with Caption">
     <p:spTree>
       <p:nvGrpSpPr>
@@ -1907,7 +2336,12 @@
         <p:nvSpPr>
           <p:cNvPr id="2" name="Title 1"/>
           <p:cNvSpPr>
-            <a:spLocks noGrp="1"/>
+            <a:spLocks noGrp="1" noChangeArrowheads="1"/>
+            <a:extLst>
+              <a:ext uri="smNativeData">
+                <pr:smNativeData xmlns:pr="smNativeData" xmlns="smNativeData" val="SMDATA_15_+nJ9aRMAAAAlAAAAZAAAAA0AAAAAkAAAAEgAAACQAAAASAAAAAAAAAACAAAAAAAAAAEAAABQAAAAAAAAAAAA4D8AAAAAAADgPwAAAAAAAOA/AAAAAAAA4D8AAAAAAADgPwAAAAAAAOA/AAAAAAAA4D8AAAAAAADgPwAAAAAAAOA/AAAAAAAA4D8CAAAAjAAAAAAAAAAAAAAAW5vVDP///wgAAAAAAAAAAAAAAAAAAAAAAAAAAAAAAAAAAAAAZAAAAAEAAABAAAAAAAAAAAAAAAAAAAAAAAAAAAAAAAAAAAAAAAAAAAAAAAAAAAAAAAAAAAAAAAAAAAAAAAAAAAAAAAAAAAAAAAAAAAAAAAAAAAAAAAAAAAAAAAAAAAAAFAAAADwAAAAAAAAAAAAAAAAAAAkUAAAAAQAAABQAAAAUAAAAFAAAAAEAAAAAAAAAZAAAAGQAAAAAAAAAZAAAAGQAAAAVAAAAYAAAAAAAAAAAAAAADwAAACADAAAAAAAAAAAAAAEAAACgMgAAVgcAAKr4//8BAAAAf39/AAEAAABkAAAAAAAAABQAAABAHwAAAAAAACYAAAAAAAAAwOD//wAAAAAmAAAAZAAAABYAAABMAAAAAAAAAAAAAAAEAAAAAAAAAAEAAADn5uYKAAAAACgAAAAoAAAAZAAAAGQAAAAAAAAAzMzMAAAAAABQAAAAUAAAAGQAAABkAAAAAAAAABcAAAAUAAAAAAAAAAAAAAD/fwAA/38AAAAAAAAJAAAABAAAAAAAAAAeAAAAaAAAAAAAAAAAAAAAAAAAAAAAAAAAAAAAECcAABAnAAAAAAAAAAAAAAAAAAAAAAAAAAAAAAAAAAAAAAAAAAAAABQAAAAAAAAAwMD/AAAAAABkAAAAMgAAAAAAAABkAAAAAAAAAH9/fwAKAAAAIgAAABgAAAAAAAAAAAAAAAAAAAAAAAAAAAAAAAAAAAAkAAAAJAAAAAAAAAAHAAAAAAAAAAAAAAAAAAAAAAAAAAAAAAAAAAAAf39/ACUAAABYAAAAAAAAAAAAAAAAAAAAAAAAAAAAAAAAAAAAAAAAAAAAAAAAAAAAAAAAAAAAAAA/AAAAAAAAAKCGAQAAAAAAAAAAAAAAAAAMAAAAAQAAAAAAAAAAAAAAAAAAAB8AAABUAAAAAAAABQAAAAEAAAAAAAAAAAAAAAAAAAAAAAAAAAAAAAAAAAAAAAAAAAAAAAJ/f38AAAAAA8zMzADAwP8Af39/AAAAAAAAAAAAAAAAAAAAAAAAAAAAIQAAABgAAAAUAAAAKwUAANACAABbHQAAqAwAABAAAAAmAAAACAAAAIGAAAAAAAAA"/>
+              </a:ext>
+            </a:extLst>
           </p:cNvSpPr>
           <p:nvPr>
             <p:ph type="title"/>
@@ -1915,23 +2349,52 @@
         </p:nvSpPr>
         <p:spPr>
           <a:xfrm>
-            <a:off x="839788" y="457200"/>
-            <a:ext cx="3932237" cy="1600200"/>
+            <a:off x="840105" y="457200"/>
+            <a:ext cx="3931920" cy="1600200"/>
           </a:xfrm>
         </p:spPr>
         <p:txBody>
-          <a:bodyPr anchor="b"/>
+          <a:bodyPr vert="horz" wrap="square" lIns="91440" tIns="45720" rIns="91440" bIns="45720" numCol="1" spcCol="215900" anchor="b">
+            <a:prstTxWarp prst="textNoShape">
+              <a:avLst/>
+            </a:prstTxWarp>
+          </a:bodyPr>
           <a:lstStyle>
             <a:lvl1pPr>
-              <a:defRPr sz="3200"/>
+              <a:defRPr lang="en-us" sz="3200" cap="none"/>
             </a:lvl1pPr>
+            <a:lvl2pPr>
+              <a:defRPr lang="en-us"/>
+            </a:lvl2pPr>
+            <a:lvl3pPr>
+              <a:defRPr lang="en-us"/>
+            </a:lvl3pPr>
+            <a:lvl4pPr>
+              <a:defRPr lang="en-us"/>
+            </a:lvl4pPr>
+            <a:lvl5pPr>
+              <a:defRPr lang="en-us"/>
+            </a:lvl5pPr>
+            <a:lvl6pPr>
+              <a:defRPr lang="en-us"/>
+            </a:lvl6pPr>
+            <a:lvl7pPr>
+              <a:defRPr lang="en-us"/>
+            </a:lvl7pPr>
+            <a:lvl8pPr>
+              <a:defRPr lang="en-us"/>
+            </a:lvl8pPr>
+            <a:lvl9pPr>
+              <a:defRPr lang="en-us"/>
+            </a:lvl9pPr>
           </a:lstStyle>
           <a:p>
-            <a:r>
-              <a:rPr lang="en-US" smtClean="0"/>
+            <a:pPr>
+              <a:defRPr lang="en-us"/>
+            </a:pPr>
+            <a:r>
               <a:t>Click to edit Master title style</a:t>
             </a:r>
-            <a:endParaRPr lang="en-US"/>
           </a:p>
         </p:txBody>
       </p:sp>
@@ -1939,7 +2402,12 @@
         <p:nvSpPr>
           <p:cNvPr id="3" name="Content Placeholder 2"/>
           <p:cNvSpPr>
-            <a:spLocks noGrp="1"/>
+            <a:spLocks noGrp="1" noChangeArrowheads="1"/>
+            <a:extLst>
+              <a:ext uri="smNativeData">
+                <pr:smNativeData xmlns:pr="smNativeData" xmlns="smNativeData" val="SMDATA_15_+nJ9aRMAAAAlAAAAZAAAAA0AAAAAkAAAAEgAAACQAAAASAAAAAAAAAAAAAAAAAAAAAEAAABQAAAAAAAAAAAA4D8AAAAAAADgPwAAAAAAAOA/AAAAAAAA4D8AAAAAAADgPwAAAAAAAOA/AAAAAAAA4D8AAAAAAADgPwAAAAAAAOA/AAAAAAAA4D8CAAAAjAAAAAAAAAAAAAAAW5vVDP///wgAAAAAAAAAAAAAAAAAAAAAAAAAAAAAAAAAAAAAZAAAAAEAAABAAAAAAAAAAAAAAAAAAAAAAAAAAAAAAAAAAAAAAAAAAAAAAAAAAAAAAAAAAAAAAAAAAAAAAAAAAAAAAAAAAAAAAAAAAAAAAAAAAAAAAAAAAAAAAAAAAAAAFAAAADwAAAAAAAAAAAAAAAAAAAkUAAAAAQAAABQAAAAUAAAAFAAAAAEAAAAAAAAAZAAAAGQAAAAAAAAAZAAAAGQAAAAVAAAAYAAAAAAAAAAAAAAADwAAACADAAAAAAAAAAAAAAEAAACgMgAAVgcAAKr4//8BAAAAf39/AAEAAABkAAAAAAAAABQAAABAHwAAAAAAACYAAAAAAAAAwOD//wAAAAAmAAAAZAAAABYAAABMAAAAAAAAAAAAAAAEAAAAAAAAAAEAAADn5uYKAAAAACgAAAAoAAAAZAAAAGQAAAAAAAAAzMzMAAAAAABQAAAAUAAAAGQAAABkAAAAAAAAABcAAAAUAAAAAAAAAAAAAAD/fwAA/38AAAAAAAAJAAAABAAAAAAAAAAeAAAAaAAAAAAAAAAAAAAAAAAAAAAAAAAAAAAAECcAABAnAAAAAAAAAAAAAAAAAAAAAAAAAAAAAAAAAAAAAAAAAAAAABQAAAAAAAAAwMD/AAAAAABkAAAAMgAAAAAAAABkAAAAAAAAAH9/fwAKAAAAIgAAABgAAAAAAAAAAAAAAAAAAAAAAAAAAAAAAAAAAAAkAAAAJAAAAAAAAAAHAAAAAAAAAAAAAAAAAAAAAAAAAAAAAAAAAAAAf39/ACUAAABYAAAAAAAAAAAAAAAAAAAAAAAAAAAAAAAAAAAAAAAAAAAAAAAAAAAAAAAAAAAAAAA/AAAAAAAAAKCGAQAAAAAAAAAAAAAAAAAMAAAAAQAAAAAAAAAAAAAAAAAAAB8AAABUAAAAAAAABQAAAAEAAAAAAAAAAAAAAAAAAAAAAAAAAAAAAAAAAAAAAAAAAAAAAAJ/f38AAAAAA8zMzADAwP8Af39/AAAAAAAAAAAAAAAAAAAAAAAAAAAAIQAAABgAAAAUAAAA4x8AABMGAADbRQAADiQAABAAAAAmAAAACAAAAAGAAAAAAAAA"/>
+              </a:ext>
+            </a:extLst>
           </p:cNvSpPr>
           <p:nvPr>
             <p:ph idx="1"/>
@@ -1947,7 +2415,7 @@
         </p:nvSpPr>
         <p:spPr>
           <a:xfrm>
-            <a:off x="5183188" y="987425"/>
+            <a:off x="5183505" y="987425"/>
             <a:ext cx="6172200" cy="4873625"/>
           </a:xfrm>
         </p:spPr>
@@ -1955,68 +2423,72 @@
           <a:bodyPr/>
           <a:lstStyle>
             <a:lvl1pPr>
-              <a:defRPr sz="3200"/>
+              <a:defRPr lang="en-us" sz="3200" cap="none"/>
             </a:lvl1pPr>
             <a:lvl2pPr>
-              <a:defRPr sz="2800"/>
+              <a:defRPr lang="en-us" sz="2800" cap="none"/>
             </a:lvl2pPr>
             <a:lvl3pPr>
-              <a:defRPr sz="2400"/>
+              <a:defRPr lang="en-us" sz="2400" cap="none"/>
             </a:lvl3pPr>
             <a:lvl4pPr>
-              <a:defRPr sz="2000"/>
+              <a:defRPr lang="en-us" sz="2000" cap="none"/>
             </a:lvl4pPr>
             <a:lvl5pPr>
-              <a:defRPr sz="2000"/>
+              <a:defRPr lang="en-us" sz="2000" cap="none"/>
             </a:lvl5pPr>
             <a:lvl6pPr>
-              <a:defRPr sz="2000"/>
+              <a:defRPr lang="en-us" sz="2000" cap="none"/>
             </a:lvl6pPr>
             <a:lvl7pPr>
-              <a:defRPr sz="2000"/>
+              <a:defRPr lang="en-us" sz="2000" cap="none"/>
             </a:lvl7pPr>
             <a:lvl8pPr>
-              <a:defRPr sz="2000"/>
+              <a:defRPr lang="en-us" sz="2000" cap="none"/>
             </a:lvl8pPr>
             <a:lvl9pPr>
-              <a:defRPr sz="2000"/>
+              <a:defRPr lang="en-us" sz="2000" cap="none"/>
             </a:lvl9pPr>
           </a:lstStyle>
           <a:p>
-            <a:pPr lvl="0"/>
-            <a:r>
-              <a:rPr lang="en-US" smtClean="0"/>
+            <a:pPr>
+              <a:defRPr lang="en-us"/>
+            </a:pPr>
+            <a:r>
               <a:t>Click to edit Master text styles</a:t>
             </a:r>
           </a:p>
           <a:p>
-            <a:pPr lvl="1"/>
-            <a:r>
-              <a:rPr lang="en-US" smtClean="0"/>
+            <a:pPr lvl="1">
+              <a:defRPr lang="en-us"/>
+            </a:pPr>
+            <a:r>
               <a:t>Second level</a:t>
             </a:r>
           </a:p>
           <a:p>
-            <a:pPr lvl="2"/>
-            <a:r>
-              <a:rPr lang="en-US" smtClean="0"/>
+            <a:pPr lvl="2">
+              <a:defRPr lang="en-us"/>
+            </a:pPr>
+            <a:r>
               <a:t>Third level</a:t>
             </a:r>
           </a:p>
           <a:p>
-            <a:pPr lvl="3"/>
-            <a:r>
-              <a:rPr lang="en-US" smtClean="0"/>
+            <a:pPr lvl="3">
+              <a:defRPr lang="en-us"/>
+            </a:pPr>
+            <a:r>
               <a:t>Fourth level</a:t>
             </a:r>
           </a:p>
           <a:p>
-            <a:pPr lvl="4"/>
-            <a:r>
-              <a:rPr lang="en-US" smtClean="0"/>
+            <a:pPr lvl="4">
+              <a:defRPr lang="en-us"/>
+            </a:pPr>
+            <a:r>
               <a:t>Fifth level</a:t>
             </a:r>
-            <a:endParaRPr lang="en-US"/>
           </a:p>
         </p:txBody>
       </p:sp>
@@ -2024,16 +2496,21 @@
         <p:nvSpPr>
           <p:cNvPr id="4" name="Text Placeholder 3"/>
           <p:cNvSpPr>
-            <a:spLocks noGrp="1"/>
-          </p:cNvSpPr>
-          <p:nvPr>
-            <p:ph type="body" sz="half" idx="2"/>
+            <a:spLocks noGrp="1" noChangeArrowheads="1"/>
+            <a:extLst>
+              <a:ext uri="smNativeData">
+                <pr:smNativeData xmlns:pr="smNativeData" xmlns="smNativeData" val="SMDATA_15_+nJ9aRMAAAAlAAAAZAAAAA0AAAAAkAAAAEgAAACQAAAASAAAAAAAAAAAAAAAAAAAAAEAAABQAAAAAAAAAAAA4D8AAAAAAADgPwAAAAAAAOA/AAAAAAAA4D8AAAAAAADgPwAAAAAAAOA/AAAAAAAA4D8AAAAAAADgPwAAAAAAAOA/AAAAAAAA4D8CAAAAjAAAAAAAAAAAAAAAW5vVDP///wgAAAAAAAAAAAAAAAAAAAAAAAAAAAAAAAAAAAAAZAAAAAEAAABAAAAAAAAAAAAAAAAAAAAAAAAAAAAAAAAAAAAAAAAAAAAAAAAAAAAAAAAAAAAAAAAAAAAAAAAAAAAAAAAAAAAAAAAAAAAAAAAAAAAAAAAAAAAAAAAAAAAAFAAAADwAAAAAAAAAAAAAAAAAAAkUAAAAAQAAABQAAAAUAAAAFAAAAAEAAAAAAAAAZAAAAGQAAAAAAAAAZAAAAGQAAAAVAAAAYAAAAAAAAAAAAAAADwAAACADAAAAAAAAAAAAAAEAAACgMgAAVgcAAKr4//8BAAAAf39/AAEAAABkAAAAAAAAABQAAABAHwAAAAAAACYAAAAAAAAAwOD//wAAAAAmAAAAZAAAABYAAABMAAAAAAAAAAAAAAAEAAAAAAAAAAEAAADn5uYKAAAAACgAAAAoAAAAZAAAAGQAAAAAAAAAzMzMAAAAAABQAAAAUAAAAGQAAABkAAAAAAAAABcAAAAUAAAAAAAAAAAAAAD/fwAA/38AAAAAAAAJAAAABAAAAAAAAAAeAAAAaAAAAAAAAAAAAAAAAAAAAAAAAAAAAAAAECcAABAnAAAAAAAAAAAAAAAAAAAAAAAAAAAAAAAAAAAAAAAAAAAAABQAAAAAAAAAwMD/AAAAAABkAAAAMgAAAAAAAABkAAAAAAAAAH9/fwAKAAAAIgAAABgAAAAAAAAAAAAAAAAAAAAAAAAAAAAAAAAAAAAkAAAAJAAAAAAAAAAHAAAAAAAAAAAAAAAAAAAAAAAAAAAAAAAAAAAAf39/ACUAAABYAAAAAAAAAAAAAAAAAAAAAAAAAAAAAAAAAAAAAAAAAAAAAAAAAAAAAAAAAAAAAAA/AAAAAAAAAKCGAQAAAAAAAAAAAAAAAAAMAAAAAQAAAAAAAAAAAAAAAAAAAB8AAABUAAAAAAAABQAAAAEAAAAAAAAAAAAAAAAAAAAAAAAAAAAAAAAAAAAAAAAAAAAAAAJ/f38AAAAAA8zMzADAwP8Af39/AAAAAAAAAAAAAAAAAAAAAAAAAAAAIQAAABgAAAAUAAAAKwUAAKgMAABbHQAAGyQAABAAAAAmAAAACAAAAAGAAAAAAAAA"/>
+              </a:ext>
+            </a:extLst>
+          </p:cNvSpPr>
+          <p:nvPr>
+            <p:ph idx="2"/>
           </p:nvPr>
         </p:nvSpPr>
         <p:spPr>
           <a:xfrm>
-            <a:off x="839788" y="2057400"/>
-            <a:ext cx="3932237" cy="3811588"/>
+            <a:off x="840105" y="2057400"/>
+            <a:ext cx="3931920" cy="3811905"/>
           </a:xfrm>
         </p:spPr>
         <p:txBody>
@@ -2041,45 +2518,46 @@
           <a:lstStyle>
             <a:lvl1pPr marL="0" indent="0">
               <a:buNone/>
-              <a:defRPr sz="1600"/>
+              <a:defRPr lang="en-us" sz="1600" cap="none"/>
             </a:lvl1pPr>
             <a:lvl2pPr marL="457200" indent="0">
               <a:buNone/>
-              <a:defRPr sz="1400"/>
+              <a:defRPr lang="en-us" sz="1400" cap="none"/>
             </a:lvl2pPr>
             <a:lvl3pPr marL="914400" indent="0">
               <a:buNone/>
-              <a:defRPr sz="1200"/>
+              <a:defRPr lang="en-us" sz="1200" cap="none"/>
             </a:lvl3pPr>
             <a:lvl4pPr marL="1371600" indent="0">
               <a:buNone/>
-              <a:defRPr sz="1000"/>
+              <a:defRPr lang="en-us" sz="1000" cap="none"/>
             </a:lvl4pPr>
             <a:lvl5pPr marL="1828800" indent="0">
               <a:buNone/>
-              <a:defRPr sz="1000"/>
+              <a:defRPr lang="en-us" sz="1000" cap="none"/>
             </a:lvl5pPr>
             <a:lvl6pPr marL="2286000" indent="0">
               <a:buNone/>
-              <a:defRPr sz="1000"/>
+              <a:defRPr lang="en-us" sz="1000" cap="none"/>
             </a:lvl6pPr>
             <a:lvl7pPr marL="2743200" indent="0">
               <a:buNone/>
-              <a:defRPr sz="1000"/>
+              <a:defRPr lang="en-us" sz="1000" cap="none"/>
             </a:lvl7pPr>
             <a:lvl8pPr marL="3200400" indent="0">
               <a:buNone/>
-              <a:defRPr sz="1000"/>
+              <a:defRPr lang="en-us" sz="1000" cap="none"/>
             </a:lvl8pPr>
             <a:lvl9pPr marL="3657600" indent="0">
               <a:buNone/>
-              <a:defRPr sz="1000"/>
+              <a:defRPr lang="en-us" sz="1000" cap="none"/>
             </a:lvl9pPr>
           </a:lstStyle>
           <a:p>
-            <a:pPr lvl="0"/>
-            <a:r>
-              <a:rPr lang="en-US" smtClean="0"/>
+            <a:pPr>
+              <a:defRPr lang="en-us"/>
+            </a:pPr>
+            <a:r>
               <a:t>Click to edit Master text styles</a:t>
             </a:r>
           </a:p>
@@ -2089,7 +2567,12 @@
         <p:nvSpPr>
           <p:cNvPr id="5" name="Date Placeholder 4"/>
           <p:cNvSpPr>
-            <a:spLocks noGrp="1"/>
+            <a:spLocks noGrp="1" noChangeArrowheads="1"/>
+            <a:extLst>
+              <a:ext uri="smNativeData">
+                <pr:smNativeData xmlns:pr="smNativeData" xmlns="smNativeData" val="SMDATA_15_+nJ9aRMAAAAlAAAAZAAAAA0AAAAAkAAAAEgAAACQAAAASAAAAAAAAAABAAAAAAAAAAEAAABQAAAAAAAAAAAA4D8AAAAAAADgPwAAAAAAAOA/AAAAAAAA4D8AAAAAAADgPwAAAAAAAOA/AAAAAAAA4D8AAAAAAADgPwAAAAAAAOA/AAAAAAAA4D8CAAAAjAAAAAAAAAAAAAAAW5vVDP///wgAAAAAAAAAAAAAAAAAAAAAAAAAAAAAAAAAAAAAZAAAAAEAAABAAAAAAAAAAAAAAAAAAAAAAAAAAAAAAAAAAAAAAAAAAAAAAAAAAAAAAAAAAAAAAAAAAAAAAAAAAAAAAAAAAAAAAAAAAAAAAAAAAAAAAAAAAAAAAAAAAAAAFAAAADwAAAAAAAAAAAAAAAAAAAkUAAAAAQAAABQAAAAUAAAAFAAAAAEAAAAAAAAAZAAAAGQAAAAAAAAAZAAAAGQAAAAVAAAAYAAAAAAAAAAAAAAADwAAACADAAAAAAAAAAAAAAEAAACgMgAAVgcAAKr4//8BAAAAf39/AAEAAABkAAAAAAAAABQAAABAHwAAAAAAACYAAAAAAAAAwOD//wAAAAAmAAAAZAAAABYAAABMAAAAAAAAAAAAAAAEAAAAAAAAAAEAAADn5uYKAAAAACgAAAAoAAAAZAAAAGQAAAAAAAAAzMzMAAAAAABQAAAAUAAAAGQAAABkAAAAAAAAABcAAAAUAAAAAAAAAAAAAAD/fwAA/38AAAAAAAAJAAAABAAAAAAAAAAeAAAAaAAAAAAAAAAAAAAAAAAAAAAAAAAAAAAAECcAABAnAAAAAAAAAAAAAAAAAAAAAAAAAAAAAAAAAAAAAAAAAAAAABQAAAAAAAAAwMD/AAAAAABkAAAAMgAAAAAAAABkAAAAAAAAAH9/fwAKAAAAIgAAABgAAAAAAAAAAAAAAAAAAAAAAAAAAAAAAAAAAAAkAAAAJAAAAAAAAAAHAAAAAAAAAAAAAAAAAAAAAAAAAAAAAAAAAAAAf39/ACUAAABYAAAAAAAAAAAAAAAAAAAAAAAAAAAAAAAAAAAAAAAAAAAAAAAAAAAAAAAAAAAAAAA/AAAAAAAAAKCGAQAAAAAAAAAAAAAAAAAMAAAAAQAAAAAAAAAAAAAAAAAAAB8AAABUAAAAAAAABQAAAAEAAAAAAAAAAAAAAAAAAAAAAAAAAAAAAAAAAAAAAAAAAAAAAAJ/f38AAAAAA8zMzADAwP8Af39/AAAAAAAAAAAAAAAAAAAAAAAAAAAAIQAAABgAAAAUAAAAKAUAABonAAAIFgAAWSkAABAAAAAmAAAACAAAAAAAAAAAAAAA"/>
+              </a:ext>
+            </a:extLst>
           </p:cNvSpPr>
           <p:nvPr>
             <p:ph type="dt" sz="half" idx="10"/>
@@ -2100,11 +2583,12 @@
           <a:bodyPr/>
           <a:lstStyle/>
           <a:p>
-            <a:fld id="{7DE6D954-9D5F-4B54-AC5F-2CADB10B85DE}" type="datetimeFigureOut">
-              <a:rPr lang="en-US" smtClean="0"/>
+            <a:pPr>
+              <a:defRPr lang="en-us"/>
+            </a:pPr>
+            <a:fld id="{3AF9D19F-D1D7-AC27-9941-27729F0F6F72}" type="datetime1">
               <a:t>1/12/2026</a:t>
             </a:fld>
-            <a:endParaRPr lang="en-US"/>
           </a:p>
         </p:txBody>
       </p:sp>
@@ -2112,7 +2596,12 @@
         <p:nvSpPr>
           <p:cNvPr id="6" name="Footer Placeholder 5"/>
           <p:cNvSpPr>
-            <a:spLocks noGrp="1"/>
+            <a:spLocks noGrp="1" noChangeArrowheads="1"/>
+            <a:extLst>
+              <a:ext uri="smNativeData">
+                <pr:smNativeData xmlns:pr="smNativeData" xmlns="smNativeData" val="SMDATA_15_+nJ9aRMAAAAlAAAAZAAAAA0AAAAAkAAAAEgAAACQAAAASAAAAAAAAAABAAAAAAAAAAEAAABQAAAAAAAAAAAA4D8AAAAAAADgPwAAAAAAAOA/AAAAAAAA4D8AAAAAAADgPwAAAAAAAOA/AAAAAAAA4D8AAAAAAADgPwAAAAAAAOA/AAAAAAAA4D8CAAAAjAAAAAAAAAAAAAAAW5vVDP///wgAAAAAAAAAAAAAAAAAAAAAAAAAAAAAAAAAAAAAZAAAAAEAAABAAAAAAAAAAAAAAAAAAAAAAAAAAAAAAAAAAAAAAAAAAAAAAAAAAAAAAAAAAAAAAAAAAAAAAAAAAAAAAAAAAAAAAAAAAAAAAAAAAAAAAAAAAAAAAAAAAAAAFAAAADwAAAAAAAAAAAAAAAAAAAkUAAAAAQAAABQAAAAUAAAAFAAAAAEAAAAAAAAAZAAAAGQAAAAAAAAAZAAAAGQAAAAVAAAAYAAAAAAAAAAAAAAADwAAACADAAAAAAAAAAAAAAEAAACgMgAAVgcAAKr4//8BAAAAf39/AAEAAABkAAAAAAAAABQAAABAHwAAAAAAACYAAAAAAAAAwOD//wAAAAAmAAAAZAAAABYAAABMAAAAAAAAAAAAAAAEAAAAAAAAAAEAAADn5uYKAAAAACgAAAAoAAAAZAAAAGQAAAAAAAAAzMzMAAAAAABQAAAAUAAAAGQAAABkAAAAAAAAABcAAAAUAAAAAAAAAAAAAAD/fwAA/38AAAAAAAAJAAAABAAAAAAAAAAeAAAAaAAAAAAAAAAAAAAAAAAAAAAAAAAAAAAAECcAABAnAAAAAAAAAAAAAAAAAAAAAAAAAAAAAAAAAAAAAAAAAAAAABQAAAAAAAAAwMD/AAAAAABkAAAAMgAAAAAAAABkAAAAAAAAAH9/fwAKAAAAIgAAABgAAAAAAAAAAAAAAAAAAAAAAAAAAAAAAAAAAAAkAAAAJAAAAAAAAAAHAAAAAAAAAAAAAAAAAAAAAAAAAAAAAAAAAAAAf39/ACUAAABYAAAAAAAAAAAAAAAAAAAAAAAAAAAAAAAAAAAAAAAAAAAAAAAAAAAAAAAAAAAAAAA/AAAAAAAAAKCGAQAAAAAAAAAAAAAAAAAMAAAAAQAAAAAAAAAAAAAAAAAAAB8AAABUAAAAAAAABQAAAAEAAAAAAAAAAAAAAAAAAAAAAAAAAAAAAAAAAAAAAAAAAAAAAAJ/f38AAAAAA8zMzADAwP8Af39/AAAAAAAAAAAAAAAAAAAAAAAAAAAAIQAAABgAAAAUAAAA2BgAABonAAAoMgAAWSkAABAAAAAmAAAACAAAAAAAAAAAAAAA"/>
+              </a:ext>
+            </a:extLst>
           </p:cNvSpPr>
           <p:nvPr>
             <p:ph type="ftr" sz="quarter" idx="11"/>
@@ -2123,7 +2612,9 @@
           <a:bodyPr/>
           <a:lstStyle/>
           <a:p>
-            <a:endParaRPr lang="en-US"/>
+            <a:pPr>
+              <a:defRPr lang="en-us"/>
+            </a:pPr>
           </a:p>
         </p:txBody>
       </p:sp>
@@ -2131,7 +2622,12 @@
         <p:nvSpPr>
           <p:cNvPr id="7" name="Slide Number Placeholder 6"/>
           <p:cNvSpPr>
-            <a:spLocks noGrp="1"/>
+            <a:spLocks noGrp="1" noChangeArrowheads="1"/>
+            <a:extLst>
+              <a:ext uri="smNativeData">
+                <pr:smNativeData xmlns:pr="smNativeData" xmlns="smNativeData" val="SMDATA_15_+nJ9aRMAAAAlAAAAZAAAAA0AAAAAkAAAAEgAAACQAAAASAAAAAAAAAABAAAAAAAAAAEAAABQAAAAAAAAAAAA4D8AAAAAAADgPwAAAAAAAOA/AAAAAAAA4D8AAAAAAADgPwAAAAAAAOA/AAAAAAAA4D8AAAAAAADgPwAAAAAAAOA/AAAAAAAA4D8CAAAAjAAAAAAAAAAAAAAAW5vVDP///wgAAAAAAAAAAAAAAAAAAAAAAAAAAAAAAAAAAAAAZAAAAAEAAABAAAAAAAAAAAAAAAAAAAAAAAAAAAAAAAAAAAAAAAAAAAAAAAAAAAAAAAAAAAAAAAAAAAAAAAAAAAAAAAAAAAAAAAAAAAAAAAAAAAAAAAAAAAAAAAAAAAAAFAAAADwAAAAAAAAAAAAAAAAAAAkUAAAAAQAAABQAAAAUAAAAFAAAAAEAAAAAAAAAZAAAAGQAAAAAAAAAZAAAAGQAAAAVAAAAYAAAAAAAAAAAAAAADwAAACADAAAAAAAAAAAAAAEAAACgMgAAVgcAAKr4//8BAAAAf39/AAEAAABkAAAAAAAAABQAAABAHwAAAAAAACYAAAAAAAAAwOD//wAAAAAmAAAAZAAAABYAAABMAAAAAAAAAAAAAAAEAAAAAAAAAAEAAADn5uYKAAAAACgAAAAoAAAAZAAAAGQAAAAAAAAAzMzMAAAAAABQAAAAUAAAAGQAAABkAAAAAAAAABcAAAAUAAAAAAAAAAAAAAD/fwAA/38AAAAAAAAJAAAABAAAAAAAAAAeAAAAaAAAAAAAAAAAAAAAAAAAAAAAAAAAAAAAECcAABAnAAAAAAAAAAAAAAAAAAAAAAAAAAAAAAAAAAAAAAAAAAAAABQAAAAAAAAAwMD/AAAAAABkAAAAMgAAAAAAAABkAAAAAAAAAH9/fwAKAAAAIgAAABgAAAAAAAAAAAAAAAAAAAAAAAAAAAAAAAAAAAAkAAAAJAAAAAAAAAAHAAAAAAAAAAAAAAAAAAAAAAAAAAAAAAAAAAAAf39/ACUAAABYAAAAAAAAAAAAAAAAAAAAAAAAAAAAAAAAAAAAAAAAAAAAAAAAAAAAAAAAAAAAAAA/AAAAAAAAAKCGAQAAAAAAAAAAAAAAAAAMAAAAAQAAAAAAAAAAAAAAAAAAAB8AAABUAAAAAAAABQAAAAEAAAAAAAAAAAAAAAAAAAAAAAAAAAAAAAAAAAAAAAAAAAAAAAJ/f38AAAAAA8zMzADAwP8Af39/AAAAAAAAAAAAAAAAAAAAAAAAAAAAIQAAABgAAAAUAAAA+DQAABonAADYRQAAWSkAABAAAAAmAAAACAAAAAAAAAAAAAAA"/>
+              </a:ext>
+            </a:extLst>
           </p:cNvSpPr>
           <p:nvPr>
             <p:ph type="sldNum" sz="quarter" idx="12"/>
@@ -2142,29 +2638,26 @@
           <a:bodyPr/>
           <a:lstStyle/>
           <a:p>
-            <a:fld id="{58AA844A-00A1-4A5D-A246-C5B817417ED4}" type="slidenum">
-              <a:rPr lang="en-US" smtClean="0"/>
+            <a:pPr>
+              <a:defRPr lang="en-us"/>
+            </a:pPr>
+            <a:fld id="{3AF9EF12-5CD7-AC19-9941-AA4CA10F6FFF}" type="slidenum">
               <a:t>‹#›</a:t>
             </a:fld>
-            <a:endParaRPr lang="en-US"/>
           </a:p>
         </p:txBody>
       </p:sp>
     </p:spTree>
-    <p:extLst>
-      <p:ext uri="{BB962C8B-B14F-4D97-AF65-F5344CB8AC3E}">
-        <p14:creationId xmlns:p14="http://schemas.microsoft.com/office/powerpoint/2010/main" val="1491909516"/>
-      </p:ext>
-    </p:extLst>
   </p:cSld>
   <p:clrMapOvr>
     <a:masterClrMapping/>
   </p:clrMapOvr>
+  <p:hf hdr="0" ftr="0"/>
 </p:sldLayout>
 </file>
 
 <file path=ppt/slideLayouts/slideLayout9.xml><?xml version="1.0" encoding="utf-8"?>
-<p:sldLayout xmlns:a="http://schemas.openxmlformats.org/drawingml/2006/main" xmlns:r="http://schemas.openxmlformats.org/officeDocument/2006/relationships" xmlns:p="http://schemas.openxmlformats.org/presentationml/2006/main" type="picTx" preserve="1">
+<p:sldLayout xmlns:p="http://schemas.openxmlformats.org/presentationml/2006/main" xmlns:mc="http://schemas.openxmlformats.org/markup-compatibility/2006" xmlns:p14="http://schemas.microsoft.com/office/powerpoint/2010/main" xmlns:p15="http://schemas.microsoft.com/office/powerpoint/2012/main" xmlns:r="http://schemas.openxmlformats.org/officeDocument/2006/relationships" xmlns:a="http://schemas.openxmlformats.org/drawingml/2006/main" type="picTx" preserve="1">
   <p:cSld name="Picture with Caption">
     <p:spTree>
       <p:nvGrpSpPr>
@@ -2184,7 +2677,12 @@
         <p:nvSpPr>
           <p:cNvPr id="2" name="Title 1"/>
           <p:cNvSpPr>
-            <a:spLocks noGrp="1"/>
+            <a:spLocks noGrp="1" noChangeArrowheads="1"/>
+            <a:extLst>
+              <a:ext uri="smNativeData">
+                <pr:smNativeData xmlns:pr="smNativeData" xmlns="smNativeData" val="SMDATA_15_+nJ9aRMAAAAlAAAAZAAAAA0AAAAAkAAAAEgAAACQAAAASAAAAAAAAAACAAAAAAAAAAEAAABQAAAAAAAAAAAA4D8AAAAAAADgPwAAAAAAAOA/AAAAAAAA4D8AAAAAAADgPwAAAAAAAOA/AAAAAAAA4D8AAAAAAADgPwAAAAAAAOA/AAAAAAAA4D8CAAAAjAAAAAAAAAAAAAAAW5vVDP///wgAAAAAAAAAAAAAAAAAAAAAAAAAAAAAAAAAAAAAZAAAAAEAAABAAAAAAAAAAAAAAAAAAAAAAAAAAAAAAAAAAAAAAAAAAAAAAAAAAAAAAAAAAAAAAAAAAAAAAAAAAAAAAAAAAAAAAAAAAAAAAAAAAAAAAAAAAAAAAAAAAAAAFAAAADwAAAAAAAAAAAAAAAAAAAkUAAAAAQAAABQAAAAUAAAAFAAAAAEAAAAAAAAAZAAAAGQAAAAAAAAAZAAAAGQAAAAVAAAAYAAAAAAAAAAAAAAADwAAACADAAAAAAAAAAAAAAEAAACgMgAAVgcAAKr4//8BAAAAf39/AAEAAABkAAAAAAAAABQAAABAHwAAAAAAACYAAAAAAAAAwOD//wAAAAAmAAAAZAAAABYAAABMAAAAAAAAAAAAAAAEAAAAAAAAAAEAAADn5uYKAAAAACgAAAAoAAAAZAAAAGQAAAAAAAAAzMzMAAAAAABQAAAAUAAAAGQAAABkAAAAAAAAABcAAAAUAAAAAAAAAAAAAAD/fwAA/38AAAAAAAAJAAAABAAAAAAAAAAeAAAAaAAAAAAAAAAAAAAAAAAAAAAAAAAAAAAAECcAABAnAAAAAAAAAAAAAAAAAAAAAAAAAAAAAAAAAAAAAAAAAAAAABQAAAAAAAAAwMD/AAAAAABkAAAAMgAAAAAAAABkAAAAAAAAAH9/fwAKAAAAIgAAABgAAAAAAAAAAAAAAAAAAAAAAAAAAAAAAAAAAAAkAAAAJAAAAAAAAAAHAAAAAAAAAAAAAAAAAAAAAAAAAAAAAAAAAAAAf39/ACUAAABYAAAAAAAAAAAAAAAAAAAAAAAAAAAAAAAAAAAAAAAAAAAAAAAAAAAAAAAAAAAAAAA/AAAAAAAAAKCGAQAAAAAAAAAAAAAAAAAMAAAAAQAAAAAAAAAAAAAAAAAAAB8AAABUAAAAAAAABQAAAAEAAAAAAAAAAAAAAAAAAAAAAAAAAAAAAAAAAAAAAAAAAAAAAAJ/f38AAAAAA8zMzADAwP8Af39/AAAAAAAAAAAAAAAAAAAAAAAAAAAAIQAAABgAAAAUAAAAKwUAANACAABbHQAAqAwAABAAAAAmAAAACAAAAIGAAAAAAAAA"/>
+              </a:ext>
+            </a:extLst>
           </p:cNvSpPr>
           <p:nvPr>
             <p:ph type="title"/>
@@ -2192,23 +2690,52 @@
         </p:nvSpPr>
         <p:spPr>
           <a:xfrm>
-            <a:off x="839788" y="457200"/>
-            <a:ext cx="3932237" cy="1600200"/>
+            <a:off x="840105" y="457200"/>
+            <a:ext cx="3931920" cy="1600200"/>
           </a:xfrm>
         </p:spPr>
         <p:txBody>
-          <a:bodyPr anchor="b"/>
+          <a:bodyPr vert="horz" wrap="square" lIns="91440" tIns="45720" rIns="91440" bIns="45720" numCol="1" spcCol="215900" anchor="b">
+            <a:prstTxWarp prst="textNoShape">
+              <a:avLst/>
+            </a:prstTxWarp>
+          </a:bodyPr>
           <a:lstStyle>
             <a:lvl1pPr>
-              <a:defRPr sz="3200"/>
+              <a:defRPr lang="en-us" sz="3200" cap="none"/>
             </a:lvl1pPr>
+            <a:lvl2pPr>
+              <a:defRPr lang="en-us"/>
+            </a:lvl2pPr>
+            <a:lvl3pPr>
+              <a:defRPr lang="en-us"/>
+            </a:lvl3pPr>
+            <a:lvl4pPr>
+              <a:defRPr lang="en-us"/>
+            </a:lvl4pPr>
+            <a:lvl5pPr>
+              <a:defRPr lang="en-us"/>
+            </a:lvl5pPr>
+            <a:lvl6pPr>
+              <a:defRPr lang="en-us"/>
+            </a:lvl6pPr>
+            <a:lvl7pPr>
+              <a:defRPr lang="en-us"/>
+            </a:lvl7pPr>
+            <a:lvl8pPr>
+              <a:defRPr lang="en-us"/>
+            </a:lvl8pPr>
+            <a:lvl9pPr>
+              <a:defRPr lang="en-us"/>
+            </a:lvl9pPr>
           </a:lstStyle>
           <a:p>
-            <a:r>
-              <a:rPr lang="en-US" smtClean="0"/>
+            <a:pPr>
+              <a:defRPr lang="en-us"/>
+            </a:pPr>
+            <a:r>
               <a:t>Click to edit Master title style</a:t>
             </a:r>
-            <a:endParaRPr lang="en-US"/>
           </a:p>
         </p:txBody>
       </p:sp>
@@ -2216,7 +2743,12 @@
         <p:nvSpPr>
           <p:cNvPr id="3" name="Picture Placeholder 2"/>
           <p:cNvSpPr>
-            <a:spLocks noGrp="1"/>
+            <a:spLocks noGrp="1" noChangeArrowheads="1"/>
+            <a:extLst>
+              <a:ext uri="smNativeData">
+                <pr:smNativeData xmlns:pr="smNativeData" xmlns="smNativeData" val="SMDATA_15_+nJ9aRMAAAAlAAAAZAAAAA0AAAAAkAAAAEgAAACQAAAASAAAAAAAAAAAAAAAAAAAAAEAAABQAAAAAAAAAAAA4D8AAAAAAADgPwAAAAAAAOA/AAAAAAAA4D8AAAAAAADgPwAAAAAAAOA/AAAAAAAA4D8AAAAAAADgPwAAAAAAAOA/AAAAAAAA4D8CAAAAjAAAAAAAAAAAAAAAW5vVDP///wgAAAAAAAAAAAAAAAAAAAAAAAAAAAAAAAAAAAAAZAAAAAEAAABAAAAAAAAAAAAAAAAAAAAAAAAAAAAAAAAAAAAAAAAAAAAAAAAAAAAAAAAAAAAAAAAAAAAAAAAAAAAAAAAAAAAAAAAAAAAAAAAAAAAAAAAAAAAAAAAAAAAAFAAAADwAAAAAAAAAAAAAAAAAAAkUAAAAAQAAABQAAAAUAAAAFAAAAAEAAAAAAAAAZAAAAGQAAAAAAAAAZAAAAGQAAAAVAAAAYAAAAAAAAAAAAAAADwAAACADAAAAAAAAAAAAAAEAAACgMgAAVgcAAKr4//8BAAAAf39/AAEAAABkAAAAAAAAABQAAABAHwAAAAAAACYAAAAAAAAAwOD//wAAAAAmAAAAZAAAABYAAABMAAAAAAAAAAAAAAAEAAAAAAAAAAEAAADn5uYKAAAAACgAAAAoAAAAZAAAAGQAAAAAAAAAzMzMAAAAAABQAAAAUAAAAGQAAABkAAAAAAAAABcAAAAUAAAAAAAAAAAAAAD/fwAA/38AAAAAAAAJAAAABAAAAAAAAAAeAAAAaAAAAAAAAAAAAAAAAAAAAAAAAAAAAAAAECcAABAnAAAAAAAAAAAAAAAAAAAAAAAAAAAAAAAAAAAAAAAAAAAAABQAAAAAAAAAwMD/AAAAAABkAAAAMgAAAAAAAABkAAAAAAAAAH9/fwAKAAAAIgAAABgAAAAAAAAAAAAAAAAAAAAAAAAAAAAAAAAAAAAkAAAAJAAAAAAAAAAHAAAAAAAAAAAAAAAAAAAAAAAAAAAAAAAAAAAAf39/ACUAAABYAAAAAAAAAAAAAAAAAAAAAAAAAAAAAAAAAAAAAAAAAAAAAAAAAAAAAAAAAAAAAAA/AAAAAAAAAKCGAQAAAAAAAAAAAAAAAAAMAAAAAQAAAAAAAAAAAAAAAAAAAB8AAABUAAAAAAAABQAAAAEAAAAAAAAAAAAAAAAAAAAAAAAAAAAAAAAAAAAAAAAAAAAAAAJ/f38AAAAAA8zMzADAwP8Af39/AAAAAAAAAAAAAAAAAAAAAAAAAAAAIQAAABgAAAAUAAAA4x8AABMGAADbRQAADiQAABAAAAAmAAAACAAAAAGAAAAAAAAA"/>
+              </a:ext>
+            </a:extLst>
           </p:cNvSpPr>
           <p:nvPr>
             <p:ph type="pic" idx="1"/>
@@ -2224,7 +2756,7 @@
         </p:nvSpPr>
         <p:spPr>
           <a:xfrm>
-            <a:off x="5183188" y="987425"/>
+            <a:off x="5183505" y="987425"/>
             <a:ext cx="6172200" cy="4873625"/>
           </a:xfrm>
         </p:spPr>
@@ -2233,43 +2765,45 @@
           <a:lstStyle>
             <a:lvl1pPr marL="0" indent="0">
               <a:buNone/>
-              <a:defRPr sz="3200"/>
+              <a:defRPr lang="en-us" sz="3200" cap="none"/>
             </a:lvl1pPr>
             <a:lvl2pPr marL="457200" indent="0">
               <a:buNone/>
-              <a:defRPr sz="2800"/>
+              <a:defRPr lang="en-us" sz="2800" cap="none"/>
             </a:lvl2pPr>
             <a:lvl3pPr marL="914400" indent="0">
               <a:buNone/>
-              <a:defRPr sz="2400"/>
+              <a:defRPr lang="en-us" sz="2400" cap="none"/>
             </a:lvl3pPr>
             <a:lvl4pPr marL="1371600" indent="0">
               <a:buNone/>
-              <a:defRPr sz="2000"/>
+              <a:defRPr lang="en-us" sz="2000" cap="none"/>
             </a:lvl4pPr>
             <a:lvl5pPr marL="1828800" indent="0">
               <a:buNone/>
-              <a:defRPr sz="2000"/>
+              <a:defRPr lang="en-us" sz="2000" cap="none"/>
             </a:lvl5pPr>
             <a:lvl6pPr marL="2286000" indent="0">
               <a:buNone/>
-              <a:defRPr sz="2000"/>
+              <a:defRPr lang="en-us" sz="2000" cap="none"/>
             </a:lvl6pPr>
             <a:lvl7pPr marL="2743200" indent="0">
               <a:buNone/>
-              <a:defRPr sz="2000"/>
+              <a:defRPr lang="en-us" sz="2000" cap="none"/>
             </a:lvl7pPr>
             <a:lvl8pPr marL="3200400" indent="0">
               <a:buNone/>
-              <a:defRPr sz="2000"/>
+              <a:defRPr lang="en-us" sz="2000" cap="none"/>
             </a:lvl8pPr>
             <a:lvl9pPr marL="3657600" indent="0">
               <a:buNone/>
-              <a:defRPr sz="2000"/>
+              <a:defRPr lang="en-us" sz="2000" cap="none"/>
             </a:lvl9pPr>
           </a:lstStyle>
           <a:p>
-            <a:endParaRPr lang="en-US"/>
+            <a:pPr>
+              <a:defRPr lang="en-us"/>
+            </a:pPr>
           </a:p>
         </p:txBody>
       </p:sp>
@@ -2277,16 +2811,21 @@
         <p:nvSpPr>
           <p:cNvPr id="4" name="Text Placeholder 3"/>
           <p:cNvSpPr>
-            <a:spLocks noGrp="1"/>
-          </p:cNvSpPr>
-          <p:nvPr>
-            <p:ph type="body" sz="half" idx="2"/>
+            <a:spLocks noGrp="1" noChangeArrowheads="1"/>
+            <a:extLst>
+              <a:ext uri="smNativeData">
+                <pr:smNativeData xmlns:pr="smNativeData" xmlns="smNativeData" val="SMDATA_15_+nJ9aRMAAAAlAAAAZAAAAA0AAAAAkAAAAEgAAACQAAAASAAAAAAAAAAAAAAAAAAAAAEAAABQAAAAAAAAAAAA4D8AAAAAAADgPwAAAAAAAOA/AAAAAAAA4D8AAAAAAADgPwAAAAAAAOA/AAAAAAAA4D8AAAAAAADgPwAAAAAAAOA/AAAAAAAA4D8CAAAAjAAAAAAAAAAAAAAAW5vVDP///wgAAAAAAAAAAAAAAAAAAAAAAAAAAAAAAAAAAAAAZAAAAAEAAABAAAAAAAAAAAAAAAAAAAAAAAAAAAAAAAAAAAAAAAAAAAAAAAAAAAAAAAAAAAAAAAAAAAAAAAAAAAAAAAAAAAAAAAAAAAAAAAAAAAAAAAAAAAAAAAAAAAAAFAAAADwAAAAAAAAAAAAAAAAAAAkUAAAAAQAAABQAAAAUAAAAFAAAAAEAAAAAAAAAZAAAAGQAAAAAAAAAZAAAAGQAAAAVAAAAYAAAAAAAAAAAAAAADwAAACADAAAAAAAAAAAAAAEAAACgMgAAVgcAAKr4//8BAAAAf39/AAEAAABkAAAAAAAAABQAAABAHwAAAAAAACYAAAAAAAAAwOD//wAAAAAmAAAAZAAAABYAAABMAAAAAAAAAAAAAAAEAAAAAAAAAAEAAADn5uYKAAAAACgAAAAoAAAAZAAAAGQAAAAAAAAAzMzMAAAAAABQAAAAUAAAAGQAAABkAAAAAAAAABcAAAAUAAAAAAAAAAAAAAD/fwAA/38AAAAAAAAJAAAABAAAAAAAAAAeAAAAaAAAAAAAAAAAAAAAAAAAAAAAAAAAAAAAECcAABAnAAAAAAAAAAAAAAAAAAAAAAAAAAAAAAAAAAAAAAAAAAAAABQAAAAAAAAAwMD/AAAAAABkAAAAMgAAAAAAAABkAAAAAAAAAH9/fwAKAAAAIgAAABgAAAAAAAAAAAAAAAAAAAAAAAAAAAAAAAAAAAAkAAAAJAAAAAAAAAAHAAAAAAAAAAAAAAAAAAAAAAAAAAAAAAAAAAAAf39/ACUAAABYAAAAAAAAAAAAAAAAAAAAAAAAAAAAAAAAAAAAAAAAAAAAAAAAAAAAAAAAAAAAAAA/AAAAAAAAAKCGAQAAAAAAAAAAAAAAAAAMAAAAAQAAAAAAAAAAAAAAAAAAAB8AAABUAAAAAAAABQAAAAEAAAAAAAAAAAAAAAAAAAAAAAAAAAAAAAAAAAAAAAAAAAAAAAJ/f38AAAAAA8zMzADAwP8Af39/AAAAAAAAAAAAAAAAAAAAAAAAAAAAIQAAABgAAAAUAAAAKwUAAKgMAABbHQAAGyQAABAAAAAmAAAACAAAAAGAAAAAAAAA"/>
+              </a:ext>
+            </a:extLst>
+          </p:cNvSpPr>
+          <p:nvPr>
+            <p:ph idx="2"/>
           </p:nvPr>
         </p:nvSpPr>
         <p:spPr>
           <a:xfrm>
-            <a:off x="839788" y="2057400"/>
-            <a:ext cx="3932237" cy="3811588"/>
+            <a:off x="840105" y="2057400"/>
+            <a:ext cx="3931920" cy="3811905"/>
           </a:xfrm>
         </p:spPr>
         <p:txBody>
@@ -2294,45 +2833,46 @@
           <a:lstStyle>
             <a:lvl1pPr marL="0" indent="0">
               <a:buNone/>
-              <a:defRPr sz="1600"/>
+              <a:defRPr lang="en-us" sz="1600" cap="none"/>
             </a:lvl1pPr>
             <a:lvl2pPr marL="457200" indent="0">
               <a:buNone/>
-              <a:defRPr sz="1400"/>
+              <a:defRPr lang="en-us" sz="1400" cap="none"/>
             </a:lvl2pPr>
             <a:lvl3pPr marL="914400" indent="0">
               <a:buNone/>
-              <a:defRPr sz="1200"/>
+              <a:defRPr lang="en-us" sz="1200" cap="none"/>
             </a:lvl3pPr>
             <a:lvl4pPr marL="1371600" indent="0">
               <a:buNone/>
-              <a:defRPr sz="1000"/>
+              <a:defRPr lang="en-us" sz="1000" cap="none"/>
             </a:lvl4pPr>
             <a:lvl5pPr marL="1828800" indent="0">
               <a:buNone/>
-              <a:defRPr sz="1000"/>
+              <a:defRPr lang="en-us" sz="1000" cap="none"/>
             </a:lvl5pPr>
             <a:lvl6pPr marL="2286000" indent="0">
               <a:buNone/>
-              <a:defRPr sz="1000"/>
+              <a:defRPr lang="en-us" sz="1000" cap="none"/>
             </a:lvl6pPr>
             <a:lvl7pPr marL="2743200" indent="0">
               <a:buNone/>
-              <a:defRPr sz="1000"/>
+              <a:defRPr lang="en-us" sz="1000" cap="none"/>
             </a:lvl7pPr>
             <a:lvl8pPr marL="3200400" indent="0">
               <a:buNone/>
-              <a:defRPr sz="1000"/>
+              <a:defRPr lang="en-us" sz="1000" cap="none"/>
             </a:lvl8pPr>
             <a:lvl9pPr marL="3657600" indent="0">
               <a:buNone/>
-              <a:defRPr sz="1000"/>
+              <a:defRPr lang="en-us" sz="1000" cap="none"/>
             </a:lvl9pPr>
           </a:lstStyle>
           <a:p>
-            <a:pPr lvl="0"/>
-            <a:r>
-              <a:rPr lang="en-US" smtClean="0"/>
+            <a:pPr>
+              <a:defRPr lang="en-us"/>
+            </a:pPr>
+            <a:r>
               <a:t>Click to edit Master text styles</a:t>
             </a:r>
           </a:p>
@@ -2342,7 +2882,12 @@
         <p:nvSpPr>
           <p:cNvPr id="5" name="Date Placeholder 4"/>
           <p:cNvSpPr>
-            <a:spLocks noGrp="1"/>
+            <a:spLocks noGrp="1" noChangeArrowheads="1"/>
+            <a:extLst>
+              <a:ext uri="smNativeData">
+                <pr:smNativeData xmlns:pr="smNativeData" xmlns="smNativeData" val="SMDATA_15_+nJ9aRMAAAAlAAAAZAAAAA0AAAAAkAAAAEgAAACQAAAASAAAAAAAAAABAAAAAAAAAAEAAABQAAAAAAAAAAAA4D8AAAAAAADgPwAAAAAAAOA/AAAAAAAA4D8AAAAAAADgPwAAAAAAAOA/AAAAAAAA4D8AAAAAAADgPwAAAAAAAOA/AAAAAAAA4D8CAAAAjAAAAAAAAAAAAAAAW5vVDP///wgAAAAAAAAAAAAAAAAAAAAAAAAAAAAAAAAAAAAAZAAAAAEAAABAAAAAAAAAAAAAAAAAAAAAAAAAAAAAAAAAAAAAAAAAAAAAAAAAAAAAAAAAAAAAAAAAAAAAAAAAAAAAAAAAAAAAAAAAAAAAAAAAAAAAAAAAAAAAAAAAAAAAFAAAADwAAAAAAAAAAAAAAAAAAAkUAAAAAQAAABQAAAAUAAAAFAAAAAEAAAAAAAAAZAAAAGQAAAAAAAAAZAAAAGQAAAAVAAAAYAAAAAAAAAAAAAAADwAAACADAAAAAAAAAAAAAAEAAACgMgAAVgcAAKr4//8BAAAAf39/AAEAAABkAAAAAAAAABQAAABAHwAAAAAAACYAAAAAAAAAwOD//wAAAAAmAAAAZAAAABYAAABMAAAAAAAAAAAAAAAEAAAAAAAAAAEAAADn5uYKAAAAACgAAAAoAAAAZAAAAGQAAAAAAAAAzMzMAAAAAABQAAAAUAAAAGQAAABkAAAAAAAAABcAAAAUAAAAAAAAAAAAAAD/fwAA/38AAAAAAAAJAAAABAAAAAAAAAAeAAAAaAAAAAAAAAAAAAAAAAAAAAAAAAAAAAAAECcAABAnAAAAAAAAAAAAAAAAAAAAAAAAAAAAAAAAAAAAAAAAAAAAABQAAAAAAAAAwMD/AAAAAABkAAAAMgAAAAAAAABkAAAAAAAAAH9/fwAKAAAAIgAAABgAAAAAAAAAAAAAAAAAAAAAAAAAAAAAAAAAAAAkAAAAJAAAAAAAAAAHAAAAAAAAAAAAAAAAAAAAAAAAAAAAAAAAAAAAf39/ACUAAABYAAAAAAAAAAAAAAAAAAAAAAAAAAAAAAAAAAAAAAAAAAAAAAAAAAAAAAAAAAAAAAA/AAAAAAAAAKCGAQAAAAAAAAAAAAAAAAAMAAAAAQAAAAAAAAAAAAAAAAAAAB8AAABUAAAAAAAABQAAAAEAAAAAAAAAAAAAAAAAAAAAAAAAAAAAAAAAAAAAAAAAAAAAAAJ/f38AAAAAA8zMzADAwP8Af39/AAAAAAAAAAAAAAAAAAAAAAAAAAAAIQAAABgAAAAUAAAAKAUAABonAAAIFgAAWSkAABAAAAAmAAAACAAAAAAAAAAAAAAA"/>
+              </a:ext>
+            </a:extLst>
           </p:cNvSpPr>
           <p:nvPr>
             <p:ph type="dt" sz="half" idx="10"/>
@@ -2353,11 +2898,12 @@
           <a:bodyPr/>
           <a:lstStyle/>
           <a:p>
-            <a:fld id="{7DE6D954-9D5F-4B54-AC5F-2CADB10B85DE}" type="datetimeFigureOut">
-              <a:rPr lang="en-US" smtClean="0"/>
+            <a:pPr>
+              <a:defRPr lang="en-us"/>
+            </a:pPr>
+            <a:fld id="{3AF9E910-5ED7-AC1F-9941-A84AA70F6FFD}" type="datetime1">
               <a:t>1/12/2026</a:t>
             </a:fld>
-            <a:endParaRPr lang="en-US"/>
           </a:p>
         </p:txBody>
       </p:sp>
@@ -2365,7 +2911,12 @@
         <p:nvSpPr>
           <p:cNvPr id="6" name="Footer Placeholder 5"/>
           <p:cNvSpPr>
-            <a:spLocks noGrp="1"/>
+            <a:spLocks noGrp="1" noChangeArrowheads="1"/>
+            <a:extLst>
+              <a:ext uri="smNativeData">
+                <pr:smNativeData xmlns:pr="smNativeData" xmlns="smNativeData" val="SMDATA_15_+nJ9aRMAAAAlAAAAZAAAAA0AAAAAkAAAAEgAAACQAAAASAAAAAAAAAABAAAAAAAAAAEAAABQAAAAAAAAAAAA4D8AAAAAAADgPwAAAAAAAOA/AAAAAAAA4D8AAAAAAADgPwAAAAAAAOA/AAAAAAAA4D8AAAAAAADgPwAAAAAAAOA/AAAAAAAA4D8CAAAAjAAAAAAAAAAAAAAAW5vVDP///wgAAAAAAAAAAAAAAAAAAAAAAAAAAAAAAAAAAAAAZAAAAAEAAABAAAAAAAAAAAAAAAAAAAAAAAAAAAAAAAAAAAAAAAAAAAAAAAAAAAAAAAAAAAAAAAAAAAAAAAAAAAAAAAAAAAAAAAAAAAAAAAAAAAAAAAAAAAAAAAAAAAAAFAAAADwAAAAAAAAAAAAAAAAAAAkUAAAAAQAAABQAAAAUAAAAFAAAAAEAAAAAAAAAZAAAAGQAAAAAAAAAZAAAAGQAAAAVAAAAYAAAAAAAAAAAAAAADwAAACADAAAAAAAAAAAAAAEAAACgMgAAVgcAAKr4//8BAAAAf39/AAEAAABkAAAAAAAAABQAAABAHwAAAAAAACYAAAAAAAAAwOD//wAAAAAmAAAAZAAAABYAAABMAAAAAAAAAAAAAAAEAAAAAAAAAAEAAADn5uYKAAAAACgAAAAoAAAAZAAAAGQAAAAAAAAAzMzMAAAAAABQAAAAUAAAAGQAAABkAAAAAAAAABcAAAAUAAAAAAAAAAAAAAD/fwAA/38AAAAAAAAJAAAABAAAAAAAAAAeAAAAaAAAAAAAAAAAAAAAAAAAAAAAAAAAAAAAECcAABAnAAAAAAAAAAAAAAAAAAAAAAAAAAAAAAAAAAAAAAAAAAAAABQAAAAAAAAAwMD/AAAAAABkAAAAMgAAAAAAAABkAAAAAAAAAH9/fwAKAAAAIgAAABgAAAAAAAAAAAAAAAAAAAAAAAAAAAAAAAAAAAAkAAAAJAAAAAAAAAAHAAAAAAAAAAAAAAAAAAAAAAAAAAAAAAAAAAAAf39/ACUAAABYAAAAAAAAAAAAAAAAAAAAAAAAAAAAAAAAAAAAAAAAAAAAAAAAAAAAAAAAAAAAAAA/AAAAAAAAAKCGAQAAAAAAAAAAAAAAAAAMAAAAAQAAAAAAAAAAAAAAAAAAAB8AAABUAAAAAAAABQAAAAEAAAAAAAAAAAAAAAAAAAAAAAAAAAAAAAAAAAAAAAAAAAAAAAJ/f38AAAAAA8zMzADAwP8Af39/AAAAAAAAAAAAAAAAAAAAAAAAAAAAIQAAABgAAAAUAAAA2BgAABonAAAoMgAAWSkAABAAAAAmAAAACAAAAAAAAAAAAAAA"/>
+              </a:ext>
+            </a:extLst>
           </p:cNvSpPr>
           <p:nvPr>
             <p:ph type="ftr" sz="quarter" idx="11"/>
@@ -2376,7 +2927,9 @@
           <a:bodyPr/>
           <a:lstStyle/>
           <a:p>
-            <a:endParaRPr lang="en-US"/>
+            <a:pPr>
+              <a:defRPr lang="en-us"/>
+            </a:pPr>
           </a:p>
         </p:txBody>
       </p:sp>
@@ -2384,7 +2937,12 @@
         <p:nvSpPr>
           <p:cNvPr id="7" name="Slide Number Placeholder 6"/>
           <p:cNvSpPr>
-            <a:spLocks noGrp="1"/>
+            <a:spLocks noGrp="1" noChangeArrowheads="1"/>
+            <a:extLst>
+              <a:ext uri="smNativeData">
+                <pr:smNativeData xmlns:pr="smNativeData" xmlns="smNativeData" val="SMDATA_15_+nJ9aRMAAAAlAAAAZAAAAA0AAAAAkAAAAEgAAACQAAAASAAAAAAAAAABAAAAAAAAAAEAAABQAAAAAAAAAAAA4D8AAAAAAADgPwAAAAAAAOA/AAAAAAAA4D8AAAAAAADgPwAAAAAAAOA/AAAAAAAA4D8AAAAAAADgPwAAAAAAAOA/AAAAAAAA4D8CAAAAjAAAAAAAAAAAAAAAW5vVDP///wgAAAAAAAAAAAAAAAAAAAAAAAAAAAAAAAAAAAAAZAAAAAEAAABAAAAAAAAAAAAAAAAAAAAAAAAAAAAAAAAAAAAAAAAAAAAAAAAAAAAAAAAAAAAAAAAAAAAAAAAAAAAAAAAAAAAAAAAAAAAAAAAAAAAAAAAAAAAAAAAAAAAAFAAAADwAAAAAAAAAAAAAAAAAAAkUAAAAAQAAABQAAAAUAAAAFAAAAAEAAAAAAAAAZAAAAGQAAAAAAAAAZAAAAGQAAAAVAAAAYAAAAAAAAAAAAAAADwAAACADAAAAAAAAAAAAAAEAAACgMgAAVgcAAKr4//8BAAAAf39/AAEAAABkAAAAAAAAABQAAABAHwAAAAAAACYAAAAAAAAAwOD//wAAAAAmAAAAZAAAABYAAABMAAAAAAAAAAAAAAAEAAAAAAAAAAEAAADn5uYKAAAAACgAAAAoAAAAZAAAAGQAAAAAAAAAzMzMAAAAAABQAAAAUAAAAGQAAABkAAAAAAAAABcAAAAUAAAAAAAAAAAAAAD/fwAA/38AAAAAAAAJAAAABAAAAAAAAAAeAAAAaAAAAAAAAAAAAAAAAAAAAAAAAAAAAAAAECcAABAnAAAAAAAAAAAAAAAAAAAAAAAAAAAAAAAAAAAAAAAAAAAAABQAAAAAAAAAwMD/AAAAAABkAAAAMgAAAAAAAABkAAAAAAAAAH9/fwAKAAAAIgAAABgAAAAAAAAAAAAAAAAAAAAAAAAAAAAAAAAAAAAkAAAAJAAAAAAAAAAHAAAAAAAAAAAAAAAAAAAAAAAAAAAAAAAAAAAAf39/ACUAAABYAAAAAAAAAAAAAAAAAAAAAAAAAAAAAAAAAAAAAAAAAAAAAAAAAAAAAAAAAAAAAAA/AAAAAAAAAKCGAQAAAAAAAAAAAAAAAAAMAAAAAQAAAAAAAAAAAAAAAAAAAB8AAABUAAAAAAAABQAAAAEAAAAAAAAAAAAAAAAAAAAAAAAAAAAAAAAAAAAAAAAAAAAAAAJ/f38AAAAAA8zMzADAwP8Af39/AAAAAAAAAAAAAAAAAAAAAAAAAAAAIQAAABgAAAAUAAAA+DQAABonAADYRQAAWSkAABAAAAAmAAAACAAAAAAAAAAAAAAA"/>
+              </a:ext>
+            </a:extLst>
           </p:cNvSpPr>
           <p:nvPr>
             <p:ph type="sldNum" sz="quarter" idx="12"/>
@@ -2395,34 +2953,34 @@
           <a:bodyPr/>
           <a:lstStyle/>
           <a:p>
-            <a:fld id="{58AA844A-00A1-4A5D-A246-C5B817417ED4}" type="slidenum">
-              <a:rPr lang="en-US" smtClean="0"/>
+            <a:pPr>
+              <a:defRPr lang="en-us"/>
+            </a:pPr>
+            <a:fld id="{3AF9B506-48D7-AC43-9941-BE16FB0F6FEB}" type="slidenum">
               <a:t>‹#›</a:t>
             </a:fld>
-            <a:endParaRPr lang="en-US"/>
           </a:p>
         </p:txBody>
       </p:sp>
     </p:spTree>
-    <p:extLst>
-      <p:ext uri="{BB962C8B-B14F-4D97-AF65-F5344CB8AC3E}">
-        <p14:creationId xmlns:p14="http://schemas.microsoft.com/office/powerpoint/2010/main" val="954314686"/>
-      </p:ext>
-    </p:extLst>
   </p:cSld>
   <p:clrMapOvr>
     <a:masterClrMapping/>
   </p:clrMapOvr>
+  <p:hf hdr="0" ftr="0"/>
 </p:sldLayout>
 </file>
 
 <file path=ppt/slideMasters/slideMaster1.xml><?xml version="1.0" encoding="utf-8"?>
-<p:sldMaster xmlns:a="http://schemas.openxmlformats.org/drawingml/2006/main" xmlns:r="http://schemas.openxmlformats.org/officeDocument/2006/relationships" xmlns:p="http://schemas.openxmlformats.org/presentationml/2006/main">
+<p:sldMaster xmlns:p="http://schemas.openxmlformats.org/presentationml/2006/main" xmlns:mc="http://schemas.openxmlformats.org/markup-compatibility/2006" xmlns:p14="http://schemas.microsoft.com/office/powerpoint/2010/main" xmlns:p15="http://schemas.microsoft.com/office/powerpoint/2012/main" xmlns:r="http://schemas.openxmlformats.org/officeDocument/2006/relationships" xmlns:a="http://schemas.openxmlformats.org/drawingml/2006/main">
   <p:cSld>
     <p:bg>
-      <p:bgRef idx="1001">
-        <a:schemeClr val="bg1"/>
-      </p:bgRef>
+      <p:bgPr>
+        <a:solidFill>
+          <a:schemeClr val="bg1"/>
+        </a:solidFill>
+        <a:effectLst/>
+      </p:bgPr>
     </p:bg>
     <p:spTree>
       <p:nvGrpSpPr>
@@ -2442,7 +3000,12 @@
         <p:nvSpPr>
           <p:cNvPr id="2" name="Title Placeholder 1"/>
           <p:cNvSpPr>
-            <a:spLocks noGrp="1"/>
+            <a:spLocks noGrp="1" noChangeArrowheads="1"/>
+            <a:extLst>
+              <a:ext uri="smNativeData">
+                <pr:smNativeData xmlns:pr="smNativeData" xmlns="smNativeData" val="SMDATA_15_+nJ9aRMAAAAlAAAAZAAAAA0AAAAAkAAAAEgAAACQAAAASAAAAAAAAAABAAAAAAAAAAEAAABQAAAAAAAAAAAA4D8AAAAAAADgPwAAAAAAAOA/AAAAAAAA4D8AAAAAAADgPwAAAAAAAOA/AAAAAAAA4D8AAAAAAADgPwAAAAAAAOA/AAAAAAAA4D8CAAAAjAAAAAAAAAAAAAAA////AP///wgAAAAAAAAAAAAAAAAAAAAAAAAAAAAAAAAAAAAAeAAAAAEAAABAAAAAAAAAAAAAAABaAAAAAAAAAAAAAAAAAAAAAAAAAAAAAAAAAAAAAAAAAAAAAAAAAAAAAAAAAAAAAAAAAAAAAAAAAAAAAAAAAAAAAAAAAAAAAAAAAAAAFAAAADwAAAAAAAAAAAAAAAAAAAAPAAAAAQAAACMAAAAjAAAAIwAAAB4AAAAAAAAAZAAAAGQAAAAAAAAAZAAAAGQAAAAVAAAAYAAAAAAAAAAAAAAADwAAACADAAAAAAAAAAAAAAEAAACgMgAAVgcAAKr4//8BAAAAf39/AAEAAABkAAAAAAAAABQAAABAHwAAAAAAACYAAAAAAAAAwOD//wAAAAAmAAAAZAAAABYAAABMAAAAAAAAAAAAAAAEAAAAAAAAAAEAAADn5uYKAAAAACgAAAAoAAAAZAAAAGQAAAAAAAAAzMzMAAAAAABQAAAAUAAAAGQAAABkAAAAAAAAABcAAAAUAAAAAAAAAAAAAAD/fwAA/38AAAAAAAAJAAAABAAAAF8AYAAeAAAAaAAAAAAAAAAAAAAAAAAAAAAAAAAAAAAAECcAABAnAAAAAAAAAAAAAAAAAAAAAAAAAAAAAAAAAAAAAAAAAAAAABQAAAAAAAAAwMD/AAAAAABkAAAAMgAAAAAAAABkAAAAAAAAAH9/fwAKAAAAIgAAABgAAAAAAAAAAAAAAAAAAAAAAAAAAAAAAAAAAAAkAAAAJAAAAAAAAAAHAAAAAAAAAAAAAAAAAAAAAAAAAAAAAAAAAAAAf39/ACUAAABYAAAAAAAAAAAAAAAAAAAAAAAAAAAAAAAAAAAAAAAAAAAAAAAAAAAAAAAAAAAAAAA/AAAAAAAAAKCGAQAAAAAAAAAAAAAAAAAMAAAAAQAAAAAAAAAAAAAAAAAAAB8AAABUAAAA////AAAAAAEAAAAAAAAAAAAAAAAAAAAAAAAAAAAAAAAAAAAAAAAAAAAAAAB/f38AAAAAA8zMzADAwP8Af39/AAAAAAAAAAAAAAAAAAAAAAAAAAAAIQAAABgAAAAUAAAAKAUAAD8CAADYRQAAZwoAABAAAAAmAAAACAAAAL8vAAAAAAAA"/>
+              </a:ext>
+            </a:extLst>
           </p:cNvSpPr>
           <p:nvPr>
             <p:ph type="title"/>
@@ -2451,23 +3014,26 @@
         <p:spPr>
           <a:xfrm>
             <a:off x="838200" y="365125"/>
-            <a:ext cx="10515600" cy="1325563"/>
+            <a:ext cx="10515600" cy="1325880"/>
           </a:xfrm>
           <a:prstGeom prst="rect">
             <a:avLst/>
           </a:prstGeom>
         </p:spPr>
         <p:txBody>
-          <a:bodyPr vert="horz" lIns="91440" tIns="45720" rIns="91440" bIns="45720" rtlCol="0" anchor="ctr">
-            <a:normAutofit/>
+          <a:bodyPr vert="horz" wrap="square" lIns="91440" tIns="45720" rIns="91440" bIns="45720" numCol="1" spcCol="215900" anchor="ctr">
+            <a:prstTxWarp prst="textNoShape">
+              <a:avLst/>
+            </a:prstTxWarp>
           </a:bodyPr>
           <a:lstStyle/>
           <a:p>
-            <a:r>
-              <a:rPr lang="en-US" smtClean="0"/>
+            <a:pPr>
+              <a:defRPr lang="en-us"/>
+            </a:pPr>
+            <a:r>
               <a:t>Click to edit Master title style</a:t>
             </a:r>
-            <a:endParaRPr lang="en-US"/>
           </a:p>
         </p:txBody>
       </p:sp>
@@ -2475,7 +3041,12 @@
         <p:nvSpPr>
           <p:cNvPr id="3" name="Text Placeholder 2"/>
           <p:cNvSpPr>
-            <a:spLocks noGrp="1"/>
+            <a:spLocks noGrp="1" noChangeArrowheads="1"/>
+            <a:extLst>
+              <a:ext uri="smNativeData">
+                <pr:smNativeData xmlns:pr="smNativeData" xmlns="smNativeData" val="SMDATA_15_+nJ9aRMAAAAlAAAAZAAAAA0AAAAAkAAAAEgAAACQAAAASAAAAAAAAAAAAAAAAAAAAAEAAABQAAAAAAAAAAAA4D8AAAAAAADgPwAAAAAAAOA/AAAAAAAA4D8AAAAAAADgPwAAAAAAAOA/AAAAAAAA4D8AAAAAAADgPwAAAAAAAOA/AAAAAAAA4D8CAAAAjAAAAAAAAAAAAAAA////AP///wgAAAAAAAAAAAAAAAAAAAAAAAAAAAAAAAAAAAAAeAAAAAEAAABAAAAAAAAAAAAAAABaAAAAAAAAAAAAAAAAAAAAAAAAAAAAAAAAAAAAAAAAAAAAAAAAAAAAAAAAAAAAAAAAAAAAAAAAAAAAAAAAAAAAAAAAAAAAAAAAAAAAFAAAADwAAAAAAAAAAAAAAAAAAAAPAAAAAQAAACMAAAAjAAAAIwAAAB4AAAAAAAAAZAAAAGQAAAAAAAAAZAAAAGQAAAAVAAAAYAAAAAAAAAAAAAAADwAAACADAAAAAAAAAAAAAAEAAACgMgAAVgcAAKr4//8BAAAAf39/AAEAAABkAAAAAAAAABQAAABAHwAAAAAAACYAAAAAAAAAwOD//wAAAAAmAAAAZAAAABYAAABMAAAAAAAAAAAAAAAEAAAAAAAAAAEAAADn5uYKAAAAACgAAAAoAAAAZAAAAGQAAAAAAAAAzMzMAAAAAABQAAAAUAAAAGQAAABkAAAAAAAAABcAAAAUAAAAAAAAAAAAAAD/fwAA/38AAAAAAAAJAAAABAAAAF8AYAAeAAAAaAAAAAAAAAAAAAAAAAAAAAAAAAAAAAAAECcAABAnAAAAAAAAAAAAAAAAAAAAAAAAAAAAAAAAAAAAAAAAAAAAABQAAAAAAAAAwMD/AAAAAABkAAAAMgAAAAAAAABkAAAAAAAAAH9/fwAKAAAAIgAAABgAAAAAAAAAAAAAAAAAAAAAAAAAAAAAAAAAAAAkAAAAJAAAAAAAAAAHAAAAAAAAAAAAAAAAAAAAAAAAAAAAAAAAAAAAf39/ACUAAABYAAAAAAAAAAAAAAAAAAAAAAAAAAAAAAAAAAAAAAAAAAAAAAAAAAAAAAAAAAAAAAA/AAAAAAAAAKCGAQAAAAAAAAAAAAAAAAAMAAAAAQAAAAAAAAAAAAAAAAAAAB8AAABUAAAA////AAAAAAEAAAAAAAAAAAAAAAAAAAAAAAAAAAAAAAAAAAAAAAAAAAAAAAB/f38AAAAAA8zMzADAwP8Af39/AAAAAAAAAAAAAAAAAAAAAAAAAAAAIQAAABgAAAAUAAAAKAUAADsLAADYRQAAACYAABAAAAAmAAAACAAAAD8vAAAAAAAA"/>
+              </a:ext>
+            </a:extLst>
           </p:cNvSpPr>
           <p:nvPr>
             <p:ph type="body" idx="1"/>
@@ -2484,52 +3055,58 @@
         <p:spPr>
           <a:xfrm>
             <a:off x="838200" y="1825625"/>
-            <a:ext cx="10515600" cy="4351338"/>
+            <a:ext cx="10515600" cy="4351655"/>
           </a:xfrm>
           <a:prstGeom prst="rect">
             <a:avLst/>
           </a:prstGeom>
         </p:spPr>
         <p:txBody>
-          <a:bodyPr vert="horz" lIns="91440" tIns="45720" rIns="91440" bIns="45720" rtlCol="0">
-            <a:normAutofit/>
+          <a:bodyPr vert="horz" wrap="square" lIns="91440" tIns="45720" rIns="91440" bIns="45720" numCol="1" spcCol="215900" anchor="t">
+            <a:prstTxWarp prst="textNoShape">
+              <a:avLst/>
+            </a:prstTxWarp>
           </a:bodyPr>
           <a:lstStyle/>
           <a:p>
-            <a:pPr lvl="0"/>
-            <a:r>
-              <a:rPr lang="en-US" smtClean="0"/>
+            <a:pPr>
+              <a:defRPr lang="en-us"/>
+            </a:pPr>
+            <a:r>
               <a:t>Click to edit Master text styles</a:t>
             </a:r>
           </a:p>
           <a:p>
-            <a:pPr lvl="1"/>
-            <a:r>
-              <a:rPr lang="en-US" smtClean="0"/>
+            <a:pPr lvl="1">
+              <a:defRPr lang="en-us"/>
+            </a:pPr>
+            <a:r>
               <a:t>Second level</a:t>
             </a:r>
           </a:p>
           <a:p>
-            <a:pPr lvl="2"/>
-            <a:r>
-              <a:rPr lang="en-US" smtClean="0"/>
+            <a:pPr lvl="2">
+              <a:defRPr lang="en-us"/>
+            </a:pPr>
+            <a:r>
               <a:t>Third level</a:t>
             </a:r>
           </a:p>
           <a:p>
-            <a:pPr lvl="3"/>
-            <a:r>
-              <a:rPr lang="en-US" smtClean="0"/>
+            <a:pPr lvl="3">
+              <a:defRPr lang="en-us"/>
+            </a:pPr>
+            <a:r>
               <a:t>Fourth level</a:t>
             </a:r>
           </a:p>
           <a:p>
-            <a:pPr lvl="4"/>
-            <a:r>
-              <a:rPr lang="en-US" smtClean="0"/>
+            <a:pPr lvl="4">
+              <a:defRPr lang="en-us"/>
+            </a:pPr>
+            <a:r>
               <a:t>Fifth level</a:t>
             </a:r>
-            <a:endParaRPr lang="en-US"/>
           </a:p>
         </p:txBody>
       </p:sp>
@@ -2537,7 +3114,12 @@
         <p:nvSpPr>
           <p:cNvPr id="4" name="Date Placeholder 3"/>
           <p:cNvSpPr>
-            <a:spLocks noGrp="1"/>
+            <a:spLocks noGrp="1" noChangeArrowheads="1"/>
+            <a:extLst>
+              <a:ext uri="smNativeData">
+                <pr:smNativeData xmlns:pr="smNativeData" xmlns="smNativeData" val="SMDATA_15_+nJ9aRMAAAAlAAAAZAAAAA0AAAAAkAAAAEgAAACQAAAASAAAAAAAAAABAAAAAAAAAAEAAABQAAAAAAAAAAAA4D8AAAAAAADgPwAAAAAAAOA/AAAAAAAA4D8AAAAAAADgPwAAAAAAAOA/AAAAAAAA4D8AAAAAAADgPwAAAAAAAOA/AAAAAAAA4D8CAAAAjAAAAAAAAAAAAAAA////AP///wgAAAAAAAAAAAAAAAAAAAAAAAAAAAAAAAAAAAAAeAAAAAEAAABAAAAAAAAAAAAAAABaAAAAAAAAAAAAAAAAAAAAAAAAAAAAAAAAAAAAAAAAAAAAAAAAAAAAAAAAAAAAAAAAAAAAAAAAAAAAAAAAAAAAAAAAAAAAAAAAAAAAFAAAADwAAAAAAAAAAAAAAAAAAAAPAAAAAQAAACMAAAAjAAAAIwAAAB4AAAAAAAAAZAAAAGQAAAAAAAAAZAAAAGQAAAAVAAAAYAAAAAAAAAAAAAAADwAAACADAAAAAAAAAAAAAAEAAACgMgAAVgcAAKr4//8BAAAAf39/AAEAAABkAAAAAAAAABQAAABAHwAAAAAAACYAAAAAAAAAwOD//wAAAAAmAAAAZAAAABYAAABMAAAAAAAAAAAAAAAEAAAAAAAAAAEAAADn5uYKAAAAACgAAAAoAAAAZAAAAGQAAAAAAAAAzMzMAAAAAABQAAAAUAAAAGQAAABkAAAAAAAAABcAAAAUAAAAAAAAAAAAAAD/fwAA/38AAAAAAAAJAAAABAAAAABwcHQeAAAAaAAAAAAAAAAAAAAAAAAAAAAAAAAAAAAAECcAABAnAAAAAAAAAAAAAAAAAAAAAAAAAAAAAAAAAAAAAAAAAAAAABQAAAAAAAAAwMD/AAAAAABkAAAAMgAAAAAAAABkAAAAAAAAAH9/fwAKAAAAIgAAABgAAAAAAAAAAAAAAAAAAAAAAAAAAAAAAAAAAAAkAAAAJAAAAAAAAAAHAAAAAAAAAAAAAAAAAAAAAAAAAAAAAAAAAAAAf39/ACUAAABYAAAAAAAAAAAAAAAAAAAAAAAAAAAAAAAAAAAAAAAAAAAAAAAAAAAAAAAAAAAAAAA/AAAAAAAAAKCGAQAAAAAAAAAAAAAAAAAMAAAAAQAAAAAAAAAAAAAAAAAAAB8AAABUAAAA////AAAAAAEAAAAAAAAAAAAAAAAAAAAAAAAAAAAAAAAAAAAAAAAAAAAAAAB/f38AAAAAA8zMzADAwP8Af39/AAAAAAAAAAAAAAAAAAAAAAAAAAAAIQAAABgAAAAUAAAAKAUAABonAAAIFgAAWSkAABAAAAAmAAAACAAAAL+PAAAAAAAA"/>
+              </a:ext>
+            </a:extLst>
           </p:cNvSpPr>
           <p:nvPr>
             <p:ph type="dt" sz="half" idx="2"/>
@@ -2553,24 +3135,51 @@
           </a:prstGeom>
         </p:spPr>
         <p:txBody>
-          <a:bodyPr vert="horz" lIns="91440" tIns="45720" rIns="91440" bIns="45720" rtlCol="0" anchor="ctr"/>
+          <a:bodyPr vert="horz" wrap="square" lIns="91440" tIns="45720" rIns="91440" bIns="45720" numCol="1" spcCol="215900" anchor="ctr">
+            <a:prstTxWarp prst="textNoShape">
+              <a:avLst/>
+            </a:prstTxWarp>
+          </a:bodyPr>
           <a:lstStyle>
             <a:lvl1pPr algn="l">
-              <a:defRPr sz="1200">
+              <a:defRPr lang="en-us" sz="1200" cap="none">
                 <a:solidFill>
-                  <a:schemeClr val="tx1">
-                    <a:tint val="75000"/>
-                  </a:schemeClr>
+                  <a:srgbClr val="8C8C8C"/>
                 </a:solidFill>
               </a:defRPr>
             </a:lvl1pPr>
+            <a:lvl2pPr>
+              <a:defRPr lang="en-us"/>
+            </a:lvl2pPr>
+            <a:lvl3pPr>
+              <a:defRPr lang="en-us"/>
+            </a:lvl3pPr>
+            <a:lvl4pPr>
+              <a:defRPr lang="en-us"/>
+            </a:lvl4pPr>
+            <a:lvl5pPr>
+              <a:defRPr lang="en-us"/>
+            </a:lvl5pPr>
+            <a:lvl6pPr>
+              <a:defRPr lang="en-us"/>
+            </a:lvl6pPr>
+            <a:lvl7pPr>
+              <a:defRPr lang="en-us"/>
+            </a:lvl7pPr>
+            <a:lvl8pPr>
+              <a:defRPr lang="en-us"/>
+            </a:lvl8pPr>
+            <a:lvl9pPr>
+              <a:defRPr lang="en-us"/>
+            </a:lvl9pPr>
           </a:lstStyle>
           <a:p>
-            <a:fld id="{7DE6D954-9D5F-4B54-AC5F-2CADB10B85DE}" type="datetimeFigureOut">
-              <a:rPr lang="en-US" smtClean="0"/>
-              <a:t>1/12/2026</a:t>
+            <a:pPr>
+              <a:defRPr lang="en-us"/>
+            </a:pPr>
+            <a:fld id="{3AF9A0F5-BBD7-AC56-9941-4D03EE0F6F18}" type="datetime1">
+              <a:t/>
             </a:fld>
-            <a:endParaRPr lang="en-US"/>
           </a:p>
         </p:txBody>
       </p:sp>
@@ -2578,7 +3187,12 @@
         <p:nvSpPr>
           <p:cNvPr id="5" name="Footer Placeholder 4"/>
           <p:cNvSpPr>
-            <a:spLocks noGrp="1"/>
+            <a:spLocks noGrp="1" noChangeArrowheads="1"/>
+            <a:extLst>
+              <a:ext uri="smNativeData">
+                <pr:smNativeData xmlns:pr="smNativeData" xmlns="smNativeData" val="SMDATA_15_+nJ9aRMAAAAlAAAAZAAAAA0AAAAAkAAAAEgAAACQAAAASAAAAAAAAAABAAAAAAAAAAEAAABQAAAAAAAAAAAA4D8AAAAAAADgPwAAAAAAAOA/AAAAAAAA4D8AAAAAAADgPwAAAAAAAOA/AAAAAAAA4D8AAAAAAADgPwAAAAAAAOA/AAAAAAAA4D8CAAAAjAAAAAAAAAAAAAAA////AP///wgAAAAAAAAAAAAAAAAAAAAAAAAAAAAAAAAAAAAAeAAAAAEAAABAAAAAAAAAAAAAAABaAAAAAAAAAAAAAAAAAAAAAAAAAAAAAAAAAAAAAAAAAAAAAAAAAAAAAAAAAAAAAAAAAAAAAAAAAAAAAAAAAAAAAAAAAAAAAAAAAAAAFAAAADwAAAAAAAAAAAAAAAAAAAAPAAAAAQAAACMAAAAjAAAAIwAAAB4AAAAAAAAAZAAAAGQAAAAAAAAAZAAAAGQAAAAVAAAAYAAAAAAAAAAAAAAADwAAACADAAAAAAAAAAAAAAEAAACgMgAAVgcAAKr4//8BAAAAf39/AAEAAABkAAAAAAAAABQAAABAHwAAAAAAACYAAAAAAAAAwOD//wAAAAAmAAAAZAAAABYAAABMAAAAAAAAAAAAAAAEAAAAAAAAAAEAAADn5uYKAAAAACgAAAAoAAAAZAAAAGQAAAAAAAAAzMzMAAAAAABQAAAAUAAAAGQAAABkAAAAAAAAABcAAAAUAAAAAAAAAAAAAAD/fwAA/38AAAAAAAAJAAAABAAAAPTvuwQeAAAAaAAAAAAAAAAAAAAAAAAAAAAAAAAAAAAAECcAABAnAAAAAAAAAAAAAAAAAAAAAAAAAAAAAAAAAAAAAAAAAAAAABQAAAAAAAAAwMD/AAAAAABkAAAAMgAAAAAAAABkAAAAAAAAAH9/fwAKAAAAIgAAABgAAAAAAAAAAAAAAAAAAAAAAAAAAAAAAAAAAAAkAAAAJAAAAAAAAAAHAAAAAAAAAAAAAAAAAAAAAAAAAAAAAAAAAAAAf39/ACUAAABYAAAAAAAAAAAAAAAAAAAAAAAAAAAAAAAAAAAAAAAAAAAAAAAAAAAAAAAAAAAAAAA/AAAAAAAAAKCGAQAAAAAAAAAAAAAAAAAMAAAAAQAAAAAAAAAAAAAAAAAAAB8AAABUAAAA////AAAAAAEAAAAAAAAAAAAAAAAAAAAAAAAAAAAAAAAAAAAAAAAAAAAAAAB/f38AAAAAA8zMzADAwP8Af39/AAAAAAAAAAAAAAAAAAAAAAAAAAAAIQAAABgAAAAUAAAA2BgAABonAAAoMgAAWSkAABAAAAAmAAAACAAAAL+PAAAAAAAA"/>
+              </a:ext>
+            </a:extLst>
           </p:cNvSpPr>
           <p:nvPr>
             <p:ph type="ftr" sz="quarter" idx="3"/>
@@ -2594,20 +3208,48 @@
           </a:prstGeom>
         </p:spPr>
         <p:txBody>
-          <a:bodyPr vert="horz" lIns="91440" tIns="45720" rIns="91440" bIns="45720" rtlCol="0" anchor="ctr"/>
+          <a:bodyPr vert="horz" wrap="square" lIns="91440" tIns="45720" rIns="91440" bIns="45720" numCol="1" spcCol="215900" anchor="ctr">
+            <a:prstTxWarp prst="textNoShape">
+              <a:avLst/>
+            </a:prstTxWarp>
+          </a:bodyPr>
           <a:lstStyle>
             <a:lvl1pPr algn="ctr">
-              <a:defRPr sz="1200">
+              <a:defRPr lang="en-us" sz="1200" cap="none">
                 <a:solidFill>
-                  <a:schemeClr val="tx1">
-                    <a:tint val="75000"/>
-                  </a:schemeClr>
+                  <a:srgbClr val="8C8C8C"/>
                 </a:solidFill>
               </a:defRPr>
             </a:lvl1pPr>
+            <a:lvl2pPr>
+              <a:defRPr lang="en-us"/>
+            </a:lvl2pPr>
+            <a:lvl3pPr>
+              <a:defRPr lang="en-us"/>
+            </a:lvl3pPr>
+            <a:lvl4pPr>
+              <a:defRPr lang="en-us"/>
+            </a:lvl4pPr>
+            <a:lvl5pPr>
+              <a:defRPr lang="en-us"/>
+            </a:lvl5pPr>
+            <a:lvl6pPr>
+              <a:defRPr lang="en-us"/>
+            </a:lvl6pPr>
+            <a:lvl7pPr>
+              <a:defRPr lang="en-us"/>
+            </a:lvl7pPr>
+            <a:lvl8pPr>
+              <a:defRPr lang="en-us"/>
+            </a:lvl8pPr>
+            <a:lvl9pPr>
+              <a:defRPr lang="en-us"/>
+            </a:lvl9pPr>
           </a:lstStyle>
           <a:p>
-            <a:endParaRPr lang="en-US"/>
+            <a:pPr>
+              <a:defRPr lang="en-us"/>
+            </a:pPr>
           </a:p>
         </p:txBody>
       </p:sp>
@@ -2615,7 +3257,12 @@
         <p:nvSpPr>
           <p:cNvPr id="6" name="Slide Number Placeholder 5"/>
           <p:cNvSpPr>
-            <a:spLocks noGrp="1"/>
+            <a:spLocks noGrp="1" noChangeArrowheads="1"/>
+            <a:extLst>
+              <a:ext uri="smNativeData">
+                <pr:smNativeData xmlns:pr="smNativeData" xmlns="smNativeData" val="SMDATA_15_+nJ9aRMAAAAlAAAAZAAAAA0AAAAAkAAAAEgAAACQAAAASAAAAAAAAAABAAAAAAAAAAEAAABQAAAAAAAAAAAA4D8AAAAAAADgPwAAAAAAAOA/AAAAAAAA4D8AAAAAAADgPwAAAAAAAOA/AAAAAAAA4D8AAAAAAADgPwAAAAAAAOA/AAAAAAAA4D8CAAAAjAAAAAAAAAAAAAAA////AP///wgAAAAAAAAAAAAAAAAAAAAAAAAAAAAAAAAAAAAAeAAAAAEAAABAAAAAAAAAAAAAAABaAAAAAAAAAAAAAAAAAAAAAAAAAAAAAAAAAAAAAAAAAAAAAAAAAAAAAAAAAAAAAAAAAAAAAAAAAAAAAAAAAAAAAAAAAAAAAAAAAAAAFAAAADwAAAAAAAAAAAAAAAAAAAAPAAAAAQAAACMAAAAjAAAAIwAAAB4AAAAAAAAAZAAAAGQAAAAAAAAAZAAAAGQAAAAVAAAAYAAAAAAAAAAAAAAADwAAACADAAAAAAAAAAAAAAEAAACgMgAAVgcAAKr4//8BAAAAf39/AAEAAABkAAAAAAAAABQAAABAHwAAAAAAACYAAAAAAAAAwOD//wAAAAAmAAAAZAAAABYAAABMAAAAAAAAAAAAAAAEAAAAAAAAAAEAAADn5uYKAAAAACgAAAAoAAAAZAAAAGQAAAAAAAAAzMzMAAAAAABQAAAAUAAAAGQAAABkAAAAAAAAABcAAAAUAAAAAAAAAAAAAAD/fwAA/38AAAAAAAAJAAAABAAAAAwgvAQeAAAAaAAAAAAAAAAAAAAAAAAAAAAAAAAAAAAAECcAABAnAAAAAAAAAAAAAAAAAAAAAAAAAAAAAAAAAAAAAAAAAAAAABQAAAAAAAAAwMD/AAAAAABkAAAAMgAAAAAAAABkAAAAAAAAAH9/fwAKAAAAIgAAABgAAAAAAAAAAAAAAAAAAAAAAAAAAAAAAAAAAAAkAAAAJAAAAAAAAAAHAAAAAAAAAAAAAAAAAAAAAAAAAAAAAAAAAAAAf39/ACUAAABYAAAAAAAAAAAAAAAAAAAAAAAAAAAAAAAAAAAAAAAAAAAAAAAAAAAAAAAAAAAAAAA/AAAAAAAAAKCGAQAAAAAAAAAAAAAAAAAMAAAAAQAAAAAAAAAAAAAAAAAAAB8AAABUAAAA////AAAAAAEAAAAAAAAAAAAAAAAAAAAAAAAAAAAAAAAAAAAAAAAAAAAAAAB/f38AAAAAA8zMzADAwP8Af39/AAAAAAAAAAAAAAAAAAAAAAAAAAAAIQAAABgAAAAUAAAA+DQAABonAADYRQAAWSkAABAAAAAmAAAACAAAAL+PAAAAAAAA"/>
+              </a:ext>
+            </a:extLst>
           </p:cNvSpPr>
           <p:nvPr>
             <p:ph type="sldNum" sz="quarter" idx="4"/>
@@ -2631,33 +3278,55 @@
           </a:prstGeom>
         </p:spPr>
         <p:txBody>
-          <a:bodyPr vert="horz" lIns="91440" tIns="45720" rIns="91440" bIns="45720" rtlCol="0" anchor="ctr"/>
+          <a:bodyPr vert="horz" wrap="square" lIns="91440" tIns="45720" rIns="91440" bIns="45720" numCol="1" spcCol="215900" anchor="ctr">
+            <a:prstTxWarp prst="textNoShape">
+              <a:avLst/>
+            </a:prstTxWarp>
+          </a:bodyPr>
           <a:lstStyle>
             <a:lvl1pPr algn="r">
-              <a:defRPr sz="1200">
+              <a:defRPr lang="en-us" sz="1200" cap="none">
                 <a:solidFill>
-                  <a:schemeClr val="tx1">
-                    <a:tint val="75000"/>
-                  </a:schemeClr>
+                  <a:srgbClr val="8C8C8C"/>
                 </a:solidFill>
               </a:defRPr>
             </a:lvl1pPr>
+            <a:lvl2pPr>
+              <a:defRPr lang="en-us"/>
+            </a:lvl2pPr>
+            <a:lvl3pPr>
+              <a:defRPr lang="en-us"/>
+            </a:lvl3pPr>
+            <a:lvl4pPr>
+              <a:defRPr lang="en-us"/>
+            </a:lvl4pPr>
+            <a:lvl5pPr>
+              <a:defRPr lang="en-us"/>
+            </a:lvl5pPr>
+            <a:lvl6pPr>
+              <a:defRPr lang="en-us"/>
+            </a:lvl6pPr>
+            <a:lvl7pPr>
+              <a:defRPr lang="en-us"/>
+            </a:lvl7pPr>
+            <a:lvl8pPr>
+              <a:defRPr lang="en-us"/>
+            </a:lvl8pPr>
+            <a:lvl9pPr>
+              <a:defRPr lang="en-us"/>
+            </a:lvl9pPr>
           </a:lstStyle>
           <a:p>
-            <a:fld id="{58AA844A-00A1-4A5D-A246-C5B817417ED4}" type="slidenum">
-              <a:rPr lang="en-US" smtClean="0"/>
-              <a:t>‹#›</a:t>
+            <a:pPr>
+              <a:defRPr lang="en-us"/>
+            </a:pPr>
+            <a:fld id="{3AF9B139-77D7-AC47-9941-8112FF0F6FD4}" type="slidenum">
+              <a:t/>
             </a:fld>
-            <a:endParaRPr lang="en-US"/>
           </a:p>
         </p:txBody>
       </p:sp>
     </p:spTree>
-    <p:extLst>
-      <p:ext uri="{BB962C8B-B14F-4D97-AF65-F5344CB8AC3E}">
-        <p14:creationId xmlns:p14="http://schemas.microsoft.com/office/powerpoint/2010/main" val="2398034499"/>
-      </p:ext>
-    </p:extLst>
   </p:cSld>
   <p:clrMap bg1="lt1" tx1="dk1" bg2="lt2" tx2="dk2" accent1="accent1" accent2="accent2" accent3="accent3" accent4="accent4" accent5="accent5" accent6="accent6" hlink="hlink" folHlink="folHlink"/>
   <p:sldLayoutIdLst>
@@ -2673,282 +3342,632 @@
     <p:sldLayoutId id="2147483658" r:id="rId10"/>
     <p:sldLayoutId id="2147483659" r:id="rId11"/>
   </p:sldLayoutIdLst>
+  <p:hf hdr="0" ftr="0"/>
   <p:txStyles>
     <p:titleStyle>
-      <a:lvl1pPr algn="l" defTabSz="914400" rtl="0" eaLnBrk="1" latinLnBrk="0" hangingPunct="1">
+      <a:lvl1pPr marL="0" marR="0" indent="0" algn="l" defTabSz="914400">
         <a:lnSpc>
           <a:spcPct val="90000"/>
         </a:lnSpc>
         <a:spcBef>
-          <a:spcPct val="0"/>
+          <a:spcPts val="0"/>
         </a:spcBef>
+        <a:spcAft>
+          <a:spcPts val="0"/>
+        </a:spcAft>
         <a:buNone/>
-        <a:defRPr sz="4400" kern="1200">
+        <a:tabLst/>
+        <a:defRPr lang="en-us" sz="4400" b="0" i="0" u="none" strike="noStrike" kern="1" cap="none" spc="0" baseline="0">
           <a:solidFill>
             <a:schemeClr val="tx1"/>
           </a:solidFill>
-          <a:latin typeface="+mj-lt"/>
-          <a:ea typeface="+mj-ea"/>
-          <a:cs typeface="+mj-cs"/>
+          <a:effectLst/>
+          <a:latin typeface="Calibri Light" pitchFamily="2" charset="0"/>
+          <a:ea typeface="Calibri Light" pitchFamily="2" charset="0"/>
+          <a:cs typeface="Calibri Light" pitchFamily="2" charset="0"/>
         </a:defRPr>
       </a:lvl1pPr>
+      <a:lvl2pPr marL="457200" marR="0" indent="0" algn="l" defTabSz="914400">
+        <a:lnSpc>
+          <a:spcPct val="100000"/>
+        </a:lnSpc>
+        <a:spcBef>
+          <a:spcPts val="0"/>
+        </a:spcBef>
+        <a:spcAft>
+          <a:spcPts val="0"/>
+        </a:spcAft>
+        <a:buNone/>
+        <a:tabLst/>
+        <a:defRPr lang="en-us" sz="1800" b="0" i="0" u="none" strike="noStrike" kern="1" cap="none" spc="0" baseline="0">
+          <a:solidFill>
+            <a:schemeClr val="tx1"/>
+          </a:solidFill>
+          <a:effectLst/>
+          <a:latin typeface="Calibri" pitchFamily="2" charset="0"/>
+          <a:ea typeface="Calibri" pitchFamily="2" charset="0"/>
+          <a:cs typeface="Calibri" pitchFamily="2" charset="0"/>
+        </a:defRPr>
+      </a:lvl2pPr>
+      <a:lvl3pPr marL="914400" marR="0" indent="0" algn="l" defTabSz="914400">
+        <a:lnSpc>
+          <a:spcPct val="100000"/>
+        </a:lnSpc>
+        <a:spcBef>
+          <a:spcPts val="0"/>
+        </a:spcBef>
+        <a:spcAft>
+          <a:spcPts val="0"/>
+        </a:spcAft>
+        <a:buNone/>
+        <a:tabLst/>
+        <a:defRPr lang="en-us" sz="1800" b="0" i="0" u="none" strike="noStrike" kern="1" cap="none" spc="0" baseline="0">
+          <a:solidFill>
+            <a:schemeClr val="tx1"/>
+          </a:solidFill>
+          <a:effectLst/>
+          <a:latin typeface="Calibri" pitchFamily="2" charset="0"/>
+          <a:ea typeface="Calibri" pitchFamily="2" charset="0"/>
+          <a:cs typeface="Calibri" pitchFamily="2" charset="0"/>
+        </a:defRPr>
+      </a:lvl3pPr>
+      <a:lvl4pPr marL="1371600" marR="0" indent="0" algn="l" defTabSz="914400">
+        <a:lnSpc>
+          <a:spcPct val="100000"/>
+        </a:lnSpc>
+        <a:spcBef>
+          <a:spcPts val="0"/>
+        </a:spcBef>
+        <a:spcAft>
+          <a:spcPts val="0"/>
+        </a:spcAft>
+        <a:buNone/>
+        <a:tabLst/>
+        <a:defRPr lang="en-us" sz="1800" b="0" i="0" u="none" strike="noStrike" kern="1" cap="none" spc="0" baseline="0">
+          <a:solidFill>
+            <a:schemeClr val="tx1"/>
+          </a:solidFill>
+          <a:effectLst/>
+          <a:latin typeface="Calibri" pitchFamily="2" charset="0"/>
+          <a:ea typeface="Calibri" pitchFamily="2" charset="0"/>
+          <a:cs typeface="Calibri" pitchFamily="2" charset="0"/>
+        </a:defRPr>
+      </a:lvl4pPr>
+      <a:lvl5pPr marL="1828800" marR="0" indent="0" algn="l" defTabSz="914400">
+        <a:lnSpc>
+          <a:spcPct val="100000"/>
+        </a:lnSpc>
+        <a:spcBef>
+          <a:spcPts val="0"/>
+        </a:spcBef>
+        <a:spcAft>
+          <a:spcPts val="0"/>
+        </a:spcAft>
+        <a:buNone/>
+        <a:tabLst/>
+        <a:defRPr lang="en-us" sz="1800" b="0" i="0" u="none" strike="noStrike" kern="1" cap="none" spc="0" baseline="0">
+          <a:solidFill>
+            <a:schemeClr val="tx1"/>
+          </a:solidFill>
+          <a:effectLst/>
+          <a:latin typeface="Calibri" pitchFamily="2" charset="0"/>
+          <a:ea typeface="Calibri" pitchFamily="2" charset="0"/>
+          <a:cs typeface="Calibri" pitchFamily="2" charset="0"/>
+        </a:defRPr>
+      </a:lvl5pPr>
+      <a:lvl6pPr marL="2286000" marR="0" indent="0" algn="l" defTabSz="914400">
+        <a:lnSpc>
+          <a:spcPct val="100000"/>
+        </a:lnSpc>
+        <a:spcBef>
+          <a:spcPts val="0"/>
+        </a:spcBef>
+        <a:spcAft>
+          <a:spcPts val="0"/>
+        </a:spcAft>
+        <a:buNone/>
+        <a:tabLst/>
+        <a:defRPr lang="en-us" sz="1800" b="0" i="0" u="none" strike="noStrike" kern="1" cap="none" spc="0" baseline="0">
+          <a:solidFill>
+            <a:schemeClr val="tx1"/>
+          </a:solidFill>
+          <a:effectLst/>
+          <a:latin typeface="Calibri" pitchFamily="2" charset="0"/>
+          <a:ea typeface="Calibri" pitchFamily="2" charset="0"/>
+          <a:cs typeface="Calibri" pitchFamily="2" charset="0"/>
+        </a:defRPr>
+      </a:lvl6pPr>
+      <a:lvl7pPr marL="2743200" marR="0" indent="0" algn="l" defTabSz="914400">
+        <a:lnSpc>
+          <a:spcPct val="100000"/>
+        </a:lnSpc>
+        <a:spcBef>
+          <a:spcPts val="0"/>
+        </a:spcBef>
+        <a:spcAft>
+          <a:spcPts val="0"/>
+        </a:spcAft>
+        <a:buNone/>
+        <a:tabLst/>
+        <a:defRPr lang="en-us" sz="1800" b="0" i="0" u="none" strike="noStrike" kern="1" cap="none" spc="0" baseline="0">
+          <a:solidFill>
+            <a:schemeClr val="tx1"/>
+          </a:solidFill>
+          <a:effectLst/>
+          <a:latin typeface="Calibri" pitchFamily="2" charset="0"/>
+          <a:ea typeface="Calibri" pitchFamily="2" charset="0"/>
+          <a:cs typeface="Calibri" pitchFamily="2" charset="0"/>
+        </a:defRPr>
+      </a:lvl7pPr>
+      <a:lvl8pPr marL="3200400" marR="0" indent="0" algn="l" defTabSz="914400">
+        <a:lnSpc>
+          <a:spcPct val="100000"/>
+        </a:lnSpc>
+        <a:spcBef>
+          <a:spcPts val="0"/>
+        </a:spcBef>
+        <a:spcAft>
+          <a:spcPts val="0"/>
+        </a:spcAft>
+        <a:buNone/>
+        <a:tabLst/>
+        <a:defRPr lang="en-us" sz="1800" b="0" i="0" u="none" strike="noStrike" kern="1" cap="none" spc="0" baseline="0">
+          <a:solidFill>
+            <a:schemeClr val="tx1"/>
+          </a:solidFill>
+          <a:effectLst/>
+          <a:latin typeface="Calibri" pitchFamily="2" charset="0"/>
+          <a:ea typeface="Calibri" pitchFamily="2" charset="0"/>
+          <a:cs typeface="Calibri" pitchFamily="2" charset="0"/>
+        </a:defRPr>
+      </a:lvl8pPr>
+      <a:lvl9pPr marL="3657600" marR="0" indent="0" algn="l" defTabSz="914400">
+        <a:lnSpc>
+          <a:spcPct val="100000"/>
+        </a:lnSpc>
+        <a:spcBef>
+          <a:spcPts val="0"/>
+        </a:spcBef>
+        <a:spcAft>
+          <a:spcPts val="0"/>
+        </a:spcAft>
+        <a:buNone/>
+        <a:tabLst/>
+        <a:defRPr lang="en-us" sz="1800" b="0" i="0" u="none" strike="noStrike" kern="1" cap="none" spc="0" baseline="0">
+          <a:solidFill>
+            <a:schemeClr val="tx1"/>
+          </a:solidFill>
+          <a:effectLst/>
+          <a:latin typeface="Calibri" pitchFamily="2" charset="0"/>
+          <a:ea typeface="Calibri" pitchFamily="2" charset="0"/>
+          <a:cs typeface="Calibri" pitchFamily="2" charset="0"/>
+        </a:defRPr>
+      </a:lvl9pPr>
     </p:titleStyle>
     <p:bodyStyle>
-      <a:lvl1pPr marL="228600" indent="-228600" algn="l" defTabSz="914400" rtl="0" eaLnBrk="1" latinLnBrk="0" hangingPunct="1">
+      <a:lvl1pPr marL="228600" marR="0" indent="-228600" algn="l" defTabSz="914400">
         <a:lnSpc>
           <a:spcPct val="90000"/>
         </a:lnSpc>
         <a:spcBef>
           <a:spcPts val="1000"/>
         </a:spcBef>
-        <a:buFont typeface="Arial" panose="020B0604020202020204" pitchFamily="34" charset="0"/>
+        <a:spcAft>
+          <a:spcPts val="0"/>
+        </a:spcAft>
+        <a:buClrTx/>
+        <a:buSzTx/>
+        <a:buFont typeface="Arial" pitchFamily="2" charset="0"/>
         <a:buChar char="•"/>
-        <a:defRPr sz="2800" kern="1200">
+        <a:tabLst/>
+        <a:defRPr lang="en-us" sz="2800" b="0" i="0" u="none" strike="noStrike" kern="1" cap="none" spc="0" baseline="0">
           <a:solidFill>
             <a:schemeClr val="tx1"/>
           </a:solidFill>
-          <a:latin typeface="+mn-lt"/>
-          <a:ea typeface="+mn-ea"/>
-          <a:cs typeface="+mn-cs"/>
+          <a:effectLst/>
+          <a:latin typeface="Calibri" pitchFamily="2" charset="0"/>
+          <a:ea typeface="Calibri" pitchFamily="2" charset="0"/>
+          <a:cs typeface="Calibri" pitchFamily="2" charset="0"/>
         </a:defRPr>
       </a:lvl1pPr>
-      <a:lvl2pPr marL="685800" indent="-228600" algn="l" defTabSz="914400" rtl="0" eaLnBrk="1" latinLnBrk="0" hangingPunct="1">
+      <a:lvl2pPr marL="685800" marR="0" indent="-228600" algn="l" defTabSz="914400">
         <a:lnSpc>
           <a:spcPct val="90000"/>
         </a:lnSpc>
         <a:spcBef>
           <a:spcPts val="500"/>
         </a:spcBef>
-        <a:buFont typeface="Arial" panose="020B0604020202020204" pitchFamily="34" charset="0"/>
+        <a:spcAft>
+          <a:spcPts val="0"/>
+        </a:spcAft>
+        <a:buClrTx/>
+        <a:buSzTx/>
+        <a:buFont typeface="Arial" pitchFamily="2" charset="0"/>
         <a:buChar char="•"/>
-        <a:defRPr sz="2400" kern="1200">
+        <a:tabLst/>
+        <a:defRPr lang="en-us" sz="2400" b="0" i="0" u="none" strike="noStrike" kern="1" cap="none" spc="0" baseline="0">
           <a:solidFill>
             <a:schemeClr val="tx1"/>
           </a:solidFill>
-          <a:latin typeface="+mn-lt"/>
-          <a:ea typeface="+mn-ea"/>
-          <a:cs typeface="+mn-cs"/>
+          <a:effectLst/>
+          <a:latin typeface="Calibri" pitchFamily="2" charset="0"/>
+          <a:ea typeface="Calibri" pitchFamily="2" charset="0"/>
+          <a:cs typeface="Calibri" pitchFamily="2" charset="0"/>
         </a:defRPr>
       </a:lvl2pPr>
-      <a:lvl3pPr marL="1143000" indent="-228600" algn="l" defTabSz="914400" rtl="0" eaLnBrk="1" latinLnBrk="0" hangingPunct="1">
+      <a:lvl3pPr marL="1143000" marR="0" indent="-228600" algn="l" defTabSz="914400">
         <a:lnSpc>
           <a:spcPct val="90000"/>
         </a:lnSpc>
         <a:spcBef>
           <a:spcPts val="500"/>
         </a:spcBef>
-        <a:buFont typeface="Arial" panose="020B0604020202020204" pitchFamily="34" charset="0"/>
+        <a:spcAft>
+          <a:spcPts val="0"/>
+        </a:spcAft>
+        <a:buClrTx/>
+        <a:buSzTx/>
+        <a:buFont typeface="Arial" pitchFamily="2" charset="0"/>
         <a:buChar char="•"/>
-        <a:defRPr sz="2000" kern="1200">
+        <a:tabLst/>
+        <a:defRPr lang="en-us" sz="2000" b="0" i="0" u="none" strike="noStrike" kern="1" cap="none" spc="0" baseline="0">
           <a:solidFill>
             <a:schemeClr val="tx1"/>
           </a:solidFill>
-          <a:latin typeface="+mn-lt"/>
-          <a:ea typeface="+mn-ea"/>
-          <a:cs typeface="+mn-cs"/>
+          <a:effectLst/>
+          <a:latin typeface="Calibri" pitchFamily="2" charset="0"/>
+          <a:ea typeface="Calibri" pitchFamily="2" charset="0"/>
+          <a:cs typeface="Calibri" pitchFamily="2" charset="0"/>
         </a:defRPr>
       </a:lvl3pPr>
-      <a:lvl4pPr marL="1600200" indent="-228600" algn="l" defTabSz="914400" rtl="0" eaLnBrk="1" latinLnBrk="0" hangingPunct="1">
+      <a:lvl4pPr marL="1600200" marR="0" indent="-228600" algn="l" defTabSz="914400">
         <a:lnSpc>
           <a:spcPct val="90000"/>
         </a:lnSpc>
         <a:spcBef>
           <a:spcPts val="500"/>
         </a:spcBef>
-        <a:buFont typeface="Arial" panose="020B0604020202020204" pitchFamily="34" charset="0"/>
+        <a:spcAft>
+          <a:spcPts val="0"/>
+        </a:spcAft>
+        <a:buClrTx/>
+        <a:buSzTx/>
+        <a:buFont typeface="Arial" pitchFamily="2" charset="0"/>
         <a:buChar char="•"/>
-        <a:defRPr sz="1800" kern="1200">
+        <a:tabLst/>
+        <a:defRPr lang="en-us" sz="1800" b="0" i="0" u="none" strike="noStrike" kern="1" cap="none" spc="0" baseline="0">
           <a:solidFill>
             <a:schemeClr val="tx1"/>
           </a:solidFill>
-          <a:latin typeface="+mn-lt"/>
-          <a:ea typeface="+mn-ea"/>
-          <a:cs typeface="+mn-cs"/>
+          <a:effectLst/>
+          <a:latin typeface="Calibri" pitchFamily="2" charset="0"/>
+          <a:ea typeface="Calibri" pitchFamily="2" charset="0"/>
+          <a:cs typeface="Calibri" pitchFamily="2" charset="0"/>
         </a:defRPr>
       </a:lvl4pPr>
-      <a:lvl5pPr marL="2057400" indent="-228600" algn="l" defTabSz="914400" rtl="0" eaLnBrk="1" latinLnBrk="0" hangingPunct="1">
+      <a:lvl5pPr marL="2057400" marR="0" indent="-228600" algn="l" defTabSz="914400">
         <a:lnSpc>
           <a:spcPct val="90000"/>
         </a:lnSpc>
         <a:spcBef>
           <a:spcPts val="500"/>
         </a:spcBef>
-        <a:buFont typeface="Arial" panose="020B0604020202020204" pitchFamily="34" charset="0"/>
+        <a:spcAft>
+          <a:spcPts val="0"/>
+        </a:spcAft>
+        <a:buClrTx/>
+        <a:buSzTx/>
+        <a:buFont typeface="Arial" pitchFamily="2" charset="0"/>
         <a:buChar char="•"/>
-        <a:defRPr sz="1800" kern="1200">
+        <a:tabLst/>
+        <a:defRPr lang="en-us" sz="1800" b="0" i="0" u="none" strike="noStrike" kern="1" cap="none" spc="0" baseline="0">
           <a:solidFill>
             <a:schemeClr val="tx1"/>
           </a:solidFill>
-          <a:latin typeface="+mn-lt"/>
-          <a:ea typeface="+mn-ea"/>
-          <a:cs typeface="+mn-cs"/>
+          <a:effectLst/>
+          <a:latin typeface="Calibri" pitchFamily="2" charset="0"/>
+          <a:ea typeface="Calibri" pitchFamily="2" charset="0"/>
+          <a:cs typeface="Calibri" pitchFamily="2" charset="0"/>
         </a:defRPr>
       </a:lvl5pPr>
-      <a:lvl6pPr marL="2514600" indent="-228600" algn="l" defTabSz="914400" rtl="0" eaLnBrk="1" latinLnBrk="0" hangingPunct="1">
+      <a:lvl6pPr marL="2514600" marR="0" indent="-228600" algn="l" defTabSz="914400">
         <a:lnSpc>
           <a:spcPct val="90000"/>
         </a:lnSpc>
         <a:spcBef>
           <a:spcPts val="500"/>
         </a:spcBef>
-        <a:buFont typeface="Arial" panose="020B0604020202020204" pitchFamily="34" charset="0"/>
+        <a:spcAft>
+          <a:spcPts val="0"/>
+        </a:spcAft>
+        <a:buClrTx/>
+        <a:buSzTx/>
+        <a:buFont typeface="Arial" pitchFamily="2" charset="0"/>
         <a:buChar char="•"/>
-        <a:defRPr sz="1800" kern="1200">
+        <a:tabLst/>
+        <a:defRPr lang="en-us" sz="1800" b="0" i="0" u="none" strike="noStrike" kern="1" cap="none" spc="0" baseline="0">
           <a:solidFill>
             <a:schemeClr val="tx1"/>
           </a:solidFill>
-          <a:latin typeface="+mn-lt"/>
-          <a:ea typeface="+mn-ea"/>
-          <a:cs typeface="+mn-cs"/>
+          <a:effectLst/>
+          <a:latin typeface="Calibri" pitchFamily="2" charset="0"/>
+          <a:ea typeface="Calibri" pitchFamily="2" charset="0"/>
+          <a:cs typeface="Calibri" pitchFamily="2" charset="0"/>
         </a:defRPr>
       </a:lvl6pPr>
-      <a:lvl7pPr marL="2971800" indent="-228600" algn="l" defTabSz="914400" rtl="0" eaLnBrk="1" latinLnBrk="0" hangingPunct="1">
+      <a:lvl7pPr marL="2971800" marR="0" indent="-228600" algn="l" defTabSz="914400">
         <a:lnSpc>
           <a:spcPct val="90000"/>
         </a:lnSpc>
         <a:spcBef>
           <a:spcPts val="500"/>
         </a:spcBef>
-        <a:buFont typeface="Arial" panose="020B0604020202020204" pitchFamily="34" charset="0"/>
+        <a:spcAft>
+          <a:spcPts val="0"/>
+        </a:spcAft>
+        <a:buClrTx/>
+        <a:buSzTx/>
+        <a:buFont typeface="Arial" pitchFamily="2" charset="0"/>
         <a:buChar char="•"/>
-        <a:defRPr sz="1800" kern="1200">
+        <a:tabLst/>
+        <a:defRPr lang="en-us" sz="1800" b="0" i="0" u="none" strike="noStrike" kern="1" cap="none" spc="0" baseline="0">
           <a:solidFill>
             <a:schemeClr val="tx1"/>
           </a:solidFill>
-          <a:latin typeface="+mn-lt"/>
-          <a:ea typeface="+mn-ea"/>
-          <a:cs typeface="+mn-cs"/>
+          <a:effectLst/>
+          <a:latin typeface="Calibri" pitchFamily="2" charset="0"/>
+          <a:ea typeface="Calibri" pitchFamily="2" charset="0"/>
+          <a:cs typeface="Calibri" pitchFamily="2" charset="0"/>
         </a:defRPr>
       </a:lvl7pPr>
-      <a:lvl8pPr marL="3429000" indent="-228600" algn="l" defTabSz="914400" rtl="0" eaLnBrk="1" latinLnBrk="0" hangingPunct="1">
+      <a:lvl8pPr marL="3429000" marR="0" indent="-228600" algn="l" defTabSz="914400">
         <a:lnSpc>
           <a:spcPct val="90000"/>
         </a:lnSpc>
         <a:spcBef>
           <a:spcPts val="500"/>
         </a:spcBef>
-        <a:buFont typeface="Arial" panose="020B0604020202020204" pitchFamily="34" charset="0"/>
+        <a:spcAft>
+          <a:spcPts val="0"/>
+        </a:spcAft>
+        <a:buClrTx/>
+        <a:buSzTx/>
+        <a:buFont typeface="Arial" pitchFamily="2" charset="0"/>
         <a:buChar char="•"/>
-        <a:defRPr sz="1800" kern="1200">
+        <a:tabLst/>
+        <a:defRPr lang="en-us" sz="1800" b="0" i="0" u="none" strike="noStrike" kern="1" cap="none" spc="0" baseline="0">
           <a:solidFill>
             <a:schemeClr val="tx1"/>
           </a:solidFill>
-          <a:latin typeface="+mn-lt"/>
-          <a:ea typeface="+mn-ea"/>
-          <a:cs typeface="+mn-cs"/>
+          <a:effectLst/>
+          <a:latin typeface="Calibri" pitchFamily="2" charset="0"/>
+          <a:ea typeface="Calibri" pitchFamily="2" charset="0"/>
+          <a:cs typeface="Calibri" pitchFamily="2" charset="0"/>
         </a:defRPr>
       </a:lvl8pPr>
-      <a:lvl9pPr marL="3886200" indent="-228600" algn="l" defTabSz="914400" rtl="0" eaLnBrk="1" latinLnBrk="0" hangingPunct="1">
+      <a:lvl9pPr marL="3886200" marR="0" indent="-228600" algn="l" defTabSz="914400">
         <a:lnSpc>
           <a:spcPct val="90000"/>
         </a:lnSpc>
         <a:spcBef>
           <a:spcPts val="500"/>
         </a:spcBef>
-        <a:buFont typeface="Arial" panose="020B0604020202020204" pitchFamily="34" charset="0"/>
+        <a:spcAft>
+          <a:spcPts val="0"/>
+        </a:spcAft>
+        <a:buClrTx/>
+        <a:buSzTx/>
+        <a:buFont typeface="Arial" pitchFamily="2" charset="0"/>
         <a:buChar char="•"/>
-        <a:defRPr sz="1800" kern="1200">
+        <a:tabLst/>
+        <a:defRPr lang="en-us" sz="1800" b="0" i="0" u="none" strike="noStrike" kern="1" cap="none" spc="0" baseline="0">
           <a:solidFill>
             <a:schemeClr val="tx1"/>
           </a:solidFill>
-          <a:latin typeface="+mn-lt"/>
-          <a:ea typeface="+mn-ea"/>
-          <a:cs typeface="+mn-cs"/>
+          <a:effectLst/>
+          <a:latin typeface="Calibri" pitchFamily="2" charset="0"/>
+          <a:ea typeface="Calibri" pitchFamily="2" charset="0"/>
+          <a:cs typeface="Calibri" pitchFamily="2" charset="0"/>
         </a:defRPr>
       </a:lvl9pPr>
     </p:bodyStyle>
     <p:otherStyle>
-      <a:defPPr>
-        <a:defRPr lang="en-US"/>
-      </a:defPPr>
-      <a:lvl1pPr marL="0" algn="l" defTabSz="914400" rtl="0" eaLnBrk="1" latinLnBrk="0" hangingPunct="1">
-        <a:defRPr sz="1800" kern="1200">
+      <a:lvl1pPr marL="0" marR="0" indent="0" algn="l" defTabSz="914400">
+        <a:lnSpc>
+          <a:spcPct val="100000"/>
+        </a:lnSpc>
+        <a:spcBef>
+          <a:spcPts val="0"/>
+        </a:spcBef>
+        <a:spcAft>
+          <a:spcPts val="0"/>
+        </a:spcAft>
+        <a:buNone/>
+        <a:tabLst/>
+        <a:defRPr lang="en-us" sz="1800" b="0" i="0" u="none" strike="noStrike" kern="1" cap="none" spc="0" baseline="0">
           <a:solidFill>
             <a:schemeClr val="tx1"/>
           </a:solidFill>
-          <a:latin typeface="+mn-lt"/>
-          <a:ea typeface="+mn-ea"/>
-          <a:cs typeface="+mn-cs"/>
+          <a:effectLst/>
+          <a:latin typeface="Calibri" pitchFamily="2" charset="0"/>
+          <a:ea typeface="Calibri" pitchFamily="2" charset="0"/>
+          <a:cs typeface="Calibri" pitchFamily="2" charset="0"/>
         </a:defRPr>
       </a:lvl1pPr>
-      <a:lvl2pPr marL="457200" algn="l" defTabSz="914400" rtl="0" eaLnBrk="1" latinLnBrk="0" hangingPunct="1">
-        <a:defRPr sz="1800" kern="1200">
+      <a:lvl2pPr marL="457200" marR="0" indent="0" algn="l" defTabSz="914400">
+        <a:lnSpc>
+          <a:spcPct val="100000"/>
+        </a:lnSpc>
+        <a:spcBef>
+          <a:spcPts val="0"/>
+        </a:spcBef>
+        <a:spcAft>
+          <a:spcPts val="0"/>
+        </a:spcAft>
+        <a:buNone/>
+        <a:tabLst/>
+        <a:defRPr lang="en-us" sz="1800" b="0" i="0" u="none" strike="noStrike" kern="1" cap="none" spc="0" baseline="0">
           <a:solidFill>
             <a:schemeClr val="tx1"/>
           </a:solidFill>
-          <a:latin typeface="+mn-lt"/>
-          <a:ea typeface="+mn-ea"/>
-          <a:cs typeface="+mn-cs"/>
+          <a:effectLst/>
+          <a:latin typeface="Calibri" pitchFamily="2" charset="0"/>
+          <a:ea typeface="Calibri" pitchFamily="2" charset="0"/>
+          <a:cs typeface="Calibri" pitchFamily="2" charset="0"/>
         </a:defRPr>
       </a:lvl2pPr>
-      <a:lvl3pPr marL="914400" algn="l" defTabSz="914400" rtl="0" eaLnBrk="1" latinLnBrk="0" hangingPunct="1">
-        <a:defRPr sz="1800" kern="1200">
+      <a:lvl3pPr marL="914400" marR="0" indent="0" algn="l" defTabSz="914400">
+        <a:lnSpc>
+          <a:spcPct val="100000"/>
+        </a:lnSpc>
+        <a:spcBef>
+          <a:spcPts val="0"/>
+        </a:spcBef>
+        <a:spcAft>
+          <a:spcPts val="0"/>
+        </a:spcAft>
+        <a:buNone/>
+        <a:tabLst/>
+        <a:defRPr lang="en-us" sz="1800" b="0" i="0" u="none" strike="noStrike" kern="1" cap="none" spc="0" baseline="0">
           <a:solidFill>
             <a:schemeClr val="tx1"/>
           </a:solidFill>
-          <a:latin typeface="+mn-lt"/>
-          <a:ea typeface="+mn-ea"/>
-          <a:cs typeface="+mn-cs"/>
+          <a:effectLst/>
+          <a:latin typeface="Calibri" pitchFamily="2" charset="0"/>
+          <a:ea typeface="Calibri" pitchFamily="2" charset="0"/>
+          <a:cs typeface="Calibri" pitchFamily="2" charset="0"/>
         </a:defRPr>
       </a:lvl3pPr>
-      <a:lvl4pPr marL="1371600" algn="l" defTabSz="914400" rtl="0" eaLnBrk="1" latinLnBrk="0" hangingPunct="1">
-        <a:defRPr sz="1800" kern="1200">
+      <a:lvl4pPr marL="1371600" marR="0" indent="0" algn="l" defTabSz="914400">
+        <a:lnSpc>
+          <a:spcPct val="100000"/>
+        </a:lnSpc>
+        <a:spcBef>
+          <a:spcPts val="0"/>
+        </a:spcBef>
+        <a:spcAft>
+          <a:spcPts val="0"/>
+        </a:spcAft>
+        <a:buNone/>
+        <a:tabLst/>
+        <a:defRPr lang="en-us" sz="1800" b="0" i="0" u="none" strike="noStrike" kern="1" cap="none" spc="0" baseline="0">
           <a:solidFill>
             <a:schemeClr val="tx1"/>
           </a:solidFill>
-          <a:latin typeface="+mn-lt"/>
-          <a:ea typeface="+mn-ea"/>
-          <a:cs typeface="+mn-cs"/>
+          <a:effectLst/>
+          <a:latin typeface="Calibri" pitchFamily="2" charset="0"/>
+          <a:ea typeface="Calibri" pitchFamily="2" charset="0"/>
+          <a:cs typeface="Calibri" pitchFamily="2" charset="0"/>
         </a:defRPr>
       </a:lvl4pPr>
-      <a:lvl5pPr marL="1828800" algn="l" defTabSz="914400" rtl="0" eaLnBrk="1" latinLnBrk="0" hangingPunct="1">
-        <a:defRPr sz="1800" kern="1200">
+      <a:lvl5pPr marL="1828800" marR="0" indent="0" algn="l" defTabSz="914400">
+        <a:lnSpc>
+          <a:spcPct val="100000"/>
+        </a:lnSpc>
+        <a:spcBef>
+          <a:spcPts val="0"/>
+        </a:spcBef>
+        <a:spcAft>
+          <a:spcPts val="0"/>
+        </a:spcAft>
+        <a:buNone/>
+        <a:tabLst/>
+        <a:defRPr lang="en-us" sz="1800" b="0" i="0" u="none" strike="noStrike" kern="1" cap="none" spc="0" baseline="0">
           <a:solidFill>
             <a:schemeClr val="tx1"/>
           </a:solidFill>
-          <a:latin typeface="+mn-lt"/>
-          <a:ea typeface="+mn-ea"/>
-          <a:cs typeface="+mn-cs"/>
+          <a:effectLst/>
+          <a:latin typeface="Calibri" pitchFamily="2" charset="0"/>
+          <a:ea typeface="Calibri" pitchFamily="2" charset="0"/>
+          <a:cs typeface="Calibri" pitchFamily="2" charset="0"/>
         </a:defRPr>
       </a:lvl5pPr>
-      <a:lvl6pPr marL="2286000" algn="l" defTabSz="914400" rtl="0" eaLnBrk="1" latinLnBrk="0" hangingPunct="1">
-        <a:defRPr sz="1800" kern="1200">
+      <a:lvl6pPr marL="2286000" marR="0" indent="0" algn="l" defTabSz="914400">
+        <a:lnSpc>
+          <a:spcPct val="100000"/>
+        </a:lnSpc>
+        <a:spcBef>
+          <a:spcPts val="0"/>
+        </a:spcBef>
+        <a:spcAft>
+          <a:spcPts val="0"/>
+        </a:spcAft>
+        <a:buNone/>
+        <a:tabLst/>
+        <a:defRPr lang="en-us" sz="1800" b="0" i="0" u="none" strike="noStrike" kern="1" cap="none" spc="0" baseline="0">
           <a:solidFill>
             <a:schemeClr val="tx1"/>
           </a:solidFill>
-          <a:latin typeface="+mn-lt"/>
-          <a:ea typeface="+mn-ea"/>
-          <a:cs typeface="+mn-cs"/>
+          <a:effectLst/>
+          <a:latin typeface="Calibri" pitchFamily="2" charset="0"/>
+          <a:ea typeface="Calibri" pitchFamily="2" charset="0"/>
+          <a:cs typeface="Calibri" pitchFamily="2" charset="0"/>
         </a:defRPr>
       </a:lvl6pPr>
-      <a:lvl7pPr marL="2743200" algn="l" defTabSz="914400" rtl="0" eaLnBrk="1" latinLnBrk="0" hangingPunct="1">
-        <a:defRPr sz="1800" kern="1200">
+      <a:lvl7pPr marL="2743200" marR="0" indent="0" algn="l" defTabSz="914400">
+        <a:lnSpc>
+          <a:spcPct val="100000"/>
+        </a:lnSpc>
+        <a:spcBef>
+          <a:spcPts val="0"/>
+        </a:spcBef>
+        <a:spcAft>
+          <a:spcPts val="0"/>
+        </a:spcAft>
+        <a:buNone/>
+        <a:tabLst/>
+        <a:defRPr lang="en-us" sz="1800" b="0" i="0" u="none" strike="noStrike" kern="1" cap="none" spc="0" baseline="0">
           <a:solidFill>
             <a:schemeClr val="tx1"/>
           </a:solidFill>
-          <a:latin typeface="+mn-lt"/>
-          <a:ea typeface="+mn-ea"/>
-          <a:cs typeface="+mn-cs"/>
+          <a:effectLst/>
+          <a:latin typeface="Calibri" pitchFamily="2" charset="0"/>
+          <a:ea typeface="Calibri" pitchFamily="2" charset="0"/>
+          <a:cs typeface="Calibri" pitchFamily="2" charset="0"/>
         </a:defRPr>
       </a:lvl7pPr>
-      <a:lvl8pPr marL="3200400" algn="l" defTabSz="914400" rtl="0" eaLnBrk="1" latinLnBrk="0" hangingPunct="1">
-        <a:defRPr sz="1800" kern="1200">
+      <a:lvl8pPr marL="3200400" marR="0" indent="0" algn="l" defTabSz="914400">
+        <a:lnSpc>
+          <a:spcPct val="100000"/>
+        </a:lnSpc>
+        <a:spcBef>
+          <a:spcPts val="0"/>
+        </a:spcBef>
+        <a:spcAft>
+          <a:spcPts val="0"/>
+        </a:spcAft>
+        <a:buNone/>
+        <a:tabLst/>
+        <a:defRPr lang="en-us" sz="1800" b="0" i="0" u="none" strike="noStrike" kern="1" cap="none" spc="0" baseline="0">
           <a:solidFill>
             <a:schemeClr val="tx1"/>
           </a:solidFill>
-          <a:latin typeface="+mn-lt"/>
-          <a:ea typeface="+mn-ea"/>
-          <a:cs typeface="+mn-cs"/>
+          <a:effectLst/>
+          <a:latin typeface="Calibri" pitchFamily="2" charset="0"/>
+          <a:ea typeface="Calibri" pitchFamily="2" charset="0"/>
+          <a:cs typeface="Calibri" pitchFamily="2" charset="0"/>
         </a:defRPr>
       </a:lvl8pPr>
-      <a:lvl9pPr marL="3657600" algn="l" defTabSz="914400" rtl="0" eaLnBrk="1" latinLnBrk="0" hangingPunct="1">
-        <a:defRPr sz="1800" kern="1200">
+      <a:lvl9pPr marL="3657600" marR="0" indent="0" algn="l" defTabSz="914400">
+        <a:lnSpc>
+          <a:spcPct val="100000"/>
+        </a:lnSpc>
+        <a:spcBef>
+          <a:spcPts val="0"/>
+        </a:spcBef>
+        <a:spcAft>
+          <a:spcPts val="0"/>
+        </a:spcAft>
+        <a:buNone/>
+        <a:tabLst/>
+        <a:defRPr lang="en-us" sz="1800" b="0" i="0" u="none" strike="noStrike" kern="1" cap="none" spc="0" baseline="0">
           <a:solidFill>
             <a:schemeClr val="tx1"/>
           </a:solidFill>
-          <a:latin typeface="+mn-lt"/>
-          <a:ea typeface="+mn-ea"/>
-          <a:cs typeface="+mn-cs"/>
+          <a:effectLst/>
+          <a:latin typeface="Calibri" pitchFamily="2" charset="0"/>
+          <a:ea typeface="Calibri" pitchFamily="2" charset="0"/>
+          <a:cs typeface="Calibri" pitchFamily="2" charset="0"/>
         </a:defRPr>
       </a:lvl9pPr>
     </p:otherStyle>
@@ -2957,7 +3976,7 @@
 </file>
 
 <file path=ppt/slides/slide1.xml><?xml version="1.0" encoding="utf-8"?>
-<p:sld xmlns:a="http://schemas.openxmlformats.org/drawingml/2006/main" xmlns:r="http://schemas.openxmlformats.org/officeDocument/2006/relationships" xmlns:p="http://schemas.openxmlformats.org/presentationml/2006/main">
+<p:sld xmlns:p="http://schemas.openxmlformats.org/presentationml/2006/main" xmlns:mc="http://schemas.openxmlformats.org/markup-compatibility/2006" xmlns:p14="http://schemas.microsoft.com/office/powerpoint/2010/main" xmlns:p15="http://schemas.microsoft.com/office/powerpoint/2012/main" xmlns:r="http://schemas.openxmlformats.org/officeDocument/2006/relationships" xmlns:a="http://schemas.openxmlformats.org/drawingml/2006/main" mc:Ignorable="p14">
   <p:cSld>
     <p:spTree>
       <p:nvGrpSpPr>
@@ -2977,7 +3996,12 @@
         <p:nvSpPr>
           <p:cNvPr id="2" name="Title 1"/>
           <p:cNvSpPr>
-            <a:spLocks noGrp="1"/>
+            <a:spLocks noGrp="1" noChangeArrowheads="1"/>
+            <a:extLst>
+              <a:ext uri="smNativeData">
+                <pr:smNativeData xmlns:pr="smNativeData" xmlns="smNativeData" val="SMDATA_15_+nJ9aRMAAAAlAAAAZAAAAA0AAAAAkAAAAEgAAACQAAAASAAAAAAAAAACAAAAAAAAAAEAAABQAAAAAAAAAAAA4D8AAAAAAADgPwAAAAAAAOA/AAAAAAAA4D8AAAAAAADgPwAAAAAAAOA/AAAAAAAA4D8AAAAAAADgPwAAAAAAAOA/AAAAAAAA4D8CAAAAjAAAAAAAAAAAAAAAW5vVDP///wgAAAAAAAAAAAAAAAAAAAAAAAAAAAAAAAAAAAAAZAAAAAEAAABAAAAAAAAAAAAAAAAAAAAAAAAAAAAAAAAAAAAAAAAAAAAAAAAAAAAAAAAAAAAAAAAAAAAAAAAAAAAAAAAAAAAAAAAAAAAAAAAAAAAAAAAAAAAAAAAAAAAAFAAAADwAAAAAAAAAAAAAAAAAAAkUAAAAAQAAABQAAAAUAAAAFAAAAAEAAAAAAAAAZAAAAGQAAAAAAAAAZAAAAGQAAAAVAAAAYAAAAAAAAAAAAAAADwAAACADAAAAAAAAAAAAAAEAAACgMgAAVgcAAKr4//8BAAAAf39/AAEAAABkAAAAAAAAABQAAABAHwAAAAAAACYAAAAAAAAAwOD//wAAAAAmAAAAZAAAABYAAABMAAAAAAAAAAAAAAAEAAAAAAAAAAEAAADn5uYKAAAAACgAAAAoAAAAZAAAAGQAAAAAAAAAzMzMAAAAAABQAAAAUAAAAGQAAABkAAAAAAAAABcAAAAUAAAAAAAAAAAAAAD/fwAA/38AAAAAAAAJAAAABAAAAAAAAAAeAAAAaAAAAAAAAAAAAAAAAAAAAAAAAAAAAAAAECcAABAnAAAAAAAAAAAAAAAAAAAAAAAAAAAAAAAAAAAAAAAAAAAAABQAAAAAAAAAwMD/AAAAAABkAAAAMgAAAAAAAABkAAAAAAAAAH9/fwAKAAAAIgAAABgAAAAAAAAAAAAAAAAAAAAAAAAAAAAAAAAAAAAkAAAAJAAAAAAAAAAHAAAAAAAAAAAAAAAAAAAAAAAAAAAAAAAAAAAAf39/ACUAAABYAAAAAAAAAAAAAAAAAAAAAAAAAAAAAAAAAAAAAAAAAAAAAAAAAAAAAAAAAAAAAAA/AAAAAAAAAKCGAQAAAAAAAAAAAAAAAAAMAAAAAQAAAAAAAAAAAAAAAAAAAB8AAABUAAAAW5vVBf///wEAAAAAAAAAAAAAAAAAAAAAAAAAAAAAAAAAAAAAAAAAAAAAAAJ/f38A5+bmA8zMzADAwP8Af39/AAAAAAAAAAAAAAAAAAAAAAAAAAAAIQAAABgAAAAUAAAAYAkAAOgGAACgQQAAmBUAABAAAAAmAAAACAAAAAAAAAAAAAAA"/>
+              </a:ext>
+            </a:extLst>
           </p:cNvSpPr>
           <p:nvPr>
             <p:ph type="ctrTitle"/>
@@ -2988,11 +4012,12 @@
           <a:bodyPr/>
           <a:lstStyle/>
           <a:p>
-            <a:r>
-              <a:rPr lang="en-US" dirty="0" smtClean="0"/>
+            <a:pPr>
+              <a:defRPr lang="en-us"/>
+            </a:pPr>
+            <a:r>
               <a:t>Object Detection Models</a:t>
             </a:r>
-            <a:endParaRPr lang="en-US" dirty="0"/>
           </a:p>
         </p:txBody>
       </p:sp>
@@ -3000,7 +4025,12 @@
         <p:nvSpPr>
           <p:cNvPr id="3" name="Subtitle 2"/>
           <p:cNvSpPr>
-            <a:spLocks noGrp="1"/>
+            <a:spLocks noGrp="1" noChangeArrowheads="1"/>
+            <a:extLst>
+              <a:ext uri="smNativeData">
+                <pr:smNativeData xmlns:pr="smNativeData" xmlns="smNativeData" val="SMDATA_15_+nJ9aRMAAAAlAAAAZAAAAA0AAAAAkAAAAEgAAACQAAAASAAAAAAAAAAAAAAAAAAAAAEAAABQAAAAAAAAAAAA4D8AAAAAAADgPwAAAAAAAOA/AAAAAAAA4D8AAAAAAADgPwAAAAAAAOA/AAAAAAAA4D8AAAAAAADgPwAAAAAAAOA/AAAAAAAA4D8CAAAAjAAAAAAAAAAAAAAAW5vVDP///wgAAAAAAAAAAAAAAAAAAAAAAAAAAAAAAAAAAAAAZAAAAAEAAABAAAAAAAAAAAAAAAAAAAAAAAAAAAAAAAAAAAAAAAAAAAAAAAAAAAAAAAAAAAAAAAAAAAAAAAAAAAAAAAAAAAAAAAAAAAAAAAAAAAAAAAAAAAAAAAAAAAAAFAAAADwAAAAAAAAAAAAAAAAAAAkUAAAAAQAAABQAAAAUAAAAFAAAAAEAAAAAAAAAZAAAAGQAAAAAAAAAZAAAAGQAAAAVAAAAYAAAAAAAAAAAAAAADwAAACADAAAAAAAAAAAAAAEAAACgMgAAVgcAAKr4//8BAAAAf39/AAEAAABkAAAAAAAAABQAAABAHwAAAAAAACYAAAAAAAAAwOD//wAAAAAmAAAAZAAAABYAAABMAAAAAAAAAAAAAAAEAAAAAAAAAAEAAADn5uYKAAAAACgAAAAoAAAAZAAAAGQAAAAAAAAAzMzMAAAAAABQAAAAUAAAAGQAAABkAAAAAAAAABcAAAAUAAAAAAAAAAAAAAD/fwAA/38AAAAAAAAJAAAABAAAAAAAAAAeAAAAaAAAAAAAAAAAAAAAAAAAAAAAAAAAAAAAECcAABAnAAAAAAAAAAAAAAAAAAAAAAAAAAAAAAAAAAAAAAAAAAAAABQAAAAAAAAAwMD/AAAAAABkAAAAMgAAAAAAAABkAAAAAAAAAH9/fwAKAAAAIgAAABgAAAAAAAAAAAAAAAAAAAAAAAAAAAAAAAAAAAAkAAAAJAAAAAAAAAAHAAAAAAAAAAAAAAAAAAAAAAAAAAAAAAAAAAAAf39/ACUAAABYAAAAAAAAAAAAAAAAAAAAAAAAAAAAAAAAAAAAAAAAAAAAAAAAAAAAAAAAAAAAAAA/AAAAAAAAAKCGAQAAAAAAAAAAAAAAAAAMAAAAAQAAAAAAAAAAAAAAAAAAAB8AAABUAAAAW5vVBf///wEAAAAAAAAAAAAAAAAAAAAAAAAAAAAAAAAAAAAAAAAAAAAAAAJ/f38A5+bmA8zMzADAwP8Af39/AAAAAAAAAAAAAAAAAAAAAAAAAAAAIQAAABgAAAAUAAAAYAkAACkWAACgQQAAWCAAABAAAAAmAAAACAAAAAAAAAAAAAAA"/>
+              </a:ext>
+            </a:extLst>
           </p:cNvSpPr>
           <p:nvPr>
             <p:ph type="subTitle" idx="1"/>
@@ -3011,25 +4041,29 @@
           <a:bodyPr/>
           <a:lstStyle/>
           <a:p>
-            <a:endParaRPr lang="en-US"/>
+            <a:pPr>
+              <a:defRPr lang="en-us"/>
+            </a:pPr>
           </a:p>
         </p:txBody>
       </p:sp>
     </p:spTree>
-    <p:extLst>
-      <p:ext uri="{BB962C8B-B14F-4D97-AF65-F5344CB8AC3E}">
-        <p14:creationId xmlns:p14="http://schemas.microsoft.com/office/powerpoint/2010/main" val="2156088603"/>
-      </p:ext>
-    </p:extLst>
   </p:cSld>
   <p:clrMapOvr>
     <a:masterClrMapping/>
   </p:clrMapOvr>
+  <p:timing>
+    <p:tnLst>
+      <p:par>
+        <p:cTn id="1" dur="indefinite" restart="never" nodeType="tmRoot"/>
+      </p:par>
+    </p:tnLst>
+  </p:timing>
 </p:sld>
 </file>
 
 <file path=ppt/slides/slide2.xml><?xml version="1.0" encoding="utf-8"?>
-<p:sld xmlns:a="http://schemas.openxmlformats.org/drawingml/2006/main" xmlns:r="http://schemas.openxmlformats.org/officeDocument/2006/relationships" xmlns:p="http://schemas.openxmlformats.org/presentationml/2006/main">
+<p:sld xmlns:p="http://schemas.openxmlformats.org/presentationml/2006/main" xmlns:mc="http://schemas.openxmlformats.org/markup-compatibility/2006" xmlns:p14="http://schemas.microsoft.com/office/powerpoint/2010/main" xmlns:p15="http://schemas.microsoft.com/office/powerpoint/2012/main" xmlns:r="http://schemas.openxmlformats.org/officeDocument/2006/relationships" xmlns:a="http://schemas.openxmlformats.org/drawingml/2006/main" mc:Ignorable="p14">
   <p:cSld>
     <p:spTree>
       <p:nvGrpSpPr>
@@ -3052,7 +4086,7 @@
             <a:spLocks noGrp="1" noChangeArrowheads="1"/>
             <a:extLst>
               <a:ext uri="smNativeData">
-                <pr:smNativeData xmlns:mc="http://schemas.openxmlformats.org/markup-compatibility/2006" xmlns:p14="http://schemas.microsoft.com/office/powerpoint/2010/main" xmlns:p15="http://schemas.microsoft.com/office/powerpoint/2012/main" xmlns:pr="smNativeData" xmlns="smNativeData" val="SMDATA_15_PhJKaRMAAAAlAAAAZAAAAA0AAAAAkAAAAEgAAACQAAAASAAAAAAAAAABAAAAAAAAAAEAAABQAAAAAAAAAAAA4D8AAAAAAADgPwAAAAAAAOA/AAAAAAAA4D8AAAAAAADgPwAAAAAAAOA/AAAAAAAA4D8AAAAAAADgPwAAAAAAAOA/AAAAAAAA4D8CAAAAjAAAAAAAAAAAAAAAu+DjDP///wgAAAAAAAAAAAAAAAAAAAAAAAAAAAAAAAAAAAAAZAAAAAEAAABAAAAAAAAAAAAAAAAAAAAAAAAAAAAAAAAAAAAAAAAAAAAAAAAAAAAAAAAAAAAAAAAAAAAAAAAAAAAAAAAAAAAAAAAAAAAAAAAAAAAAAAAAAAAAAAAAAAAAFAAAADwAAAAAAAAAAAAAAAAAAAkUAAAAAQAAABQAAAAUAAAAFAAAAAEAAAAAAAAAZAAAAGQAAAAAAAAAZAAAAGQAAAAVAAAAYAAAAAAAAAAAAAAADwAAACADAAAAAAAAAAAAAAEAAACgMgAAVgcAAKr4//8BAAAAf39/AAEAAABkAAAAAAAAABQAAABAHwAAAAAAACYAAAAAAAAAwOD//wAAAAAmAAAAZAAAABYAAABMAAAAAAAAAAAAAAAEAAAAAAAAAAEAAACAgIAKAAAAACgAAAAoAAAAZAAAAGQAAAAAAAAAzMzMAAAAAABQAAAAUAAAAGQAAABkAAAAAAAAABcAAAAUAAAAAAAAAAAAAAD/fwAA/38AAAAAAAAJAAAABAAAAF8AYAAeAAAAaAAAAAAAAAAAAAAAAAAAAAAAAAAAAAAAECcAABAnAAAAAAAAAAAAAAAAAAAAAAAAAAAAAAAAAAAAAAAAAAAAABQAAAAAAAAAwMD/AAAAAABkAAAAMgAAAAAAAABkAAAAAAAAAH9/fwAKAAAAIgAAABgAAAAAAAAAAAAAAAAAAAAAAAAAAAAAAAAAAAAkAAAAJAAAAAAAAAAHAAAAAAAAAAAAAAAAAAAAAAAAAAAAAAAAAAAAf39/ACUAAABYAAAAAAAAAAAAAAAAAAAAAAAAAAAAAAAAAAAAAAAAAAAAAAAAAAAAAAAAAAAAAAA/AAAAAAAAAKCGAQAAAAAAAAAAAAAAAAAMAAAAAQAAAAAAAAAAAAAAAAAAAB8AAABUAAAAAAAABQAAAAEAAAAAAAAAAAAAAAAAAAAAAAAAAAAAAAAAAAAAAAAAAAAAAAJ/f38AAAAAA8zMzADAwP8Af39/AAAAAAAAAAAAAAAAAAAAAAAAAAAAIQAAABgAAAAUAAAAwAMAALABAABARwAAuAgAABAAAAAmAAAACAAAAAAAAAAAAAAA"/>
+                <pr:smNativeData xmlns:pr="smNativeData" xmlns="smNativeData" val="SMDATA_15_+nJ9aRMAAAAlAAAAZAAAAA0AAAAAkAAAAEgAAACQAAAASAAAAAAAAAABAAAAAAAAAAEAAABQAAAAAAAAAAAA4D8AAAAAAADgPwAAAAAAAOA/AAAAAAAA4D8AAAAAAADgPwAAAAAAAOA/AAAAAAAA4D8AAAAAAADgPwAAAAAAAOA/AAAAAAAA4D8CAAAAjAAAAAAAAAAAAAAAW5vVDP///wgAAAAAAAAAAAAAAAAAAAAAAAAAAAAAAAAAAAAAZAAAAAEAAABAAAAAAAAAAAAAAAAAAAAAAAAAAAAAAAAAAAAAAAAAAAAAAAAAAAAAAAAAAAAAAAAAAAAAAAAAAAAAAAAAAAAAAAAAAAAAAAAAAAAAAAAAAAAAAAAAAAAAFAAAADwAAAAAAAAAAAAAAAAAAAkUAAAAAQAAABQAAAAUAAAAFAAAAAEAAAAAAAAAZAAAAGQAAAAAAAAAZAAAAGQAAAAVAAAAYAAAAAAAAAAAAAAADwAAACADAAAAAAAAAAAAAAEAAACgMgAAVgcAAKr4//8BAAAAf39/AAEAAABkAAAAAAAAABQAAABAHwAAAAAAACYAAAAAAAAAwOD//wAAAAAmAAAAZAAAABYAAABMAAAAAAAAAAAAAAAEAAAAAAAAAAEAAADn5uYKAAAAACgAAAAoAAAAZAAAAGQAAAAAAAAAzMzMAAAAAABQAAAAUAAAAGQAAABkAAAAAAAAABcAAAAUAAAAAAAAAAAAAAD/fwAA/38AAAAAAAAJAAAABAAAAEFBQUEeAAAAaAAAAAAAAAAAAAAAAAAAAAAAAAAAAAAAECcAABAnAAAAAAAAAAAAAAAAAAAAAAAAAAAAAAAAAAAAAAAAAAAAABQAAAAAAAAAwMD/AAAAAABkAAAAMgAAAAAAAABkAAAAAAAAAH9/fwAKAAAAIgAAABgAAAAAAAAAAAAAAAAAAAAAAAAAAAAAAAAAAAAkAAAAJAAAAAAAAAAHAAAAAAAAAAAAAAAAAAAAAAAAAAAAAAAAAAAAf39/ACUAAABYAAAAAAAAAAAAAAAAAAAAAAAAAAAAAAAAAAAAAAAAAAAAAAAAAAAAAAAAAAAAAAA/AAAAAAAAAKCGAQAAAAAAAAAAAAAAAAAMAAAAAQAAAAAAAAAAAAAAAAAAAB8AAABUAAAAW5vVBf///wEAAAAAAAAAAAAAAAAAAAAAAAAAAAAAAAAAAAAAAAAAAAAAAAJ/f38A5+bmA8zMzADAwP8Af39/AAAAAAAAAAAAAAAAAAAAAAAAAAAAIQAAABgAAAAUAAAAKAUAAD8CAADYRQAAZwoAABAAAAAmAAAACAAAAAAAAAAAAAAA"/>
               </a:ext>
             </a:extLst>
           </p:cNvSpPr>
@@ -3065,11 +4099,17 @@
           <a:bodyPr/>
           <a:lstStyle/>
           <a:p>
+            <a:pPr>
+              <a:defRPr lang="en-us"/>
+            </a:pPr>
             <a:r>
               <a:t>Object Detection models</a:t>
             </a:r>
           </a:p>
           <a:p>
+            <a:pPr>
+              <a:defRPr lang="en-us"/>
+            </a:pPr>
             <a:r>
               <a:t>recognize multiple objects in same image</a:t>
             </a:r>
@@ -3083,7 +4123,7 @@
             <a:spLocks noGrp="1" noChangeArrowheads="1"/>
             <a:extLst>
               <a:ext uri="smNativeData">
-                <pr:smNativeData xmlns:mc="http://schemas.openxmlformats.org/markup-compatibility/2006" xmlns:p14="http://schemas.microsoft.com/office/powerpoint/2010/main" xmlns:p15="http://schemas.microsoft.com/office/powerpoint/2012/main" xmlns:pr="smNativeData" xmlns="smNativeData" val="SMDATA_15_PhJKaRMAAAAlAAAAZAAAAA0AAAAAkAAAAEgAAACQAAAASAAAAAAAAAAAAAAAAAAAAAEAAABQAAAAAAAAAAAA4D8AAAAAAADgPwAAAAAAAOA/AAAAAAAA4D8AAAAAAADgPwAAAAAAAOA/AAAAAAAA4D8AAAAAAADgPwAAAAAAAOA/AAAAAAAA4D8CAAAAjAAAAAAAAAAAAAAAu+DjDP///wgAAAAAAAAAAAAAAAAAAAAAAAAAAAAAAAAAAAAAZAAAAAEAAABAAAAAAAAAAAAAAAAAAAAAAAAAAAAAAAAAAAAAAAAAAAAAAAAAAAAAAAAAAAAAAAAAAAAAAAAAAAAAAAAAAAAAAAAAAAAAAAAAAAAAAAAAAAAAAAAAAAAAFAAAADwAAAAAAAAAAAAAAAAAAAkUAAAAAQAAABQAAAAUAAAAFAAAAAEAAAAAAAAAZAAAAGQAAAAAAAAAZAAAAGQAAAAVAAAAYAAAAAAAAAAAAAAADwAAACADAAAAAAAAAAAAAAEAAACgMgAAVgcAAKr4//8BAAAAf39/AAEAAABkAAAAAAAAABQAAABAHwAAAAAAACYAAAAAAAAAwOD//wAAAAAmAAAAZAAAABYAAABMAAAAAAAAAAAAAAAEAAAAAAAAAAEAAACAgIAKAAAAACgAAAAoAAAAZAAAAGQAAAAAAAAAzMzMAAAAAABQAAAAUAAAAGQAAABkAAAAAAAAABcAAAAUAAAAAAAAAAAAAAD/fwAA/38AAAAAAAAJAAAABAAAAF8AYAAeAAAAaAAAAAAAAAAAAAAAAAAAAAAAAAAAAAAAECcAABAnAAAAAAAAAAAAAAAAAAAAAAAAAAAAAAAAAAAAAAAAAAAAABQAAAAAAAAAwMD/AAAAAABkAAAAMgAAAAAAAABkAAAAAAAAAH9/fwAKAAAAIgAAABgAAAAAAAAAAAAAAAAAAAAAAAAAAAAAAAAAAAAkAAAAJAAAAAAAAAAHAAAAAAAAAAAAAAAAAAAAAAAAAAAAAAAAAAAAf39/ACUAAABYAAAAAAAAAAAAAAAAAAAAAAAAAAAAAAAAAAAAAAAAAAAAAAAAAAAAAAAAAAAAAAA/AAAAAAAAAKCGAQAAAAAAAAAAAAAAAAAMAAAAAQAAAAAAAAAAAAAAAAAAAB8AAABUAAAAAAAABQAAAAEAAAAAAAAAAAAAAAAAAAAAAAAAAAAAAAAAAAAAAAAAAAAAAAJ/f38AAAAAA8zMzADAwP8Af39/AAAAAAAAAAAAAAAAAAAAAAAAAAAAIQAAABgAAAAUAAAAwAMAANgJAABARwAAsCUAAAAAAAAmAAAACAAAAAEAAAAAAAAA"/>
+                <pr:smNativeData xmlns:pr="smNativeData" xmlns="smNativeData" val="SMDATA_15_+nJ9aRMAAAAlAAAAZAAAAA0AAAAAkAAAAEgAAACQAAAASAAAAAAAAAAAAAAAAAAAAAEAAABQAAAAAAAAAAAA4D8AAAAAAADgPwAAAAAAAOA/AAAAAAAA4D8AAAAAAADgPwAAAAAAAOA/AAAAAAAA4D8AAAAAAADgPwAAAAAAAOA/AAAAAAAA4D8CAAAAjAAAAAAAAAAAAAAAW5vVDP///wgAAAAAAAAAAAAAAAAAAAAAAAAAAAAAAAAAAAAAZAAAAAEAAABAAAAAAAAAAAAAAAAAAAAAAAAAAAAAAAAAAAAAAAAAAAAAAAAAAAAAAAAAAAAAAAAAAAAAAAAAAAAAAAAAAAAAAAAAAAAAAAAAAAAAAAAAAAAAAAAAAAAAFAAAADwAAAAAAAAAAAAAAAAAAAkUAAAAAQAAABQAAAAUAAAAFAAAAAEAAAAAAAAAZAAAAGQAAAAAAAAAZAAAAGQAAAAVAAAAYAAAAAAAAAAAAAAADwAAACADAAAAAAAAAAAAAAEAAACgMgAAVgcAAKr4//8BAAAAf39/AAEAAABkAAAAAAAAABQAAABAHwAAAAAAACYAAAAAAAAAwOD//wAAAAAmAAAAZAAAABYAAABMAAAAAAAAAAAAAAAEAAAAAAAAAAEAAADn5uYKAAAAACgAAAAoAAAAZAAAAGQAAAAAAAAAzMzMAAAAAABQAAAAUAAAAGQAAABkAAAAAAAAABcAAAAUAAAAAAAAAAAAAAD/fwAA/38AAAAAAAAJAAAABAAAAAAAAAAeAAAAaAAAAAAAAAAAAAAAAAAAAAAAAAAAAAAAECcAABAnAAAAAAAAAAAAAAAAAAAAAAAAAAAAAAAAAAAAAAAAAAAAABQAAAAAAAAAwMD/AAAAAABkAAAAMgAAAAAAAABkAAAAAAAAAH9/fwAKAAAAIgAAABgAAAAAAAAAAAAAAAAAAAAAAAAAAAAAAAAAAAAkAAAAJAAAAAAAAAAHAAAAAAAAAAAAAAAAAAAAAAAAAAAAAAAAAAAAf39/ACUAAABYAAAAAAAAAAAAAAAAAAAAAAAAAAAAAAAAAAAAAAAAAAAAAAAAAAAAAAAAAAAAAAA/AAAAAAAAAKCGAQAAAAAAAAAAAAAAAAAMAAAAAQAAAAAAAAAAAAAAAAAAAB8AAABUAAAAW5vVBf///wEAAAAAAAAAAAAAAAAAAAAAAAAAAAAAAAAAAAAAAAAAAAAAAAJ/f38A5+bmA8zMzADAwP8Af39/AAAAAAAAAAAAAAAAAAAAAAAAAAAAIQAAABgAAAAUAAAAwAMAANgJAABARwAAsCUAABAAAAAmAAAACAAAAAEgAAAAAAAA"/>
               </a:ext>
             </a:extLst>
           </p:cNvSpPr>
@@ -3098,174 +4138,270 @@
           </a:xfrm>
         </p:spPr>
         <p:txBody>
-          <a:bodyPr>
-            <a:normAutofit fontScale="92500" lnSpcReduction="10000"/>
+          <a:bodyPr vert="horz" wrap="square" lIns="91440" tIns="45720" rIns="91440" bIns="45720" numCol="1" spcCol="215900" anchor="t">
+            <a:prstTxWarp prst="textNoShape">
+              <a:avLst/>
+            </a:prstTxWarp>
           </a:bodyPr>
           <a:lstStyle/>
           <a:p>
-            <a:r>
-              <a:rPr sz="2400" dirty="0"/>
+            <a:pPr>
+              <a:lnSpc>
+                <a:spcPct val="80000"/>
+              </a:lnSpc>
+              <a:spcBef>
+                <a:spcPts val="920"/>
+              </a:spcBef>
+              <a:defRPr lang="en-us" sz="2575" cap="none"/>
+            </a:pPr>
+            <a:r>
+              <a:rPr lang="en-us" sz="2210" cap="none"/>
               <a:t>YOLO - You Only Look Once - single stage/pass</a:t>
             </a:r>
-          </a:p>
-          <a:p>
-            <a:pPr lvl="1"/>
-            <a:r>
-              <a:rPr sz="2000" dirty="0" err="1"/>
-              <a:t>Darknet</a:t>
-            </a:r>
-            <a:r>
-              <a:rPr sz="2000" dirty="0"/>
-              <a:t> latest version is v4 but is continually being improved</a:t>
-            </a:r>
+            <a:endParaRPr lang="en-us" sz="2210" cap="none"/>
+          </a:p>
+          <a:p>
+            <a:pPr lvl="1">
+              <a:lnSpc>
+                <a:spcPct val="80000"/>
+              </a:lnSpc>
+              <a:spcBef>
+                <a:spcPts val="460"/>
+              </a:spcBef>
+              <a:defRPr lang="en-us" sz="2210" cap="none"/>
+            </a:pPr>
+            <a:r>
+              <a:rPr lang="en-us" sz="1840" cap="none"/>
+              <a:t>Darknet latest version is v4 but is continually being improved</a:t>
+            </a:r>
+            <a:endParaRPr lang="en-us" sz="1840" cap="none"/>
           </a:p>
           <a:p>
             <a:pPr lvl="2">
-              <a:defRPr cap="none">
+              <a:lnSpc>
+                <a:spcPct val="80000"/>
+              </a:lnSpc>
+              <a:spcBef>
+                <a:spcPts val="460"/>
+              </a:spcBef>
+              <a:defRPr lang="en-us" sz="1840" cap="none">
                 <a:hlinkClick r:id="rId2"/>
               </a:defRPr>
             </a:pPr>
             <a:r>
-              <a:rPr sz="1800" dirty="0">
+              <a:rPr lang="en-us" sz="1655" cap="none">
                 <a:hlinkClick r:id="rId2"/>
               </a:rPr>
               <a:t>https://www.ccoderun.ca/programming/yolo_faq/</a:t>
             </a:r>
-          </a:p>
-          <a:p>
-            <a:pPr lvl="2"/>
-            <a:r>
-              <a:rPr sz="1800" dirty="0"/>
+            <a:endParaRPr lang="en-us" sz="1655" cap="none">
+              <a:hlinkClick r:id="rId2"/>
+            </a:endParaRPr>
+          </a:p>
+          <a:p>
+            <a:pPr lvl="2">
+              <a:lnSpc>
+                <a:spcPct val="80000"/>
+              </a:lnSpc>
+              <a:spcBef>
+                <a:spcPts val="460"/>
+              </a:spcBef>
+              <a:defRPr lang="en-us" sz="1840" cap="none"/>
+            </a:pPr>
+            <a:r>
+              <a:rPr lang="en-us" sz="1655" cap="none"/>
               <a:t>https://github.com/hank-ai/darknet</a:t>
             </a:r>
-          </a:p>
-          <a:p>
-            <a:pPr lvl="1"/>
-            <a:r>
-              <a:rPr sz="2000" dirty="0"/>
-              <a:t>Non-</a:t>
-            </a:r>
-            <a:r>
-              <a:rPr sz="2000" dirty="0" err="1"/>
-              <a:t>Darknet</a:t>
-            </a:r>
-            <a:r>
-              <a:rPr sz="2000" dirty="0"/>
-              <a:t> versions are v5+</a:t>
-            </a:r>
-          </a:p>
-          <a:p>
-            <a:pPr lvl="2"/>
-            <a:r>
-              <a:rPr sz="1800" dirty="0"/>
-              <a:t>*Note that </a:t>
-            </a:r>
-            <a:r>
-              <a:rPr lang="en-US" sz="1800" dirty="0" err="1" smtClean="0"/>
-              <a:t>U</a:t>
-            </a:r>
-            <a:r>
-              <a:rPr sz="1800" dirty="0" err="1" smtClean="0"/>
-              <a:t>ltralytics</a:t>
-            </a:r>
-            <a:r>
-              <a:rPr sz="1800" dirty="0" smtClean="0"/>
-              <a:t> </a:t>
-            </a:r>
-            <a:r>
-              <a:rPr sz="1800" dirty="0"/>
-              <a:t>does not own Yolo! You can make these models on your own, but they do provide pre-trained </a:t>
-            </a:r>
-            <a:r>
-              <a:rPr sz="1800" dirty="0" smtClean="0"/>
-              <a:t>weights</a:t>
-            </a:r>
-            <a:r>
-              <a:rPr lang="en-US" sz="1800" dirty="0" smtClean="0"/>
-              <a:t> and super-easy python library (pay if commercial)</a:t>
-            </a:r>
-            <a:r>
-              <a:rPr sz="1800" dirty="0" smtClean="0"/>
-              <a:t>.</a:t>
-            </a:r>
-            <a:endParaRPr sz="1800" dirty="0"/>
-          </a:p>
-          <a:p>
-            <a:pPr lvl="2"/>
-            <a:r>
-              <a:rPr sz="1800" dirty="0"/>
+            <a:endParaRPr lang="en-us" sz="1655" cap="none"/>
+          </a:p>
+          <a:p>
+            <a:pPr lvl="1">
+              <a:lnSpc>
+                <a:spcPct val="80000"/>
+              </a:lnSpc>
+              <a:spcBef>
+                <a:spcPts val="460"/>
+              </a:spcBef>
+              <a:defRPr lang="en-us" sz="2210" cap="none"/>
+            </a:pPr>
+            <a:r>
+              <a:rPr lang="en-us" sz="1840" cap="none"/>
+              <a:t>Non-Darknet versions are v5+</a:t>
+            </a:r>
+            <a:endParaRPr lang="en-us" sz="1840" cap="none"/>
+          </a:p>
+          <a:p>
+            <a:pPr lvl="2">
+              <a:lnSpc>
+                <a:spcPct val="80000"/>
+              </a:lnSpc>
+              <a:spcBef>
+                <a:spcPts val="460"/>
+              </a:spcBef>
+              <a:defRPr lang="en-us" sz="1840" cap="none"/>
+            </a:pPr>
+            <a:r>
+              <a:rPr lang="en-us" sz="1655" cap="none"/>
+              <a:t>*Note that Ultralytics does not own Yolo! You can make these models on your own, but they do provide pre-trained weights and super-easy python library (pay if commercial).</a:t>
+            </a:r>
+            <a:endParaRPr lang="en-us" sz="1655" cap="none"/>
+          </a:p>
+          <a:p>
+            <a:pPr lvl="2">
+              <a:lnSpc>
+                <a:spcPct val="80000"/>
+              </a:lnSpc>
+              <a:spcBef>
+                <a:spcPts val="460"/>
+              </a:spcBef>
+              <a:defRPr lang="en-us" sz="1840" cap="none"/>
+            </a:pPr>
+            <a:r>
+              <a:rPr lang="en-us" sz="1655" cap="none"/>
               <a:t>v5: </a:t>
             </a:r>
             <a:r>
-              <a:rPr sz="1800" cap="none" dirty="0">
+              <a:rPr lang="en-us" sz="1655" cap="none">
                 <a:hlinkClick r:id="rId3"/>
               </a:rPr>
               <a:t>https://github.com/ultralytics/yolov5</a:t>
             </a:r>
-          </a:p>
-          <a:p>
-            <a:pPr lvl="2"/>
-            <a:r>
-              <a:rPr sz="1800" dirty="0"/>
+            <a:endParaRPr lang="en-us" sz="1655" cap="none">
+              <a:hlinkClick r:id="rId3"/>
+            </a:endParaRPr>
+          </a:p>
+          <a:p>
+            <a:pPr lvl="2">
+              <a:lnSpc>
+                <a:spcPct val="80000"/>
+              </a:lnSpc>
+              <a:spcBef>
+                <a:spcPts val="460"/>
+              </a:spcBef>
+              <a:defRPr lang="en-us" sz="1840" cap="none"/>
+            </a:pPr>
+            <a:r>
+              <a:rPr lang="en-us" sz="1655" cap="none"/>
               <a:t>v11: </a:t>
             </a:r>
             <a:r>
-              <a:rPr sz="1800" cap="none" dirty="0">
+              <a:rPr lang="en-us" sz="1655" cap="none">
                 <a:hlinkClick r:id="rId4"/>
               </a:rPr>
               <a:t>https://github.com/ultralytics/ultralytics</a:t>
             </a:r>
-          </a:p>
-          <a:p>
-            <a:pPr lvl="2"/>
-            <a:endParaRPr sz="1800" cap="none" dirty="0">
+            <a:endParaRPr lang="en-us" sz="1655" cap="none">
               <a:hlinkClick r:id="rId4"/>
             </a:endParaRPr>
           </a:p>
           <a:p>
-            <a:r>
-              <a:rPr sz="2400" dirty="0"/>
+            <a:pPr lvl="2">
+              <a:lnSpc>
+                <a:spcPct val="80000"/>
+              </a:lnSpc>
+              <a:spcBef>
+                <a:spcPts val="460"/>
+              </a:spcBef>
+              <a:defRPr lang="en-us" sz="1840" cap="none"/>
+            </a:pPr>
+            <a:endParaRPr lang="en-us" sz="1655" cap="none">
+              <a:hlinkClick r:id="rId4"/>
+            </a:endParaRPr>
+          </a:p>
+          <a:p>
+            <a:pPr>
+              <a:lnSpc>
+                <a:spcPct val="80000"/>
+              </a:lnSpc>
+              <a:spcBef>
+                <a:spcPts val="920"/>
+              </a:spcBef>
+              <a:defRPr lang="en-us" sz="2575" cap="none"/>
+            </a:pPr>
+            <a:r>
+              <a:rPr lang="en-us" sz="2210" cap="none"/>
               <a:t>Faster R-CNN - multiple stage</a:t>
             </a:r>
-          </a:p>
-          <a:p>
-            <a:pPr lvl="2"/>
-            <a:r>
-              <a:rPr sz="1800" dirty="0"/>
+            <a:endParaRPr lang="en-us" sz="2210" cap="none"/>
+          </a:p>
+          <a:p>
+            <a:pPr lvl="2">
+              <a:lnSpc>
+                <a:spcPct val="80000"/>
+              </a:lnSpc>
+              <a:spcBef>
+                <a:spcPts val="460"/>
+              </a:spcBef>
+              <a:defRPr lang="en-us" sz="1840" cap="none"/>
+            </a:pPr>
+            <a:r>
+              <a:rPr lang="en-us" sz="1655" cap="none"/>
               <a:t>RPN (Region Proposal Network) first, then classifies from there.</a:t>
             </a:r>
-          </a:p>
-          <a:p>
-            <a:pPr lvl="2"/>
-            <a:r>
-              <a:rPr sz="1800" dirty="0"/>
+            <a:endParaRPr lang="en-us" sz="1655" cap="none"/>
+          </a:p>
+          <a:p>
+            <a:pPr lvl="2">
+              <a:lnSpc>
+                <a:spcPct val="80000"/>
+              </a:lnSpc>
+              <a:spcBef>
+                <a:spcPts val="460"/>
+              </a:spcBef>
+              <a:defRPr lang="en-us" sz="1840" cap="none"/>
+            </a:pPr>
+            <a:r>
+              <a:rPr lang="en-us" sz="1655" cap="none"/>
               <a:t>Slower but more accurate especially for complex scenes &amp; small overlapping</a:t>
             </a:r>
-          </a:p>
-          <a:p>
-            <a:r>
-              <a:rPr sz="2400" dirty="0"/>
+            <a:endParaRPr lang="en-us" sz="1655" cap="none"/>
+          </a:p>
+          <a:p>
+            <a:pPr>
+              <a:lnSpc>
+                <a:spcPct val="80000"/>
+              </a:lnSpc>
+              <a:spcBef>
+                <a:spcPts val="920"/>
+              </a:spcBef>
+              <a:defRPr lang="en-us" sz="2575" cap="none"/>
+            </a:pPr>
+            <a:r>
+              <a:rPr lang="en-us" sz="2210" cap="none"/>
               <a:t>DETR - Detection Transformer</a:t>
             </a:r>
-          </a:p>
-          <a:p>
-            <a:pPr lvl="2"/>
-            <a:r>
-              <a:rPr sz="1800" dirty="0"/>
+            <a:endParaRPr lang="en-us" sz="2210" cap="none"/>
+          </a:p>
+          <a:p>
+            <a:pPr lvl="2">
+              <a:lnSpc>
+                <a:spcPct val="80000"/>
+              </a:lnSpc>
+              <a:spcBef>
+                <a:spcPts val="460"/>
+              </a:spcBef>
+              <a:defRPr lang="en-us" sz="1840" cap="none"/>
+            </a:pPr>
+            <a:r>
+              <a:rPr lang="en-us" sz="1655" cap="none"/>
               <a:t>Requires a lot of training data</a:t>
             </a:r>
-          </a:p>
-          <a:p>
-            <a:endParaRPr dirty="0"/>
+            <a:endParaRPr lang="en-us" sz="1655" cap="none"/>
+          </a:p>
+          <a:p>
+            <a:pPr>
+              <a:lnSpc>
+                <a:spcPct val="80000"/>
+              </a:lnSpc>
+              <a:spcBef>
+                <a:spcPts val="920"/>
+              </a:spcBef>
+              <a:defRPr lang="en-us" sz="2575" cap="none"/>
+            </a:pPr>
           </a:p>
         </p:txBody>
       </p:sp>
     </p:spTree>
-    <p:extLst>
-      <p:ext uri="{BB962C8B-B14F-4D97-AF65-F5344CB8AC3E}">
-        <p14:creationId xmlns:p14="http://schemas.microsoft.com/office/powerpoint/2010/main" val="315227639"/>
-      </p:ext>
-    </p:extLst>
   </p:cSld>
   <p:clrMapOvr>
     <a:masterClrMapping/>
@@ -3281,7 +4417,7 @@
 </file>
 
 <file path=ppt/slides/slide3.xml><?xml version="1.0" encoding="utf-8"?>
-<p:sld xmlns:a="http://schemas.openxmlformats.org/drawingml/2006/main" xmlns:r="http://schemas.openxmlformats.org/officeDocument/2006/relationships" xmlns:p="http://schemas.openxmlformats.org/presentationml/2006/main">
+<p:sld xmlns:p="http://schemas.openxmlformats.org/presentationml/2006/main" xmlns:mc="http://schemas.openxmlformats.org/markup-compatibility/2006" xmlns:p14="http://schemas.microsoft.com/office/powerpoint/2010/main" xmlns:p15="http://schemas.microsoft.com/office/powerpoint/2012/main" xmlns:r="http://schemas.openxmlformats.org/officeDocument/2006/relationships" xmlns:a="http://schemas.openxmlformats.org/drawingml/2006/main" mc:Ignorable="p14">
   <p:cSld>
     <p:spTree>
       <p:nvGrpSpPr>
@@ -3301,7 +4437,12 @@
         <p:nvSpPr>
           <p:cNvPr id="2" name="Title 1"/>
           <p:cNvSpPr>
-            <a:spLocks noGrp="1"/>
+            <a:spLocks noGrp="1" noChangeArrowheads="1"/>
+            <a:extLst>
+              <a:ext uri="smNativeData">
+                <pr:smNativeData xmlns:pr="smNativeData" xmlns="smNativeData" val="SMDATA_15_+nJ9aRMAAAAlAAAAZAAAAA0AAAAAkAAAAEgAAACQAAAASAAAAAAAAAABAAAAAAAAAAEAAABQAAAAAAAAAAAA4D8AAAAAAADgPwAAAAAAAOA/AAAAAAAA4D8AAAAAAADgPwAAAAAAAOA/AAAAAAAA4D8AAAAAAADgPwAAAAAAAOA/AAAAAAAA4D8CAAAAjAAAAAAAAAAAAAAAW5vVDP///wgAAAAAAAAAAAAAAAAAAAAAAAAAAAAAAAAAAAAAZAAAAAEAAABAAAAAAAAAAAAAAAAAAAAAAAAAAAAAAAAAAAAAAAAAAAAAAAAAAAAAAAAAAAAAAAAAAAAAAAAAAAAAAAAAAAAAAAAAAAAAAAAAAAAAAAAAAAAAAAAAAAAAFAAAADwAAAAAAAAAAAAAAAAAAAkUAAAAAQAAABQAAAAUAAAAFAAAAAEAAAAAAAAAZAAAAGQAAAAAAAAAZAAAAGQAAAAVAAAAYAAAAAAAAAAAAAAADwAAACADAAAAAAAAAAAAAAEAAACgMgAAVgcAAKr4//8BAAAAf39/AAEAAABkAAAAAAAAABQAAABAHwAAAAAAACYAAAAAAAAAwOD//wAAAAAmAAAAZAAAABYAAABMAAAAAAAAAAAAAAAEAAAAAAAAAAEAAADn5uYKAAAAACgAAAAoAAAAZAAAAGQAAAAAAAAAzMzMAAAAAABQAAAAUAAAAGQAAABkAAAAAAAAABcAAAAUAAAAAAAAAAAAAAD/fwAA/38AAAAAAAAJAAAABAAAAAAAAAAeAAAAaAAAAAAAAAAAAAAAAAAAAAAAAAAAAAAAECcAABAnAAAAAAAAAAAAAAAAAAAAAAAAAAAAAAAAAAAAAAAAAAAAABQAAAAAAAAAwMD/AAAAAABkAAAAMgAAAAAAAABkAAAAAAAAAH9/fwAKAAAAIgAAABgAAAAAAAAAAAAAAAAAAAAAAAAAAAAAAAAAAAAkAAAAJAAAAAAAAAAHAAAAAAAAAAAAAAAAAAAAAAAAAAAAAAAAAAAAf39/ACUAAABYAAAAAAAAAAAAAAAAAAAAAAAAAAAAAAAAAAAAAAAAAAAAAAAAAAAAAAAAAAAAAAA/AAAAAAAAAKCGAQAAAAAAAAAAAAAAAAAMAAAAAQAAAAAAAAAAAAAAAAAAAB8AAABUAAAAW5vVBf///wEAAAAAAAAAAAAAAAAAAAAAAAAAAAAAAAAAAAAAAAAAAAAAAAJ/f38A5+bmA8zMzADAwP8Af39/AAAAAAAAAAAAAAAAAAAAAAAAAAAAIQAAABgAAAAUAAAAKAUAAD8CAADYRQAAZwoAABAAAAAmAAAACAAAAAAAAAAAAAAA"/>
+              </a:ext>
+            </a:extLst>
           </p:cNvSpPr>
           <p:nvPr>
             <p:ph type="title"/>
@@ -3312,11 +4453,12 @@
           <a:bodyPr/>
           <a:lstStyle/>
           <a:p>
-            <a:r>
-              <a:rPr lang="en-US" dirty="0" smtClean="0"/>
+            <a:pPr>
+              <a:defRPr lang="en-us"/>
+            </a:pPr>
+            <a:r>
               <a:t>Object Recognition Models Output</a:t>
             </a:r>
-            <a:endParaRPr lang="en-US" dirty="0"/>
           </a:p>
         </p:txBody>
       </p:sp>
@@ -3324,10 +4466,81 @@
         <p:nvSpPr>
           <p:cNvPr id="3" name="Content Placeholder 2"/>
           <p:cNvSpPr>
-            <a:spLocks noGrp="1"/>
-          </p:cNvSpPr>
-          <p:nvPr>
-            <p:ph idx="1"/>
+            <a:spLocks noGrp="1" noChangeArrowheads="1"/>
+            <a:extLst>
+              <a:ext uri="smNativeData">
+                <pr:smNativeData xmlns:pr="smNativeData" xmlns="smNativeData" val="SMDATA_15_+nJ9aRMAAAAlAAAAZAAAAA0AAAAAkAAAAEgAAACQAAAASAAAAAAAAAAAAAAAAAAAAAEAAABQAAAAAAAAAAAA4D8AAAAAAADgPwAAAAAAAOA/AAAAAAAA4D8AAAAAAADgPwAAAAAAAOA/AAAAAAAA4D8AAAAAAADgPwAAAAAAAOA/AAAAAAAA4D8CAAAAjAAAAAAAAAAAAAAAW5vVDP///wgAAAAAAAAAAAAAAAAAAAAAAAAAAAAAAAAAAAAAZAAAAAEAAABAAAAAAAAAAAAAAAAAAAAAAAAAAAAAAAAAAAAAAAAAAAAAAAAAAAAAAAAAAAAAAAAAAAAAAAAAAAAAAAAAAAAAAAAAAAAAAAAAAAAAAAAAAAAAAAAAAAAAFAAAADwAAAAAAAAAAAAAAAAAAAkUAAAAAQAAABQAAAAUAAAAFAAAAAEAAAAAAAAAZAAAAGQAAAAAAAAAZAAAAGQAAAAVAAAAYAAAAAAAAAAAAAAADwAAACADAAAAAAAAAAAAAAEAAACgMgAAVgcAAKr4//8BAAAAf39/AAEAAABkAAAAAAAAABQAAABAHwAAAAAAACYAAAAAAAAAwOD//wAAAAAmAAAAZAAAABYAAABMAAAAAAAAAAAAAAAEAAAAAAAAAAEAAADn5uYKAAAAACgAAAAoAAAAZAAAAGQAAAAAAAAAzMzMAAAAAABQAAAAUAAAAGQAAABkAAAAAAAAABcAAAAUAAAAAAAAAAAAAAD/fwAA/38AAAAAAAAJAAAABAAAAAAAAAAeAAAAaAAAAAAAAAAAAAAAAAAAAAAAAAAAAAAAECcAABAnAAAAAAAAAAAAAAAAAAAAAAAAAAAAAAAAAAAAAAAAAAAAABQAAAAAAAAAwMD/AAAAAABkAAAAMgAAAAAAAABkAAAAAAAAAH9/fwAKAAAAIgAAABgAAAAAAAAAAAAAAAAAAAAAAAAAAAAAAAAAAAAkAAAAJAAAAAAAAAAHAAAAAAAAAAAAAAAAAAAAAAAAAAAAAAAAAAAAf39/ACUAAABYAAAAAAAAAAAAAAAAAAAAAAAAAAAAAAAAAAAAAAAAAAAAAAAAAAAAAAAAAAAAAAA/AAAAAAAAAKCGAQAAAAAAAAAAAAAAAAAMAAAAAQAAAAAAAAAAAAAAAAAAAB8AAABUAAAAW5vVBf///wEAAAAAAAAAAAAAAAAAAAAAAAAAAAAAAAAAAAAAAAAAAAAAAAJ/f38A5+bmA8zMzADAwP8Af39/AAAAAAAAAAAAAAAAAAAAAAAAAAAAIQAAABgAAAAUAAAAKAUAADsLAADYRQAAACYAAAAAAAAmAAAACAAAAAEAAAAAAAAA"/>
+              </a:ext>
+            </a:extLst>
+          </p:cNvSpPr>
+          <p:nvPr>
+            <p:ph type="body" idx="1"/>
+          </p:nvPr>
+        </p:nvSpPr>
+        <p:spPr>
+          <a:xfrm>
+            <a:off x="838200" y="1825625"/>
+            <a:ext cx="10515600" cy="4351655"/>
+          </a:xfrm>
+        </p:spPr>
+        <p:txBody>
+          <a:bodyPr/>
+          <a:lstStyle/>
+          <a:p>
+            <a:pPr>
+              <a:defRPr lang="en-us"/>
+            </a:pPr>
+            <a:r>
+              <a:t>Yolo v3/v4 output:</a:t>
+            </a:r>
+          </a:p>
+          <a:p>
+            <a:pPr lvl="1">
+              <a:defRPr lang="en-us"/>
+            </a:pPr>
+            <a:r>
+              <a:t>Class ID zero-based</a:t>
+            </a:r>
+          </a:p>
+          <a:p>
+            <a:pPr lvl="1">
+              <a:defRPr lang="en-us"/>
+            </a:pPr>
+            <a:r>
+              <a:t>Floating point confidence score</a:t>
+            </a:r>
+          </a:p>
+          <a:p>
+            <a:pPr lvl="1">
+              <a:defRPr lang="en-us"/>
+            </a:pPr>
+            <a:r>
+              <a:t>Bounding box: x, y, width, height</a:t>
+            </a:r>
+          </a:p>
+          <a:p>
+            <a:pPr lvl="2">
+              <a:defRPr lang="en-us"/>
+            </a:pPr>
+            <a:r>
+              <a:t>x,y might be relative to cell?</a:t>
+            </a:r>
+          </a:p>
+        </p:txBody>
+      </p:sp>
+      <p:sp>
+        <p:nvSpPr>
+          <p:cNvPr id="4" name="Date Placeholder 3"/>
+          <p:cNvSpPr>
+            <a:spLocks noGrp="1" noChangeArrowheads="1"/>
+            <a:extLst>
+              <a:ext uri="smNativeData">
+                <pr:smNativeData xmlns:pr="smNativeData" xmlns="smNativeData" val="SMDATA_15_+nJ9aRMAAAAlAAAAZAAAAA0AAAAAkAAAAEgAAACQAAAASAAAAAAAAAABAAAAAAAAAAEAAABQAAAAAAAAAAAA4D8AAAAAAADgPwAAAAAAAOA/AAAAAAAA4D8AAAAAAADgPwAAAAAAAOA/AAAAAAAA4D8AAAAAAADgPwAAAAAAAOA/AAAAAAAA4D8CAAAAjAAAAAAAAAAAAAAAW5vVDP///wgAAAAAAAAAAAAAAAAAAAAAAAAAAAAAAAAAAAAAZAAAAAEAAABAAAAAAAAAAAAAAAAAAAAAAAAAAAAAAAAAAAAAAAAAAAAAAAAAAAAAAAAAAAAAAAAAAAAAAAAAAAAAAAAAAAAAAAAAAAAAAAAAAAAAAAAAAAAAAAAAAAAAFAAAADwAAAAAAAAAAAAAAAAAAAkUAAAAAQAAABQAAAAUAAAAFAAAAAEAAAAAAAAAZAAAAGQAAAAAAAAAZAAAAGQAAAAVAAAAYAAAAAAAAAAAAAAADwAAACADAAAAAAAAAAAAAAEAAACgMgAAVgcAAKr4//8BAAAAf39/AAEAAABkAAAAAAAAABQAAABAHwAAAAAAACYAAAAAAAAAwOD//wAAAAAmAAAAZAAAABYAAABMAAAAAAAAAAAAAAAEAAAAAAAAAAEAAADn5uYKAAAAACgAAAAoAAAAZAAAAGQAAAAAAAAAzMzMAAAAAABQAAAAUAAAAGQAAABkAAAAAAAAABcAAAAUAAAAAAAAAAAAAAD/fwAA/38AAAAAAAAJAAAABAAAAI4DBQAeAAAAaAAAAAAAAAAAAAAAAAAAAAAAAAAAAAAAECcAABAnAAAAAAAAAAAAAAAAAAAAAAAAAAAAAAAAAAAAAAAAAAAAABQAAAAAAAAAwMD/AAAAAABkAAAAMgAAAAAAAABkAAAAAAAAAH9/fwAKAAAAIgAAABgAAAAAAAAAAAAAAAAAAAAAAAAAAAAAAAAAAAAkAAAAJAAAAAAAAAAHAAAAAAAAAAAAAAAAAAAAAAAAAAAAAAAAAAAAf39/ACUAAABYAAAAAAAAAAAAAAAAAAAAAAAAAAAAAAAAAAAAAAAAAAAAAAAAAAAAAAAAAAAAAAA/AAAAAAAAAKCGAQAAAAAAAAAAAAAAAAAMAAAAAQAAAAAAAAAAAAAAAAAAAB8AAABUAAAAW5vVBf///wEAAAAAAAAAAAAAAAAAAAAAAAAAAAAAAAAAAAAAAAAAAAAAAAJ/f38A5+bmA8zMzADAwP8Af39/AAAAAAAAAAAAAAAAAAAAAAAAAAAAIQAAABgAAAAUAAAAKAUAABonAAAIFgAAWSkAABAAAAAmAAAACAAAAAAAAAAAAAAA"/>
+              </a:ext>
+            </a:extLst>
+          </p:cNvSpPr>
+          <p:nvPr>
+            <p:ph type="dt" sz="quarter" idx="10"/>
           </p:nvPr>
         </p:nvSpPr>
         <p:spPr/>
@@ -3335,54 +4548,28 @@
           <a:bodyPr/>
           <a:lstStyle/>
           <a:p>
-            <a:r>
-              <a:rPr lang="en-US" dirty="0" smtClean="0"/>
-              <a:t>Yolo v4 output:</a:t>
-            </a:r>
-          </a:p>
-          <a:p>
-            <a:pPr lvl="1"/>
-            <a:r>
-              <a:rPr lang="en-US" dirty="0" smtClean="0"/>
-              <a:t>Class ID zero-based</a:t>
-            </a:r>
-          </a:p>
-          <a:p>
-            <a:pPr lvl="1"/>
-            <a:r>
-              <a:rPr lang="en-US" dirty="0" smtClean="0"/>
-              <a:t>Floating point confidence score</a:t>
-            </a:r>
-          </a:p>
-          <a:p>
-            <a:pPr lvl="1"/>
-            <a:r>
-              <a:rPr lang="en-US" dirty="0" smtClean="0"/>
-              <a:t>Bounding box: x, y, width, height</a:t>
-            </a:r>
-          </a:p>
-          <a:p>
-            <a:pPr lvl="2"/>
-            <a:r>
-              <a:rPr lang="en-US" dirty="0" err="1" smtClean="0"/>
-              <a:t>x,y</a:t>
-            </a:r>
-            <a:r>
-              <a:rPr lang="en-US" dirty="0" smtClean="0"/>
-              <a:t> might be relative to cell?</a:t>
-            </a:r>
-            <a:endParaRPr lang="en-US" dirty="0"/>
-          </a:p>
-        </p:txBody>
-      </p:sp>
-      <p:sp>
-        <p:nvSpPr>
-          <p:cNvPr id="4" name="Date Placeholder 3"/>
-          <p:cNvSpPr>
-            <a:spLocks noGrp="1"/>
-          </p:cNvSpPr>
-          <p:nvPr>
-            <p:ph type="dt" sz="quarter" idx="10"/>
+            <a:pPr>
+              <a:defRPr lang="en-us"/>
+            </a:pPr>
+            <a:fld id="{3AF9A66F-21D7-AC50-9941-D705E80F6F82}" type="datetime1">
+              <a:t>1/30/2026</a:t>
+            </a:fld>
+          </a:p>
+        </p:txBody>
+      </p:sp>
+      <p:sp>
+        <p:nvSpPr>
+          <p:cNvPr id="5" name="Slide Number Placeholder 4"/>
+          <p:cNvSpPr>
+            <a:spLocks noGrp="1" noChangeArrowheads="1"/>
+            <a:extLst>
+              <a:ext uri="smNativeData">
+                <pr:smNativeData xmlns:pr="smNativeData" xmlns="smNativeData" val="SMDATA_15_+nJ9aRMAAAAlAAAAZAAAAA0AAAAAkAAAAEgAAACQAAAASAAAAAAAAAABAAAAAAAAAAEAAABQAAAAAAAAAAAA4D8AAAAAAADgPwAAAAAAAOA/AAAAAAAA4D8AAAAAAADgPwAAAAAAAOA/AAAAAAAA4D8AAAAAAADgPwAAAAAAAOA/AAAAAAAA4D8CAAAAjAAAAAAAAAAAAAAAW5vVDP///wgAAAAAAAAAAAAAAAAAAAAAAAAAAAAAAAAAAAAAZAAAAAEAAABAAAAAAAAAAAAAAAAAAAAAAAAAAAAAAAAAAAAAAAAAAAAAAAAAAAAAAAAAAAAAAAAAAAAAAAAAAAAAAAAAAAAAAAAAAAAAAAAAAAAAAAAAAAAAAAAAAAAAFAAAADwAAAAAAAAAAAAAAAAAAAkUAAAAAQAAABQAAAAUAAAAFAAAAAEAAAAAAAAAZAAAAGQAAAAAAAAAZAAAAGQAAAAVAAAAYAAAAAAAAAAAAAAADwAAACADAAAAAAAAAAAAAAEAAACgMgAAVgcAAKr4//8BAAAAf39/AAEAAABkAAAAAAAAABQAAABAHwAAAAAAACYAAAAAAAAAwOD//wAAAAAmAAAAZAAAABYAAABMAAAAAAAAAAAAAAAEAAAAAAAAAAEAAADn5uYKAAAAACgAAAAoAAAAZAAAAGQAAAAAAAAAzMzMAAAAAABQAAAAUAAAAGQAAABkAAAAAAAAABcAAAAUAAAAAAAAAAAAAAD/fwAA/38AAAAAAAAJAAAABAAAAAAAAAAeAAAAaAAAAAAAAAAAAAAAAAAAAAAAAAAAAAAAECcAABAnAAAAAAAAAAAAAAAAAAAAAAAAAAAAAAAAAAAAAAAAAAAAABQAAAAAAAAAwMD/AAAAAABkAAAAMgAAAAAAAABkAAAAAAAAAH9/fwAKAAAAIgAAABgAAAAAAAAAAAAAAAAAAAAAAAAAAAAAAAAAAAAkAAAAJAAAAAAAAAAHAAAAAAAAAAAAAAAAAAAAAAAAAAAAAAAAAAAAf39/ACUAAABYAAAAAAAAAAAAAAAAAAAAAAAAAAAAAAAAAAAAAAAAAAAAAAAAAAAAAAAAAAAAAAA/AAAAAAAAAKCGAQAAAAAAAAAAAAAAAAAMAAAAAQAAAAAAAAAAAAAAAAAAAB8AAABUAAAAW5vVBf///wEAAAAAAAAAAAAAAAAAAAAAAAAAAAAAAAAAAAAAAAAAAAAAAAJ/f38A5+bmA8zMzADAwP8Af39/AAAAAAAAAAAAAAAAAAAAAAAAAAAAIQAAABgAAAAUAAAA+DQAABonAADYRQAAWSkAABAAAAAmAAAACAAAAAAAAAAAAAAA"/>
+              </a:ext>
+            </a:extLst>
+          </p:cNvSpPr>
+          <p:nvPr>
+            <p:ph type="sldNum" sz="quarter" idx="12"/>
           </p:nvPr>
         </p:nvSpPr>
         <p:spPr/>
@@ -3390,52 +4577,32 @@
           <a:bodyPr/>
           <a:lstStyle/>
           <a:p>
-            <a:fld id="{0CA7AC8E-C0E1-F25A-AF1F-360FE2515963}" type="datetime1">
-              <a:rPr lang="en-US" smtClean="0"/>
-              <a:t>1/12/2026</a:t>
-            </a:fld>
-            <a:endParaRPr lang="en-US"/>
-          </a:p>
-        </p:txBody>
-      </p:sp>
-      <p:sp>
-        <p:nvSpPr>
-          <p:cNvPr id="5" name="Slide Number Placeholder 4"/>
-          <p:cNvSpPr>
-            <a:spLocks noGrp="1"/>
-          </p:cNvSpPr>
-          <p:nvPr>
-            <p:ph type="sldNum" sz="quarter" idx="12"/>
-          </p:nvPr>
-        </p:nvSpPr>
-        <p:spPr/>
-        <p:txBody>
-          <a:bodyPr/>
-          <a:lstStyle/>
-          <a:p>
-            <a:fld id="{0CA7DD58-16E1-F22B-AF1F-E07E935159B5}" type="slidenum">
-              <a:rPr lang="en-US" smtClean="0"/>
+            <a:pPr>
+              <a:defRPr lang="en-us"/>
+            </a:pPr>
+            <a:fld id="{3AF9C2F9-B7D7-AC34-9941-41618C0F6F14}" type="slidenum">
               <a:t>3</a:t>
             </a:fld>
-            <a:endParaRPr lang="en-US"/>
           </a:p>
         </p:txBody>
       </p:sp>
     </p:spTree>
-    <p:extLst>
-      <p:ext uri="{BB962C8B-B14F-4D97-AF65-F5344CB8AC3E}">
-        <p14:creationId xmlns:p14="http://schemas.microsoft.com/office/powerpoint/2010/main" val="2137505576"/>
-      </p:ext>
-    </p:extLst>
   </p:cSld>
   <p:clrMapOvr>
     <a:masterClrMapping/>
   </p:clrMapOvr>
+  <p:timing>
+    <p:tnLst>
+      <p:par>
+        <p:cTn id="1" dur="indefinite" restart="never" nodeType="tmRoot"/>
+      </p:par>
+    </p:tnLst>
+  </p:timing>
 </p:sld>
 </file>
 
 <file path=ppt/slides/slide4.xml><?xml version="1.0" encoding="utf-8"?>
-<p:sld xmlns:a="http://schemas.openxmlformats.org/drawingml/2006/main" xmlns:r="http://schemas.openxmlformats.org/officeDocument/2006/relationships" xmlns:p="http://schemas.openxmlformats.org/presentationml/2006/main">
+<p:sld xmlns:p="http://schemas.openxmlformats.org/presentationml/2006/main" xmlns:mc="http://schemas.openxmlformats.org/markup-compatibility/2006" xmlns:p14="http://schemas.microsoft.com/office/powerpoint/2010/main" xmlns:p15="http://schemas.microsoft.com/office/powerpoint/2012/main" xmlns:r="http://schemas.openxmlformats.org/officeDocument/2006/relationships" xmlns:a="http://schemas.openxmlformats.org/drawingml/2006/main" mc:Ignorable="p14">
   <p:cSld>
     <p:spTree>
       <p:nvGrpSpPr>
@@ -3453,128 +4620,158 @@
       </p:grpSpPr>
       <p:sp>
         <p:nvSpPr>
-          <p:cNvPr id="2" name="Title 1"/>
-          <p:cNvSpPr>
-            <a:spLocks noGrp="1"/>
+          <p:cNvPr id="2" name="SlideTitle1"/>
+          <p:cNvSpPr>
+            <a:spLocks noGrp="1" noChangeArrowheads="1"/>
+            <a:extLst>
+              <a:ext uri="smNativeData">
+                <pr:smNativeData xmlns:pr="smNativeData" xmlns="smNativeData" val="SMDATA_15_+nJ9aRMAAAAlAAAAZAAAAA0AAAAAkAAAAEgAAACQAAAASAAAAAAAAAABAAAAAAAAAAEAAABQAAAAAAAAAAAA4D8AAAAAAADgPwAAAAAAAOA/AAAAAAAA4D8AAAAAAADgPwAAAAAAAOA/AAAAAAAA4D8AAAAAAADgPwAAAAAAAOA/AAAAAAAA4D8CAAAAjAAAAAAAAAAAAAAAW5vVDP///wgAAAAAAAAAAAAAAAAAAAAAAAAAAAAAAAAAAAAAZAAAAAEAAABAAAAAAAAAAAAAAAAAAAAAAAAAAAAAAAAAAAAAAAAAAAAAAAAAAAAAAAAAAAAAAAAAAAAAAAAAAAAAAAAAAAAAAAAAAAAAAAAAAAAAAAAAAAAAAAAAAAAAFAAAADwAAAAAAAAAAAAAAAAAAAkUAAAAAQAAABQAAAAUAAAAFAAAAAEAAAAAAAAAZAAAAGQAAAAAAAAAZAAAAGQAAAAVAAAAYAAAAAAAAAAAAAAADwAAACADAAAAAAAAAAAAAAEAAACgMgAAVgcAAKr4//8BAAAAf39/AAEAAABkAAAAAAAAABQAAABAHwAAAAAAACYAAAAAAAAAwOD//wAAAAAmAAAAZAAAABYAAABMAAAAAAAAAAAAAAAEAAAAAAAAAAEAAADn5uYKAAAAACgAAAAoAAAAZAAAAGQAAAAAAAAAzMzMAAAAAABQAAAAUAAAAGQAAABkAAAAAAAAABcAAAAUAAAAAAAAAAAAAAD/fwAA/38AAAAAAAAJAAAABAAAAAAAAAAeAAAAaAAAAAAAAAAAAAAAAAAAAAAAAAAAAAAAECcAABAnAAAAAAAAAAAAAAAAAAAAAAAAAAAAAAAAAAAAAAAAAAAAABQAAAAAAAAAwMD/AAAAAABkAAAAMgAAAAAAAABkAAAAAAAAAH9/fwAKAAAAIgAAABgAAAAAAAAAAAAAAAAAAAAAAAAAAAAAAAAAAAAkAAAAJAAAAAAAAAAHAAAAAAAAAAAAAAAAAAAAAAAAAAAAAAAAAAAAf39/ACUAAABYAAAAAAAAAAAAAAAAAAAAAAAAAAAAAAAAAAAAAAAAAAAAAAAAAAAAAAAAAAAAAAA/AAAAAAAAAKCGAQAAAAAAAAAAAAAAAAAMAAAAAQAAAAAAAAAAAAAAAAAAAB8AAABUAAAAW5vVBf///wEAAAAAAAAAAAAAAAAAAAAAAAAAAAAAAAAAAAAAAAAAAAAAAAJ/f38A5+bmA8zMzADAwP8Af39/AAAAAAAAAAAAAAAAAAAAAAAAAAAAIQAAABgAAAAUAAAAKAUAAD8CAADYRQAAZwoAAAAAAAAmAAAACAAAAAEAAAAAAAAA"/>
+              </a:ext>
+            </a:extLst>
           </p:cNvSpPr>
           <p:nvPr>
             <p:ph type="title"/>
           </p:nvPr>
         </p:nvSpPr>
-        <p:spPr/>
-        <p:txBody>
-          <a:bodyPr/>
-          <a:lstStyle/>
-          <a:p>
-            <a:r>
-              <a:rPr lang="en-US" dirty="0" err="1" smtClean="0"/>
-              <a:t>Darknet</a:t>
-            </a:r>
-            <a:r>
-              <a:rPr lang="en-US" dirty="0" smtClean="0"/>
-              <a:t> / </a:t>
-            </a:r>
-            <a:r>
-              <a:rPr lang="en-US" dirty="0" err="1" smtClean="0"/>
-              <a:t>DarkPlate</a:t>
-            </a:r>
-            <a:r>
-              <a:rPr lang="en-US" dirty="0" smtClean="0"/>
-              <a:t> on various computers</a:t>
-            </a:r>
-            <a:endParaRPr lang="en-US" dirty="0"/>
-          </a:p>
-        </p:txBody>
-      </p:sp>
-      <p:sp>
-        <p:nvSpPr>
-          <p:cNvPr id="3" name="Content Placeholder 2"/>
-          <p:cNvSpPr>
-            <a:spLocks noGrp="1"/>
-          </p:cNvSpPr>
-          <p:nvPr>
-            <p:ph idx="1"/>
-          </p:nvPr>
-        </p:nvSpPr>
-        <p:spPr/>
-        <p:txBody>
-          <a:bodyPr/>
-          <a:lstStyle/>
-          <a:p>
-            <a:r>
-              <a:rPr lang="en-US" dirty="0" err="1" smtClean="0"/>
-              <a:t>Darknet</a:t>
-            </a:r>
-            <a:r>
-              <a:rPr lang="en-US" dirty="0" smtClean="0"/>
-              <a:t> is working on all platforms, but GPU not used on:</a:t>
-            </a:r>
-          </a:p>
-          <a:p>
-            <a:pPr lvl="1"/>
-            <a:r>
-              <a:rPr lang="en-US" dirty="0" smtClean="0"/>
-              <a:t>Raspberry Pi w/AI Hat+</a:t>
-            </a:r>
-          </a:p>
-          <a:p>
-            <a:pPr lvl="1"/>
-            <a:r>
-              <a:rPr lang="en-US" dirty="0" smtClean="0"/>
-              <a:t>Windows computers</a:t>
-            </a:r>
-          </a:p>
-          <a:p>
-            <a:pPr lvl="2"/>
-            <a:r>
-              <a:rPr lang="en-US" dirty="0" smtClean="0"/>
-              <a:t>*Need to compile for GPU, not sure how</a:t>
-            </a:r>
-          </a:p>
-          <a:p>
-            <a:r>
-              <a:rPr lang="en-US" dirty="0" err="1" smtClean="0"/>
-              <a:t>Darknet</a:t>
-            </a:r>
-            <a:r>
-              <a:rPr lang="en-US" dirty="0" smtClean="0"/>
-              <a:t> &amp; </a:t>
-            </a:r>
-            <a:r>
-              <a:rPr lang="en-US" dirty="0" err="1" smtClean="0"/>
-              <a:t>DarkPlate</a:t>
-            </a:r>
-            <a:r>
-              <a:rPr lang="en-US" dirty="0" smtClean="0"/>
-              <a:t> work on Linux computers including </a:t>
-            </a:r>
-            <a:r>
-              <a:rPr lang="en-US" dirty="0" err="1" smtClean="0"/>
-              <a:t>Nvidia</a:t>
-            </a:r>
-            <a:r>
-              <a:rPr lang="en-US" dirty="0" smtClean="0"/>
-              <a:t> Jetson Orin Nano</a:t>
-            </a:r>
-            <a:endParaRPr lang="en-US" dirty="0"/>
+        <p:spPr>
+          <a:xfrm>
+            <a:off x="838200" y="365125"/>
+            <a:ext cx="10515600" cy="1325880"/>
+          </a:xfrm>
+        </p:spPr>
+        <p:txBody>
+          <a:bodyPr/>
+          <a:lstStyle/>
+          <a:p>
+            <a:pPr>
+              <a:defRPr lang="en-us"/>
+            </a:pPr>
+            <a:r>
+              <a:t>Yolo v3 uses three different scales</a:t>
+            </a:r>
+          </a:p>
+        </p:txBody>
+      </p:sp>
+      <p:sp>
+        <p:nvSpPr>
+          <p:cNvPr id="3" name="SlideText1"/>
+          <p:cNvSpPr>
+            <a:spLocks noGrp="1" noChangeArrowheads="1"/>
+            <a:extLst>
+              <a:ext uri="smNativeData">
+                <pr:smNativeData xmlns:pr="smNativeData" xmlns="smNativeData" val="SMDATA_15_+nJ9aRMAAAAlAAAAZAAAAA0AAAAAkAAAAEgAAACQAAAASAAAAAAAAAAAAAAAAAAAAAEAAABQAAAAAAAAAAAA4D8AAAAAAADgPwAAAAAAAOA/AAAAAAAA4D8AAAAAAADgPwAAAAAAAOA/AAAAAAAA4D8AAAAAAADgPwAAAAAAAOA/AAAAAAAA4D8CAAAAjAAAAAAAAAAAAAAAW5vVDP///wgAAAAAAAAAAAAAAAAAAAAAAAAAAAAAAAAAAAAAZAAAAAEAAABAAAAAAAAAAAAAAAAAAAAAAAAAAAAAAAAAAAAAAAAAAAAAAAAAAAAAAAAAAAAAAAAAAAAAAAAAAAAAAAAAAAAAAAAAAAAAAAAAAAAAAAAAAAAAAAAAAAAAFAAAADwAAAAAAAAAAAAAAAAAAAkUAAAAAQAAABQAAAAUAAAAFAAAAAEAAAAAAAAAZAAAAGQAAAAAAAAAZAAAAGQAAAAVAAAAYAAAAAAAAAAAAAAADwAAACADAAAAAAAAAAAAAAEAAACgMgAAVgcAAKr4//8BAAAAf39/AAEAAABkAAAAAAAAABQAAABAHwAAAAAAACYAAAAAAAAAwOD//wAAAAAmAAAAZAAAABYAAABMAAAAAAAAAAAAAAAEAAAAAAAAAAEAAADn5uYKAAAAACgAAAAoAAAAZAAAAGQAAAAAAAAAzMzMAAAAAABQAAAAUAAAAGQAAABkAAAAAAAAABcAAAAUAAAAAAAAAAAAAAD/fwAA/38AAAAAAAAJAAAABAAAAF8AYAAeAAAAaAAAAAAAAAAAAAAAAAAAAAAAAAAAAAAAECcAABAnAAAAAAAAAAAAAAAAAAAAAAAAAAAAAAAAAAAAAAAAAAAAABQAAAAAAAAAwMD/AAAAAABkAAAAMgAAAAAAAABkAAAAAAAAAH9/fwAKAAAAIgAAABgAAAAAAAAAAAAAAAAAAAAAAAAAAAAAAAAAAAAkAAAAJAAAAAAAAAAHAAAAAAAAAAAAAAAAAAAAAAAAAAAAAAAAAAAAf39/ACUAAABYAAAAAAAAAAAAAAAAAAAAAAAAAAAAAAAAAAAAAAAAAAAAAAAAAAAAAAAAAAAAAAA/AAAAAAAAAKCGAQAAAAAAAAAAAAAAAAAMAAAAAQAAAAAAAAAAAAAAAAAAAB8AAABUAAAAW5vVBf///wEAAAAAAAAAAAAAAAAAAAAAAAAAAAAAAAAAAAAAAAAAAAAAAAJ/f38A5+bmA8zMzADAwP8Af39/AAAAAAAAAAAAAAAAAAAAAAAAAAAAIQAAABgAAAAUAAAAKAUAADsLAADYRQAAACYAAAAAAAAmAAAACAAAAAEAAAAAAAAA"/>
+              </a:ext>
+            </a:extLst>
+          </p:cNvSpPr>
+          <p:nvPr>
+            <p:ph type="body" idx="1"/>
+          </p:nvPr>
+        </p:nvSpPr>
+        <p:spPr>
+          <a:xfrm>
+            <a:off x="838200" y="1825625"/>
+            <a:ext cx="10515600" cy="4351655"/>
+          </a:xfrm>
+        </p:spPr>
+        <p:txBody>
+          <a:bodyPr/>
+          <a:lstStyle/>
+          <a:p>
+            <a:pPr>
+              <a:defRPr lang="en-us"/>
+            </a:pPr>
+            <a:r>
+              <a:t>There are 106 layers in the neural network, and the output is spit out at layers 82, 94, 106 (strides of 32, 16, 8)</a:t>
+            </a:r>
+          </a:p>
+          <a:p>
+            <a:pPr lvl="1">
+              <a:defRPr lang="en-us"/>
+            </a:pPr>
+            <a:r>
+              <a:t>Output stride 32 gives output grid of 13x13 for large objects (416x416 input)</a:t>
+            </a:r>
+          </a:p>
+          <a:p>
+            <a:pPr lvl="1">
+              <a:defRPr lang="en-us"/>
+            </a:pPr>
+            <a:r>
+              <a:t>Output stride 16 gives output grid of 26x26 for medium objects</a:t>
+            </a:r>
+          </a:p>
+          <a:p>
+            <a:pPr lvl="1">
+              <a:defRPr lang="en-us"/>
+            </a:pPr>
+            <a:r>
+              <a:t>Output stride 8 gives output grid of 52x52 for small object</a:t>
+            </a:r>
+          </a:p>
+          <a:p>
+            <a:pPr>
+              <a:defRPr lang="en-us"/>
+            </a:pPr>
+            <a:r>
+              <a:t>The output for each cell is b * (5+c) long = 3*(5+80) = 255</a:t>
+            </a:r>
+          </a:p>
+          <a:p>
+            <a:pPr lvl="1">
+              <a:defRPr lang="en-us"/>
+            </a:pPr>
+            <a:r>
+              <a:t>B = 3 number of bounding boxes predicted per cell</a:t>
+            </a:r>
+          </a:p>
+          <a:p>
+            <a:pPr lvl="1">
+              <a:defRPr lang="en-us"/>
+            </a:pPr>
+            <a:r>
+              <a:t>C = 80 number of classes it can detect</a:t>
+            </a:r>
+          </a:p>
+          <a:p>
+            <a:pPr lvl="1">
+              <a:defRPr lang="en-us"/>
+            </a:pPr>
+            <a:r>
+              <a:t>So the three different outputs are 13x13x255, 26x26x255, 52x52x255s</a:t>
+            </a:r>
+          </a:p>
+          <a:p>
+            <a:pPr lvl="2">
+              <a:defRPr lang="en-us"/>
+            </a:pPr>
+            <a:r>
+              <a:t>Each cell predicts 3 bounding boxes so each scale predicts: 507, 2028, 8112 b.b.’s</a:t>
+            </a:r>
+          </a:p>
+          <a:p>
+            <a:pPr lvl="1">
+              <a:defRPr lang="en-us"/>
+            </a:pPr>
           </a:p>
         </p:txBody>
       </p:sp>
     </p:spTree>
-    <p:extLst>
-      <p:ext uri="{BB962C8B-B14F-4D97-AF65-F5344CB8AC3E}">
-        <p14:creationId xmlns:p14="http://schemas.microsoft.com/office/powerpoint/2010/main" val="3313792027"/>
-      </p:ext>
-    </p:extLst>
   </p:cSld>
   <p:clrMapOvr>
     <a:masterClrMapping/>
   </p:clrMapOvr>
+  <p:timing>
+    <p:tnLst>
+      <p:par>
+        <p:cTn id="1" dur="indefinite" restart="never" nodeType="tmRoot"/>
+      </p:par>
+    </p:tnLst>
+  </p:timing>
 </p:sld>
 </file>
 
 <file path=ppt/slides/slide5.xml><?xml version="1.0" encoding="utf-8"?>
-<p:sld xmlns:a="http://schemas.openxmlformats.org/drawingml/2006/main" xmlns:r="http://schemas.openxmlformats.org/officeDocument/2006/relationships" xmlns:p="http://schemas.openxmlformats.org/presentationml/2006/main">
+<p:sld xmlns:p="http://schemas.openxmlformats.org/presentationml/2006/main" xmlns:mc="http://schemas.openxmlformats.org/markup-compatibility/2006" xmlns:p14="http://schemas.microsoft.com/office/powerpoint/2010/main" xmlns:p15="http://schemas.microsoft.com/office/powerpoint/2012/main" xmlns:r="http://schemas.openxmlformats.org/officeDocument/2006/relationships" xmlns:a="http://schemas.openxmlformats.org/drawingml/2006/main" mc:Ignorable="p14">
   <p:cSld>
     <p:spTree>
       <p:nvGrpSpPr>
@@ -3594,7 +4791,12 @@
         <p:nvSpPr>
           <p:cNvPr id="2" name="Title 1"/>
           <p:cNvSpPr>
-            <a:spLocks noGrp="1"/>
+            <a:spLocks noGrp="1" noChangeArrowheads="1"/>
+            <a:extLst>
+              <a:ext uri="smNativeData">
+                <pr:smNativeData xmlns:pr="smNativeData" xmlns="smNativeData" val="SMDATA_15_+nJ9aRMAAAAlAAAAZAAAAA0AAAAAkAAAAEgAAACQAAAASAAAAAAAAAABAAAAAAAAAAEAAABQAAAAAAAAAAAA4D8AAAAAAADgPwAAAAAAAOA/AAAAAAAA4D8AAAAAAADgPwAAAAAAAOA/AAAAAAAA4D8AAAAAAADgPwAAAAAAAOA/AAAAAAAA4D8CAAAAjAAAAAAAAAAAAAAAW5vVDP///wgAAAAAAAAAAAAAAAAAAAAAAAAAAAAAAAAAAAAAZAAAAAEAAABAAAAAAAAAAAAAAAAAAAAAAAAAAAAAAAAAAAAAAAAAAAAAAAAAAAAAAAAAAAAAAAAAAAAAAAAAAAAAAAAAAAAAAAAAAAAAAAAAAAAAAAAAAAAAAAAAAAAAFAAAADwAAAAAAAAAAAAAAAAAAAkUAAAAAQAAABQAAAAUAAAAFAAAAAEAAAAAAAAAZAAAAGQAAAAAAAAAZAAAAGQAAAAVAAAAYAAAAAAAAAAAAAAADwAAACADAAAAAAAAAAAAAAEAAACgMgAAVgcAAKr4//8BAAAAf39/AAEAAABkAAAAAAAAABQAAABAHwAAAAAAACYAAAAAAAAAwOD//wAAAAAmAAAAZAAAABYAAABMAAAAAAAAAAAAAAAEAAAAAAAAAAEAAADn5uYKAAAAACgAAAAoAAAAZAAAAGQAAAAAAAAAzMzMAAAAAABQAAAAUAAAAGQAAABkAAAAAAAAABcAAAAUAAAAAAAAAAAAAAD/fwAA/38AAAAAAAAJAAAABAAAAF8AYAAeAAAAaAAAAAAAAAAAAAAAAAAAAAAAAAAAAAAAECcAABAnAAAAAAAAAAAAAAAAAAAAAAAAAAAAAAAAAAAAAAAAAAAAABQAAAAAAAAAwMD/AAAAAABkAAAAMgAAAAAAAABkAAAAAAAAAH9/fwAKAAAAIgAAABgAAAAAAAAAAAAAAAAAAAAAAAAAAAAAAAAAAAAkAAAAJAAAAAAAAAAHAAAAAAAAAAAAAAAAAAAAAAAAAAAAAAAAAAAAf39/ACUAAABYAAAAAAAAAAAAAAAAAAAAAAAAAAAAAAAAAAAAAAAAAAAAAAAAAAAAAAAAAAAAAAA/AAAAAAAAAKCGAQAAAAAAAAAAAAAAAAAMAAAAAQAAAAAAAAAAAAAAAAAAAB8AAABUAAAAW5vVBf///wEAAAAAAAAAAAAAAAAAAAAAAAAAAAAAAAAAAAAAAAAAAAAAAAJ/f38A5+bmA8zMzADAwP8Af39/AAAAAAAAAAAAAAAAAAAAAAAAAAAAIQAAABgAAAAUAAAAKAUAAD8CAADYRQAAZwoAABAAAAAmAAAACAAAAAAAAAAAAAAA"/>
+              </a:ext>
+            </a:extLst>
           </p:cNvSpPr>
           <p:nvPr>
             <p:ph type="title"/>
@@ -3605,11 +4807,12 @@
           <a:bodyPr/>
           <a:lstStyle/>
           <a:p>
-            <a:r>
-              <a:rPr lang="en-US" dirty="0" smtClean="0"/>
-              <a:t>License Plate Detection</a:t>
-            </a:r>
-            <a:endParaRPr lang="en-US" dirty="0"/>
+            <a:pPr>
+              <a:defRPr lang="en-us"/>
+            </a:pPr>
+            <a:r>
+              <a:t>Darknet / DarkPlate on various computers</a:t>
+            </a:r>
           </a:p>
         </p:txBody>
       </p:sp>
@@ -3617,10 +4820,15 @@
         <p:nvSpPr>
           <p:cNvPr id="3" name="Content Placeholder 2"/>
           <p:cNvSpPr>
-            <a:spLocks noGrp="1"/>
-          </p:cNvSpPr>
-          <p:nvPr>
-            <p:ph idx="1"/>
+            <a:spLocks noGrp="1" noChangeArrowheads="1"/>
+            <a:extLst>
+              <a:ext uri="smNativeData">
+                <pr:smNativeData xmlns:pr="smNativeData" xmlns="smNativeData" val="SMDATA_15_+nJ9aRMAAAAlAAAAZAAAAA0AAAAAkAAAAEgAAACQAAAASAAAAAAAAAAAAAAAAAAAAAEAAABQAAAAAAAAAAAA4D8AAAAAAADgPwAAAAAAAOA/AAAAAAAA4D8AAAAAAADgPwAAAAAAAOA/AAAAAAAA4D8AAAAAAADgPwAAAAAAAOA/AAAAAAAA4D8CAAAAjAAAAAAAAAAAAAAAW5vVDP///wgAAAAAAAAAAAAAAAAAAAAAAAAAAAAAAAAAAAAAZAAAAAEAAABAAAAAAAAAAAAAAAAAAAAAAAAAAAAAAAAAAAAAAAAAAAAAAAAAAAAAAAAAAAAAAAAAAAAAAAAAAAAAAAAAAAAAAAAAAAAAAAAAAAAAAAAAAAAAAAAAAAAAFAAAADwAAAAAAAAAAAAAAAAAAAkUAAAAAQAAABQAAAAUAAAAFAAAAAEAAAAAAAAAZAAAAGQAAAAAAAAAZAAAAGQAAAAVAAAAYAAAAAAAAAAAAAAADwAAACADAAAAAAAAAAAAAAEAAACgMgAAVgcAAKr4//8BAAAAf39/AAEAAABkAAAAAAAAABQAAABAHwAAAAAAACYAAAAAAAAAwOD//wAAAAAmAAAAZAAAABYAAABMAAAAAAAAAAAAAAAEAAAAAAAAAAEAAADn5uYKAAAAACgAAAAoAAAAZAAAAGQAAAAAAAAAzMzMAAAAAABQAAAAUAAAAGQAAABkAAAAAAAAABcAAAAUAAAAAAAAAAAAAAD/fwAA/38AAAAAAAAJAAAABAAAAAAAAAAeAAAAaAAAAAAAAAAAAAAAAAAAAAAAAAAAAAAAECcAABAnAAAAAAAAAAAAAAAAAAAAAAAAAAAAAAAAAAAAAAAAAAAAABQAAAAAAAAAwMD/AAAAAABkAAAAMgAAAAAAAABkAAAAAAAAAH9/fwAKAAAAIgAAABgAAAAAAAAAAAAAAAAAAAAAAAAAAAAAAAAAAAAkAAAAJAAAAAAAAAAHAAAAAAAAAAAAAAAAAAAAAAAAAAAAAAAAAAAAf39/ACUAAABYAAAAAAAAAAAAAAAAAAAAAAAAAAAAAAAAAAAAAAAAAAAAAAAAAAAAAAAAAAAAAAA/AAAAAAAAAKCGAQAAAAAAAAAAAAAAAAAMAAAAAQAAAAAAAAAAAAAAAAAAAB8AAABUAAAAW5vVBf///wEAAAAAAAAAAAAAAAAAAAAAAAAAAAAAAAAAAAAAAAAAAAAAAAJ/f38A5+bmA8zMzADAwP8Af39/AAAAAAAAAAAAAAAAAAAAAAAAAAAAIQAAABgAAAAUAAAAKAUAADsLAADYRQAAACYAABAAAAAmAAAACAAAAAAAAAAAAAAA"/>
+              </a:ext>
+            </a:extLst>
+          </p:cNvSpPr>
+          <p:nvPr>
+            <p:ph type="body" idx="1"/>
           </p:nvPr>
         </p:nvSpPr>
         <p:spPr/>
@@ -3628,100 +4836,188 @@
           <a:bodyPr/>
           <a:lstStyle/>
           <a:p>
-            <a:r>
-              <a:rPr lang="en-US" dirty="0" smtClean="0">
-                <a:hlinkClick r:id="rId2"/>
-              </a:rPr>
-              <a:t>https://github.com/stephanecharette/DarkPlate</a:t>
-            </a:r>
-            <a:endParaRPr lang="en-US" dirty="0" smtClean="0"/>
-          </a:p>
-          <a:p>
-            <a:r>
-              <a:rPr lang="en-US" dirty="0" err="1" smtClean="0"/>
-              <a:t>DarkPlate</a:t>
-            </a:r>
-            <a:r>
-              <a:rPr lang="en-US" dirty="0" smtClean="0"/>
-              <a:t> relies on </a:t>
-            </a:r>
-            <a:r>
-              <a:rPr lang="en-US" dirty="0" err="1" smtClean="0"/>
-              <a:t>DarkHelp</a:t>
-            </a:r>
-            <a:r>
-              <a:rPr lang="en-US" dirty="0" smtClean="0"/>
-              <a:t> which has helper functions for </a:t>
-            </a:r>
-            <a:r>
-              <a:rPr lang="en-US" dirty="0" err="1" smtClean="0"/>
-              <a:t>DarkNet</a:t>
-            </a:r>
-            <a:endParaRPr lang="en-US" dirty="0" smtClean="0"/>
-          </a:p>
-          <a:p>
-            <a:pPr lvl="1"/>
-            <a:r>
-              <a:rPr lang="en-US" dirty="0" smtClean="0"/>
-              <a:t>Build </a:t>
-            </a:r>
-            <a:r>
-              <a:rPr lang="en-US" dirty="0" err="1" smtClean="0"/>
-              <a:t>DarkNet</a:t>
-            </a:r>
-            <a:r>
-              <a:rPr lang="en-US" dirty="0" smtClean="0"/>
-              <a:t> first, then </a:t>
-            </a:r>
-            <a:r>
-              <a:rPr lang="en-US" dirty="0" err="1" smtClean="0"/>
-              <a:t>DarkHelp</a:t>
-            </a:r>
-            <a:r>
-              <a:rPr lang="en-US" dirty="0" smtClean="0"/>
-              <a:t> and the </a:t>
-            </a:r>
-            <a:r>
-              <a:rPr lang="en-US" dirty="0" err="1" smtClean="0"/>
-              <a:t>DarkPlate</a:t>
-            </a:r>
-            <a:endParaRPr lang="en-US" dirty="0" smtClean="0"/>
-          </a:p>
-          <a:p>
-            <a:r>
-              <a:rPr lang="en-US" dirty="0" smtClean="0"/>
-              <a:t>*Check how well it works on </a:t>
-            </a:r>
-            <a:r>
-              <a:rPr lang="en-US" smtClean="0"/>
-              <a:t>random images</a:t>
-            </a:r>
-            <a:endParaRPr lang="en-US" dirty="0"/>
+            <a:pPr>
+              <a:defRPr lang="en-us"/>
+            </a:pPr>
+            <a:r>
+              <a:t>Darknet is working on all platforms, but GPU not used on:</a:t>
+            </a:r>
+          </a:p>
+          <a:p>
+            <a:pPr lvl="1">
+              <a:defRPr lang="en-us"/>
+            </a:pPr>
+            <a:r>
+              <a:t>Raspberry Pi w/AI Hat+</a:t>
+            </a:r>
+          </a:p>
+          <a:p>
+            <a:pPr lvl="1">
+              <a:defRPr lang="en-us"/>
+            </a:pPr>
+            <a:r>
+              <a:t>Windows computers</a:t>
+            </a:r>
+          </a:p>
+          <a:p>
+            <a:pPr lvl="2">
+              <a:defRPr lang="en-us"/>
+            </a:pPr>
+            <a:r>
+              <a:t>*Need to compile for GPU, not sure how</a:t>
+            </a:r>
+          </a:p>
+          <a:p>
+            <a:pPr>
+              <a:defRPr lang="en-us"/>
+            </a:pPr>
+            <a:r>
+              <a:t>Darknet &amp; DarkPlate work on Linux computers including Nvidia Jetson Orin Nano</a:t>
+            </a:r>
           </a:p>
         </p:txBody>
       </p:sp>
     </p:spTree>
-    <p:extLst>
-      <p:ext uri="{BB962C8B-B14F-4D97-AF65-F5344CB8AC3E}">
-        <p14:creationId xmlns:p14="http://schemas.microsoft.com/office/powerpoint/2010/main" val="1207780365"/>
-      </p:ext>
-    </p:extLst>
   </p:cSld>
   <p:clrMapOvr>
     <a:masterClrMapping/>
   </p:clrMapOvr>
+  <p:timing>
+    <p:tnLst>
+      <p:par>
+        <p:cTn id="1" dur="indefinite" restart="never" nodeType="tmRoot"/>
+      </p:par>
+    </p:tnLst>
+  </p:timing>
+</p:sld>
+</file>
+
+<file path=ppt/slides/slide6.xml><?xml version="1.0" encoding="utf-8"?>
+<p:sld xmlns:p="http://schemas.openxmlformats.org/presentationml/2006/main" xmlns:mc="http://schemas.openxmlformats.org/markup-compatibility/2006" xmlns:p14="http://schemas.microsoft.com/office/powerpoint/2010/main" xmlns:p15="http://schemas.microsoft.com/office/powerpoint/2012/main" xmlns:r="http://schemas.openxmlformats.org/officeDocument/2006/relationships" xmlns:a="http://schemas.openxmlformats.org/drawingml/2006/main" mc:Ignorable="p14">
+  <p:cSld>
+    <p:spTree>
+      <p:nvGrpSpPr>
+        <p:cNvPr id="1" name=""/>
+        <p:cNvGrpSpPr/>
+        <p:nvPr/>
+      </p:nvGrpSpPr>
+      <p:grpSpPr>
+        <a:xfrm>
+          <a:off x="0" y="0"/>
+          <a:ext cx="0" cy="0"/>
+          <a:chOff x="0" y="0"/>
+          <a:chExt cx="0" cy="0"/>
+        </a:xfrm>
+      </p:grpSpPr>
+      <p:sp>
+        <p:nvSpPr>
+          <p:cNvPr id="2" name="Title 1"/>
+          <p:cNvSpPr>
+            <a:spLocks noGrp="1" noChangeArrowheads="1"/>
+            <a:extLst>
+              <a:ext uri="smNativeData">
+                <pr:smNativeData xmlns:pr="smNativeData" xmlns="smNativeData" val="SMDATA_15_+nJ9aRMAAAAlAAAAZAAAAA0AAAAAkAAAAEgAAACQAAAASAAAAAAAAAABAAAAAAAAAAEAAABQAAAAAAAAAAAA4D8AAAAAAADgPwAAAAAAAOA/AAAAAAAA4D8AAAAAAADgPwAAAAAAAOA/AAAAAAAA4D8AAAAAAADgPwAAAAAAAOA/AAAAAAAA4D8CAAAAjAAAAAAAAAAAAAAAW5vVDP///wgAAAAAAAAAAAAAAAAAAAAAAAAAAAAAAAAAAAAAZAAAAAEAAABAAAAAAAAAAAAAAAAAAAAAAAAAAAAAAAAAAAAAAAAAAAAAAAAAAAAAAAAAAAAAAAAAAAAAAAAAAAAAAAAAAAAAAAAAAAAAAAAAAAAAAAAAAAAAAAAAAAAAFAAAADwAAAAAAAAAAAAAAAAAAAkUAAAAAQAAABQAAAAUAAAAFAAAAAEAAAAAAAAAZAAAAGQAAAAAAAAAZAAAAGQAAAAVAAAAYAAAAAAAAAAAAAAADwAAACADAAAAAAAAAAAAAAEAAACgMgAAVgcAAKr4//8BAAAAf39/AAEAAABkAAAAAAAAABQAAABAHwAAAAAAACYAAAAAAAAAwOD//wAAAAAmAAAAZAAAABYAAABMAAAAAAAAAAAAAAAEAAAAAAAAAAEAAADn5uYKAAAAACgAAAAoAAAAZAAAAGQAAAAAAAAAzMzMAAAAAABQAAAAUAAAAGQAAABkAAAAAAAAABcAAAAUAAAAAAAAAAAAAAD/fwAA/38AAAAAAAAJAAAABAAAAF8AYAAeAAAAaAAAAAAAAAAAAAAAAAAAAAAAAAAAAAAAECcAABAnAAAAAAAAAAAAAAAAAAAAAAAAAAAAAAAAAAAAAAAAAAAAABQAAAAAAAAAwMD/AAAAAABkAAAAMgAAAAAAAABkAAAAAAAAAH9/fwAKAAAAIgAAABgAAAAAAAAAAAAAAAAAAAAAAAAAAAAAAAAAAAAkAAAAJAAAAAAAAAAHAAAAAAAAAAAAAAAAAAAAAAAAAAAAAAAAAAAAf39/ACUAAABYAAAAAAAAAAAAAAAAAAAAAAAAAAAAAAAAAAAAAAAAAAAAAAAAAAAAAAAAAAAAAAA/AAAAAAAAAKCGAQAAAAAAAAAAAAAAAAAMAAAAAQAAAAAAAAAAAAAAAAAAAB8AAABUAAAAW5vVBf///wEAAAAAAAAAAAAAAAAAAAAAAAAAAAAAAAAAAAAAAAAAAAAAAAJ/f38A5+bmA8zMzADAwP8Af39/AAAAAAAAAAAAAAAAAAAAAAAAAAAAIQAAABgAAAAUAAAAKAUAAD8CAADYRQAAZwoAABAAAAAmAAAACAAAAAAAAAAAAAAA"/>
+              </a:ext>
+            </a:extLst>
+          </p:cNvSpPr>
+          <p:nvPr>
+            <p:ph type="title"/>
+          </p:nvPr>
+        </p:nvSpPr>
+        <p:spPr/>
+        <p:txBody>
+          <a:bodyPr/>
+          <a:lstStyle/>
+          <a:p>
+            <a:pPr>
+              <a:defRPr lang="en-us"/>
+            </a:pPr>
+            <a:r>
+              <a:t>License Plate Detection</a:t>
+            </a:r>
+          </a:p>
+        </p:txBody>
+      </p:sp>
+      <p:sp>
+        <p:nvSpPr>
+          <p:cNvPr id="3" name="Content Placeholder 2"/>
+          <p:cNvSpPr>
+            <a:spLocks noGrp="1" noChangeArrowheads="1"/>
+            <a:extLst>
+              <a:ext uri="smNativeData">
+                <pr:smNativeData xmlns:pr="smNativeData" xmlns="smNativeData" val="SMDATA_15_+nJ9aRMAAAAlAAAAZAAAAA0AAAAAkAAAAEgAAACQAAAASAAAAAAAAAAAAAAAAAAAAAEAAABQAAAAAAAAAAAA4D8AAAAAAADgPwAAAAAAAOA/AAAAAAAA4D8AAAAAAADgPwAAAAAAAOA/AAAAAAAA4D8AAAAAAADgPwAAAAAAAOA/AAAAAAAA4D8CAAAAjAAAAAAAAAAAAAAAW5vVDP///wgAAAAAAAAAAAAAAAAAAAAAAAAAAAAAAAAAAAAAZAAAAAEAAABAAAAAAAAAAAAAAAAAAAAAAAAAAAAAAAAAAAAAAAAAAAAAAAAAAAAAAAAAAAAAAAAAAAAAAAAAAAAAAAAAAAAAAAAAAAAAAAAAAAAAAAAAAAAAAAAAAAAAFAAAADwAAAAAAAAAAAAAAAAAAAkUAAAAAQAAABQAAAAUAAAAFAAAAAEAAAAAAAAAZAAAAGQAAAAAAAAAZAAAAGQAAAAVAAAAYAAAAAAAAAAAAAAADwAAACADAAAAAAAAAAAAAAEAAACgMgAAVgcAAKr4//8BAAAAf39/AAEAAABkAAAAAAAAABQAAABAHwAAAAAAACYAAAAAAAAAwOD//wAAAAAmAAAAZAAAABYAAABMAAAAAAAAAAAAAAAEAAAAAAAAAAEAAADn5uYKAAAAACgAAAAoAAAAZAAAAGQAAAAAAAAAzMzMAAAAAABQAAAAUAAAAGQAAABkAAAAAAAAABcAAAAUAAAAAAAAAAAAAAD/fwAA/38AAAAAAAAJAAAABAAAAF8AYAAeAAAAaAAAAAAAAAAAAAAAAAAAAAAAAAAAAAAAECcAABAnAAAAAAAAAAAAAAAAAAAAAAAAAAAAAAAAAAAAAAAAAAAAABQAAAAAAAAAwMD/AAAAAABkAAAAMgAAAAAAAABkAAAAAAAAAH9/fwAKAAAAIgAAABgAAAAAAAAAAAAAAAAAAAAAAAAAAAAAAAAAAAAkAAAAJAAAAAAAAAAHAAAAAAAAAAAAAAAAAAAAAAAAAAAAAAAAAAAAf39/ACUAAABYAAAAAAAAAAAAAAAAAAAAAAAAAAAAAAAAAAAAAAAAAAAAAAAAAAAAAAAAAAAAAAA/AAAAAAAAAKCGAQAAAAAAAAAAAAAAAAAMAAAAAQAAAAAAAAAAAAAAAAAAAB8AAABUAAAAW5vVBf///wEAAAAAAAAAAAAAAAAAAAAAAAAAAAAAAAAAAAAAAAAAAAAAAAJ/f38A5+bmA8zMzADAwP8Af39/AAAAAAAAAAAAAAAAAAAAAAAAAAAAIQAAABgAAAAUAAAAKAUAADsLAADYRQAAACYAABAAAAAmAAAACAAAAAAAAAAAAAAA"/>
+              </a:ext>
+            </a:extLst>
+          </p:cNvSpPr>
+          <p:nvPr>
+            <p:ph type="body" idx="1"/>
+          </p:nvPr>
+        </p:nvSpPr>
+        <p:spPr/>
+        <p:txBody>
+          <a:bodyPr/>
+          <a:lstStyle/>
+          <a:p>
+            <a:pPr>
+              <a:defRPr lang="en-us"/>
+            </a:pPr>
+            <a:r>
+              <a:rPr lang="en-us" cap="none">
+                <a:hlinkClick r:id="rId2"/>
+              </a:rPr>
+              <a:t>https://github.com/stephanecharette/DarkPlate</a:t>
+            </a:r>
+          </a:p>
+          <a:p>
+            <a:pPr>
+              <a:defRPr lang="en-us"/>
+            </a:pPr>
+            <a:r>
+              <a:t>DarkPlate relies on DarkHelp which has helper functions for DarkNet</a:t>
+            </a:r>
+          </a:p>
+          <a:p>
+            <a:pPr lvl="1">
+              <a:defRPr lang="en-us"/>
+            </a:pPr>
+            <a:r>
+              <a:t>Build DarkNet first, then DarkHelp and the DarkPlate</a:t>
+            </a:r>
+          </a:p>
+          <a:p>
+            <a:pPr>
+              <a:defRPr lang="en-us"/>
+            </a:pPr>
+            <a:r>
+              <a:t>*Check how well it works on random images</a:t>
+            </a:r>
+          </a:p>
+        </p:txBody>
+      </p:sp>
+    </p:spTree>
+  </p:cSld>
+  <p:clrMapOvr>
+    <a:masterClrMapping/>
+  </p:clrMapOvr>
+  <p:timing>
+    <p:tnLst>
+      <p:par>
+        <p:cTn id="1" dur="indefinite" restart="never" nodeType="tmRoot"/>
+      </p:par>
+    </p:tnLst>
+  </p:timing>
 </p:sld>
 </file>
 
 <file path=ppt/theme/theme1.xml><?xml version="1.0" encoding="utf-8"?>
-<a:theme xmlns:a="http://schemas.openxmlformats.org/drawingml/2006/main" name="Office Theme">
+<a:theme xmlns:a="http://schemas.openxmlformats.org/drawingml/2006/main" name="Presentation">
   <a:themeElements>
-    <a:clrScheme name="Office">
+    <a:clrScheme name="Presentation 1">
       <a:dk1>
-        <a:sysClr val="windowText" lastClr="000000"/>
+        <a:srgbClr val="000000"/>
       </a:dk1>
       <a:lt1>
-        <a:sysClr val="window" lastClr="FFFFFF"/>
+        <a:srgbClr val="FFFFFF"/>
       </a:lt1>
       <a:dk2>
         <a:srgbClr val="44546A"/>
@@ -3754,76 +5050,16 @@
         <a:srgbClr val="954F72"/>
       </a:folHlink>
     </a:clrScheme>
-    <a:fontScheme name="Office">
+    <a:fontScheme name="Presentation">
       <a:majorFont>
-        <a:latin typeface="Calibri Light" panose="020F0302020204030204"/>
-        <a:ea typeface=""/>
-        <a:cs typeface=""/>
-        <a:font script="Jpan" typeface="ＭＳ Ｐゴシック"/>
-        <a:font script="Hang" typeface="맑은 고딕"/>
-        <a:font script="Hans" typeface="宋体"/>
-        <a:font script="Hant" typeface="新細明體"/>
-        <a:font script="Arab" typeface="Times New Roman"/>
-        <a:font script="Hebr" typeface="Times New Roman"/>
-        <a:font script="Thai" typeface="Angsana New"/>
-        <a:font script="Ethi" typeface="Nyala"/>
-        <a:font script="Beng" typeface="Vrinda"/>
-        <a:font script="Gujr" typeface="Shruti"/>
-        <a:font script="Khmr" typeface="MoolBoran"/>
-        <a:font script="Knda" typeface="Tunga"/>
-        <a:font script="Guru" typeface="Raavi"/>
-        <a:font script="Cans" typeface="Euphemia"/>
-        <a:font script="Cher" typeface="Plantagenet Cherokee"/>
-        <a:font script="Yiii" typeface="Microsoft Yi Baiti"/>
-        <a:font script="Tibt" typeface="Microsoft Himalaya"/>
-        <a:font script="Thaa" typeface="MV Boli"/>
-        <a:font script="Deva" typeface="Mangal"/>
-        <a:font script="Telu" typeface="Gautami"/>
-        <a:font script="Taml" typeface="Latha"/>
-        <a:font script="Syrc" typeface="Estrangelo Edessa"/>
-        <a:font script="Orya" typeface="Kalinga"/>
-        <a:font script="Mlym" typeface="Kartika"/>
-        <a:font script="Laoo" typeface="DokChampa"/>
-        <a:font script="Sinh" typeface="Iskoola Pota"/>
-        <a:font script="Mong" typeface="Mongolian Baiti"/>
-        <a:font script="Viet" typeface="Times New Roman"/>
-        <a:font script="Uigh" typeface="Microsoft Uighur"/>
-        <a:font script="Geor" typeface="Sylfaen"/>
+        <a:latin typeface="Calibri Light"/>
+        <a:ea typeface="Calibri Light"/>
+        <a:cs typeface="Calibri Light"/>
       </a:majorFont>
       <a:minorFont>
-        <a:latin typeface="Calibri" panose="020F0502020204030204"/>
-        <a:ea typeface=""/>
-        <a:cs typeface=""/>
-        <a:font script="Jpan" typeface="ＭＳ Ｐゴシック"/>
-        <a:font script="Hang" typeface="맑은 고딕"/>
-        <a:font script="Hans" typeface="宋体"/>
-        <a:font script="Hant" typeface="新細明體"/>
-        <a:font script="Arab" typeface="Arial"/>
-        <a:font script="Hebr" typeface="Arial"/>
-        <a:font script="Thai" typeface="Cordia New"/>
-        <a:font script="Ethi" typeface="Nyala"/>
-        <a:font script="Beng" typeface="Vrinda"/>
-        <a:font script="Gujr" typeface="Shruti"/>
-        <a:font script="Khmr" typeface="DaunPenh"/>
-        <a:font script="Knda" typeface="Tunga"/>
-        <a:font script="Guru" typeface="Raavi"/>
-        <a:font script="Cans" typeface="Euphemia"/>
-        <a:font script="Cher" typeface="Plantagenet Cherokee"/>
-        <a:font script="Yiii" typeface="Microsoft Yi Baiti"/>
-        <a:font script="Tibt" typeface="Microsoft Himalaya"/>
-        <a:font script="Thaa" typeface="MV Boli"/>
-        <a:font script="Deva" typeface="Mangal"/>
-        <a:font script="Telu" typeface="Gautami"/>
-        <a:font script="Taml" typeface="Latha"/>
-        <a:font script="Syrc" typeface="Estrangelo Edessa"/>
-        <a:font script="Orya" typeface="Kalinga"/>
-        <a:font script="Mlym" typeface="Kartika"/>
-        <a:font script="Laoo" typeface="DokChampa"/>
-        <a:font script="Sinh" typeface="Iskoola Pota"/>
-        <a:font script="Mong" typeface="Mongolian Baiti"/>
-        <a:font script="Viet" typeface="Arial"/>
-        <a:font script="Uigh" typeface="Microsoft Uighur"/>
-        <a:font script="Geor" typeface="Sylfaen"/>
+        <a:latin typeface="Calibri"/>
+        <a:ea typeface="Calibri"/>
+        <a:cs typeface="Calibri"/>
       </a:minorFont>
     </a:fontScheme>
     <a:fmtScheme name="Office">
@@ -3835,141 +5071,236 @@
           <a:gsLst>
             <a:gs pos="0">
               <a:schemeClr val="phClr">
-                <a:lumMod val="110000"/>
-                <a:satMod val="105000"/>
-                <a:tint val="67000"/>
+                <a:tint val="50000"/>
+                <a:satMod val="300000"/>
               </a:schemeClr>
             </a:gs>
-            <a:gs pos="50000">
+            <a:gs pos="35000">
               <a:schemeClr val="phClr">
-                <a:lumMod val="105000"/>
-                <a:satMod val="103000"/>
-                <a:tint val="73000"/>
+                <a:tint val="37000"/>
+                <a:satMod val="300000"/>
               </a:schemeClr>
             </a:gs>
             <a:gs pos="100000">
               <a:schemeClr val="phClr">
-                <a:lumMod val="105000"/>
-                <a:satMod val="109000"/>
-                <a:tint val="81000"/>
+                <a:tint val="15000"/>
+                <a:satMod val="350000"/>
               </a:schemeClr>
             </a:gs>
           </a:gsLst>
-          <a:lin ang="5400000" scaled="0"/>
+          <a:lin ang="16200000" scaled="1"/>
         </a:gradFill>
         <a:gradFill rotWithShape="1">
           <a:gsLst>
             <a:gs pos="0">
               <a:schemeClr val="phClr">
-                <a:satMod val="103000"/>
-                <a:lumMod val="102000"/>
-                <a:tint val="94000"/>
+                <a:shade val="51000"/>
+                <a:satMod val="130000"/>
               </a:schemeClr>
             </a:gs>
-            <a:gs pos="50000">
+            <a:gs pos="80000">
               <a:schemeClr val="phClr">
-                <a:satMod val="110000"/>
-                <a:lumMod val="100000"/>
-                <a:shade val="100000"/>
+                <a:shade val="93000"/>
+                <a:satMod val="130000"/>
               </a:schemeClr>
             </a:gs>
             <a:gs pos="100000">
               <a:schemeClr val="phClr">
-                <a:lumMod val="99000"/>
-                <a:satMod val="120000"/>
-                <a:shade val="78000"/>
+                <a:shade val="94000"/>
+                <a:satMod val="135000"/>
               </a:schemeClr>
             </a:gs>
           </a:gsLst>
-          <a:lin ang="5400000" scaled="0"/>
+          <a:lin ang="16200000" scaled="0"/>
         </a:gradFill>
       </a:fillStyleLst>
       <a:lnStyleLst>
-        <a:ln w="6350" cap="flat" cmpd="sng" algn="ctr">
+        <a:ln w="9525" cap="flat" cmpd="sng" algn="ctr">
+          <a:solidFill>
+            <a:schemeClr val="phClr">
+              <a:shade val="95000"/>
+              <a:satMod val="105000"/>
+            </a:schemeClr>
+          </a:solidFill>
+          <a:prstDash val="solid"/>
+        </a:ln>
+        <a:ln w="25400" cap="flat" cmpd="sng" algn="ctr">
           <a:solidFill>
             <a:schemeClr val="phClr"/>
           </a:solidFill>
           <a:prstDash val="solid"/>
-          <a:miter lim="800000"/>
         </a:ln>
-        <a:ln w="12700" cap="flat" cmpd="sng" algn="ctr">
+        <a:ln w="38100" cap="flat" cmpd="sng" algn="ctr">
           <a:solidFill>
             <a:schemeClr val="phClr"/>
           </a:solidFill>
           <a:prstDash val="solid"/>
-          <a:miter lim="800000"/>
-        </a:ln>
-        <a:ln w="19050" cap="flat" cmpd="sng" algn="ctr">
-          <a:solidFill>
-            <a:schemeClr val="phClr"/>
-          </a:solidFill>
-          <a:prstDash val="solid"/>
-          <a:miter lim="800000"/>
         </a:ln>
       </a:lnStyleLst>
       <a:effectStyleLst>
         <a:effectStyle>
-          <a:effectLst/>
-        </a:effectStyle>
-        <a:effectStyle>
-          <a:effectLst/>
+          <a:effectLst>
+            <a:outerShdw blurRad="40000" dist="20000" dir="5400000" rotWithShape="0">
+              <a:srgbClr val="000000">
+                <a:alpha val="38000"/>
+              </a:srgbClr>
+            </a:outerShdw>
+          </a:effectLst>
         </a:effectStyle>
         <a:effectStyle>
           <a:effectLst>
-            <a:outerShdw blurRad="57150" dist="19050" dir="5400000" algn="ctr" rotWithShape="0">
+            <a:outerShdw blurRad="40000" dist="23000" dir="5400000" rotWithShape="0">
               <a:srgbClr val="000000">
-                <a:alpha val="63000"/>
+                <a:alpha val="35000"/>
               </a:srgbClr>
             </a:outerShdw>
           </a:effectLst>
+        </a:effectStyle>
+        <a:effectStyle>
+          <a:effectLst>
+            <a:outerShdw blurRad="40000" dist="23000" dir="5400000" rotWithShape="0">
+              <a:srgbClr val="000000">
+                <a:alpha val="35000"/>
+              </a:srgbClr>
+            </a:outerShdw>
+          </a:effectLst>
+          <a:scene3d>
+            <a:camera prst="orthographicFront">
+              <a:rot lat="0" lon="0" rev="0"/>
+            </a:camera>
+            <a:lightRig rig="threePt" dir="t">
+              <a:rot lat="0" lon="0" rev="1200000"/>
+            </a:lightRig>
+          </a:scene3d>
+          <a:sp3d>
+            <a:bevelT w="63500" h="25400"/>
+          </a:sp3d>
         </a:effectStyle>
       </a:effectStyleLst>
       <a:bgFillStyleLst>
         <a:solidFill>
           <a:schemeClr val="phClr"/>
         </a:solidFill>
-        <a:solidFill>
-          <a:schemeClr val="phClr">
-            <a:tint val="95000"/>
-            <a:satMod val="170000"/>
-          </a:schemeClr>
-        </a:solidFill>
         <a:gradFill rotWithShape="1">
           <a:gsLst>
             <a:gs pos="0">
               <a:schemeClr val="phClr">
-                <a:tint val="93000"/>
-                <a:satMod val="150000"/>
-                <a:shade val="98000"/>
-                <a:lumMod val="102000"/>
+                <a:tint val="40000"/>
+                <a:satMod val="350000"/>
               </a:schemeClr>
             </a:gs>
-            <a:gs pos="50000">
+            <a:gs pos="40000">
               <a:schemeClr val="phClr">
-                <a:tint val="98000"/>
-                <a:satMod val="130000"/>
-                <a:shade val="90000"/>
-                <a:lumMod val="103000"/>
+                <a:tint val="45000"/>
+                <a:shade val="99000"/>
+                <a:satMod val="350000"/>
               </a:schemeClr>
             </a:gs>
             <a:gs pos="100000">
               <a:schemeClr val="phClr">
-                <a:shade val="63000"/>
-                <a:satMod val="120000"/>
+                <a:shade val="20000"/>
+                <a:satMod val="255000"/>
               </a:schemeClr>
             </a:gs>
           </a:gsLst>
-          <a:lin ang="5400000" scaled="0"/>
+          <a:path path="circle">
+            <a:fillToRect l="50000" t="-80000" r="50000" b="180000"/>
+          </a:path>
+        </a:gradFill>
+        <a:gradFill rotWithShape="1">
+          <a:gsLst>
+            <a:gs pos="0">
+              <a:schemeClr val="phClr">
+                <a:tint val="80000"/>
+                <a:satMod val="300000"/>
+              </a:schemeClr>
+            </a:gs>
+            <a:gs pos="100000">
+              <a:schemeClr val="phClr">
+                <a:shade val="30000"/>
+                <a:satMod val="200000"/>
+              </a:schemeClr>
+            </a:gs>
+          </a:gsLst>
+          <a:path path="circle">
+            <a:fillToRect l="50000" t="50000" r="50000" b="50000"/>
+          </a:path>
         </a:gradFill>
       </a:bgFillStyleLst>
     </a:fmtScheme>
   </a:themeElements>
-  <a:objectDefaults/>
-  <a:extraClrSchemeLst/>
-  <a:extLst>
-    <a:ext uri="{05A4C25C-085E-4340-85A3-A5531E510DB2}">
-      <thm15:themeFamily xmlns:thm15="http://schemas.microsoft.com/office/thememl/2012/main" name="Office Theme" id="{62F939B6-93AF-4DB8-9C6B-D6C7DFDC589F}" vid="{4A3C46E8-61CC-4603-A589-7422A47A8E4A}"/>
-    </a:ext>
-  </a:extLst>
+  <a:objectDefaults>
+    <a:spDef>
+      <a:spPr/>
+      <a:bodyPr>
+        <a:prstTxWarp prst="textNoShape">
+          <a:avLst/>
+        </a:prstTxWarp>
+        <a:noAutofit/>
+      </a:bodyPr>
+      <a:lstStyle>
+        <a:defPPr>
+          <a:defRPr/>
+        </a:defPPr>
+      </a:lstStyle>
+      <a:style>
+        <a:lnRef idx="0">
+          <a:schemeClr val="accent1"/>
+        </a:lnRef>
+        <a:fillRef idx="0">
+          <a:schemeClr val="accent1"/>
+        </a:fillRef>
+        <a:effectRef idx="0">
+          <a:schemeClr val="accent1"/>
+        </a:effectRef>
+        <a:fontRef idx="minor">
+          <a:schemeClr val="lt1"/>
+        </a:fontRef>
+      </a:style>
+    </a:spDef>
+  </a:objectDefaults>
+  <a:extraClrSchemeLst>
+    <a:extraClrScheme>
+      <a:clrScheme name="Presentation 1">
+        <a:dk1>
+          <a:srgbClr val="000000"/>
+        </a:dk1>
+        <a:lt1>
+          <a:srgbClr val="FFFFFF"/>
+        </a:lt1>
+        <a:dk2>
+          <a:srgbClr val="44546A"/>
+        </a:dk2>
+        <a:lt2>
+          <a:srgbClr val="E7E6E6"/>
+        </a:lt2>
+        <a:accent1>
+          <a:srgbClr val="5B9BD5"/>
+        </a:accent1>
+        <a:accent2>
+          <a:srgbClr val="ED7D31"/>
+        </a:accent2>
+        <a:accent3>
+          <a:srgbClr val="A5A5A5"/>
+        </a:accent3>
+        <a:accent4>
+          <a:srgbClr val="FFC000"/>
+        </a:accent4>
+        <a:accent5>
+          <a:srgbClr val="4472C4"/>
+        </a:accent5>
+        <a:accent6>
+          <a:srgbClr val="70AD47"/>
+        </a:accent6>
+        <a:hlink>
+          <a:srgbClr val="0563C1"/>
+        </a:hlink>
+        <a:folHlink>
+          <a:srgbClr val="954F72"/>
+        </a:folHlink>
+      </a:clrScheme>
+      <a:clrMap bg1="lt1" tx1="dk1" bg2="lt2" tx2="dk2" accent1="accent1" accent2="accent2" accent3="accent3" accent4="accent4" accent5="accent5" accent6="accent6" hlink="hlink" folHlink="folHlink"/>
+    </a:extraClrScheme>
+  </a:extraClrSchemeLst>
 </a:theme>
 </file>